--- a/webinar/2026-09-17-ai-for-abm-foundations/deliverables/forgex-ai-for-abm-webinar-deck.pptx
+++ b/webinar/2026-09-17-ai-for-abm-foundations/deliverables/forgex-ai-for-abm-webinar-deck.pptx
@@ -2,33 +2,33 @@
 <file path=ppt/presentation.xml><?xml version="1.0" encoding="utf-8"?>
 <p:presentation xmlns:p="http://schemas.openxmlformats.org/presentationml/2006/main">
   <p:sldMasterIdLst>
-    <p:sldMasterId xmlns:r="http://schemas.openxmlformats.org/officeDocument/2006/relationships" id="2147483648" r:id="R6d8985d453654fa0"/>
+    <p:sldMasterId xmlns:r="http://schemas.openxmlformats.org/officeDocument/2006/relationships" id="2147483648" r:id="R057bc7f3a29044e1"/>
   </p:sldMasterIdLst>
   <p:notesMasterIdLst>
-    <p:notesMasterId xmlns:r="http://schemas.openxmlformats.org/officeDocument/2006/relationships" r:id="R8c7f39e5d38c48b8"/>
+    <p:notesMasterId xmlns:r="http://schemas.openxmlformats.org/officeDocument/2006/relationships" r:id="R348283ae57114fe2"/>
   </p:notesMasterIdLst>
   <p:sldIdLst>
-    <p:sldId xmlns:r="http://schemas.openxmlformats.org/officeDocument/2006/relationships" id="256" r:id="Rf83d58ada9fe4301"/>
-    <p:sldId xmlns:r="http://schemas.openxmlformats.org/officeDocument/2006/relationships" id="257" r:id="R7a9857a619424cb7"/>
-    <p:sldId xmlns:r="http://schemas.openxmlformats.org/officeDocument/2006/relationships" id="258" r:id="R81e48ba2cee8492c"/>
-    <p:sldId xmlns:r="http://schemas.openxmlformats.org/officeDocument/2006/relationships" id="259" r:id="Rd5857deb2dca45c2"/>
-    <p:sldId xmlns:r="http://schemas.openxmlformats.org/officeDocument/2006/relationships" id="260" r:id="Reb268437b1b5419d"/>
-    <p:sldId xmlns:r="http://schemas.openxmlformats.org/officeDocument/2006/relationships" id="261" r:id="R0bdad7166a454d64"/>
-    <p:sldId xmlns:r="http://schemas.openxmlformats.org/officeDocument/2006/relationships" id="262" r:id="R48f449173bc34575"/>
-    <p:sldId xmlns:r="http://schemas.openxmlformats.org/officeDocument/2006/relationships" id="263" r:id="Rb30c961718e940d6"/>
-    <p:sldId xmlns:r="http://schemas.openxmlformats.org/officeDocument/2006/relationships" id="264" r:id="R4cf40031982c4126"/>
-    <p:sldId xmlns:r="http://schemas.openxmlformats.org/officeDocument/2006/relationships" id="265" r:id="R2376c5c8446a4c9e"/>
-    <p:sldId xmlns:r="http://schemas.openxmlformats.org/officeDocument/2006/relationships" id="266" r:id="R91da10b8b8774da8"/>
-    <p:sldId xmlns:r="http://schemas.openxmlformats.org/officeDocument/2006/relationships" id="267" r:id="R4faceceda7254d6b"/>
-    <p:sldId xmlns:r="http://schemas.openxmlformats.org/officeDocument/2006/relationships" id="268" r:id="R8ce30961f75141fa"/>
-    <p:sldId xmlns:r="http://schemas.openxmlformats.org/officeDocument/2006/relationships" id="269" r:id="Ra8e6fc9d65794d30"/>
-    <p:sldId xmlns:r="http://schemas.openxmlformats.org/officeDocument/2006/relationships" id="270" r:id="Rd4d77f5bd37c4388"/>
-    <p:sldId xmlns:r="http://schemas.openxmlformats.org/officeDocument/2006/relationships" id="271" r:id="Rdf3df895dbae434b"/>
-    <p:sldId xmlns:r="http://schemas.openxmlformats.org/officeDocument/2006/relationships" id="272" r:id="R950b58498c9a405e"/>
-    <p:sldId xmlns:r="http://schemas.openxmlformats.org/officeDocument/2006/relationships" id="273" r:id="R4605a622d69c4950"/>
-    <p:sldId xmlns:r="http://schemas.openxmlformats.org/officeDocument/2006/relationships" id="274" r:id="R766385ce28c24cd2"/>
-    <p:sldId xmlns:r="http://schemas.openxmlformats.org/officeDocument/2006/relationships" id="275" r:id="R69adc6369b724f6c"/>
-    <p:sldId xmlns:r="http://schemas.openxmlformats.org/officeDocument/2006/relationships" id="276" r:id="R7e3f68748497459d"/>
+    <p:sldId xmlns:r="http://schemas.openxmlformats.org/officeDocument/2006/relationships" id="256" r:id="R61991f2bd73a4a15"/>
+    <p:sldId xmlns:r="http://schemas.openxmlformats.org/officeDocument/2006/relationships" id="257" r:id="R9d2533b48fd34af5"/>
+    <p:sldId xmlns:r="http://schemas.openxmlformats.org/officeDocument/2006/relationships" id="258" r:id="R43fbfac072414536"/>
+    <p:sldId xmlns:r="http://schemas.openxmlformats.org/officeDocument/2006/relationships" id="259" r:id="R2df15b8232124295"/>
+    <p:sldId xmlns:r="http://schemas.openxmlformats.org/officeDocument/2006/relationships" id="260" r:id="R74a38bfa3b9c4bca"/>
+    <p:sldId xmlns:r="http://schemas.openxmlformats.org/officeDocument/2006/relationships" id="261" r:id="R94897d980b3e4a9a"/>
+    <p:sldId xmlns:r="http://schemas.openxmlformats.org/officeDocument/2006/relationships" id="262" r:id="R3947c349eb104346"/>
+    <p:sldId xmlns:r="http://schemas.openxmlformats.org/officeDocument/2006/relationships" id="263" r:id="Rbfbd6e30e71c4b25"/>
+    <p:sldId xmlns:r="http://schemas.openxmlformats.org/officeDocument/2006/relationships" id="264" r:id="Rd7b622fce54144bf"/>
+    <p:sldId xmlns:r="http://schemas.openxmlformats.org/officeDocument/2006/relationships" id="265" r:id="Rb860ed1241824795"/>
+    <p:sldId xmlns:r="http://schemas.openxmlformats.org/officeDocument/2006/relationships" id="266" r:id="R7cec8f2935bf4025"/>
+    <p:sldId xmlns:r="http://schemas.openxmlformats.org/officeDocument/2006/relationships" id="267" r:id="R6b28f07645df4a57"/>
+    <p:sldId xmlns:r="http://schemas.openxmlformats.org/officeDocument/2006/relationships" id="268" r:id="R9d47095d7a6642c7"/>
+    <p:sldId xmlns:r="http://schemas.openxmlformats.org/officeDocument/2006/relationships" id="269" r:id="R2dfd100ec6754b51"/>
+    <p:sldId xmlns:r="http://schemas.openxmlformats.org/officeDocument/2006/relationships" id="270" r:id="Rbbeb1ae505274cb9"/>
+    <p:sldId xmlns:r="http://schemas.openxmlformats.org/officeDocument/2006/relationships" id="271" r:id="Rb46497f4d5bf4b89"/>
+    <p:sldId xmlns:r="http://schemas.openxmlformats.org/officeDocument/2006/relationships" id="272" r:id="R53251cf6437e4ec5"/>
+    <p:sldId xmlns:r="http://schemas.openxmlformats.org/officeDocument/2006/relationships" id="273" r:id="Rd17d342498544b34"/>
+    <p:sldId xmlns:r="http://schemas.openxmlformats.org/officeDocument/2006/relationships" id="274" r:id="Rfedda95930ed47e5"/>
+    <p:sldId xmlns:r="http://schemas.openxmlformats.org/officeDocument/2006/relationships" id="275" r:id="R631393df1bfe4879"/>
+    <p:sldId xmlns:r="http://schemas.openxmlformats.org/officeDocument/2006/relationships" id="276" r:id="Re63c0662b94f4f40"/>
   </p:sldIdLst>
   <p:sldSz cx="12192000" cy="6858000"/>
   <p:notesSz cx="6858000" cy="9144000"/>
@@ -2320,7 +2320,7 @@
   </p:cSld>
   <p:clrMap bg1="lt1" tx1="dk1" bg2="lt2" tx2="dk2" accent1="accent1" accent2="accent2" accent3="accent3" accent4="accent4" accent5="accent5" accent6="accent6" hlink="hlink" folHlink="folHlink"/>
   <p:sldLayoutIdLst>
-    <p:sldLayoutId xmlns:r="http://schemas.openxmlformats.org/officeDocument/2006/relationships" id="2147483649" r:id="Rc81dff7d7b5843ab"/>
+    <p:sldLayoutId xmlns:r="http://schemas.openxmlformats.org/officeDocument/2006/relationships" id="2147483649" r:id="Rbc515e5be2ef4e30"/>
   </p:sldLayoutIdLst>
   <p:txStyles>
     <p:titleStyle>
@@ -2868,10 +2868,10 @@
       </p:grpSpPr>
       <p:sp>
         <p:nvSpPr>
-          <p:cNvPr id="53" name="">
-            <a:extLst xmlns:a="http://schemas.openxmlformats.org/drawingml/2006/main">
-              <a:ext uri="{FF2B5EF4-FFF2-40B4-BE49-F238E27FC236}">
-                <a16:creationId xmlns:a16="http://schemas.microsoft.com/office/drawing/2014/main" id="{10189193-51FF-441F-A11F-2CED8A8A0495}"/>
+          <p:cNvPr id="51" name="">
+            <a:extLst xmlns:a="http://schemas.openxmlformats.org/drawingml/2006/main">
+              <a:ext uri="{FF2B5EF4-FFF2-40B4-BE49-F238E27FC236}">
+                <a16:creationId xmlns:a16="http://schemas.microsoft.com/office/drawing/2014/main" id="{5CC90880-50A6-4676-9C66-EB51572387DA}"/>
               </a:ext>
             </a:extLst>
           </p:cNvPr>
@@ -2921,7 +2921,7 @@
           <p:cNvPr id="2" name="">
             <a:extLst xmlns:a="http://schemas.openxmlformats.org/drawingml/2006/main">
               <a:ext uri="{FF2B5EF4-FFF2-40B4-BE49-F238E27FC236}">
-                <a16:creationId xmlns:a16="http://schemas.microsoft.com/office/drawing/2014/main" id="{485C83A2-D74B-46CC-AAC4-F0A7481B1519}"/>
+                <a16:creationId xmlns:a16="http://schemas.microsoft.com/office/drawing/2014/main" id="{F6219C74-E617-407D-9B50-8DB1DF18F2FE}"/>
               </a:ext>
             </a:extLst>
           </p:cNvPr>
@@ -2952,7 +2952,7 @@
           <p:cNvPr id="3" name="">
             <a:extLst xmlns:a="http://schemas.openxmlformats.org/drawingml/2006/main">
               <a:ext uri="{FF2B5EF4-FFF2-40B4-BE49-F238E27FC236}">
-                <a16:creationId xmlns:a16="http://schemas.microsoft.com/office/drawing/2014/main" id="{2AAE6ABD-305C-4D9A-BFFC-E18A1FEF5721}"/>
+                <a16:creationId xmlns:a16="http://schemas.microsoft.com/office/drawing/2014/main" id="{7E097024-16E6-4A09-8B4C-6650D441A99F}"/>
               </a:ext>
             </a:extLst>
           </p:cNvPr>
@@ -2983,7 +2983,7 @@
           <p:cNvPr id="4" name="">
             <a:extLst xmlns:a="http://schemas.openxmlformats.org/drawingml/2006/main">
               <a:ext uri="{FF2B5EF4-FFF2-40B4-BE49-F238E27FC236}">
-                <a16:creationId xmlns:a16="http://schemas.microsoft.com/office/drawing/2014/main" id="{FC427283-F72F-4DBB-9F52-15F13FA7E274}"/>
+                <a16:creationId xmlns:a16="http://schemas.microsoft.com/office/drawing/2014/main" id="{A819432B-0BEB-48DE-8134-A71BA772B327}"/>
               </a:ext>
             </a:extLst>
           </p:cNvPr>
@@ -3014,7 +3014,7 @@
           <p:cNvPr id="5" name="">
             <a:extLst xmlns:a="http://schemas.openxmlformats.org/drawingml/2006/main">
               <a:ext uri="{FF2B5EF4-FFF2-40B4-BE49-F238E27FC236}">
-                <a16:creationId xmlns:a16="http://schemas.microsoft.com/office/drawing/2014/main" id="{E20F6B8B-2DA0-4B30-A39A-E13748000AF0}"/>
+                <a16:creationId xmlns:a16="http://schemas.microsoft.com/office/drawing/2014/main" id="{19117274-DE39-46C0-913D-F2E60E3D1E76}"/>
               </a:ext>
             </a:extLst>
           </p:cNvPr>
@@ -3045,7 +3045,7 @@
           <p:cNvPr id="6" name="">
             <a:extLst xmlns:a="http://schemas.openxmlformats.org/drawingml/2006/main">
               <a:ext uri="{FF2B5EF4-FFF2-40B4-BE49-F238E27FC236}">
-                <a16:creationId xmlns:a16="http://schemas.microsoft.com/office/drawing/2014/main" id="{43D68B2C-FC37-44F5-B4BE-61EADE8E0D37}"/>
+                <a16:creationId xmlns:a16="http://schemas.microsoft.com/office/drawing/2014/main" id="{79160732-9D38-4C71-80A8-D5B2356B6E3A}"/>
               </a:ext>
             </a:extLst>
           </p:cNvPr>
@@ -3076,7 +3076,7 @@
           <p:cNvPr id="7" name="">
             <a:extLst xmlns:a="http://schemas.openxmlformats.org/drawingml/2006/main">
               <a:ext uri="{FF2B5EF4-FFF2-40B4-BE49-F238E27FC236}">
-                <a16:creationId xmlns:a16="http://schemas.microsoft.com/office/drawing/2014/main" id="{51C249D9-710E-4976-BE22-0A658F29D165}"/>
+                <a16:creationId xmlns:a16="http://schemas.microsoft.com/office/drawing/2014/main" id="{31B7A4CD-9731-412A-B822-EE262134CB06}"/>
               </a:ext>
             </a:extLst>
           </p:cNvPr>
@@ -3107,7 +3107,7 @@
           <p:cNvPr id="8" name="">
             <a:extLst xmlns:a="http://schemas.openxmlformats.org/drawingml/2006/main">
               <a:ext uri="{FF2B5EF4-FFF2-40B4-BE49-F238E27FC236}">
-                <a16:creationId xmlns:a16="http://schemas.microsoft.com/office/drawing/2014/main" id="{CF7C3E7D-7E79-42A9-A2AD-7F07CE3656FF}"/>
+                <a16:creationId xmlns:a16="http://schemas.microsoft.com/office/drawing/2014/main" id="{2A7491E7-D455-4A30-B6CF-1ACF86A077B5}"/>
               </a:ext>
             </a:extLst>
           </p:cNvPr>
@@ -3138,7 +3138,7 @@
           <p:cNvPr id="9" name="">
             <a:extLst xmlns:a="http://schemas.openxmlformats.org/drawingml/2006/main">
               <a:ext uri="{FF2B5EF4-FFF2-40B4-BE49-F238E27FC236}">
-                <a16:creationId xmlns:a16="http://schemas.microsoft.com/office/drawing/2014/main" id="{26E344E0-5B3A-4161-BD8A-38903E8A7622}"/>
+                <a16:creationId xmlns:a16="http://schemas.microsoft.com/office/drawing/2014/main" id="{9248C23A-1CB5-4CFD-9EB2-D6A25062FB70}"/>
               </a:ext>
             </a:extLst>
           </p:cNvPr>
@@ -3169,7 +3169,7 @@
           <p:cNvPr id="10" name="">
             <a:extLst xmlns:a="http://schemas.openxmlformats.org/drawingml/2006/main">
               <a:ext uri="{FF2B5EF4-FFF2-40B4-BE49-F238E27FC236}">
-                <a16:creationId xmlns:a16="http://schemas.microsoft.com/office/drawing/2014/main" id="{5193F585-E65E-4928-A2F6-4E943D32F4DC}"/>
+                <a16:creationId xmlns:a16="http://schemas.microsoft.com/office/drawing/2014/main" id="{19BD8509-EAE6-4D55-9B1D-76F56DB3A7CE}"/>
               </a:ext>
             </a:extLst>
           </p:cNvPr>
@@ -3200,7 +3200,7 @@
           <p:cNvPr id="11" name="">
             <a:extLst xmlns:a="http://schemas.openxmlformats.org/drawingml/2006/main">
               <a:ext uri="{FF2B5EF4-FFF2-40B4-BE49-F238E27FC236}">
-                <a16:creationId xmlns:a16="http://schemas.microsoft.com/office/drawing/2014/main" id="{B0CD0679-7619-4AF9-AEBF-DEB96EDBA639}"/>
+                <a16:creationId xmlns:a16="http://schemas.microsoft.com/office/drawing/2014/main" id="{BFB1F397-9E2E-4F2C-89C1-A04305AB94BE}"/>
               </a:ext>
             </a:extLst>
           </p:cNvPr>
@@ -3231,7 +3231,7 @@
           <p:cNvPr id="12" name="">
             <a:extLst xmlns:a="http://schemas.openxmlformats.org/drawingml/2006/main">
               <a:ext uri="{FF2B5EF4-FFF2-40B4-BE49-F238E27FC236}">
-                <a16:creationId xmlns:a16="http://schemas.microsoft.com/office/drawing/2014/main" id="{1AE80088-EACB-4E1D-8F55-2769C64D1BA7}"/>
+                <a16:creationId xmlns:a16="http://schemas.microsoft.com/office/drawing/2014/main" id="{9C11AC28-2EE8-498C-BF80-11897A279D69}"/>
               </a:ext>
             </a:extLst>
           </p:cNvPr>
@@ -3262,7 +3262,7 @@
           <p:cNvPr id="13" name="">
             <a:extLst xmlns:a="http://schemas.openxmlformats.org/drawingml/2006/main">
               <a:ext uri="{FF2B5EF4-FFF2-40B4-BE49-F238E27FC236}">
-                <a16:creationId xmlns:a16="http://schemas.microsoft.com/office/drawing/2014/main" id="{4803662A-2F83-430E-A829-090E8BBE3445}"/>
+                <a16:creationId xmlns:a16="http://schemas.microsoft.com/office/drawing/2014/main" id="{F00DF64B-722E-493D-ABFC-440BEF7DFF5C}"/>
               </a:ext>
             </a:extLst>
           </p:cNvPr>
@@ -3293,7 +3293,7 @@
           <p:cNvPr id="14" name="">
             <a:extLst xmlns:a="http://schemas.openxmlformats.org/drawingml/2006/main">
               <a:ext uri="{FF2B5EF4-FFF2-40B4-BE49-F238E27FC236}">
-                <a16:creationId xmlns:a16="http://schemas.microsoft.com/office/drawing/2014/main" id="{EF36C3DB-1ADB-4926-ADCD-AC7CCF92C79D}"/>
+                <a16:creationId xmlns:a16="http://schemas.microsoft.com/office/drawing/2014/main" id="{62BF2A37-AA4B-4ADD-BE3C-37A6DFE13C98}"/>
               </a:ext>
             </a:extLst>
           </p:cNvPr>
@@ -3324,7 +3324,7 @@
           <p:cNvPr id="15" name="">
             <a:extLst xmlns:a="http://schemas.openxmlformats.org/drawingml/2006/main">
               <a:ext uri="{FF2B5EF4-FFF2-40B4-BE49-F238E27FC236}">
-                <a16:creationId xmlns:a16="http://schemas.microsoft.com/office/drawing/2014/main" id="{9921A7F5-9AC2-40C7-8513-D6672819C35C}"/>
+                <a16:creationId xmlns:a16="http://schemas.microsoft.com/office/drawing/2014/main" id="{9FE447DD-C726-4EB0-BD73-0ABC4B242A27}"/>
               </a:ext>
             </a:extLst>
           </p:cNvPr>
@@ -3355,7 +3355,7 @@
           <p:cNvPr id="16" name="">
             <a:extLst xmlns:a="http://schemas.openxmlformats.org/drawingml/2006/main">
               <a:ext uri="{FF2B5EF4-FFF2-40B4-BE49-F238E27FC236}">
-                <a16:creationId xmlns:a16="http://schemas.microsoft.com/office/drawing/2014/main" id="{32B5AFB9-2EA4-47BF-BD59-A1FE73A50DFF}"/>
+                <a16:creationId xmlns:a16="http://schemas.microsoft.com/office/drawing/2014/main" id="{33B5F2E1-4BE0-4001-9B76-9A32AB626E00}"/>
               </a:ext>
             </a:extLst>
           </p:cNvPr>
@@ -3386,7 +3386,7 @@
           <p:cNvPr id="17" name="">
             <a:extLst xmlns:a="http://schemas.openxmlformats.org/drawingml/2006/main">
               <a:ext uri="{FF2B5EF4-FFF2-40B4-BE49-F238E27FC236}">
-                <a16:creationId xmlns:a16="http://schemas.microsoft.com/office/drawing/2014/main" id="{389DFEB1-CF8C-454C-BB3B-0057420D1C87}"/>
+                <a16:creationId xmlns:a16="http://schemas.microsoft.com/office/drawing/2014/main" id="{95B90EE6-F70B-4177-BDE8-F8C238A6BC4C}"/>
               </a:ext>
             </a:extLst>
           </p:cNvPr>
@@ -3417,7 +3417,7 @@
           <p:cNvPr id="18" name="">
             <a:extLst xmlns:a="http://schemas.openxmlformats.org/drawingml/2006/main">
               <a:ext uri="{FF2B5EF4-FFF2-40B4-BE49-F238E27FC236}">
-                <a16:creationId xmlns:a16="http://schemas.microsoft.com/office/drawing/2014/main" id="{11856CE1-32F0-4DD9-92F5-2010504F3382}"/>
+                <a16:creationId xmlns:a16="http://schemas.microsoft.com/office/drawing/2014/main" id="{A429FEA4-2881-4872-89CE-D7BA4146D58E}"/>
               </a:ext>
             </a:extLst>
           </p:cNvPr>
@@ -3448,7 +3448,7 @@
           <p:cNvPr id="19" name="">
             <a:extLst xmlns:a="http://schemas.openxmlformats.org/drawingml/2006/main">
               <a:ext uri="{FF2B5EF4-FFF2-40B4-BE49-F238E27FC236}">
-                <a16:creationId xmlns:a16="http://schemas.microsoft.com/office/drawing/2014/main" id="{9F7A857A-F2B2-4243-9923-3741A5F3407D}"/>
+                <a16:creationId xmlns:a16="http://schemas.microsoft.com/office/drawing/2014/main" id="{D9B4307D-494A-4B55-91E2-39297874B944}"/>
               </a:ext>
             </a:extLst>
           </p:cNvPr>
@@ -3479,7 +3479,7 @@
           <p:cNvPr id="20" name="">
             <a:extLst xmlns:a="http://schemas.openxmlformats.org/drawingml/2006/main">
               <a:ext uri="{FF2B5EF4-FFF2-40B4-BE49-F238E27FC236}">
-                <a16:creationId xmlns:a16="http://schemas.microsoft.com/office/drawing/2014/main" id="{8B0E9E0C-3AD2-489B-8EDF-295DFA2E104F}"/>
+                <a16:creationId xmlns:a16="http://schemas.microsoft.com/office/drawing/2014/main" id="{A635B29F-D343-490B-9FA8-4A4038DF2165}"/>
               </a:ext>
             </a:extLst>
           </p:cNvPr>
@@ -3510,7 +3510,7 @@
           <p:cNvPr id="21" name="">
             <a:extLst xmlns:a="http://schemas.openxmlformats.org/drawingml/2006/main">
               <a:ext uri="{FF2B5EF4-FFF2-40B4-BE49-F238E27FC236}">
-                <a16:creationId xmlns:a16="http://schemas.microsoft.com/office/drawing/2014/main" id="{006252FF-096C-43AB-A493-7D51DE474CC5}"/>
+                <a16:creationId xmlns:a16="http://schemas.microsoft.com/office/drawing/2014/main" id="{5A47DB96-699E-4E36-B08B-5584F44BCCD1}"/>
               </a:ext>
             </a:extLst>
           </p:cNvPr>
@@ -3541,7 +3541,7 @@
           <p:cNvPr id="22" name="">
             <a:extLst xmlns:a="http://schemas.openxmlformats.org/drawingml/2006/main">
               <a:ext uri="{FF2B5EF4-FFF2-40B4-BE49-F238E27FC236}">
-                <a16:creationId xmlns:a16="http://schemas.microsoft.com/office/drawing/2014/main" id="{B62A9B45-FA24-47C5-A580-62CE7C4590DF}"/>
+                <a16:creationId xmlns:a16="http://schemas.microsoft.com/office/drawing/2014/main" id="{3F7F8230-BFBC-48A9-8342-84EAA6F72C0A}"/>
               </a:ext>
             </a:extLst>
           </p:cNvPr>
@@ -3572,7 +3572,7 @@
           <p:cNvPr id="23" name="">
             <a:extLst xmlns:a="http://schemas.openxmlformats.org/drawingml/2006/main">
               <a:ext uri="{FF2B5EF4-FFF2-40B4-BE49-F238E27FC236}">
-                <a16:creationId xmlns:a16="http://schemas.microsoft.com/office/drawing/2014/main" id="{C0302FC1-DC36-48F5-A738-6400D65EA074}"/>
+                <a16:creationId xmlns:a16="http://schemas.microsoft.com/office/drawing/2014/main" id="{401BD5F7-5F0C-4DD9-B214-7C77487D01D1}"/>
               </a:ext>
             </a:extLst>
           </p:cNvPr>
@@ -3603,7 +3603,7 @@
           <p:cNvPr id="24" name="">
             <a:extLst xmlns:a="http://schemas.openxmlformats.org/drawingml/2006/main">
               <a:ext uri="{FF2B5EF4-FFF2-40B4-BE49-F238E27FC236}">
-                <a16:creationId xmlns:a16="http://schemas.microsoft.com/office/drawing/2014/main" id="{1EDE0B3F-AF6D-4D1D-8CBF-769F3FFD8B3E}"/>
+                <a16:creationId xmlns:a16="http://schemas.microsoft.com/office/drawing/2014/main" id="{4122F1B4-2B24-4652-AC98-3F6267D953C2}"/>
               </a:ext>
             </a:extLst>
           </p:cNvPr>
@@ -3634,7 +3634,7 @@
           <p:cNvPr id="25" name="">
             <a:extLst xmlns:a="http://schemas.openxmlformats.org/drawingml/2006/main">
               <a:ext uri="{FF2B5EF4-FFF2-40B4-BE49-F238E27FC236}">
-                <a16:creationId xmlns:a16="http://schemas.microsoft.com/office/drawing/2014/main" id="{0CCE4A7E-F6A3-45C1-8CE1-514EC82C9BBA}"/>
+                <a16:creationId xmlns:a16="http://schemas.microsoft.com/office/drawing/2014/main" id="{34F58CD2-15D9-4DBF-8626-D229D8188A93}"/>
               </a:ext>
             </a:extLst>
           </p:cNvPr>
@@ -3665,7 +3665,7 @@
           <p:cNvPr id="26" name="">
             <a:extLst xmlns:a="http://schemas.openxmlformats.org/drawingml/2006/main">
               <a:ext uri="{FF2B5EF4-FFF2-40B4-BE49-F238E27FC236}">
-                <a16:creationId xmlns:a16="http://schemas.microsoft.com/office/drawing/2014/main" id="{68EBD81E-1EFA-4DFB-90CD-12F54E7282A5}"/>
+                <a16:creationId xmlns:a16="http://schemas.microsoft.com/office/drawing/2014/main" id="{27997DAC-3922-41CA-BA91-9AC3091BF32B}"/>
               </a:ext>
             </a:extLst>
           </p:cNvPr>
@@ -3696,7 +3696,7 @@
           <p:cNvPr id="27" name="">
             <a:extLst xmlns:a="http://schemas.openxmlformats.org/drawingml/2006/main">
               <a:ext uri="{FF2B5EF4-FFF2-40B4-BE49-F238E27FC236}">
-                <a16:creationId xmlns:a16="http://schemas.microsoft.com/office/drawing/2014/main" id="{D4C5F6DA-7E7E-47D3-9D61-8B011C3B793B}"/>
+                <a16:creationId xmlns:a16="http://schemas.microsoft.com/office/drawing/2014/main" id="{160C2D7E-B145-4E41-8507-EC4A88106CDC}"/>
               </a:ext>
             </a:extLst>
           </p:cNvPr>
@@ -3727,7 +3727,7 @@
           <p:cNvPr id="28" name="">
             <a:extLst xmlns:a="http://schemas.openxmlformats.org/drawingml/2006/main">
               <a:ext uri="{FF2B5EF4-FFF2-40B4-BE49-F238E27FC236}">
-                <a16:creationId xmlns:a16="http://schemas.microsoft.com/office/drawing/2014/main" id="{812B47FE-0A55-4C20-BD1B-6457D9AB5AEE}"/>
+                <a16:creationId xmlns:a16="http://schemas.microsoft.com/office/drawing/2014/main" id="{BACF0158-CC28-4824-8E88-A6474A2C4E95}"/>
               </a:ext>
             </a:extLst>
           </p:cNvPr>
@@ -3758,7 +3758,7 @@
           <p:cNvPr id="29" name="">
             <a:extLst xmlns:a="http://schemas.openxmlformats.org/drawingml/2006/main">
               <a:ext uri="{FF2B5EF4-FFF2-40B4-BE49-F238E27FC236}">
-                <a16:creationId xmlns:a16="http://schemas.microsoft.com/office/drawing/2014/main" id="{BE868183-CFFD-4758-A5FA-BD688F6DC42F}"/>
+                <a16:creationId xmlns:a16="http://schemas.microsoft.com/office/drawing/2014/main" id="{58FB33B2-CA16-4185-A94E-054B2A6BC0D6}"/>
               </a:ext>
             </a:extLst>
           </p:cNvPr>
@@ -3789,7 +3789,7 @@
           <p:cNvPr id="30" name="">
             <a:extLst xmlns:a="http://schemas.openxmlformats.org/drawingml/2006/main">
               <a:ext uri="{FF2B5EF4-FFF2-40B4-BE49-F238E27FC236}">
-                <a16:creationId xmlns:a16="http://schemas.microsoft.com/office/drawing/2014/main" id="{9EBCF6C0-3107-4895-AFC0-26D902E8452D}"/>
+                <a16:creationId xmlns:a16="http://schemas.microsoft.com/office/drawing/2014/main" id="{4537DE66-329E-4233-AFD3-989FFDC7EF13}"/>
               </a:ext>
             </a:extLst>
           </p:cNvPr>
@@ -3820,7 +3820,7 @@
           <p:cNvPr id="31" name="">
             <a:extLst xmlns:a="http://schemas.openxmlformats.org/drawingml/2006/main">
               <a:ext uri="{FF2B5EF4-FFF2-40B4-BE49-F238E27FC236}">
-                <a16:creationId xmlns:a16="http://schemas.microsoft.com/office/drawing/2014/main" id="{3A2A8F16-E06E-4087-8646-3637863073AE}"/>
+                <a16:creationId xmlns:a16="http://schemas.microsoft.com/office/drawing/2014/main" id="{7DAED9A6-79FD-4FB5-B813-E1E9FD3DDB62}"/>
               </a:ext>
             </a:extLst>
           </p:cNvPr>
@@ -3851,7 +3851,7 @@
           <p:cNvPr id="32" name="">
             <a:extLst xmlns:a="http://schemas.openxmlformats.org/drawingml/2006/main">
               <a:ext uri="{FF2B5EF4-FFF2-40B4-BE49-F238E27FC236}">
-                <a16:creationId xmlns:a16="http://schemas.microsoft.com/office/drawing/2014/main" id="{59A0D897-E7EA-4BD9-A5F8-B33B2862D67A}"/>
+                <a16:creationId xmlns:a16="http://schemas.microsoft.com/office/drawing/2014/main" id="{99354246-6097-45B4-992F-F90CCABD5407}"/>
               </a:ext>
             </a:extLst>
           </p:cNvPr>
@@ -3882,7 +3882,7 @@
           <p:cNvPr id="33" name="">
             <a:extLst xmlns:a="http://schemas.openxmlformats.org/drawingml/2006/main">
               <a:ext uri="{FF2B5EF4-FFF2-40B4-BE49-F238E27FC236}">
-                <a16:creationId xmlns:a16="http://schemas.microsoft.com/office/drawing/2014/main" id="{F46A453A-B080-4778-934D-266782BC962D}"/>
+                <a16:creationId xmlns:a16="http://schemas.microsoft.com/office/drawing/2014/main" id="{0A9471B5-A306-495C-97F7-77E89C481272}"/>
               </a:ext>
             </a:extLst>
           </p:cNvPr>
@@ -3913,7 +3913,7 @@
           <p:cNvPr id="34" name="">
             <a:extLst xmlns:a="http://schemas.openxmlformats.org/drawingml/2006/main">
               <a:ext uri="{FF2B5EF4-FFF2-40B4-BE49-F238E27FC236}">
-                <a16:creationId xmlns:a16="http://schemas.microsoft.com/office/drawing/2014/main" id="{BD4013AE-F9D0-4353-AF92-BAEB1EE390F7}"/>
+                <a16:creationId xmlns:a16="http://schemas.microsoft.com/office/drawing/2014/main" id="{6F88B05C-87C2-4A6C-A403-C84B0B01EEB3}"/>
               </a:ext>
             </a:extLst>
           </p:cNvPr>
@@ -3944,7 +3944,7 @@
           <p:cNvPr id="35" name="">
             <a:extLst xmlns:a="http://schemas.openxmlformats.org/drawingml/2006/main">
               <a:ext uri="{FF2B5EF4-FFF2-40B4-BE49-F238E27FC236}">
-                <a16:creationId xmlns:a16="http://schemas.microsoft.com/office/drawing/2014/main" id="{CAC60EC0-1332-4796-85BF-35466DB40CD8}"/>
+                <a16:creationId xmlns:a16="http://schemas.microsoft.com/office/drawing/2014/main" id="{05DE4D3F-EDDF-44FE-B15C-D5107368BD9E}"/>
               </a:ext>
             </a:extLst>
           </p:cNvPr>
@@ -3975,7 +3975,7 @@
           <p:cNvPr id="36" name="">
             <a:extLst xmlns:a="http://schemas.openxmlformats.org/drawingml/2006/main">
               <a:ext uri="{FF2B5EF4-FFF2-40B4-BE49-F238E27FC236}">
-                <a16:creationId xmlns:a16="http://schemas.microsoft.com/office/drawing/2014/main" id="{CF1B6747-0B15-4072-A951-4C368B361E15}"/>
+                <a16:creationId xmlns:a16="http://schemas.microsoft.com/office/drawing/2014/main" id="{5EA583B1-B2FB-43FE-A907-12A405B64A6F}"/>
               </a:ext>
             </a:extLst>
           </p:cNvPr>
@@ -4006,7 +4006,7 @@
           <p:cNvPr id="37" name="">
             <a:extLst xmlns:a="http://schemas.openxmlformats.org/drawingml/2006/main">
               <a:ext uri="{FF2B5EF4-FFF2-40B4-BE49-F238E27FC236}">
-                <a16:creationId xmlns:a16="http://schemas.microsoft.com/office/drawing/2014/main" id="{D68B2831-DB24-47D7-BAFD-89C983922176}"/>
+                <a16:creationId xmlns:a16="http://schemas.microsoft.com/office/drawing/2014/main" id="{D863B4EB-1C52-43FA-9C92-542350E46CC9}"/>
               </a:ext>
             </a:extLst>
           </p:cNvPr>
@@ -4037,7 +4037,7 @@
           <p:cNvPr id="38" name="">
             <a:extLst xmlns:a="http://schemas.openxmlformats.org/drawingml/2006/main">
               <a:ext uri="{FF2B5EF4-FFF2-40B4-BE49-F238E27FC236}">
-                <a16:creationId xmlns:a16="http://schemas.microsoft.com/office/drawing/2014/main" id="{7D531EF5-FE11-4E42-BDAB-7E402D0A73B2}"/>
+                <a16:creationId xmlns:a16="http://schemas.microsoft.com/office/drawing/2014/main" id="{58F49BBC-ADDF-4F6F-A9F1-3D6010963FDF}"/>
               </a:ext>
             </a:extLst>
           </p:cNvPr>
@@ -4068,7 +4068,7 @@
           <p:cNvPr id="39" name="">
             <a:extLst xmlns:a="http://schemas.openxmlformats.org/drawingml/2006/main">
               <a:ext uri="{FF2B5EF4-FFF2-40B4-BE49-F238E27FC236}">
-                <a16:creationId xmlns:a16="http://schemas.microsoft.com/office/drawing/2014/main" id="{E4123468-671B-48C8-855D-DAC1BEDC96D1}"/>
+                <a16:creationId xmlns:a16="http://schemas.microsoft.com/office/drawing/2014/main" id="{BA127C15-BBAB-4047-ACA5-B2772E3A80B4}"/>
               </a:ext>
             </a:extLst>
           </p:cNvPr>
@@ -4099,7 +4099,7 @@
           <p:cNvPr id="40" name="">
             <a:extLst xmlns:a="http://schemas.openxmlformats.org/drawingml/2006/main">
               <a:ext uri="{FF2B5EF4-FFF2-40B4-BE49-F238E27FC236}">
-                <a16:creationId xmlns:a16="http://schemas.microsoft.com/office/drawing/2014/main" id="{931D4FDD-DB02-4A30-8374-502937163C31}"/>
+                <a16:creationId xmlns:a16="http://schemas.microsoft.com/office/drawing/2014/main" id="{E7659E24-7F7F-4871-BC82-1DFF402F34D2}"/>
               </a:ext>
             </a:extLst>
           </p:cNvPr>
@@ -4130,7 +4130,7 @@
           <p:cNvPr id="41" name="">
             <a:extLst xmlns:a="http://schemas.openxmlformats.org/drawingml/2006/main">
               <a:ext uri="{FF2B5EF4-FFF2-40B4-BE49-F238E27FC236}">
-                <a16:creationId xmlns:a16="http://schemas.microsoft.com/office/drawing/2014/main" id="{939ABDB2-C0DD-4DEF-8648-43F7E68956E9}"/>
+                <a16:creationId xmlns:a16="http://schemas.microsoft.com/office/drawing/2014/main" id="{A48B945B-C201-427A-AE87-7EC42DE04354}"/>
               </a:ext>
             </a:extLst>
           </p:cNvPr>
@@ -4161,7 +4161,7 @@
           <p:cNvPr id="42" name="">
             <a:extLst xmlns:a="http://schemas.openxmlformats.org/drawingml/2006/main">
               <a:ext uri="{FF2B5EF4-FFF2-40B4-BE49-F238E27FC236}">
-                <a16:creationId xmlns:a16="http://schemas.microsoft.com/office/drawing/2014/main" id="{FB668BF7-6061-41C2-9F06-7DAC53E9E4D5}"/>
+                <a16:creationId xmlns:a16="http://schemas.microsoft.com/office/drawing/2014/main" id="{5955E8F9-9C04-454C-A2DA-B14739651FC7}"/>
               </a:ext>
             </a:extLst>
           </p:cNvPr>
@@ -4192,68 +4192,18 @@
           <p:cNvPr id="43" name="">
             <a:extLst xmlns:a="http://schemas.openxmlformats.org/drawingml/2006/main">
               <a:ext uri="{FF2B5EF4-FFF2-40B4-BE49-F238E27FC236}">
-                <a16:creationId xmlns:a16="http://schemas.microsoft.com/office/drawing/2014/main" id="{8D3AC75C-DDBF-458C-8FBE-88743B4FE7FB}"/>
-              </a:ext>
-            </a:extLst>
-          </p:cNvPr>
-          <p:cNvSpPr>
-            <a:spLocks xmlns:a="http://schemas.openxmlformats.org/drawingml/2006/main" noGrp="1"/>
-          </p:cNvSpPr>
-          <p:nvPr/>
-        </p:nvSpPr>
-        <p:spPr>
-          <a:xfrm xmlns:a="http://schemas.openxmlformats.org/drawingml/2006/main">
-            <a:off x="666750" y="1619250"/>
-            <a:ext cx="3429000" cy="228600"/>
-          </a:xfrm>
-          <a:prstGeom xmlns:a="http://schemas.openxmlformats.org/drawingml/2006/main" prst="rect">
-            <a:avLst/>
-          </a:prstGeom>
-          <a:noFill xmlns:a="http://schemas.openxmlformats.org/drawingml/2006/main"/>
-          <a:ln xmlns:a="http://schemas.openxmlformats.org/drawingml/2006/main" w="0">
-            <a:noFill/>
-            <a:prstDash val="solid"/>
-          </a:ln>
-        </p:spPr>
-        <p:txBody>
-          <a:bodyPr xmlns:a="http://schemas.openxmlformats.org/drawingml/2006/main"/>
-          <a:lstStyle xmlns:a="http://schemas.openxmlformats.org/drawingml/2006/main"/>
-          <a:p xmlns:a="http://schemas.openxmlformats.org/drawingml/2006/main">
-            <a:pPr algn="l">
-              <a:defRPr sz="975" b="1">
-                <a:solidFill>
-                  <a:srgbClr val="C7F25C"/>
-                </a:solidFill>
-              </a:defRPr>
-            </a:pPr>
-            <a:r>
-              <a:rPr sz="975" b="1">
-                <a:solidFill>
-                  <a:srgbClr val="C7F25C"/>
-                </a:solidFill>
-              </a:rPr>
-              <a:t>SEPTEMBER 17, 2026</a:t>
-            </a:r>
-          </a:p>
-        </p:txBody>
-      </p:sp>
-      <p:sp>
-        <p:nvSpPr>
-          <p:cNvPr id="44" name="">
-            <a:extLst xmlns:a="http://schemas.openxmlformats.org/drawingml/2006/main">
-              <a:ext uri="{FF2B5EF4-FFF2-40B4-BE49-F238E27FC236}">
-                <a16:creationId xmlns:a16="http://schemas.microsoft.com/office/drawing/2014/main" id="{37743645-D14E-4ECE-9927-1DE0499047AC}"/>
-              </a:ext>
-            </a:extLst>
-          </p:cNvPr>
-          <p:cNvSpPr>
-            <a:spLocks xmlns:a="http://schemas.openxmlformats.org/drawingml/2006/main" noGrp="1"/>
-          </p:cNvSpPr>
-          <p:nvPr/>
-        </p:nvSpPr>
-        <p:spPr>
-          <a:xfrm xmlns:a="http://schemas.openxmlformats.org/drawingml/2006/main">
-            <a:off x="666750" y="2038350"/>
+                <a16:creationId xmlns:a16="http://schemas.microsoft.com/office/drawing/2014/main" id="{A45C468A-A5EA-4997-A418-2ADB2B4E3C39}"/>
+              </a:ext>
+            </a:extLst>
+          </p:cNvPr>
+          <p:cNvSpPr>
+            <a:spLocks xmlns:a="http://schemas.openxmlformats.org/drawingml/2006/main" noGrp="1"/>
+          </p:cNvSpPr>
+          <p:nvPr/>
+        </p:nvSpPr>
+        <p:spPr>
+          <a:xfrm xmlns:a="http://schemas.openxmlformats.org/drawingml/2006/main">
+            <a:off x="666750" y="1809750"/>
             <a:ext cx="6858000" cy="628650"/>
           </a:xfrm>
           <a:prstGeom xmlns:a="http://schemas.openxmlformats.org/drawingml/2006/main" prst="rect">
@@ -4289,21 +4239,21 @@
       </p:sp>
       <p:sp>
         <p:nvSpPr>
-          <p:cNvPr id="45" name="">
-            <a:extLst xmlns:a="http://schemas.openxmlformats.org/drawingml/2006/main">
-              <a:ext uri="{FF2B5EF4-FFF2-40B4-BE49-F238E27FC236}">
-                <a16:creationId xmlns:a16="http://schemas.microsoft.com/office/drawing/2014/main" id="{1351BF18-C614-400D-9319-3460007923DB}"/>
-              </a:ext>
-            </a:extLst>
-          </p:cNvPr>
-          <p:cNvSpPr>
-            <a:spLocks xmlns:a="http://schemas.openxmlformats.org/drawingml/2006/main" noGrp="1"/>
-          </p:cNvSpPr>
-          <p:nvPr/>
-        </p:nvSpPr>
-        <p:spPr>
-          <a:xfrm xmlns:a="http://schemas.openxmlformats.org/drawingml/2006/main">
-            <a:off x="666750" y="2571750"/>
+          <p:cNvPr id="44" name="">
+            <a:extLst xmlns:a="http://schemas.openxmlformats.org/drawingml/2006/main">
+              <a:ext uri="{FF2B5EF4-FFF2-40B4-BE49-F238E27FC236}">
+                <a16:creationId xmlns:a16="http://schemas.microsoft.com/office/drawing/2014/main" id="{B3C1F76A-40A7-4B3C-9075-9FC4433DB217}"/>
+              </a:ext>
+            </a:extLst>
+          </p:cNvPr>
+          <p:cNvSpPr>
+            <a:spLocks xmlns:a="http://schemas.openxmlformats.org/drawingml/2006/main" noGrp="1"/>
+          </p:cNvSpPr>
+          <p:nvPr/>
+        </p:nvSpPr>
+        <p:spPr>
+          <a:xfrm xmlns:a="http://schemas.openxmlformats.org/drawingml/2006/main">
+            <a:off x="666750" y="2343150"/>
             <a:ext cx="7810500" cy="1695450"/>
           </a:xfrm>
           <a:prstGeom xmlns:a="http://schemas.openxmlformats.org/drawingml/2006/main" prst="rect">
@@ -4356,60 +4306,10 @@
       </p:sp>
       <p:sp>
         <p:nvSpPr>
-          <p:cNvPr id="46" name="">
-            <a:extLst xmlns:a="http://schemas.openxmlformats.org/drawingml/2006/main">
-              <a:ext uri="{FF2B5EF4-FFF2-40B4-BE49-F238E27FC236}">
-                <a16:creationId xmlns:a16="http://schemas.microsoft.com/office/drawing/2014/main" id="{C779BC6D-B0F1-4D0D-A8F8-867718273EAA}"/>
-              </a:ext>
-            </a:extLst>
-          </p:cNvPr>
-          <p:cNvSpPr>
-            <a:spLocks xmlns:a="http://schemas.openxmlformats.org/drawingml/2006/main" noGrp="1"/>
-          </p:cNvSpPr>
-          <p:nvPr/>
-        </p:nvSpPr>
-        <p:spPr>
-          <a:xfrm xmlns:a="http://schemas.openxmlformats.org/drawingml/2006/main">
-            <a:off x="685800" y="4495800"/>
-            <a:ext cx="7239000" cy="609600"/>
-          </a:xfrm>
-          <a:prstGeom xmlns:a="http://schemas.openxmlformats.org/drawingml/2006/main" prst="rect">
-            <a:avLst/>
-          </a:prstGeom>
-          <a:noFill xmlns:a="http://schemas.openxmlformats.org/drawingml/2006/main"/>
-          <a:ln xmlns:a="http://schemas.openxmlformats.org/drawingml/2006/main" w="0">
-            <a:noFill/>
-            <a:prstDash val="solid"/>
-          </a:ln>
-        </p:spPr>
-        <p:txBody>
-          <a:bodyPr xmlns:a="http://schemas.openxmlformats.org/drawingml/2006/main"/>
-          <a:lstStyle xmlns:a="http://schemas.openxmlformats.org/drawingml/2006/main"/>
-          <a:p xmlns:a="http://schemas.openxmlformats.org/drawingml/2006/main">
-            <a:pPr algn="l">
-              <a:defRPr sz="1875" b="0">
-                <a:solidFill>
-                  <a:srgbClr val="EAE3EC"/>
-                </a:solidFill>
-              </a:defRPr>
-            </a:pPr>
-            <a:r>
-              <a:rPr sz="1875" b="0">
-                <a:solidFill>
-                  <a:srgbClr val="EAE3EC"/>
-                </a:solidFill>
-              </a:rPr>
-              <a:t>How to move from AI questions to governed ABM outcomes</a:t>
-            </a:r>
-          </a:p>
-        </p:txBody>
-      </p:sp>
-      <p:sp>
-        <p:nvSpPr>
-          <p:cNvPr id="47" name="">
-            <a:extLst xmlns:a="http://schemas.openxmlformats.org/drawingml/2006/main">
-              <a:ext uri="{FF2B5EF4-FFF2-40B4-BE49-F238E27FC236}">
-                <a16:creationId xmlns:a16="http://schemas.microsoft.com/office/drawing/2014/main" id="{C8B22303-D783-4F96-8713-C04AD9A4B600}"/>
+          <p:cNvPr id="45" name="">
+            <a:extLst xmlns:a="http://schemas.openxmlformats.org/drawingml/2006/main">
+              <a:ext uri="{FF2B5EF4-FFF2-40B4-BE49-F238E27FC236}">
+                <a16:creationId xmlns:a16="http://schemas.microsoft.com/office/drawing/2014/main" id="{E819732E-3C00-4517-98AB-6FFD80791F2E}"/>
               </a:ext>
             </a:extLst>
           </p:cNvPr>
@@ -4437,10 +4337,10 @@
       </p:sp>
       <p:sp>
         <p:nvSpPr>
-          <p:cNvPr id="48" name="">
-            <a:extLst xmlns:a="http://schemas.openxmlformats.org/drawingml/2006/main">
-              <a:ext uri="{FF2B5EF4-FFF2-40B4-BE49-F238E27FC236}">
-                <a16:creationId xmlns:a16="http://schemas.microsoft.com/office/drawing/2014/main" id="{45993DA4-67F5-48A9-84CD-4083C488A37E}"/>
+          <p:cNvPr id="46" name="">
+            <a:extLst xmlns:a="http://schemas.openxmlformats.org/drawingml/2006/main">
+              <a:ext uri="{FF2B5EF4-FFF2-40B4-BE49-F238E27FC236}">
+                <a16:creationId xmlns:a16="http://schemas.microsoft.com/office/drawing/2014/main" id="{38AB49F1-CFCB-4ADE-BFB3-2BAA917C6AC1}"/>
               </a:ext>
             </a:extLst>
           </p:cNvPr>
@@ -4487,10 +4387,10 @@
       </p:sp>
       <p:sp>
         <p:nvSpPr>
-          <p:cNvPr id="49" name="">
-            <a:extLst xmlns:a="http://schemas.openxmlformats.org/drawingml/2006/main">
-              <a:ext uri="{FF2B5EF4-FFF2-40B4-BE49-F238E27FC236}">
-                <a16:creationId xmlns:a16="http://schemas.microsoft.com/office/drawing/2014/main" id="{5D6D8319-A95E-41F1-8CB4-A43B9DC28263}"/>
+          <p:cNvPr id="47" name="">
+            <a:extLst xmlns:a="http://schemas.openxmlformats.org/drawingml/2006/main">
+              <a:ext uri="{FF2B5EF4-FFF2-40B4-BE49-F238E27FC236}">
+                <a16:creationId xmlns:a16="http://schemas.microsoft.com/office/drawing/2014/main" id="{F97F82AE-601A-4D3C-9798-3E37374EF672}"/>
               </a:ext>
             </a:extLst>
           </p:cNvPr>
@@ -4502,7 +4402,7 @@
         <p:spPr>
           <a:xfrm xmlns:a="http://schemas.openxmlformats.org/drawingml/2006/main">
             <a:off x="685800" y="6038850"/>
-            <a:ext cx="4953000" cy="228600"/>
+            <a:ext cx="5905500" cy="228600"/>
           </a:xfrm>
           <a:prstGeom xmlns:a="http://schemas.openxmlformats.org/drawingml/2006/main" prst="rect">
             <a:avLst/>
@@ -4530,17 +4430,17 @@
                   <a:srgbClr val="C7F25C"/>
                 </a:solidFill>
               </a:rPr>
-              <a:t>12 PM ET  |  LIVE WORKSPACE BUILD</a:t>
-            </a:r>
-          </a:p>
-        </p:txBody>
-      </p:sp>
-      <p:sp>
-        <p:nvSpPr>
-          <p:cNvPr id="50" name="">
-            <a:extLst xmlns:a="http://schemas.openxmlformats.org/drawingml/2006/main">
-              <a:ext uri="{FF2B5EF4-FFF2-40B4-BE49-F238E27FC236}">
-                <a16:creationId xmlns:a16="http://schemas.microsoft.com/office/drawing/2014/main" id="{D4FA92E1-23C3-451A-99E6-9D22FC9AAA60}"/>
+              <a:t>SEPTEMBER 17, 2026  |  12 PM ET  |  LIVE WORKSPACE BUILD</a:t>
+            </a:r>
+          </a:p>
+        </p:txBody>
+      </p:sp>
+      <p:sp>
+        <p:nvSpPr>
+          <p:cNvPr id="48" name="">
+            <a:extLst xmlns:a="http://schemas.openxmlformats.org/drawingml/2006/main">
+              <a:ext uri="{FF2B5EF4-FFF2-40B4-BE49-F238E27FC236}">
+                <a16:creationId xmlns:a16="http://schemas.microsoft.com/office/drawing/2014/main" id="{58BFB66C-2270-4D16-BEDE-4ED1C0542520}"/>
               </a:ext>
             </a:extLst>
           </p:cNvPr>
@@ -4568,10 +4468,10 @@
       </p:sp>
       <p:sp>
         <p:nvSpPr>
-          <p:cNvPr id="51" name="">
-            <a:extLst xmlns:a="http://schemas.openxmlformats.org/drawingml/2006/main">
-              <a:ext uri="{FF2B5EF4-FFF2-40B4-BE49-F238E27FC236}">
-                <a16:creationId xmlns:a16="http://schemas.microsoft.com/office/drawing/2014/main" id="{F25C0A1A-CF12-4CF3-B1CB-8C2D5A241D22}"/>
+          <p:cNvPr id="49" name="">
+            <a:extLst xmlns:a="http://schemas.openxmlformats.org/drawingml/2006/main">
+              <a:ext uri="{FF2B5EF4-FFF2-40B4-BE49-F238E27FC236}">
+                <a16:creationId xmlns:a16="http://schemas.microsoft.com/office/drawing/2014/main" id="{EF36AF4A-0552-4B8D-9ACC-6F083D187B97}"/>
               </a:ext>
             </a:extLst>
           </p:cNvPr>
@@ -4599,10 +4499,10 @@
       </p:sp>
       <p:sp>
         <p:nvSpPr>
-          <p:cNvPr id="52" name="">
-            <a:extLst xmlns:a="http://schemas.openxmlformats.org/drawingml/2006/main">
-              <a:ext uri="{FF2B5EF4-FFF2-40B4-BE49-F238E27FC236}">
-                <a16:creationId xmlns:a16="http://schemas.microsoft.com/office/drawing/2014/main" id="{BF4B82B5-1C9F-47F7-95D2-9EE4E0719DF5}"/>
+          <p:cNvPr id="50" name="">
+            <a:extLst xmlns:a="http://schemas.openxmlformats.org/drawingml/2006/main">
+              <a:ext uri="{FF2B5EF4-FFF2-40B4-BE49-F238E27FC236}">
+                <a16:creationId xmlns:a16="http://schemas.microsoft.com/office/drawing/2014/main" id="{8728D426-ABFB-4239-8BD0-C1792A45B994}"/>
               </a:ext>
             </a:extLst>
           </p:cNvPr>
@@ -4631,7 +4531,7 @@
     </p:spTree>
     <p:extLst>
       <p:ext uri="{BB962C8B-B14F-4D97-AF65-F5344CB8AC3E}">
-        <p14:creationId xmlns:p14="http://schemas.microsoft.com/office/powerpoint/2010/main" val="154974944"/>
+        <p14:creationId xmlns:p14="http://schemas.microsoft.com/office/powerpoint/2010/main" val="150010095"/>
       </p:ext>
     </p:extLst>
   </p:cSld>
@@ -4659,10 +4559,10 @@
       </p:grpSpPr>
       <p:sp>
         <p:nvSpPr>
-          <p:cNvPr id="33" name="">
-            <a:extLst xmlns:a="http://schemas.openxmlformats.org/drawingml/2006/main">
-              <a:ext uri="{FF2B5EF4-FFF2-40B4-BE49-F238E27FC236}">
-                <a16:creationId xmlns:a16="http://schemas.microsoft.com/office/drawing/2014/main" id="{18B90C86-D704-4030-B917-BE4A92A162E9}"/>
+          <p:cNvPr id="32" name="">
+            <a:extLst xmlns:a="http://schemas.openxmlformats.org/drawingml/2006/main">
+              <a:ext uri="{FF2B5EF4-FFF2-40B4-BE49-F238E27FC236}">
+                <a16:creationId xmlns:a16="http://schemas.microsoft.com/office/drawing/2014/main" id="{F9050DBF-86A9-4253-A14D-241EB1F8E7E0}"/>
               </a:ext>
             </a:extLst>
           </p:cNvPr>
@@ -4712,7 +4612,7 @@
           <p:cNvPr id="2" name="">
             <a:extLst xmlns:a="http://schemas.openxmlformats.org/drawingml/2006/main">
               <a:ext uri="{FF2B5EF4-FFF2-40B4-BE49-F238E27FC236}">
-                <a16:creationId xmlns:a16="http://schemas.microsoft.com/office/drawing/2014/main" id="{0BAF3737-52EB-481B-B43D-E8170A4F6DC8}"/>
+                <a16:creationId xmlns:a16="http://schemas.microsoft.com/office/drawing/2014/main" id="{26950C46-BC0F-495A-9397-92F4C32AC969}"/>
               </a:ext>
             </a:extLst>
           </p:cNvPr>
@@ -4743,19 +4643,169 @@
           <p:cNvPr id="3" name="">
             <a:extLst xmlns:a="http://schemas.openxmlformats.org/drawingml/2006/main">
               <a:ext uri="{FF2B5EF4-FFF2-40B4-BE49-F238E27FC236}">
-                <a16:creationId xmlns:a16="http://schemas.microsoft.com/office/drawing/2014/main" id="{2E568D11-508C-40C6-87B7-EB428BBEA255}"/>
-              </a:ext>
-            </a:extLst>
-          </p:cNvPr>
-          <p:cNvSpPr>
-            <a:spLocks xmlns:a="http://schemas.openxmlformats.org/drawingml/2006/main" noGrp="1"/>
-          </p:cNvSpPr>
-          <p:nvPr/>
-        </p:nvSpPr>
-        <p:spPr>
-          <a:xfrm xmlns:a="http://schemas.openxmlformats.org/drawingml/2006/main">
-            <a:off x="609600" y="800100"/>
-            <a:ext cx="3429000" cy="228600"/>
+                <a16:creationId xmlns:a16="http://schemas.microsoft.com/office/drawing/2014/main" id="{B5EA2B0F-35AF-4091-A2A4-2AF26A54A8EA}"/>
+              </a:ext>
+            </a:extLst>
+          </p:cNvPr>
+          <p:cNvSpPr>
+            <a:spLocks xmlns:a="http://schemas.openxmlformats.org/drawingml/2006/main" noGrp="1"/>
+          </p:cNvSpPr>
+          <p:nvPr/>
+        </p:nvSpPr>
+        <p:spPr>
+          <a:xfrm xmlns:a="http://schemas.openxmlformats.org/drawingml/2006/main">
+            <a:off x="609600" y="838200"/>
+            <a:ext cx="10668000" cy="704850"/>
+          </a:xfrm>
+          <a:prstGeom xmlns:a="http://schemas.openxmlformats.org/drawingml/2006/main" prst="rect">
+            <a:avLst/>
+          </a:prstGeom>
+          <a:noFill xmlns:a="http://schemas.openxmlformats.org/drawingml/2006/main"/>
+          <a:ln xmlns:a="http://schemas.openxmlformats.org/drawingml/2006/main" w="0">
+            <a:noFill/>
+            <a:prstDash val="solid"/>
+          </a:ln>
+        </p:spPr>
+        <p:txBody>
+          <a:bodyPr xmlns:a="http://schemas.openxmlformats.org/drawingml/2006/main"/>
+          <a:lstStyle xmlns:a="http://schemas.openxmlformats.org/drawingml/2006/main"/>
+          <a:p xmlns:a="http://schemas.openxmlformats.org/drawingml/2006/main">
+            <a:pPr algn="l">
+              <a:defRPr sz="3150" b="1">
+                <a:solidFill>
+                  <a:srgbClr val="FFFFFF"/>
+                </a:solidFill>
+              </a:defRPr>
+            </a:pPr>
+            <a:r>
+              <a:rPr sz="3150" b="1">
+                <a:solidFill>
+                  <a:srgbClr val="FFFFFF"/>
+                </a:solidFill>
+              </a:rPr>
+              <a:t>Learn the plumbing. Keep the durable parts portable.</a:t>
+            </a:r>
+          </a:p>
+        </p:txBody>
+      </p:sp>
+      <p:sp>
+        <p:nvSpPr>
+          <p:cNvPr id="4" name="">
+            <a:extLst xmlns:a="http://schemas.openxmlformats.org/drawingml/2006/main">
+              <a:ext uri="{FF2B5EF4-FFF2-40B4-BE49-F238E27FC236}">
+                <a16:creationId xmlns:a16="http://schemas.microsoft.com/office/drawing/2014/main" id="{F4585F56-8D30-4517-A693-9E6D6935C3D6}"/>
+              </a:ext>
+            </a:extLst>
+          </p:cNvPr>
+          <p:cNvSpPr>
+            <a:spLocks xmlns:a="http://schemas.openxmlformats.org/drawingml/2006/main" noGrp="1"/>
+          </p:cNvSpPr>
+          <p:nvPr/>
+        </p:nvSpPr>
+        <p:spPr>
+          <a:xfrm xmlns:a="http://schemas.openxmlformats.org/drawingml/2006/main">
+            <a:off x="609600" y="6515100"/>
+            <a:ext cx="2381250" cy="171450"/>
+          </a:xfrm>
+          <a:prstGeom xmlns:a="http://schemas.openxmlformats.org/drawingml/2006/main" prst="rect">
+            <a:avLst/>
+          </a:prstGeom>
+          <a:noFill xmlns:a="http://schemas.openxmlformats.org/drawingml/2006/main"/>
+          <a:ln xmlns:a="http://schemas.openxmlformats.org/drawingml/2006/main" w="0">
+            <a:noFill/>
+            <a:prstDash val="solid"/>
+          </a:ln>
+        </p:spPr>
+        <p:txBody>
+          <a:bodyPr xmlns:a="http://schemas.openxmlformats.org/drawingml/2006/main"/>
+          <a:lstStyle xmlns:a="http://schemas.openxmlformats.org/drawingml/2006/main"/>
+          <a:p xmlns:a="http://schemas.openxmlformats.org/drawingml/2006/main">
+            <a:pPr algn="l">
+              <a:defRPr sz="750" b="1">
+                <a:solidFill>
+                  <a:srgbClr val="EAE3EC"/>
+                </a:solidFill>
+              </a:defRPr>
+            </a:pPr>
+            <a:r>
+              <a:rPr sz="750" b="1">
+                <a:solidFill>
+                  <a:srgbClr val="EAE3EC"/>
+                </a:solidFill>
+              </a:rPr>
+              <a:t>FORGEX  |  AI FOR ABM</a:t>
+            </a:r>
+          </a:p>
+        </p:txBody>
+      </p:sp>
+      <p:sp>
+        <p:nvSpPr>
+          <p:cNvPr id="5" name="">
+            <a:extLst xmlns:a="http://schemas.openxmlformats.org/drawingml/2006/main">
+              <a:ext uri="{FF2B5EF4-FFF2-40B4-BE49-F238E27FC236}">
+                <a16:creationId xmlns:a16="http://schemas.microsoft.com/office/drawing/2014/main" id="{F145889B-C697-4D82-B72B-A23991506473}"/>
+              </a:ext>
+            </a:extLst>
+          </p:cNvPr>
+          <p:cNvSpPr>
+            <a:spLocks xmlns:a="http://schemas.openxmlformats.org/drawingml/2006/main" noGrp="1"/>
+          </p:cNvSpPr>
+          <p:nvPr/>
+        </p:nvSpPr>
+        <p:spPr>
+          <a:xfrm xmlns:a="http://schemas.openxmlformats.org/drawingml/2006/main">
+            <a:off x="11239500" y="6496050"/>
+            <a:ext cx="342900" cy="190500"/>
+          </a:xfrm>
+          <a:prstGeom xmlns:a="http://schemas.openxmlformats.org/drawingml/2006/main" prst="rect">
+            <a:avLst/>
+          </a:prstGeom>
+          <a:noFill xmlns:a="http://schemas.openxmlformats.org/drawingml/2006/main"/>
+          <a:ln xmlns:a="http://schemas.openxmlformats.org/drawingml/2006/main" w="0">
+            <a:noFill/>
+            <a:prstDash val="solid"/>
+          </a:ln>
+        </p:spPr>
+        <p:txBody>
+          <a:bodyPr xmlns:a="http://schemas.openxmlformats.org/drawingml/2006/main"/>
+          <a:lstStyle xmlns:a="http://schemas.openxmlformats.org/drawingml/2006/main"/>
+          <a:p xmlns:a="http://schemas.openxmlformats.org/drawingml/2006/main">
+            <a:pPr algn="r">
+              <a:defRPr sz="825" b="1">
+                <a:solidFill>
+                  <a:srgbClr val="C7F25C"/>
+                </a:solidFill>
+              </a:defRPr>
+            </a:pPr>
+            <a:r>
+              <a:rPr sz="825" b="1">
+                <a:solidFill>
+                  <a:srgbClr val="C7F25C"/>
+                </a:solidFill>
+              </a:rPr>
+              <a:t>10</a:t>
+            </a:r>
+          </a:p>
+        </p:txBody>
+      </p:sp>
+      <p:sp>
+        <p:nvSpPr>
+          <p:cNvPr id="6" name="">
+            <a:extLst xmlns:a="http://schemas.openxmlformats.org/drawingml/2006/main">
+              <a:ext uri="{FF2B5EF4-FFF2-40B4-BE49-F238E27FC236}">
+                <a16:creationId xmlns:a16="http://schemas.microsoft.com/office/drawing/2014/main" id="{241E8142-3820-4B70-B31E-01255835007D}"/>
+              </a:ext>
+            </a:extLst>
+          </p:cNvPr>
+          <p:cNvSpPr>
+            <a:spLocks xmlns:a="http://schemas.openxmlformats.org/drawingml/2006/main" noGrp="1"/>
+          </p:cNvSpPr>
+          <p:nvPr/>
+        </p:nvSpPr>
+        <p:spPr>
+          <a:xfrm xmlns:a="http://schemas.openxmlformats.org/drawingml/2006/main">
+            <a:off x="742950" y="2000250"/>
+            <a:ext cx="3238500" cy="228600"/>
           </a:xfrm>
           <a:prstGeom xmlns:a="http://schemas.openxmlformats.org/drawingml/2006/main" prst="rect">
             <a:avLst/>
@@ -4783,157 +4833,7 @@
                   <a:srgbClr val="C7F25C"/>
                 </a:solidFill>
               </a:rPr>
-              <a:t>THE PORTABLE MARKETER</a:t>
-            </a:r>
-          </a:p>
-        </p:txBody>
-      </p:sp>
-      <p:sp>
-        <p:nvSpPr>
-          <p:cNvPr id="4" name="">
-            <a:extLst xmlns:a="http://schemas.openxmlformats.org/drawingml/2006/main">
-              <a:ext uri="{FF2B5EF4-FFF2-40B4-BE49-F238E27FC236}">
-                <a16:creationId xmlns:a16="http://schemas.microsoft.com/office/drawing/2014/main" id="{D77F05D9-556C-4924-ACBA-0302A7F2CC8B}"/>
-              </a:ext>
-            </a:extLst>
-          </p:cNvPr>
-          <p:cNvSpPr>
-            <a:spLocks xmlns:a="http://schemas.openxmlformats.org/drawingml/2006/main" noGrp="1"/>
-          </p:cNvSpPr>
-          <p:nvPr/>
-        </p:nvSpPr>
-        <p:spPr>
-          <a:xfrm xmlns:a="http://schemas.openxmlformats.org/drawingml/2006/main">
-            <a:off x="609600" y="1066800"/>
-            <a:ext cx="10668000" cy="647700"/>
-          </a:xfrm>
-          <a:prstGeom xmlns:a="http://schemas.openxmlformats.org/drawingml/2006/main" prst="rect">
-            <a:avLst/>
-          </a:prstGeom>
-          <a:noFill xmlns:a="http://schemas.openxmlformats.org/drawingml/2006/main"/>
-          <a:ln xmlns:a="http://schemas.openxmlformats.org/drawingml/2006/main" w="0">
-            <a:noFill/>
-            <a:prstDash val="solid"/>
-          </a:ln>
-        </p:spPr>
-        <p:txBody>
-          <a:bodyPr xmlns:a="http://schemas.openxmlformats.org/drawingml/2006/main"/>
-          <a:lstStyle xmlns:a="http://schemas.openxmlformats.org/drawingml/2006/main"/>
-          <a:p xmlns:a="http://schemas.openxmlformats.org/drawingml/2006/main">
-            <a:pPr algn="l">
-              <a:defRPr sz="3150" b="1">
-                <a:solidFill>
-                  <a:srgbClr val="FFFFFF"/>
-                </a:solidFill>
-              </a:defRPr>
-            </a:pPr>
-            <a:r>
-              <a:rPr sz="3150" b="1">
-                <a:solidFill>
-                  <a:srgbClr val="FFFFFF"/>
-                </a:solidFill>
-              </a:rPr>
-              <a:t>Learn the plumbing. Keep the durable parts portable.</a:t>
-            </a:r>
-          </a:p>
-        </p:txBody>
-      </p:sp>
-      <p:sp>
-        <p:nvSpPr>
-          <p:cNvPr id="5" name="">
-            <a:extLst xmlns:a="http://schemas.openxmlformats.org/drawingml/2006/main">
-              <a:ext uri="{FF2B5EF4-FFF2-40B4-BE49-F238E27FC236}">
-                <a16:creationId xmlns:a16="http://schemas.microsoft.com/office/drawing/2014/main" id="{C8D52CE6-7769-4755-A1BE-843BFF1C2DDD}"/>
-              </a:ext>
-            </a:extLst>
-          </p:cNvPr>
-          <p:cNvSpPr>
-            <a:spLocks xmlns:a="http://schemas.openxmlformats.org/drawingml/2006/main" noGrp="1"/>
-          </p:cNvSpPr>
-          <p:nvPr/>
-        </p:nvSpPr>
-        <p:spPr>
-          <a:xfrm xmlns:a="http://schemas.openxmlformats.org/drawingml/2006/main">
-            <a:off x="609600" y="6515100"/>
-            <a:ext cx="2381250" cy="171450"/>
-          </a:xfrm>
-          <a:prstGeom xmlns:a="http://schemas.openxmlformats.org/drawingml/2006/main" prst="rect">
-            <a:avLst/>
-          </a:prstGeom>
-          <a:noFill xmlns:a="http://schemas.openxmlformats.org/drawingml/2006/main"/>
-          <a:ln xmlns:a="http://schemas.openxmlformats.org/drawingml/2006/main" w="0">
-            <a:noFill/>
-            <a:prstDash val="solid"/>
-          </a:ln>
-        </p:spPr>
-        <p:txBody>
-          <a:bodyPr xmlns:a="http://schemas.openxmlformats.org/drawingml/2006/main"/>
-          <a:lstStyle xmlns:a="http://schemas.openxmlformats.org/drawingml/2006/main"/>
-          <a:p xmlns:a="http://schemas.openxmlformats.org/drawingml/2006/main">
-            <a:pPr algn="l">
-              <a:defRPr sz="750" b="1">
-                <a:solidFill>
-                  <a:srgbClr val="EAE3EC"/>
-                </a:solidFill>
-              </a:defRPr>
-            </a:pPr>
-            <a:r>
-              <a:rPr sz="750" b="1">
-                <a:solidFill>
-                  <a:srgbClr val="EAE3EC"/>
-                </a:solidFill>
-              </a:rPr>
-              <a:t>FORGEX  |  AI FOR ABM</a:t>
-            </a:r>
-          </a:p>
-        </p:txBody>
-      </p:sp>
-      <p:sp>
-        <p:nvSpPr>
-          <p:cNvPr id="6" name="">
-            <a:extLst xmlns:a="http://schemas.openxmlformats.org/drawingml/2006/main">
-              <a:ext uri="{FF2B5EF4-FFF2-40B4-BE49-F238E27FC236}">
-                <a16:creationId xmlns:a16="http://schemas.microsoft.com/office/drawing/2014/main" id="{C7F7D5F7-F04C-4463-A5E5-A470881AED32}"/>
-              </a:ext>
-            </a:extLst>
-          </p:cNvPr>
-          <p:cNvSpPr>
-            <a:spLocks xmlns:a="http://schemas.openxmlformats.org/drawingml/2006/main" noGrp="1"/>
-          </p:cNvSpPr>
-          <p:nvPr/>
-        </p:nvSpPr>
-        <p:spPr>
-          <a:xfrm xmlns:a="http://schemas.openxmlformats.org/drawingml/2006/main">
-            <a:off x="11239500" y="6496050"/>
-            <a:ext cx="342900" cy="190500"/>
-          </a:xfrm>
-          <a:prstGeom xmlns:a="http://schemas.openxmlformats.org/drawingml/2006/main" prst="rect">
-            <a:avLst/>
-          </a:prstGeom>
-          <a:noFill xmlns:a="http://schemas.openxmlformats.org/drawingml/2006/main"/>
-          <a:ln xmlns:a="http://schemas.openxmlformats.org/drawingml/2006/main" w="0">
-            <a:noFill/>
-            <a:prstDash val="solid"/>
-          </a:ln>
-        </p:spPr>
-        <p:txBody>
-          <a:bodyPr xmlns:a="http://schemas.openxmlformats.org/drawingml/2006/main"/>
-          <a:lstStyle xmlns:a="http://schemas.openxmlformats.org/drawingml/2006/main"/>
-          <a:p xmlns:a="http://schemas.openxmlformats.org/drawingml/2006/main">
-            <a:pPr algn="r">
-              <a:defRPr sz="825" b="1">
-                <a:solidFill>
-                  <a:srgbClr val="C7F25C"/>
-                </a:solidFill>
-              </a:defRPr>
-            </a:pPr>
-            <a:r>
-              <a:rPr sz="825" b="1">
-                <a:solidFill>
-                  <a:srgbClr val="C7F25C"/>
-                </a:solidFill>
-              </a:rPr>
-              <a:t>10</a:t>
+              <a:t>THE FIXTURES CHANGE</a:t>
             </a:r>
           </a:p>
         </p:txBody>
@@ -4943,57 +4843,7 @@
           <p:cNvPr id="7" name="">
             <a:extLst xmlns:a="http://schemas.openxmlformats.org/drawingml/2006/main">
               <a:ext uri="{FF2B5EF4-FFF2-40B4-BE49-F238E27FC236}">
-                <a16:creationId xmlns:a16="http://schemas.microsoft.com/office/drawing/2014/main" id="{3E8EDE48-F18A-4BA8-82C7-D259C396BB42}"/>
-              </a:ext>
-            </a:extLst>
-          </p:cNvPr>
-          <p:cNvSpPr>
-            <a:spLocks xmlns:a="http://schemas.openxmlformats.org/drawingml/2006/main" noGrp="1"/>
-          </p:cNvSpPr>
-          <p:nvPr/>
-        </p:nvSpPr>
-        <p:spPr>
-          <a:xfrm xmlns:a="http://schemas.openxmlformats.org/drawingml/2006/main">
-            <a:off x="742950" y="2000250"/>
-            <a:ext cx="3238500" cy="228600"/>
-          </a:xfrm>
-          <a:prstGeom xmlns:a="http://schemas.openxmlformats.org/drawingml/2006/main" prst="rect">
-            <a:avLst/>
-          </a:prstGeom>
-          <a:noFill xmlns:a="http://schemas.openxmlformats.org/drawingml/2006/main"/>
-          <a:ln xmlns:a="http://schemas.openxmlformats.org/drawingml/2006/main" w="0">
-            <a:noFill/>
-            <a:prstDash val="solid"/>
-          </a:ln>
-        </p:spPr>
-        <p:txBody>
-          <a:bodyPr xmlns:a="http://schemas.openxmlformats.org/drawingml/2006/main"/>
-          <a:lstStyle xmlns:a="http://schemas.openxmlformats.org/drawingml/2006/main"/>
-          <a:p xmlns:a="http://schemas.openxmlformats.org/drawingml/2006/main">
-            <a:pPr algn="l">
-              <a:defRPr sz="975" b="1">
-                <a:solidFill>
-                  <a:srgbClr val="C7F25C"/>
-                </a:solidFill>
-              </a:defRPr>
-            </a:pPr>
-            <a:r>
-              <a:rPr sz="975" b="1">
-                <a:solidFill>
-                  <a:srgbClr val="C7F25C"/>
-                </a:solidFill>
-              </a:rPr>
-              <a:t>THE FIXTURES CHANGE</a:t>
-            </a:r>
-          </a:p>
-        </p:txBody>
-      </p:sp>
-      <p:sp>
-        <p:nvSpPr>
-          <p:cNvPr id="8" name="">
-            <a:extLst xmlns:a="http://schemas.openxmlformats.org/drawingml/2006/main">
-              <a:ext uri="{FF2B5EF4-FFF2-40B4-BE49-F238E27FC236}">
-                <a16:creationId xmlns:a16="http://schemas.microsoft.com/office/drawing/2014/main" id="{7D91E1E6-8EED-4864-BBB3-C656EF6C2836}"/>
+                <a16:creationId xmlns:a16="http://schemas.microsoft.com/office/drawing/2014/main" id="{CFEDA6E8-04B4-4A3E-ABC7-A63BD00BA8E3}"/>
               </a:ext>
             </a:extLst>
           </p:cNvPr>
@@ -5025,10 +4875,10 @@
       </p:sp>
       <p:sp>
         <p:nvSpPr>
-          <p:cNvPr id="9" name="">
-            <a:extLst xmlns:a="http://schemas.openxmlformats.org/drawingml/2006/main">
-              <a:ext uri="{FF2B5EF4-FFF2-40B4-BE49-F238E27FC236}">
-                <a16:creationId xmlns:a16="http://schemas.microsoft.com/office/drawing/2014/main" id="{3C5AD8AA-7FAE-4C70-B0B8-34F5CE6AB5CE}"/>
+          <p:cNvPr id="8" name="">
+            <a:extLst xmlns:a="http://schemas.openxmlformats.org/drawingml/2006/main">
+              <a:ext uri="{FF2B5EF4-FFF2-40B4-BE49-F238E27FC236}">
+                <a16:creationId xmlns:a16="http://schemas.microsoft.com/office/drawing/2014/main" id="{E6725B75-2E0D-46FB-B61C-017A373BE2F5}"/>
               </a:ext>
             </a:extLst>
           </p:cNvPr>
@@ -5075,10 +4925,10 @@
       </p:sp>
       <p:sp>
         <p:nvSpPr>
-          <p:cNvPr id="10" name="">
-            <a:extLst xmlns:a="http://schemas.openxmlformats.org/drawingml/2006/main">
-              <a:ext uri="{FF2B5EF4-FFF2-40B4-BE49-F238E27FC236}">
-                <a16:creationId xmlns:a16="http://schemas.microsoft.com/office/drawing/2014/main" id="{611E8B4A-ABB4-4182-8F85-18019C97F4C6}"/>
+          <p:cNvPr id="9" name="">
+            <a:extLst xmlns:a="http://schemas.openxmlformats.org/drawingml/2006/main">
+              <a:ext uri="{FF2B5EF4-FFF2-40B4-BE49-F238E27FC236}">
+                <a16:creationId xmlns:a16="http://schemas.microsoft.com/office/drawing/2014/main" id="{4917CF96-C2DB-4A20-8689-0D82CB43E0BA}"/>
               </a:ext>
             </a:extLst>
           </p:cNvPr>
@@ -5110,10 +4960,10 @@
       </p:sp>
       <p:sp>
         <p:nvSpPr>
-          <p:cNvPr id="11" name="">
-            <a:extLst xmlns:a="http://schemas.openxmlformats.org/drawingml/2006/main">
-              <a:ext uri="{FF2B5EF4-FFF2-40B4-BE49-F238E27FC236}">
-                <a16:creationId xmlns:a16="http://schemas.microsoft.com/office/drawing/2014/main" id="{9F0D9A1B-6C1F-49BE-8108-F4033B72D123}"/>
+          <p:cNvPr id="10" name="">
+            <a:extLst xmlns:a="http://schemas.openxmlformats.org/drawingml/2006/main">
+              <a:ext uri="{FF2B5EF4-FFF2-40B4-BE49-F238E27FC236}">
+                <a16:creationId xmlns:a16="http://schemas.microsoft.com/office/drawing/2014/main" id="{798E075F-0438-4C61-BC1F-F6BDB7353BC0}"/>
               </a:ext>
             </a:extLst>
           </p:cNvPr>
@@ -5160,10 +5010,10 @@
       </p:sp>
       <p:sp>
         <p:nvSpPr>
-          <p:cNvPr id="12" name="">
-            <a:extLst xmlns:a="http://schemas.openxmlformats.org/drawingml/2006/main">
-              <a:ext uri="{FF2B5EF4-FFF2-40B4-BE49-F238E27FC236}">
-                <a16:creationId xmlns:a16="http://schemas.microsoft.com/office/drawing/2014/main" id="{AA3E4CCE-621F-4541-9D7A-878EED4B4B0E}"/>
+          <p:cNvPr id="11" name="">
+            <a:extLst xmlns:a="http://schemas.openxmlformats.org/drawingml/2006/main">
+              <a:ext uri="{FF2B5EF4-FFF2-40B4-BE49-F238E27FC236}">
+                <a16:creationId xmlns:a16="http://schemas.microsoft.com/office/drawing/2014/main" id="{F832EB18-F79E-4CE6-BF96-C1FB70BE5EDC}"/>
               </a:ext>
             </a:extLst>
           </p:cNvPr>
@@ -5195,10 +5045,10 @@
       </p:sp>
       <p:sp>
         <p:nvSpPr>
-          <p:cNvPr id="13" name="">
-            <a:extLst xmlns:a="http://schemas.openxmlformats.org/drawingml/2006/main">
-              <a:ext uri="{FF2B5EF4-FFF2-40B4-BE49-F238E27FC236}">
-                <a16:creationId xmlns:a16="http://schemas.microsoft.com/office/drawing/2014/main" id="{4C6E080D-401C-4E18-BE69-25E4F1CD6AA7}"/>
+          <p:cNvPr id="12" name="">
+            <a:extLst xmlns:a="http://schemas.openxmlformats.org/drawingml/2006/main">
+              <a:ext uri="{FF2B5EF4-FFF2-40B4-BE49-F238E27FC236}">
+                <a16:creationId xmlns:a16="http://schemas.microsoft.com/office/drawing/2014/main" id="{4DF162E3-4476-4691-A7D7-156811437C6A}"/>
               </a:ext>
             </a:extLst>
           </p:cNvPr>
@@ -5245,10 +5095,10 @@
       </p:sp>
       <p:sp>
         <p:nvSpPr>
-          <p:cNvPr id="14" name="">
-            <a:extLst xmlns:a="http://schemas.openxmlformats.org/drawingml/2006/main">
-              <a:ext uri="{FF2B5EF4-FFF2-40B4-BE49-F238E27FC236}">
-                <a16:creationId xmlns:a16="http://schemas.microsoft.com/office/drawing/2014/main" id="{48CBCCD7-0BBD-4724-8A18-D336EF00A884}"/>
+          <p:cNvPr id="13" name="">
+            <a:extLst xmlns:a="http://schemas.openxmlformats.org/drawingml/2006/main">
+              <a:ext uri="{FF2B5EF4-FFF2-40B4-BE49-F238E27FC236}">
+                <a16:creationId xmlns:a16="http://schemas.microsoft.com/office/drawing/2014/main" id="{5B279958-071A-4917-B654-FCCBD88C33AD}"/>
               </a:ext>
             </a:extLst>
           </p:cNvPr>
@@ -5280,10 +5130,10 @@
       </p:sp>
       <p:sp>
         <p:nvSpPr>
-          <p:cNvPr id="15" name="">
-            <a:extLst xmlns:a="http://schemas.openxmlformats.org/drawingml/2006/main">
-              <a:ext uri="{FF2B5EF4-FFF2-40B4-BE49-F238E27FC236}">
-                <a16:creationId xmlns:a16="http://schemas.microsoft.com/office/drawing/2014/main" id="{D1C4467B-EA5F-4EE4-A50F-04A5A315F648}"/>
+          <p:cNvPr id="14" name="">
+            <a:extLst xmlns:a="http://schemas.openxmlformats.org/drawingml/2006/main">
+              <a:ext uri="{FF2B5EF4-FFF2-40B4-BE49-F238E27FC236}">
+                <a16:creationId xmlns:a16="http://schemas.microsoft.com/office/drawing/2014/main" id="{01963049-18D3-4B48-B3B7-BE1564372347}"/>
               </a:ext>
             </a:extLst>
           </p:cNvPr>
@@ -5330,10 +5180,10 @@
       </p:sp>
       <p:sp>
         <p:nvSpPr>
-          <p:cNvPr id="16" name="">
-            <a:extLst xmlns:a="http://schemas.openxmlformats.org/drawingml/2006/main">
-              <a:ext uri="{FF2B5EF4-FFF2-40B4-BE49-F238E27FC236}">
-                <a16:creationId xmlns:a16="http://schemas.microsoft.com/office/drawing/2014/main" id="{629EA36B-E5CD-4C75-B9AE-FACDB21DAEFC}"/>
+          <p:cNvPr id="15" name="">
+            <a:extLst xmlns:a="http://schemas.openxmlformats.org/drawingml/2006/main">
+              <a:ext uri="{FF2B5EF4-FFF2-40B4-BE49-F238E27FC236}">
+                <a16:creationId xmlns:a16="http://schemas.microsoft.com/office/drawing/2014/main" id="{92F2EC87-A3D4-4DA4-8AFC-2443F6FD5FE3}"/>
               </a:ext>
             </a:extLst>
           </p:cNvPr>
@@ -5363,10 +5213,10 @@
       </p:sp>
       <p:sp>
         <p:nvSpPr>
-          <p:cNvPr id="17" name="">
-            <a:extLst xmlns:a="http://schemas.openxmlformats.org/drawingml/2006/main">
-              <a:ext uri="{FF2B5EF4-FFF2-40B4-BE49-F238E27FC236}">
-                <a16:creationId xmlns:a16="http://schemas.microsoft.com/office/drawing/2014/main" id="{2E60167B-5594-4BDE-BA67-C456FEEF5590}"/>
+          <p:cNvPr id="16" name="">
+            <a:extLst xmlns:a="http://schemas.openxmlformats.org/drawingml/2006/main">
+              <a:ext uri="{FF2B5EF4-FFF2-40B4-BE49-F238E27FC236}">
+                <a16:creationId xmlns:a16="http://schemas.microsoft.com/office/drawing/2014/main" id="{ADAD8C28-8C78-444F-BF59-8E53892A9D4A}"/>
               </a:ext>
             </a:extLst>
           </p:cNvPr>
@@ -5396,10 +5246,10 @@
       </p:sp>
       <p:sp>
         <p:nvSpPr>
-          <p:cNvPr id="18" name="">
-            <a:extLst xmlns:a="http://schemas.openxmlformats.org/drawingml/2006/main">
-              <a:ext uri="{FF2B5EF4-FFF2-40B4-BE49-F238E27FC236}">
-                <a16:creationId xmlns:a16="http://schemas.microsoft.com/office/drawing/2014/main" id="{93B4C067-A642-43BA-AA82-E9F3B1A555CC}"/>
+          <p:cNvPr id="17" name="">
+            <a:extLst xmlns:a="http://schemas.openxmlformats.org/drawingml/2006/main">
+              <a:ext uri="{FF2B5EF4-FFF2-40B4-BE49-F238E27FC236}">
+                <a16:creationId xmlns:a16="http://schemas.microsoft.com/office/drawing/2014/main" id="{91D71CDC-9E81-4094-9FB7-45F29383F1B3}"/>
               </a:ext>
             </a:extLst>
           </p:cNvPr>
@@ -5429,10 +5279,10 @@
       </p:sp>
       <p:sp>
         <p:nvSpPr>
-          <p:cNvPr id="19" name="">
-            <a:extLst xmlns:a="http://schemas.openxmlformats.org/drawingml/2006/main">
-              <a:ext uri="{FF2B5EF4-FFF2-40B4-BE49-F238E27FC236}">
-                <a16:creationId xmlns:a16="http://schemas.microsoft.com/office/drawing/2014/main" id="{F3EF7BF7-5594-4F44-896B-C25771D77366}"/>
+          <p:cNvPr id="18" name="">
+            <a:extLst xmlns:a="http://schemas.openxmlformats.org/drawingml/2006/main">
+              <a:ext uri="{FF2B5EF4-FFF2-40B4-BE49-F238E27FC236}">
+                <a16:creationId xmlns:a16="http://schemas.microsoft.com/office/drawing/2014/main" id="{98EBA0F7-AE63-4FFD-B5C1-655B154B580E}"/>
               </a:ext>
             </a:extLst>
           </p:cNvPr>
@@ -5462,10 +5312,10 @@
       </p:sp>
       <p:sp>
         <p:nvSpPr>
-          <p:cNvPr id="20" name="">
-            <a:extLst xmlns:a="http://schemas.openxmlformats.org/drawingml/2006/main">
-              <a:ext uri="{FF2B5EF4-FFF2-40B4-BE49-F238E27FC236}">
-                <a16:creationId xmlns:a16="http://schemas.microsoft.com/office/drawing/2014/main" id="{66985FA6-FC0D-45BD-9533-66647A7D8F3B}"/>
+          <p:cNvPr id="19" name="">
+            <a:extLst xmlns:a="http://schemas.openxmlformats.org/drawingml/2006/main">
+              <a:ext uri="{FF2B5EF4-FFF2-40B4-BE49-F238E27FC236}">
+                <a16:creationId xmlns:a16="http://schemas.microsoft.com/office/drawing/2014/main" id="{A49A3923-7468-46F2-8D74-7D767B734C9B}"/>
               </a:ext>
             </a:extLst>
           </p:cNvPr>
@@ -5495,10 +5345,10 @@
       </p:sp>
       <p:sp>
         <p:nvSpPr>
-          <p:cNvPr id="21" name="">
-            <a:extLst xmlns:a="http://schemas.openxmlformats.org/drawingml/2006/main">
-              <a:ext uri="{FF2B5EF4-FFF2-40B4-BE49-F238E27FC236}">
-                <a16:creationId xmlns:a16="http://schemas.microsoft.com/office/drawing/2014/main" id="{3C3ADB68-269A-4BD0-BA49-3BDD2C1501CB}"/>
+          <p:cNvPr id="20" name="">
+            <a:extLst xmlns:a="http://schemas.openxmlformats.org/drawingml/2006/main">
+              <a:ext uri="{FF2B5EF4-FFF2-40B4-BE49-F238E27FC236}">
+                <a16:creationId xmlns:a16="http://schemas.microsoft.com/office/drawing/2014/main" id="{72DC3542-995F-4FE9-9230-6A121146E84B}"/>
               </a:ext>
             </a:extLst>
           </p:cNvPr>
@@ -5545,10 +5395,10 @@
       </p:sp>
       <p:sp>
         <p:nvSpPr>
-          <p:cNvPr id="22" name="">
-            <a:extLst xmlns:a="http://schemas.openxmlformats.org/drawingml/2006/main">
-              <a:ext uri="{FF2B5EF4-FFF2-40B4-BE49-F238E27FC236}">
-                <a16:creationId xmlns:a16="http://schemas.microsoft.com/office/drawing/2014/main" id="{867275ED-BA1E-431F-B746-8AEDFFE6864F}"/>
+          <p:cNvPr id="21" name="">
+            <a:extLst xmlns:a="http://schemas.openxmlformats.org/drawingml/2006/main">
+              <a:ext uri="{FF2B5EF4-FFF2-40B4-BE49-F238E27FC236}">
+                <a16:creationId xmlns:a16="http://schemas.microsoft.com/office/drawing/2014/main" id="{7898DB99-3BF4-4509-BED7-2597D9434664}"/>
               </a:ext>
             </a:extLst>
           </p:cNvPr>
@@ -5580,10 +5430,10 @@
       </p:sp>
       <p:sp>
         <p:nvSpPr>
-          <p:cNvPr id="23" name="">
-            <a:extLst xmlns:a="http://schemas.openxmlformats.org/drawingml/2006/main">
-              <a:ext uri="{FF2B5EF4-FFF2-40B4-BE49-F238E27FC236}">
-                <a16:creationId xmlns:a16="http://schemas.microsoft.com/office/drawing/2014/main" id="{82A2185C-3975-4161-AF8E-97B09510AA14}"/>
+          <p:cNvPr id="22" name="">
+            <a:extLst xmlns:a="http://schemas.openxmlformats.org/drawingml/2006/main">
+              <a:ext uri="{FF2B5EF4-FFF2-40B4-BE49-F238E27FC236}">
+                <a16:creationId xmlns:a16="http://schemas.microsoft.com/office/drawing/2014/main" id="{C196FFB7-63DC-4C13-A9F0-6D79B3397CD4}"/>
               </a:ext>
             </a:extLst>
           </p:cNvPr>
@@ -5630,10 +5480,10 @@
       </p:sp>
       <p:sp>
         <p:nvSpPr>
-          <p:cNvPr id="24" name="">
-            <a:extLst xmlns:a="http://schemas.openxmlformats.org/drawingml/2006/main">
-              <a:ext uri="{FF2B5EF4-FFF2-40B4-BE49-F238E27FC236}">
-                <a16:creationId xmlns:a16="http://schemas.microsoft.com/office/drawing/2014/main" id="{11CA7ACE-577D-443D-AAC7-41992AC6A694}"/>
+          <p:cNvPr id="23" name="">
+            <a:extLst xmlns:a="http://schemas.openxmlformats.org/drawingml/2006/main">
+              <a:ext uri="{FF2B5EF4-FFF2-40B4-BE49-F238E27FC236}">
+                <a16:creationId xmlns:a16="http://schemas.microsoft.com/office/drawing/2014/main" id="{731804F2-00D7-4057-986B-3ED19B0FC182}"/>
               </a:ext>
             </a:extLst>
           </p:cNvPr>
@@ -5665,10 +5515,10 @@
       </p:sp>
       <p:sp>
         <p:nvSpPr>
-          <p:cNvPr id="25" name="">
-            <a:extLst xmlns:a="http://schemas.openxmlformats.org/drawingml/2006/main">
-              <a:ext uri="{FF2B5EF4-FFF2-40B4-BE49-F238E27FC236}">
-                <a16:creationId xmlns:a16="http://schemas.microsoft.com/office/drawing/2014/main" id="{89B4E3C7-893E-4EE2-8DE2-9B6575581704}"/>
+          <p:cNvPr id="24" name="">
+            <a:extLst xmlns:a="http://schemas.openxmlformats.org/drawingml/2006/main">
+              <a:ext uri="{FF2B5EF4-FFF2-40B4-BE49-F238E27FC236}">
+                <a16:creationId xmlns:a16="http://schemas.microsoft.com/office/drawing/2014/main" id="{FCC9ABB8-F228-429A-92E5-D990155CEAB9}"/>
               </a:ext>
             </a:extLst>
           </p:cNvPr>
@@ -5715,10 +5565,10 @@
       </p:sp>
       <p:sp>
         <p:nvSpPr>
-          <p:cNvPr id="26" name="">
-            <a:extLst xmlns:a="http://schemas.openxmlformats.org/drawingml/2006/main">
-              <a:ext uri="{FF2B5EF4-FFF2-40B4-BE49-F238E27FC236}">
-                <a16:creationId xmlns:a16="http://schemas.microsoft.com/office/drawing/2014/main" id="{6FDF324C-D196-4F65-B632-F4FE37CA39D9}"/>
+          <p:cNvPr id="25" name="">
+            <a:extLst xmlns:a="http://schemas.openxmlformats.org/drawingml/2006/main">
+              <a:ext uri="{FF2B5EF4-FFF2-40B4-BE49-F238E27FC236}">
+                <a16:creationId xmlns:a16="http://schemas.microsoft.com/office/drawing/2014/main" id="{F412CCB0-4D38-43F8-B67F-358B87CB0EB7}"/>
               </a:ext>
             </a:extLst>
           </p:cNvPr>
@@ -5750,10 +5600,10 @@
       </p:sp>
       <p:sp>
         <p:nvSpPr>
-          <p:cNvPr id="27" name="">
-            <a:extLst xmlns:a="http://schemas.openxmlformats.org/drawingml/2006/main">
-              <a:ext uri="{FF2B5EF4-FFF2-40B4-BE49-F238E27FC236}">
-                <a16:creationId xmlns:a16="http://schemas.microsoft.com/office/drawing/2014/main" id="{114F0BEA-E794-4EEF-85CB-1FC9DD93EE07}"/>
+          <p:cNvPr id="26" name="">
+            <a:extLst xmlns:a="http://schemas.openxmlformats.org/drawingml/2006/main">
+              <a:ext uri="{FF2B5EF4-FFF2-40B4-BE49-F238E27FC236}">
+                <a16:creationId xmlns:a16="http://schemas.microsoft.com/office/drawing/2014/main" id="{F496A6A9-71CA-4C48-86FA-84B8E2BDBC05}"/>
               </a:ext>
             </a:extLst>
           </p:cNvPr>
@@ -5800,10 +5650,10 @@
       </p:sp>
       <p:sp>
         <p:nvSpPr>
-          <p:cNvPr id="28" name="">
-            <a:extLst xmlns:a="http://schemas.openxmlformats.org/drawingml/2006/main">
-              <a:ext uri="{FF2B5EF4-FFF2-40B4-BE49-F238E27FC236}">
-                <a16:creationId xmlns:a16="http://schemas.microsoft.com/office/drawing/2014/main" id="{D69CCF69-659E-4446-ADAF-9058C21E8CD7}"/>
+          <p:cNvPr id="27" name="">
+            <a:extLst xmlns:a="http://schemas.openxmlformats.org/drawingml/2006/main">
+              <a:ext uri="{FF2B5EF4-FFF2-40B4-BE49-F238E27FC236}">
+                <a16:creationId xmlns:a16="http://schemas.microsoft.com/office/drawing/2014/main" id="{35903DAC-CF9B-42B7-95FB-18D23D5260DD}"/>
               </a:ext>
             </a:extLst>
           </p:cNvPr>
@@ -5835,10 +5685,10 @@
       </p:sp>
       <p:sp>
         <p:nvSpPr>
-          <p:cNvPr id="29" name="">
-            <a:extLst xmlns:a="http://schemas.openxmlformats.org/drawingml/2006/main">
-              <a:ext uri="{FF2B5EF4-FFF2-40B4-BE49-F238E27FC236}">
-                <a16:creationId xmlns:a16="http://schemas.microsoft.com/office/drawing/2014/main" id="{CA1B45DD-2128-4789-A341-6848070AA3D6}"/>
+          <p:cNvPr id="28" name="">
+            <a:extLst xmlns:a="http://schemas.openxmlformats.org/drawingml/2006/main">
+              <a:ext uri="{FF2B5EF4-FFF2-40B4-BE49-F238E27FC236}">
+                <a16:creationId xmlns:a16="http://schemas.microsoft.com/office/drawing/2014/main" id="{AAB5BE97-E1B3-4631-8AE3-83D01ADB5AB0}"/>
               </a:ext>
             </a:extLst>
           </p:cNvPr>
@@ -5885,10 +5735,10 @@
       </p:sp>
       <p:sp>
         <p:nvSpPr>
-          <p:cNvPr id="30" name="">
-            <a:extLst xmlns:a="http://schemas.openxmlformats.org/drawingml/2006/main">
-              <a:ext uri="{FF2B5EF4-FFF2-40B4-BE49-F238E27FC236}">
-                <a16:creationId xmlns:a16="http://schemas.microsoft.com/office/drawing/2014/main" id="{C86E4A3F-76ED-4281-A96C-6D338C59D4C1}"/>
+          <p:cNvPr id="29" name="">
+            <a:extLst xmlns:a="http://schemas.openxmlformats.org/drawingml/2006/main">
+              <a:ext uri="{FF2B5EF4-FFF2-40B4-BE49-F238E27FC236}">
+                <a16:creationId xmlns:a16="http://schemas.microsoft.com/office/drawing/2014/main" id="{0C22F2B0-7773-49D1-9DC9-EE42D22152AC}"/>
               </a:ext>
             </a:extLst>
           </p:cNvPr>
@@ -5920,10 +5770,10 @@
       </p:sp>
       <p:sp>
         <p:nvSpPr>
-          <p:cNvPr id="31" name="">
-            <a:extLst xmlns:a="http://schemas.openxmlformats.org/drawingml/2006/main">
-              <a:ext uri="{FF2B5EF4-FFF2-40B4-BE49-F238E27FC236}">
-                <a16:creationId xmlns:a16="http://schemas.microsoft.com/office/drawing/2014/main" id="{81A80CC8-C161-4B69-AAD1-8C6D0FD9CB54}"/>
+          <p:cNvPr id="30" name="">
+            <a:extLst xmlns:a="http://schemas.openxmlformats.org/drawingml/2006/main">
+              <a:ext uri="{FF2B5EF4-FFF2-40B4-BE49-F238E27FC236}">
+                <a16:creationId xmlns:a16="http://schemas.microsoft.com/office/drawing/2014/main" id="{C18E446C-101C-47C7-B342-5265E3ACC93B}"/>
               </a:ext>
             </a:extLst>
           </p:cNvPr>
@@ -5970,10 +5820,10 @@
       </p:sp>
       <p:sp>
         <p:nvSpPr>
-          <p:cNvPr id="32" name="">
-            <a:extLst xmlns:a="http://schemas.openxmlformats.org/drawingml/2006/main">
-              <a:ext uri="{FF2B5EF4-FFF2-40B4-BE49-F238E27FC236}">
-                <a16:creationId xmlns:a16="http://schemas.microsoft.com/office/drawing/2014/main" id="{EB265261-61FC-4355-9AC0-2DF3CE332EDB}"/>
+          <p:cNvPr id="31" name="">
+            <a:extLst xmlns:a="http://schemas.openxmlformats.org/drawingml/2006/main">
+              <a:ext uri="{FF2B5EF4-FFF2-40B4-BE49-F238E27FC236}">
+                <a16:creationId xmlns:a16="http://schemas.microsoft.com/office/drawing/2014/main" id="{431F086C-93B2-441D-891A-387CC646F8CB}"/>
               </a:ext>
             </a:extLst>
           </p:cNvPr>
@@ -6021,7 +5871,7 @@
     </p:spTree>
     <p:extLst>
       <p:ext uri="{BB962C8B-B14F-4D97-AF65-F5344CB8AC3E}">
-        <p14:creationId xmlns:p14="http://schemas.microsoft.com/office/powerpoint/2010/main" val="1273523238"/>
+        <p14:creationId xmlns:p14="http://schemas.microsoft.com/office/powerpoint/2010/main" val="193979179"/>
       </p:ext>
     </p:extLst>
   </p:cSld>
@@ -6049,10 +5899,10 @@
       </p:grpSpPr>
       <p:sp>
         <p:nvSpPr>
-          <p:cNvPr id="19" name="">
-            <a:extLst xmlns:a="http://schemas.openxmlformats.org/drawingml/2006/main">
-              <a:ext uri="{FF2B5EF4-FFF2-40B4-BE49-F238E27FC236}">
-                <a16:creationId xmlns:a16="http://schemas.microsoft.com/office/drawing/2014/main" id="{DDDD7DF1-E097-4AF5-B12E-AAE7A959AD93}"/>
+          <p:cNvPr id="18" name="">
+            <a:extLst xmlns:a="http://schemas.openxmlformats.org/drawingml/2006/main">
+              <a:ext uri="{FF2B5EF4-FFF2-40B4-BE49-F238E27FC236}">
+                <a16:creationId xmlns:a16="http://schemas.microsoft.com/office/drawing/2014/main" id="{42D3CAD7-C6EA-43D5-95DE-A1A07296BFFD}"/>
               </a:ext>
             </a:extLst>
           </p:cNvPr>
@@ -6102,7 +5952,7 @@
           <p:cNvPr id="2" name="">
             <a:extLst xmlns:a="http://schemas.openxmlformats.org/drawingml/2006/main">
               <a:ext uri="{FF2B5EF4-FFF2-40B4-BE49-F238E27FC236}">
-                <a16:creationId xmlns:a16="http://schemas.microsoft.com/office/drawing/2014/main" id="{34D7D004-52D8-45EE-B72F-E514FFCEA269}"/>
+                <a16:creationId xmlns:a16="http://schemas.microsoft.com/office/drawing/2014/main" id="{46B2AFFD-1E96-4AD1-B63A-E76D10407CE5}"/>
               </a:ext>
             </a:extLst>
           </p:cNvPr>
@@ -6133,69 +5983,19 @@
           <p:cNvPr id="3" name="">
             <a:extLst xmlns:a="http://schemas.openxmlformats.org/drawingml/2006/main">
               <a:ext uri="{FF2B5EF4-FFF2-40B4-BE49-F238E27FC236}">
-                <a16:creationId xmlns:a16="http://schemas.microsoft.com/office/drawing/2014/main" id="{88DCBA0C-E405-473D-94D3-7F14A28C07D0}"/>
-              </a:ext>
-            </a:extLst>
-          </p:cNvPr>
-          <p:cNvSpPr>
-            <a:spLocks xmlns:a="http://schemas.openxmlformats.org/drawingml/2006/main" noGrp="1"/>
-          </p:cNvSpPr>
-          <p:nvPr/>
-        </p:nvSpPr>
-        <p:spPr>
-          <a:xfrm xmlns:a="http://schemas.openxmlformats.org/drawingml/2006/main">
-            <a:off x="609600" y="800100"/>
-            <a:ext cx="3429000" cy="228600"/>
-          </a:xfrm>
-          <a:prstGeom xmlns:a="http://schemas.openxmlformats.org/drawingml/2006/main" prst="rect">
-            <a:avLst/>
-          </a:prstGeom>
-          <a:noFill xmlns:a="http://schemas.openxmlformats.org/drawingml/2006/main"/>
-          <a:ln xmlns:a="http://schemas.openxmlformats.org/drawingml/2006/main" w="0">
-            <a:noFill/>
-            <a:prstDash val="solid"/>
-          </a:ln>
-        </p:spPr>
-        <p:txBody>
-          <a:bodyPr xmlns:a="http://schemas.openxmlformats.org/drawingml/2006/main"/>
-          <a:lstStyle xmlns:a="http://schemas.openxmlformats.org/drawingml/2006/main"/>
-          <a:p xmlns:a="http://schemas.openxmlformats.org/drawingml/2006/main">
-            <a:pPr algn="l">
-              <a:defRPr sz="975" b="1">
-                <a:solidFill>
-                  <a:srgbClr val="E63888"/>
-                </a:solidFill>
-              </a:defRPr>
-            </a:pPr>
-            <a:r>
-              <a:rPr sz="975" b="1">
-                <a:solidFill>
-                  <a:srgbClr val="E63888"/>
-                </a:solidFill>
-              </a:rPr>
-              <a:t>THE LADDER</a:t>
-            </a:r>
-          </a:p>
-        </p:txBody>
-      </p:sp>
-      <p:sp>
-        <p:nvSpPr>
-          <p:cNvPr id="4" name="">
-            <a:extLst xmlns:a="http://schemas.openxmlformats.org/drawingml/2006/main">
-              <a:ext uri="{FF2B5EF4-FFF2-40B4-BE49-F238E27FC236}">
-                <a16:creationId xmlns:a16="http://schemas.microsoft.com/office/drawing/2014/main" id="{7751DA37-A7FF-4007-A1E6-66442D5D1C1D}"/>
-              </a:ext>
-            </a:extLst>
-          </p:cNvPr>
-          <p:cNvSpPr>
-            <a:spLocks xmlns:a="http://schemas.openxmlformats.org/drawingml/2006/main" noGrp="1"/>
-          </p:cNvSpPr>
-          <p:nvPr/>
-        </p:nvSpPr>
-        <p:spPr>
-          <a:xfrm xmlns:a="http://schemas.openxmlformats.org/drawingml/2006/main">
-            <a:off x="609600" y="1066800"/>
-            <a:ext cx="10668000" cy="647700"/>
+                <a16:creationId xmlns:a16="http://schemas.microsoft.com/office/drawing/2014/main" id="{268F20C7-0B59-456D-A51E-F0FF34441768}"/>
+              </a:ext>
+            </a:extLst>
+          </p:cNvPr>
+          <p:cNvSpPr>
+            <a:spLocks xmlns:a="http://schemas.openxmlformats.org/drawingml/2006/main" noGrp="1"/>
+          </p:cNvSpPr>
+          <p:nvPr/>
+        </p:nvSpPr>
+        <p:spPr>
+          <a:xfrm xmlns:a="http://schemas.openxmlformats.org/drawingml/2006/main">
+            <a:off x="609600" y="838200"/>
+            <a:ext cx="10668000" cy="704850"/>
           </a:xfrm>
           <a:prstGeom xmlns:a="http://schemas.openxmlformats.org/drawingml/2006/main" prst="rect">
             <a:avLst/>
@@ -6230,10 +6030,10 @@
       </p:sp>
       <p:sp>
         <p:nvSpPr>
-          <p:cNvPr id="5" name="">
-            <a:extLst xmlns:a="http://schemas.openxmlformats.org/drawingml/2006/main">
-              <a:ext uri="{FF2B5EF4-FFF2-40B4-BE49-F238E27FC236}">
-                <a16:creationId xmlns:a16="http://schemas.microsoft.com/office/drawing/2014/main" id="{00123D8F-D711-496E-B9C2-8F40C8AAB396}"/>
+          <p:cNvPr id="4" name="">
+            <a:extLst xmlns:a="http://schemas.openxmlformats.org/drawingml/2006/main">
+              <a:ext uri="{FF2B5EF4-FFF2-40B4-BE49-F238E27FC236}">
+                <a16:creationId xmlns:a16="http://schemas.microsoft.com/office/drawing/2014/main" id="{54FA9475-23FF-4CB3-BBC7-058D392BB255}"/>
               </a:ext>
             </a:extLst>
           </p:cNvPr>
@@ -6280,10 +6080,10 @@
       </p:sp>
       <p:sp>
         <p:nvSpPr>
-          <p:cNvPr id="6" name="">
-            <a:extLst xmlns:a="http://schemas.openxmlformats.org/drawingml/2006/main">
-              <a:ext uri="{FF2B5EF4-FFF2-40B4-BE49-F238E27FC236}">
-                <a16:creationId xmlns:a16="http://schemas.microsoft.com/office/drawing/2014/main" id="{2BBBC8D1-657B-4C8F-94A8-19F09880D858}"/>
+          <p:cNvPr id="5" name="">
+            <a:extLst xmlns:a="http://schemas.openxmlformats.org/drawingml/2006/main">
+              <a:ext uri="{FF2B5EF4-FFF2-40B4-BE49-F238E27FC236}">
+                <a16:creationId xmlns:a16="http://schemas.microsoft.com/office/drawing/2014/main" id="{CADB4F99-F869-4AB6-8DBA-748AC6595A64}"/>
               </a:ext>
             </a:extLst>
           </p:cNvPr>
@@ -6330,10 +6130,10 @@
       </p:sp>
       <p:sp>
         <p:nvSpPr>
-          <p:cNvPr id="7" name="">
-            <a:extLst xmlns:a="http://schemas.openxmlformats.org/drawingml/2006/main">
-              <a:ext uri="{FF2B5EF4-FFF2-40B4-BE49-F238E27FC236}">
-                <a16:creationId xmlns:a16="http://schemas.microsoft.com/office/drawing/2014/main" id="{631752D3-9A0B-4981-9BC8-CDAE2F0AC0AD}"/>
+          <p:cNvPr id="6" name="">
+            <a:extLst xmlns:a="http://schemas.openxmlformats.org/drawingml/2006/main">
+              <a:ext uri="{FF2B5EF4-FFF2-40B4-BE49-F238E27FC236}">
+                <a16:creationId xmlns:a16="http://schemas.microsoft.com/office/drawing/2014/main" id="{252A7AF4-884B-45D7-A50D-6BD44926A0E5}"/>
               </a:ext>
             </a:extLst>
           </p:cNvPr>
@@ -6380,10 +6180,10 @@
       </p:sp>
       <p:sp>
         <p:nvSpPr>
-          <p:cNvPr id="8" name="">
-            <a:extLst xmlns:a="http://schemas.openxmlformats.org/drawingml/2006/main">
-              <a:ext uri="{FF2B5EF4-FFF2-40B4-BE49-F238E27FC236}">
-                <a16:creationId xmlns:a16="http://schemas.microsoft.com/office/drawing/2014/main" id="{AF6FED50-7FFC-4C66-A011-EBACE11335CE}"/>
+          <p:cNvPr id="7" name="">
+            <a:extLst xmlns:a="http://schemas.openxmlformats.org/drawingml/2006/main">
+              <a:ext uri="{FF2B5EF4-FFF2-40B4-BE49-F238E27FC236}">
+                <a16:creationId xmlns:a16="http://schemas.microsoft.com/office/drawing/2014/main" id="{A836DE03-7A47-4409-86A8-9A663D4732B7}"/>
               </a:ext>
             </a:extLst>
           </p:cNvPr>
@@ -6430,10 +6230,10 @@
       </p:sp>
       <p:sp>
         <p:nvSpPr>
-          <p:cNvPr id="9" name="">
-            <a:extLst xmlns:a="http://schemas.openxmlformats.org/drawingml/2006/main">
-              <a:ext uri="{FF2B5EF4-FFF2-40B4-BE49-F238E27FC236}">
-                <a16:creationId xmlns:a16="http://schemas.microsoft.com/office/drawing/2014/main" id="{B1C56125-1715-467C-AE99-1F968740701F}"/>
+          <p:cNvPr id="8" name="">
+            <a:extLst xmlns:a="http://schemas.openxmlformats.org/drawingml/2006/main">
+              <a:ext uri="{FF2B5EF4-FFF2-40B4-BE49-F238E27FC236}">
+                <a16:creationId xmlns:a16="http://schemas.microsoft.com/office/drawing/2014/main" id="{3A30B91C-3DF5-4E9A-8796-8630E45E770C}"/>
               </a:ext>
             </a:extLst>
           </p:cNvPr>
@@ -6497,10 +6297,10 @@
       </p:sp>
       <p:sp>
         <p:nvSpPr>
-          <p:cNvPr id="10" name="">
-            <a:extLst xmlns:a="http://schemas.openxmlformats.org/drawingml/2006/main">
-              <a:ext uri="{FF2B5EF4-FFF2-40B4-BE49-F238E27FC236}">
-                <a16:creationId xmlns:a16="http://schemas.microsoft.com/office/drawing/2014/main" id="{9000953A-8A5F-4295-8A9D-349272255777}"/>
+          <p:cNvPr id="9" name="">
+            <a:extLst xmlns:a="http://schemas.openxmlformats.org/drawingml/2006/main">
+              <a:ext uri="{FF2B5EF4-FFF2-40B4-BE49-F238E27FC236}">
+                <a16:creationId xmlns:a16="http://schemas.microsoft.com/office/drawing/2014/main" id="{536206F8-FF54-4186-AB49-C5AE376DCF07}"/>
               </a:ext>
             </a:extLst>
           </p:cNvPr>
@@ -6532,10 +6332,10 @@
       </p:sp>
       <p:sp>
         <p:nvSpPr>
-          <p:cNvPr id="11" name="">
-            <a:extLst xmlns:a="http://schemas.openxmlformats.org/drawingml/2006/main">
-              <a:ext uri="{FF2B5EF4-FFF2-40B4-BE49-F238E27FC236}">
-                <a16:creationId xmlns:a16="http://schemas.microsoft.com/office/drawing/2014/main" id="{3D27ECBD-6440-4B8A-B83B-125370004744}"/>
+          <p:cNvPr id="10" name="">
+            <a:extLst xmlns:a="http://schemas.openxmlformats.org/drawingml/2006/main">
+              <a:ext uri="{FF2B5EF4-FFF2-40B4-BE49-F238E27FC236}">
+                <a16:creationId xmlns:a16="http://schemas.microsoft.com/office/drawing/2014/main" id="{BE35FA64-9933-413F-B04C-703DCA1EFCD9}"/>
               </a:ext>
             </a:extLst>
           </p:cNvPr>
@@ -6582,10 +6382,10 @@
       </p:sp>
       <p:sp>
         <p:nvSpPr>
-          <p:cNvPr id="12" name="">
-            <a:extLst xmlns:a="http://schemas.openxmlformats.org/drawingml/2006/main">
-              <a:ext uri="{FF2B5EF4-FFF2-40B4-BE49-F238E27FC236}">
-                <a16:creationId xmlns:a16="http://schemas.microsoft.com/office/drawing/2014/main" id="{376B730A-4DDA-4E2B-8FD3-19D6E7805388}"/>
+          <p:cNvPr id="11" name="">
+            <a:extLst xmlns:a="http://schemas.openxmlformats.org/drawingml/2006/main">
+              <a:ext uri="{FF2B5EF4-FFF2-40B4-BE49-F238E27FC236}">
+                <a16:creationId xmlns:a16="http://schemas.microsoft.com/office/drawing/2014/main" id="{E0ADA090-74C0-4F3C-B098-6FC3C6B642FB}"/>
               </a:ext>
             </a:extLst>
           </p:cNvPr>
@@ -6632,10 +6432,10 @@
       </p:sp>
       <p:sp>
         <p:nvSpPr>
-          <p:cNvPr id="13" name="">
-            <a:extLst xmlns:a="http://schemas.openxmlformats.org/drawingml/2006/main">
-              <a:ext uri="{FF2B5EF4-FFF2-40B4-BE49-F238E27FC236}">
-                <a16:creationId xmlns:a16="http://schemas.microsoft.com/office/drawing/2014/main" id="{AB0F0C0D-B8B3-40F1-B930-B3042317FD40}"/>
+          <p:cNvPr id="12" name="">
+            <a:extLst xmlns:a="http://schemas.openxmlformats.org/drawingml/2006/main">
+              <a:ext uri="{FF2B5EF4-FFF2-40B4-BE49-F238E27FC236}">
+                <a16:creationId xmlns:a16="http://schemas.microsoft.com/office/drawing/2014/main" id="{1B089F7A-CEEB-42B6-9CD0-4CC0147B6CEA}"/>
               </a:ext>
             </a:extLst>
           </p:cNvPr>
@@ -6665,10 +6465,10 @@
       </p:sp>
       <p:sp>
         <p:nvSpPr>
-          <p:cNvPr id="14" name="">
-            <a:extLst xmlns:a="http://schemas.openxmlformats.org/drawingml/2006/main">
-              <a:ext uri="{FF2B5EF4-FFF2-40B4-BE49-F238E27FC236}">
-                <a16:creationId xmlns:a16="http://schemas.microsoft.com/office/drawing/2014/main" id="{C9FDC35B-226D-4C9F-B436-B62AF403BDF3}"/>
+          <p:cNvPr id="13" name="">
+            <a:extLst xmlns:a="http://schemas.openxmlformats.org/drawingml/2006/main">
+              <a:ext uri="{FF2B5EF4-FFF2-40B4-BE49-F238E27FC236}">
+                <a16:creationId xmlns:a16="http://schemas.microsoft.com/office/drawing/2014/main" id="{4BFB651A-1EF4-4BC3-8830-8F8E90055FF0}"/>
               </a:ext>
             </a:extLst>
           </p:cNvPr>
@@ -6715,10 +6515,10 @@
       </p:sp>
       <p:sp>
         <p:nvSpPr>
-          <p:cNvPr id="15" name="">
-            <a:extLst xmlns:a="http://schemas.openxmlformats.org/drawingml/2006/main">
-              <a:ext uri="{FF2B5EF4-FFF2-40B4-BE49-F238E27FC236}">
-                <a16:creationId xmlns:a16="http://schemas.microsoft.com/office/drawing/2014/main" id="{D8E9F242-951A-4245-B9FB-7147EF6CF1AD}"/>
+          <p:cNvPr id="14" name="">
+            <a:extLst xmlns:a="http://schemas.openxmlformats.org/drawingml/2006/main">
+              <a:ext uri="{FF2B5EF4-FFF2-40B4-BE49-F238E27FC236}">
+                <a16:creationId xmlns:a16="http://schemas.microsoft.com/office/drawing/2014/main" id="{73028BF0-B47A-4D63-ADDB-F4117F74838C}"/>
               </a:ext>
             </a:extLst>
           </p:cNvPr>
@@ -6765,10 +6565,10 @@
       </p:sp>
       <p:sp>
         <p:nvSpPr>
-          <p:cNvPr id="16" name="">
-            <a:extLst xmlns:a="http://schemas.openxmlformats.org/drawingml/2006/main">
-              <a:ext uri="{FF2B5EF4-FFF2-40B4-BE49-F238E27FC236}">
-                <a16:creationId xmlns:a16="http://schemas.microsoft.com/office/drawing/2014/main" id="{071C7773-D5C5-4BBF-802F-D08CAD4BD892}"/>
+          <p:cNvPr id="15" name="">
+            <a:extLst xmlns:a="http://schemas.openxmlformats.org/drawingml/2006/main">
+              <a:ext uri="{FF2B5EF4-FFF2-40B4-BE49-F238E27FC236}">
+                <a16:creationId xmlns:a16="http://schemas.microsoft.com/office/drawing/2014/main" id="{CE25BFF5-8021-441B-85AC-8CD2E2FD51F1}"/>
               </a:ext>
             </a:extLst>
           </p:cNvPr>
@@ -6798,10 +6598,10 @@
       </p:sp>
       <p:sp>
         <p:nvSpPr>
-          <p:cNvPr id="17" name="">
-            <a:extLst xmlns:a="http://schemas.openxmlformats.org/drawingml/2006/main">
-              <a:ext uri="{FF2B5EF4-FFF2-40B4-BE49-F238E27FC236}">
-                <a16:creationId xmlns:a16="http://schemas.microsoft.com/office/drawing/2014/main" id="{4A013DA3-4D83-4B62-B478-10B969F6BE4E}"/>
+          <p:cNvPr id="16" name="">
+            <a:extLst xmlns:a="http://schemas.openxmlformats.org/drawingml/2006/main">
+              <a:ext uri="{FF2B5EF4-FFF2-40B4-BE49-F238E27FC236}">
+                <a16:creationId xmlns:a16="http://schemas.microsoft.com/office/drawing/2014/main" id="{1FF9F8DB-B9E1-4F9F-8E16-66ABF3C7F3E6}"/>
               </a:ext>
             </a:extLst>
           </p:cNvPr>
@@ -6848,10 +6648,10 @@
       </p:sp>
       <p:sp>
         <p:nvSpPr>
-          <p:cNvPr id="18" name="">
-            <a:extLst xmlns:a="http://schemas.openxmlformats.org/drawingml/2006/main">
-              <a:ext uri="{FF2B5EF4-FFF2-40B4-BE49-F238E27FC236}">
-                <a16:creationId xmlns:a16="http://schemas.microsoft.com/office/drawing/2014/main" id="{122D6853-C55C-469F-973F-70790B7FD793}"/>
+          <p:cNvPr id="17" name="">
+            <a:extLst xmlns:a="http://schemas.openxmlformats.org/drawingml/2006/main">
+              <a:ext uri="{FF2B5EF4-FFF2-40B4-BE49-F238E27FC236}">
+                <a16:creationId xmlns:a16="http://schemas.microsoft.com/office/drawing/2014/main" id="{B71BECFA-38F0-45C6-9774-684A5F30618B}"/>
               </a:ext>
             </a:extLst>
           </p:cNvPr>
@@ -6899,7 +6699,7 @@
     </p:spTree>
     <p:extLst>
       <p:ext uri="{BB962C8B-B14F-4D97-AF65-F5344CB8AC3E}">
-        <p14:creationId xmlns:p14="http://schemas.microsoft.com/office/powerpoint/2010/main" val="12455234"/>
+        <p14:creationId xmlns:p14="http://schemas.microsoft.com/office/powerpoint/2010/main" val="296113869"/>
       </p:ext>
     </p:extLst>
   </p:cSld>
@@ -6927,10 +6727,10 @@
       </p:grpSpPr>
       <p:sp>
         <p:nvSpPr>
-          <p:cNvPr id="32" name="">
-            <a:extLst xmlns:a="http://schemas.openxmlformats.org/drawingml/2006/main">
-              <a:ext uri="{FF2B5EF4-FFF2-40B4-BE49-F238E27FC236}">
-                <a16:creationId xmlns:a16="http://schemas.microsoft.com/office/drawing/2014/main" id="{CE1DEC20-48A2-4C6A-99FA-0308FAFCDA5F}"/>
+          <p:cNvPr id="31" name="">
+            <a:extLst xmlns:a="http://schemas.openxmlformats.org/drawingml/2006/main">
+              <a:ext uri="{FF2B5EF4-FFF2-40B4-BE49-F238E27FC236}">
+                <a16:creationId xmlns:a16="http://schemas.microsoft.com/office/drawing/2014/main" id="{37A1881F-21D5-4699-A9B0-2C3383501E4A}"/>
               </a:ext>
             </a:extLst>
           </p:cNvPr>
@@ -6980,7 +6780,7 @@
           <p:cNvPr id="2" name="">
             <a:extLst xmlns:a="http://schemas.openxmlformats.org/drawingml/2006/main">
               <a:ext uri="{FF2B5EF4-FFF2-40B4-BE49-F238E27FC236}">
-                <a16:creationId xmlns:a16="http://schemas.microsoft.com/office/drawing/2014/main" id="{47D42E2C-192F-46D8-899E-F08571E0A589}"/>
+                <a16:creationId xmlns:a16="http://schemas.microsoft.com/office/drawing/2014/main" id="{6C9D2B76-E12A-44C5-B2EA-910ECBFDFA1C}"/>
               </a:ext>
             </a:extLst>
           </p:cNvPr>
@@ -7011,69 +6811,19 @@
           <p:cNvPr id="3" name="">
             <a:extLst xmlns:a="http://schemas.openxmlformats.org/drawingml/2006/main">
               <a:ext uri="{FF2B5EF4-FFF2-40B4-BE49-F238E27FC236}">
-                <a16:creationId xmlns:a16="http://schemas.microsoft.com/office/drawing/2014/main" id="{DBB3A407-7C53-48DD-A46E-95BA5F63E66E}"/>
-              </a:ext>
-            </a:extLst>
-          </p:cNvPr>
-          <p:cNvSpPr>
-            <a:spLocks xmlns:a="http://schemas.openxmlformats.org/drawingml/2006/main" noGrp="1"/>
-          </p:cNvSpPr>
-          <p:nvPr/>
-        </p:nvSpPr>
-        <p:spPr>
-          <a:xfrm xmlns:a="http://schemas.openxmlformats.org/drawingml/2006/main">
-            <a:off x="609600" y="800100"/>
-            <a:ext cx="3429000" cy="228600"/>
-          </a:xfrm>
-          <a:prstGeom xmlns:a="http://schemas.openxmlformats.org/drawingml/2006/main" prst="rect">
-            <a:avLst/>
-          </a:prstGeom>
-          <a:noFill xmlns:a="http://schemas.openxmlformats.org/drawingml/2006/main"/>
-          <a:ln xmlns:a="http://schemas.openxmlformats.org/drawingml/2006/main" w="0">
-            <a:noFill/>
-            <a:prstDash val="solid"/>
-          </a:ln>
-        </p:spPr>
-        <p:txBody>
-          <a:bodyPr xmlns:a="http://schemas.openxmlformats.org/drawingml/2006/main"/>
-          <a:lstStyle xmlns:a="http://schemas.openxmlformats.org/drawingml/2006/main"/>
-          <a:p xmlns:a="http://schemas.openxmlformats.org/drawingml/2006/main">
-            <a:pPr algn="l">
-              <a:defRPr sz="975" b="1">
-                <a:solidFill>
-                  <a:srgbClr val="C7F25C"/>
-                </a:solidFill>
-              </a:defRPr>
-            </a:pPr>
-            <a:r>
-              <a:rPr sz="975" b="1">
-                <a:solidFill>
-                  <a:srgbClr val="C7F25C"/>
-                </a:solidFill>
-              </a:rPr>
-              <a:t>SKILL ANATOMY</a:t>
-            </a:r>
-          </a:p>
-        </p:txBody>
-      </p:sp>
-      <p:sp>
-        <p:nvSpPr>
-          <p:cNvPr id="4" name="">
-            <a:extLst xmlns:a="http://schemas.openxmlformats.org/drawingml/2006/main">
-              <a:ext uri="{FF2B5EF4-FFF2-40B4-BE49-F238E27FC236}">
-                <a16:creationId xmlns:a16="http://schemas.microsoft.com/office/drawing/2014/main" id="{FF8D342D-6057-49DD-A0BA-AE3C455403EB}"/>
-              </a:ext>
-            </a:extLst>
-          </p:cNvPr>
-          <p:cNvSpPr>
-            <a:spLocks xmlns:a="http://schemas.openxmlformats.org/drawingml/2006/main" noGrp="1"/>
-          </p:cNvSpPr>
-          <p:nvPr/>
-        </p:nvSpPr>
-        <p:spPr>
-          <a:xfrm xmlns:a="http://schemas.openxmlformats.org/drawingml/2006/main">
-            <a:off x="609600" y="1066800"/>
-            <a:ext cx="10668000" cy="647700"/>
+                <a16:creationId xmlns:a16="http://schemas.microsoft.com/office/drawing/2014/main" id="{3D9B838A-FA0F-4D34-B820-0D716E066094}"/>
+              </a:ext>
+            </a:extLst>
+          </p:cNvPr>
+          <p:cNvSpPr>
+            <a:spLocks xmlns:a="http://schemas.openxmlformats.org/drawingml/2006/main" noGrp="1"/>
+          </p:cNvSpPr>
+          <p:nvPr/>
+        </p:nvSpPr>
+        <p:spPr>
+          <a:xfrm xmlns:a="http://schemas.openxmlformats.org/drawingml/2006/main">
+            <a:off x="609600" y="838200"/>
+            <a:ext cx="10668000" cy="704850"/>
           </a:xfrm>
           <a:prstGeom xmlns:a="http://schemas.openxmlformats.org/drawingml/2006/main" prst="rect">
             <a:avLst/>
@@ -7108,10 +6858,10 @@
       </p:sp>
       <p:sp>
         <p:nvSpPr>
-          <p:cNvPr id="5" name="">
-            <a:extLst xmlns:a="http://schemas.openxmlformats.org/drawingml/2006/main">
-              <a:ext uri="{FF2B5EF4-FFF2-40B4-BE49-F238E27FC236}">
-                <a16:creationId xmlns:a16="http://schemas.microsoft.com/office/drawing/2014/main" id="{174A9EFD-B332-473E-9D5C-863276159AEA}"/>
+          <p:cNvPr id="4" name="">
+            <a:extLst xmlns:a="http://schemas.openxmlformats.org/drawingml/2006/main">
+              <a:ext uri="{FF2B5EF4-FFF2-40B4-BE49-F238E27FC236}">
+                <a16:creationId xmlns:a16="http://schemas.microsoft.com/office/drawing/2014/main" id="{9AD9403C-6D86-4068-88F5-148FF76B96AA}"/>
               </a:ext>
             </a:extLst>
           </p:cNvPr>
@@ -7158,10 +6908,10 @@
       </p:sp>
       <p:sp>
         <p:nvSpPr>
-          <p:cNvPr id="6" name="">
-            <a:extLst xmlns:a="http://schemas.openxmlformats.org/drawingml/2006/main">
-              <a:ext uri="{FF2B5EF4-FFF2-40B4-BE49-F238E27FC236}">
-                <a16:creationId xmlns:a16="http://schemas.microsoft.com/office/drawing/2014/main" id="{83913054-9C9B-440F-8A56-A75F1C762366}"/>
+          <p:cNvPr id="5" name="">
+            <a:extLst xmlns:a="http://schemas.openxmlformats.org/drawingml/2006/main">
+              <a:ext uri="{FF2B5EF4-FFF2-40B4-BE49-F238E27FC236}">
+                <a16:creationId xmlns:a16="http://schemas.microsoft.com/office/drawing/2014/main" id="{6604EB77-ED83-49E0-8395-4250E6E483EB}"/>
               </a:ext>
             </a:extLst>
           </p:cNvPr>
@@ -7208,10 +6958,10 @@
       </p:sp>
       <p:sp>
         <p:nvSpPr>
-          <p:cNvPr id="7" name="">
-            <a:extLst xmlns:a="http://schemas.openxmlformats.org/drawingml/2006/main">
-              <a:ext uri="{FF2B5EF4-FFF2-40B4-BE49-F238E27FC236}">
-                <a16:creationId xmlns:a16="http://schemas.microsoft.com/office/drawing/2014/main" id="{254363A3-C688-4BE8-BA84-0B93CDC165B5}"/>
+          <p:cNvPr id="6" name="">
+            <a:extLst xmlns:a="http://schemas.openxmlformats.org/drawingml/2006/main">
+              <a:ext uri="{FF2B5EF4-FFF2-40B4-BE49-F238E27FC236}">
+                <a16:creationId xmlns:a16="http://schemas.microsoft.com/office/drawing/2014/main" id="{90DEB3C5-E65E-483D-B556-CEFFFD129E5F}"/>
               </a:ext>
             </a:extLst>
           </p:cNvPr>
@@ -7243,10 +6993,10 @@
       </p:sp>
       <p:sp>
         <p:nvSpPr>
-          <p:cNvPr id="8" name="">
-            <a:extLst xmlns:a="http://schemas.openxmlformats.org/drawingml/2006/main">
-              <a:ext uri="{FF2B5EF4-FFF2-40B4-BE49-F238E27FC236}">
-                <a16:creationId xmlns:a16="http://schemas.microsoft.com/office/drawing/2014/main" id="{DA4341F2-CC5D-431D-ABF3-BCEDE5C9FA89}"/>
+          <p:cNvPr id="7" name="">
+            <a:extLst xmlns:a="http://schemas.openxmlformats.org/drawingml/2006/main">
+              <a:ext uri="{FF2B5EF4-FFF2-40B4-BE49-F238E27FC236}">
+                <a16:creationId xmlns:a16="http://schemas.microsoft.com/office/drawing/2014/main" id="{446BFF76-6C54-4809-833A-57828918D18B}"/>
               </a:ext>
             </a:extLst>
           </p:cNvPr>
@@ -7293,10 +7043,10 @@
       </p:sp>
       <p:sp>
         <p:nvSpPr>
-          <p:cNvPr id="9" name="">
-            <a:extLst xmlns:a="http://schemas.openxmlformats.org/drawingml/2006/main">
-              <a:ext uri="{FF2B5EF4-FFF2-40B4-BE49-F238E27FC236}">
-                <a16:creationId xmlns:a16="http://schemas.microsoft.com/office/drawing/2014/main" id="{675E3E45-23E2-4D3E-98D7-C3D9BE82E597}"/>
+          <p:cNvPr id="8" name="">
+            <a:extLst xmlns:a="http://schemas.openxmlformats.org/drawingml/2006/main">
+              <a:ext uri="{FF2B5EF4-FFF2-40B4-BE49-F238E27FC236}">
+                <a16:creationId xmlns:a16="http://schemas.microsoft.com/office/drawing/2014/main" id="{8695BDFF-1B55-4782-BCF4-B182B0172DCB}"/>
               </a:ext>
             </a:extLst>
           </p:cNvPr>
@@ -7343,10 +7093,10 @@
       </p:sp>
       <p:sp>
         <p:nvSpPr>
-          <p:cNvPr id="10" name="">
-            <a:extLst xmlns:a="http://schemas.openxmlformats.org/drawingml/2006/main">
-              <a:ext uri="{FF2B5EF4-FFF2-40B4-BE49-F238E27FC236}">
-                <a16:creationId xmlns:a16="http://schemas.microsoft.com/office/drawing/2014/main" id="{4A848A01-AF2B-4897-B1F4-6D4E8CAEF0D4}"/>
+          <p:cNvPr id="9" name="">
+            <a:extLst xmlns:a="http://schemas.openxmlformats.org/drawingml/2006/main">
+              <a:ext uri="{FF2B5EF4-FFF2-40B4-BE49-F238E27FC236}">
+                <a16:creationId xmlns:a16="http://schemas.microsoft.com/office/drawing/2014/main" id="{7AB4AA21-0419-4842-8766-E27D8AD17E14}"/>
               </a:ext>
             </a:extLst>
           </p:cNvPr>
@@ -7393,10 +7143,10 @@
       </p:sp>
       <p:sp>
         <p:nvSpPr>
-          <p:cNvPr id="11" name="">
-            <a:extLst xmlns:a="http://schemas.openxmlformats.org/drawingml/2006/main">
-              <a:ext uri="{FF2B5EF4-FFF2-40B4-BE49-F238E27FC236}">
-                <a16:creationId xmlns:a16="http://schemas.microsoft.com/office/drawing/2014/main" id="{60A7E4B1-BAED-4AB2-93D9-A83E53FA1DBB}"/>
+          <p:cNvPr id="10" name="">
+            <a:extLst xmlns:a="http://schemas.openxmlformats.org/drawingml/2006/main">
+              <a:ext uri="{FF2B5EF4-FFF2-40B4-BE49-F238E27FC236}">
+                <a16:creationId xmlns:a16="http://schemas.microsoft.com/office/drawing/2014/main" id="{A7C848CE-1E9A-4A6A-9B99-3D60EAB51A23}"/>
               </a:ext>
             </a:extLst>
           </p:cNvPr>
@@ -7428,10 +7178,10 @@
       </p:sp>
       <p:sp>
         <p:nvSpPr>
-          <p:cNvPr id="12" name="">
-            <a:extLst xmlns:a="http://schemas.openxmlformats.org/drawingml/2006/main">
-              <a:ext uri="{FF2B5EF4-FFF2-40B4-BE49-F238E27FC236}">
-                <a16:creationId xmlns:a16="http://schemas.microsoft.com/office/drawing/2014/main" id="{ED0BFD13-958D-4820-BCC9-521F9CA49D12}"/>
+          <p:cNvPr id="11" name="">
+            <a:extLst xmlns:a="http://schemas.openxmlformats.org/drawingml/2006/main">
+              <a:ext uri="{FF2B5EF4-FFF2-40B4-BE49-F238E27FC236}">
+                <a16:creationId xmlns:a16="http://schemas.microsoft.com/office/drawing/2014/main" id="{CC75C8AA-18DA-44D4-813D-93C02E21C969}"/>
               </a:ext>
             </a:extLst>
           </p:cNvPr>
@@ -7478,10 +7228,10 @@
       </p:sp>
       <p:sp>
         <p:nvSpPr>
-          <p:cNvPr id="13" name="">
-            <a:extLst xmlns:a="http://schemas.openxmlformats.org/drawingml/2006/main">
-              <a:ext uri="{FF2B5EF4-FFF2-40B4-BE49-F238E27FC236}">
-                <a16:creationId xmlns:a16="http://schemas.microsoft.com/office/drawing/2014/main" id="{8D02A9B0-4029-490B-8121-B5F00BD218A2}"/>
+          <p:cNvPr id="12" name="">
+            <a:extLst xmlns:a="http://schemas.openxmlformats.org/drawingml/2006/main">
+              <a:ext uri="{FF2B5EF4-FFF2-40B4-BE49-F238E27FC236}">
+                <a16:creationId xmlns:a16="http://schemas.microsoft.com/office/drawing/2014/main" id="{4BD66431-B319-4F41-8119-9420060A4EF9}"/>
               </a:ext>
             </a:extLst>
           </p:cNvPr>
@@ -7528,10 +7278,10 @@
       </p:sp>
       <p:sp>
         <p:nvSpPr>
-          <p:cNvPr id="14" name="">
-            <a:extLst xmlns:a="http://schemas.openxmlformats.org/drawingml/2006/main">
-              <a:ext uri="{FF2B5EF4-FFF2-40B4-BE49-F238E27FC236}">
-                <a16:creationId xmlns:a16="http://schemas.microsoft.com/office/drawing/2014/main" id="{789695FE-D7BA-4C81-BEF0-6730140771C6}"/>
+          <p:cNvPr id="13" name="">
+            <a:extLst xmlns:a="http://schemas.openxmlformats.org/drawingml/2006/main">
+              <a:ext uri="{FF2B5EF4-FFF2-40B4-BE49-F238E27FC236}">
+                <a16:creationId xmlns:a16="http://schemas.microsoft.com/office/drawing/2014/main" id="{31803A31-A8D6-4099-B2FC-E278AE6C914A}"/>
               </a:ext>
             </a:extLst>
           </p:cNvPr>
@@ -7578,10 +7328,10 @@
       </p:sp>
       <p:sp>
         <p:nvSpPr>
-          <p:cNvPr id="15" name="">
-            <a:extLst xmlns:a="http://schemas.openxmlformats.org/drawingml/2006/main">
-              <a:ext uri="{FF2B5EF4-FFF2-40B4-BE49-F238E27FC236}">
-                <a16:creationId xmlns:a16="http://schemas.microsoft.com/office/drawing/2014/main" id="{E0AE5541-5FEF-42C3-AEE0-81C78E7CA77A}"/>
+          <p:cNvPr id="14" name="">
+            <a:extLst xmlns:a="http://schemas.openxmlformats.org/drawingml/2006/main">
+              <a:ext uri="{FF2B5EF4-FFF2-40B4-BE49-F238E27FC236}">
+                <a16:creationId xmlns:a16="http://schemas.microsoft.com/office/drawing/2014/main" id="{7FDC3465-569F-424F-B923-54AF1AFC0087}"/>
               </a:ext>
             </a:extLst>
           </p:cNvPr>
@@ -7613,10 +7363,10 @@
       </p:sp>
       <p:sp>
         <p:nvSpPr>
-          <p:cNvPr id="16" name="">
-            <a:extLst xmlns:a="http://schemas.openxmlformats.org/drawingml/2006/main">
-              <a:ext uri="{FF2B5EF4-FFF2-40B4-BE49-F238E27FC236}">
-                <a16:creationId xmlns:a16="http://schemas.microsoft.com/office/drawing/2014/main" id="{B84C300D-A71A-49E3-A3E0-87F08366D5C5}"/>
+          <p:cNvPr id="15" name="">
+            <a:extLst xmlns:a="http://schemas.openxmlformats.org/drawingml/2006/main">
+              <a:ext uri="{FF2B5EF4-FFF2-40B4-BE49-F238E27FC236}">
+                <a16:creationId xmlns:a16="http://schemas.microsoft.com/office/drawing/2014/main" id="{DDB617FF-8E1D-4B8E-B4F2-D602B55D4DD0}"/>
               </a:ext>
             </a:extLst>
           </p:cNvPr>
@@ -7663,10 +7413,10 @@
       </p:sp>
       <p:sp>
         <p:nvSpPr>
-          <p:cNvPr id="17" name="">
-            <a:extLst xmlns:a="http://schemas.openxmlformats.org/drawingml/2006/main">
-              <a:ext uri="{FF2B5EF4-FFF2-40B4-BE49-F238E27FC236}">
-                <a16:creationId xmlns:a16="http://schemas.microsoft.com/office/drawing/2014/main" id="{83CE3D5A-5F0F-4B51-ABF0-D9A58B670054}"/>
+          <p:cNvPr id="16" name="">
+            <a:extLst xmlns:a="http://schemas.openxmlformats.org/drawingml/2006/main">
+              <a:ext uri="{FF2B5EF4-FFF2-40B4-BE49-F238E27FC236}">
+                <a16:creationId xmlns:a16="http://schemas.microsoft.com/office/drawing/2014/main" id="{61B3C7A2-817F-4A16-AB29-8D577AE9BA5E}"/>
               </a:ext>
             </a:extLst>
           </p:cNvPr>
@@ -7713,10 +7463,10 @@
       </p:sp>
       <p:sp>
         <p:nvSpPr>
-          <p:cNvPr id="18" name="">
-            <a:extLst xmlns:a="http://schemas.openxmlformats.org/drawingml/2006/main">
-              <a:ext uri="{FF2B5EF4-FFF2-40B4-BE49-F238E27FC236}">
-                <a16:creationId xmlns:a16="http://schemas.microsoft.com/office/drawing/2014/main" id="{8F1EA5A9-5C5F-4BFD-B316-C299C35C2092}"/>
+          <p:cNvPr id="17" name="">
+            <a:extLst xmlns:a="http://schemas.openxmlformats.org/drawingml/2006/main">
+              <a:ext uri="{FF2B5EF4-FFF2-40B4-BE49-F238E27FC236}">
+                <a16:creationId xmlns:a16="http://schemas.microsoft.com/office/drawing/2014/main" id="{E4C185C8-2F5F-491C-AB1B-E2DA9E8B070D}"/>
               </a:ext>
             </a:extLst>
           </p:cNvPr>
@@ -7763,10 +7513,10 @@
       </p:sp>
       <p:sp>
         <p:nvSpPr>
-          <p:cNvPr id="19" name="">
-            <a:extLst xmlns:a="http://schemas.openxmlformats.org/drawingml/2006/main">
-              <a:ext uri="{FF2B5EF4-FFF2-40B4-BE49-F238E27FC236}">
-                <a16:creationId xmlns:a16="http://schemas.microsoft.com/office/drawing/2014/main" id="{1235A257-CDA9-4E61-9413-F4F14D9D4925}"/>
+          <p:cNvPr id="18" name="">
+            <a:extLst xmlns:a="http://schemas.openxmlformats.org/drawingml/2006/main">
+              <a:ext uri="{FF2B5EF4-FFF2-40B4-BE49-F238E27FC236}">
+                <a16:creationId xmlns:a16="http://schemas.microsoft.com/office/drawing/2014/main" id="{4DD949C0-F632-4255-9D98-7D76790BE469}"/>
               </a:ext>
             </a:extLst>
           </p:cNvPr>
@@ -7798,10 +7548,10 @@
       </p:sp>
       <p:sp>
         <p:nvSpPr>
-          <p:cNvPr id="20" name="">
-            <a:extLst xmlns:a="http://schemas.openxmlformats.org/drawingml/2006/main">
-              <a:ext uri="{FF2B5EF4-FFF2-40B4-BE49-F238E27FC236}">
-                <a16:creationId xmlns:a16="http://schemas.microsoft.com/office/drawing/2014/main" id="{C27C06DD-0107-4FA8-9F63-2100E43F23A9}"/>
+          <p:cNvPr id="19" name="">
+            <a:extLst xmlns:a="http://schemas.openxmlformats.org/drawingml/2006/main">
+              <a:ext uri="{FF2B5EF4-FFF2-40B4-BE49-F238E27FC236}">
+                <a16:creationId xmlns:a16="http://schemas.microsoft.com/office/drawing/2014/main" id="{D441FA28-AA1B-4049-B84F-C8C8165AF7A7}"/>
               </a:ext>
             </a:extLst>
           </p:cNvPr>
@@ -7848,10 +7598,10 @@
       </p:sp>
       <p:sp>
         <p:nvSpPr>
-          <p:cNvPr id="21" name="">
-            <a:extLst xmlns:a="http://schemas.openxmlformats.org/drawingml/2006/main">
-              <a:ext uri="{FF2B5EF4-FFF2-40B4-BE49-F238E27FC236}">
-                <a16:creationId xmlns:a16="http://schemas.microsoft.com/office/drawing/2014/main" id="{24783EF7-3AC5-4307-ACEE-9A45575A281D}"/>
+          <p:cNvPr id="20" name="">
+            <a:extLst xmlns:a="http://schemas.openxmlformats.org/drawingml/2006/main">
+              <a:ext uri="{FF2B5EF4-FFF2-40B4-BE49-F238E27FC236}">
+                <a16:creationId xmlns:a16="http://schemas.microsoft.com/office/drawing/2014/main" id="{A489B1FC-A700-4BEB-94A5-23B8E4546DA0}"/>
               </a:ext>
             </a:extLst>
           </p:cNvPr>
@@ -7898,10 +7648,10 @@
       </p:sp>
       <p:sp>
         <p:nvSpPr>
-          <p:cNvPr id="22" name="">
-            <a:extLst xmlns:a="http://schemas.openxmlformats.org/drawingml/2006/main">
-              <a:ext uri="{FF2B5EF4-FFF2-40B4-BE49-F238E27FC236}">
-                <a16:creationId xmlns:a16="http://schemas.microsoft.com/office/drawing/2014/main" id="{25DC5CAB-F0FD-4671-99E9-8A9CB91F18CB}"/>
+          <p:cNvPr id="21" name="">
+            <a:extLst xmlns:a="http://schemas.openxmlformats.org/drawingml/2006/main">
+              <a:ext uri="{FF2B5EF4-FFF2-40B4-BE49-F238E27FC236}">
+                <a16:creationId xmlns:a16="http://schemas.microsoft.com/office/drawing/2014/main" id="{FB58A9D6-0179-47A8-8E33-B7AA11D9D01F}"/>
               </a:ext>
             </a:extLst>
           </p:cNvPr>
@@ -7948,10 +7698,10 @@
       </p:sp>
       <p:sp>
         <p:nvSpPr>
-          <p:cNvPr id="23" name="">
-            <a:extLst xmlns:a="http://schemas.openxmlformats.org/drawingml/2006/main">
-              <a:ext uri="{FF2B5EF4-FFF2-40B4-BE49-F238E27FC236}">
-                <a16:creationId xmlns:a16="http://schemas.microsoft.com/office/drawing/2014/main" id="{8F4016FB-E216-4124-99C9-8A4D0E2FC2B8}"/>
+          <p:cNvPr id="22" name="">
+            <a:extLst xmlns:a="http://schemas.openxmlformats.org/drawingml/2006/main">
+              <a:ext uri="{FF2B5EF4-FFF2-40B4-BE49-F238E27FC236}">
+                <a16:creationId xmlns:a16="http://schemas.microsoft.com/office/drawing/2014/main" id="{F33942F5-6B23-42E6-A91D-CD49FBC556CA}"/>
               </a:ext>
             </a:extLst>
           </p:cNvPr>
@@ -7983,10 +7733,10 @@
       </p:sp>
       <p:sp>
         <p:nvSpPr>
-          <p:cNvPr id="24" name="">
-            <a:extLst xmlns:a="http://schemas.openxmlformats.org/drawingml/2006/main">
-              <a:ext uri="{FF2B5EF4-FFF2-40B4-BE49-F238E27FC236}">
-                <a16:creationId xmlns:a16="http://schemas.microsoft.com/office/drawing/2014/main" id="{F74F5793-6534-4EF2-ABFD-0E7E0F13305D}"/>
+          <p:cNvPr id="23" name="">
+            <a:extLst xmlns:a="http://schemas.openxmlformats.org/drawingml/2006/main">
+              <a:ext uri="{FF2B5EF4-FFF2-40B4-BE49-F238E27FC236}">
+                <a16:creationId xmlns:a16="http://schemas.microsoft.com/office/drawing/2014/main" id="{65B62549-75BC-4C15-BF25-D7C95BCF0040}"/>
               </a:ext>
             </a:extLst>
           </p:cNvPr>
@@ -8033,10 +7783,10 @@
       </p:sp>
       <p:sp>
         <p:nvSpPr>
-          <p:cNvPr id="25" name="">
-            <a:extLst xmlns:a="http://schemas.openxmlformats.org/drawingml/2006/main">
-              <a:ext uri="{FF2B5EF4-FFF2-40B4-BE49-F238E27FC236}">
-                <a16:creationId xmlns:a16="http://schemas.microsoft.com/office/drawing/2014/main" id="{0547B980-A3CD-4060-8FEF-9AFDCE73CFCE}"/>
+          <p:cNvPr id="24" name="">
+            <a:extLst xmlns:a="http://schemas.openxmlformats.org/drawingml/2006/main">
+              <a:ext uri="{FF2B5EF4-FFF2-40B4-BE49-F238E27FC236}">
+                <a16:creationId xmlns:a16="http://schemas.microsoft.com/office/drawing/2014/main" id="{F2F0EC97-D107-4D57-9B1C-8C5893745B93}"/>
               </a:ext>
             </a:extLst>
           </p:cNvPr>
@@ -8083,10 +7833,10 @@
       </p:sp>
       <p:sp>
         <p:nvSpPr>
-          <p:cNvPr id="26" name="">
-            <a:extLst xmlns:a="http://schemas.openxmlformats.org/drawingml/2006/main">
-              <a:ext uri="{FF2B5EF4-FFF2-40B4-BE49-F238E27FC236}">
-                <a16:creationId xmlns:a16="http://schemas.microsoft.com/office/drawing/2014/main" id="{A65E647C-ABA0-4EF5-9043-BEE33B0D1A76}"/>
+          <p:cNvPr id="25" name="">
+            <a:extLst xmlns:a="http://schemas.openxmlformats.org/drawingml/2006/main">
+              <a:ext uri="{FF2B5EF4-FFF2-40B4-BE49-F238E27FC236}">
+                <a16:creationId xmlns:a16="http://schemas.microsoft.com/office/drawing/2014/main" id="{7CBF511A-9AAF-4AC8-801E-9A6110EB9EAF}"/>
               </a:ext>
             </a:extLst>
           </p:cNvPr>
@@ -8133,10 +7883,10 @@
       </p:sp>
       <p:sp>
         <p:nvSpPr>
-          <p:cNvPr id="27" name="">
-            <a:extLst xmlns:a="http://schemas.openxmlformats.org/drawingml/2006/main">
-              <a:ext uri="{FF2B5EF4-FFF2-40B4-BE49-F238E27FC236}">
-                <a16:creationId xmlns:a16="http://schemas.microsoft.com/office/drawing/2014/main" id="{4946330F-4B6A-4435-B5D3-8D4B133EFE4E}"/>
+          <p:cNvPr id="26" name="">
+            <a:extLst xmlns:a="http://schemas.openxmlformats.org/drawingml/2006/main">
+              <a:ext uri="{FF2B5EF4-FFF2-40B4-BE49-F238E27FC236}">
+                <a16:creationId xmlns:a16="http://schemas.microsoft.com/office/drawing/2014/main" id="{A8FC330B-6BA0-44F7-9C69-F419628C4A43}"/>
               </a:ext>
             </a:extLst>
           </p:cNvPr>
@@ -8168,10 +7918,10 @@
       </p:sp>
       <p:sp>
         <p:nvSpPr>
-          <p:cNvPr id="28" name="">
-            <a:extLst xmlns:a="http://schemas.openxmlformats.org/drawingml/2006/main">
-              <a:ext uri="{FF2B5EF4-FFF2-40B4-BE49-F238E27FC236}">
-                <a16:creationId xmlns:a16="http://schemas.microsoft.com/office/drawing/2014/main" id="{69794D7F-3296-4A46-8098-C2051D62FA04}"/>
+          <p:cNvPr id="27" name="">
+            <a:extLst xmlns:a="http://schemas.openxmlformats.org/drawingml/2006/main">
+              <a:ext uri="{FF2B5EF4-FFF2-40B4-BE49-F238E27FC236}">
+                <a16:creationId xmlns:a16="http://schemas.microsoft.com/office/drawing/2014/main" id="{B2CCD1B9-A55E-44E6-A6A0-9E3A0B18AD94}"/>
               </a:ext>
             </a:extLst>
           </p:cNvPr>
@@ -8218,10 +7968,10 @@
       </p:sp>
       <p:sp>
         <p:nvSpPr>
-          <p:cNvPr id="29" name="">
-            <a:extLst xmlns:a="http://schemas.openxmlformats.org/drawingml/2006/main">
-              <a:ext uri="{FF2B5EF4-FFF2-40B4-BE49-F238E27FC236}">
-                <a16:creationId xmlns:a16="http://schemas.microsoft.com/office/drawing/2014/main" id="{1CB16FD2-F97F-4471-8643-C564C2E50094}"/>
+          <p:cNvPr id="28" name="">
+            <a:extLst xmlns:a="http://schemas.openxmlformats.org/drawingml/2006/main">
+              <a:ext uri="{FF2B5EF4-FFF2-40B4-BE49-F238E27FC236}">
+                <a16:creationId xmlns:a16="http://schemas.microsoft.com/office/drawing/2014/main" id="{70F88E16-207D-4EAC-A520-1F443A82C2CE}"/>
               </a:ext>
             </a:extLst>
           </p:cNvPr>
@@ -8268,10 +8018,10 @@
       </p:sp>
       <p:sp>
         <p:nvSpPr>
-          <p:cNvPr id="30" name="">
-            <a:extLst xmlns:a="http://schemas.openxmlformats.org/drawingml/2006/main">
-              <a:ext uri="{FF2B5EF4-FFF2-40B4-BE49-F238E27FC236}">
-                <a16:creationId xmlns:a16="http://schemas.microsoft.com/office/drawing/2014/main" id="{A8BC76AA-1DCD-48B6-923E-B923645A7347}"/>
+          <p:cNvPr id="29" name="">
+            <a:extLst xmlns:a="http://schemas.openxmlformats.org/drawingml/2006/main">
+              <a:ext uri="{FF2B5EF4-FFF2-40B4-BE49-F238E27FC236}">
+                <a16:creationId xmlns:a16="http://schemas.microsoft.com/office/drawing/2014/main" id="{D53D96D6-B38E-4FEF-98A8-7F7C29C92804}"/>
               </a:ext>
             </a:extLst>
           </p:cNvPr>
@@ -8318,10 +8068,10 @@
       </p:sp>
       <p:sp>
         <p:nvSpPr>
-          <p:cNvPr id="31" name="">
-            <a:extLst xmlns:a="http://schemas.openxmlformats.org/drawingml/2006/main">
-              <a:ext uri="{FF2B5EF4-FFF2-40B4-BE49-F238E27FC236}">
-                <a16:creationId xmlns:a16="http://schemas.microsoft.com/office/drawing/2014/main" id="{BFCAC39C-E2EA-471C-B20B-F73C004D2A30}"/>
+          <p:cNvPr id="30" name="">
+            <a:extLst xmlns:a="http://schemas.openxmlformats.org/drawingml/2006/main">
+              <a:ext uri="{FF2B5EF4-FFF2-40B4-BE49-F238E27FC236}">
+                <a16:creationId xmlns:a16="http://schemas.microsoft.com/office/drawing/2014/main" id="{6B4A3305-6598-480F-96DB-5D2A103DC025}"/>
               </a:ext>
             </a:extLst>
           </p:cNvPr>
@@ -8369,7 +8119,7 @@
     </p:spTree>
     <p:extLst>
       <p:ext uri="{BB962C8B-B14F-4D97-AF65-F5344CB8AC3E}">
-        <p14:creationId xmlns:p14="http://schemas.microsoft.com/office/powerpoint/2010/main" val="1889961079"/>
+        <p14:creationId xmlns:p14="http://schemas.microsoft.com/office/powerpoint/2010/main" val="1492209285"/>
       </p:ext>
     </p:extLst>
   </p:cSld>
@@ -8397,10 +8147,10 @@
       </p:grpSpPr>
       <p:sp>
         <p:nvSpPr>
-          <p:cNvPr id="20" name="">
-            <a:extLst xmlns:a="http://schemas.openxmlformats.org/drawingml/2006/main">
-              <a:ext uri="{FF2B5EF4-FFF2-40B4-BE49-F238E27FC236}">
-                <a16:creationId xmlns:a16="http://schemas.microsoft.com/office/drawing/2014/main" id="{EB8A2A58-B6A3-4F12-AA26-64E9AC218248}"/>
+          <p:cNvPr id="19" name="">
+            <a:extLst xmlns:a="http://schemas.openxmlformats.org/drawingml/2006/main">
+              <a:ext uri="{FF2B5EF4-FFF2-40B4-BE49-F238E27FC236}">
+                <a16:creationId xmlns:a16="http://schemas.microsoft.com/office/drawing/2014/main" id="{41D44F0B-0225-4CE0-BC74-40A43F1BBB11}"/>
               </a:ext>
             </a:extLst>
           </p:cNvPr>
@@ -8450,7 +8200,7 @@
           <p:cNvPr id="2" name="">
             <a:extLst xmlns:a="http://schemas.openxmlformats.org/drawingml/2006/main">
               <a:ext uri="{FF2B5EF4-FFF2-40B4-BE49-F238E27FC236}">
-                <a16:creationId xmlns:a16="http://schemas.microsoft.com/office/drawing/2014/main" id="{4AB2CC83-D8B7-4573-9B4F-A3C493E44258}"/>
+                <a16:creationId xmlns:a16="http://schemas.microsoft.com/office/drawing/2014/main" id="{B5CB3EBC-E827-46CF-8CE3-554DC9E7216F}"/>
               </a:ext>
             </a:extLst>
           </p:cNvPr>
@@ -8481,69 +8231,19 @@
           <p:cNvPr id="3" name="">
             <a:extLst xmlns:a="http://schemas.openxmlformats.org/drawingml/2006/main">
               <a:ext uri="{FF2B5EF4-FFF2-40B4-BE49-F238E27FC236}">
-                <a16:creationId xmlns:a16="http://schemas.microsoft.com/office/drawing/2014/main" id="{DDD4AFE7-1416-428D-A28B-80E1A23F542E}"/>
-              </a:ext>
-            </a:extLst>
-          </p:cNvPr>
-          <p:cNvSpPr>
-            <a:spLocks xmlns:a="http://schemas.openxmlformats.org/drawingml/2006/main" noGrp="1"/>
-          </p:cNvSpPr>
-          <p:nvPr/>
-        </p:nvSpPr>
-        <p:spPr>
-          <a:xfrm xmlns:a="http://schemas.openxmlformats.org/drawingml/2006/main">
-            <a:off x="609600" y="800100"/>
-            <a:ext cx="3429000" cy="228600"/>
-          </a:xfrm>
-          <a:prstGeom xmlns:a="http://schemas.openxmlformats.org/drawingml/2006/main" prst="rect">
-            <a:avLst/>
-          </a:prstGeom>
-          <a:noFill xmlns:a="http://schemas.openxmlformats.org/drawingml/2006/main"/>
-          <a:ln xmlns:a="http://schemas.openxmlformats.org/drawingml/2006/main" w="0">
-            <a:noFill/>
-            <a:prstDash val="solid"/>
-          </a:ln>
-        </p:spPr>
-        <p:txBody>
-          <a:bodyPr xmlns:a="http://schemas.openxmlformats.org/drawingml/2006/main"/>
-          <a:lstStyle xmlns:a="http://schemas.openxmlformats.org/drawingml/2006/main"/>
-          <a:p xmlns:a="http://schemas.openxmlformats.org/drawingml/2006/main">
-            <a:pPr algn="l">
-              <a:defRPr sz="975" b="1">
-                <a:solidFill>
-                  <a:srgbClr val="E63888"/>
-                </a:solidFill>
-              </a:defRPr>
-            </a:pPr>
-            <a:r>
-              <a:rPr sz="975" b="1">
-                <a:solidFill>
-                  <a:srgbClr val="E63888"/>
-                </a:solidFill>
-              </a:rPr>
-              <a:t>SKILLS WORTH BORROWING</a:t>
-            </a:r>
-          </a:p>
-        </p:txBody>
-      </p:sp>
-      <p:sp>
-        <p:nvSpPr>
-          <p:cNvPr id="4" name="">
-            <a:extLst xmlns:a="http://schemas.openxmlformats.org/drawingml/2006/main">
-              <a:ext uri="{FF2B5EF4-FFF2-40B4-BE49-F238E27FC236}">
-                <a16:creationId xmlns:a16="http://schemas.microsoft.com/office/drawing/2014/main" id="{487715B3-90B8-4152-9E77-7F8FB3375A0E}"/>
-              </a:ext>
-            </a:extLst>
-          </p:cNvPr>
-          <p:cNvSpPr>
-            <a:spLocks xmlns:a="http://schemas.openxmlformats.org/drawingml/2006/main" noGrp="1"/>
-          </p:cNvSpPr>
-          <p:nvPr/>
-        </p:nvSpPr>
-        <p:spPr>
-          <a:xfrm xmlns:a="http://schemas.openxmlformats.org/drawingml/2006/main">
-            <a:off x="609600" y="1066800"/>
-            <a:ext cx="10668000" cy="647700"/>
+                <a16:creationId xmlns:a16="http://schemas.microsoft.com/office/drawing/2014/main" id="{9FA148C6-7948-43C3-A2D1-A505C408A1E9}"/>
+              </a:ext>
+            </a:extLst>
+          </p:cNvPr>
+          <p:cNvSpPr>
+            <a:spLocks xmlns:a="http://schemas.openxmlformats.org/drawingml/2006/main" noGrp="1"/>
+          </p:cNvSpPr>
+          <p:nvPr/>
+        </p:nvSpPr>
+        <p:spPr>
+          <a:xfrm xmlns:a="http://schemas.openxmlformats.org/drawingml/2006/main">
+            <a:off x="609600" y="838200"/>
+            <a:ext cx="10668000" cy="704850"/>
           </a:xfrm>
           <a:prstGeom xmlns:a="http://schemas.openxmlformats.org/drawingml/2006/main" prst="rect">
             <a:avLst/>
@@ -8578,10 +8278,10 @@
       </p:sp>
       <p:sp>
         <p:nvSpPr>
-          <p:cNvPr id="5" name="">
-            <a:extLst xmlns:a="http://schemas.openxmlformats.org/drawingml/2006/main">
-              <a:ext uri="{FF2B5EF4-FFF2-40B4-BE49-F238E27FC236}">
-                <a16:creationId xmlns:a16="http://schemas.microsoft.com/office/drawing/2014/main" id="{018DB9E5-A3D3-44C1-AB44-F3F798CAF21B}"/>
+          <p:cNvPr id="4" name="">
+            <a:extLst xmlns:a="http://schemas.openxmlformats.org/drawingml/2006/main">
+              <a:ext uri="{FF2B5EF4-FFF2-40B4-BE49-F238E27FC236}">
+                <a16:creationId xmlns:a16="http://schemas.microsoft.com/office/drawing/2014/main" id="{A02002F8-2AD8-416D-8147-8D29546C656C}"/>
               </a:ext>
             </a:extLst>
           </p:cNvPr>
@@ -8628,10 +8328,10 @@
       </p:sp>
       <p:sp>
         <p:nvSpPr>
-          <p:cNvPr id="6" name="">
-            <a:extLst xmlns:a="http://schemas.openxmlformats.org/drawingml/2006/main">
-              <a:ext uri="{FF2B5EF4-FFF2-40B4-BE49-F238E27FC236}">
-                <a16:creationId xmlns:a16="http://schemas.microsoft.com/office/drawing/2014/main" id="{B0DF224A-D629-4597-BBE6-D06C30BDF884}"/>
+          <p:cNvPr id="5" name="">
+            <a:extLst xmlns:a="http://schemas.openxmlformats.org/drawingml/2006/main">
+              <a:ext uri="{FF2B5EF4-FFF2-40B4-BE49-F238E27FC236}">
+                <a16:creationId xmlns:a16="http://schemas.microsoft.com/office/drawing/2014/main" id="{A1BED357-0B15-4963-A0E3-794FF9B36A23}"/>
               </a:ext>
             </a:extLst>
           </p:cNvPr>
@@ -8678,10 +8378,10 @@
       </p:sp>
       <p:sp>
         <p:nvSpPr>
-          <p:cNvPr id="7" name="">
-            <a:extLst xmlns:a="http://schemas.openxmlformats.org/drawingml/2006/main">
-              <a:ext uri="{FF2B5EF4-FFF2-40B4-BE49-F238E27FC236}">
-                <a16:creationId xmlns:a16="http://schemas.microsoft.com/office/drawing/2014/main" id="{94D01B1A-7792-4694-8887-0E789A19DA60}"/>
+          <p:cNvPr id="6" name="">
+            <a:extLst xmlns:a="http://schemas.openxmlformats.org/drawingml/2006/main">
+              <a:ext uri="{FF2B5EF4-FFF2-40B4-BE49-F238E27FC236}">
+                <a16:creationId xmlns:a16="http://schemas.microsoft.com/office/drawing/2014/main" id="{715BD202-D2FB-45C0-87AD-D29F4F0AF4E6}"/>
               </a:ext>
             </a:extLst>
           </p:cNvPr>
@@ -8713,10 +8413,10 @@
       </p:sp>
       <p:sp>
         <p:nvSpPr>
-          <p:cNvPr id="8" name="">
-            <a:extLst xmlns:a="http://schemas.openxmlformats.org/drawingml/2006/main">
-              <a:ext uri="{FF2B5EF4-FFF2-40B4-BE49-F238E27FC236}">
-                <a16:creationId xmlns:a16="http://schemas.microsoft.com/office/drawing/2014/main" id="{0884BA27-496D-46C1-A1B6-CD12DC5C545F}"/>
+          <p:cNvPr id="7" name="">
+            <a:extLst xmlns:a="http://schemas.openxmlformats.org/drawingml/2006/main">
+              <a:ext uri="{FF2B5EF4-FFF2-40B4-BE49-F238E27FC236}">
+                <a16:creationId xmlns:a16="http://schemas.microsoft.com/office/drawing/2014/main" id="{291A2EE8-720C-4F40-888B-1BC45F1BCACA}"/>
               </a:ext>
             </a:extLst>
           </p:cNvPr>
@@ -8763,10 +8463,10 @@
       </p:sp>
       <p:sp>
         <p:nvSpPr>
-          <p:cNvPr id="9" name="">
-            <a:extLst xmlns:a="http://schemas.openxmlformats.org/drawingml/2006/main">
-              <a:ext uri="{FF2B5EF4-FFF2-40B4-BE49-F238E27FC236}">
-                <a16:creationId xmlns:a16="http://schemas.microsoft.com/office/drawing/2014/main" id="{0739DFBA-0055-4104-A65C-7F2BCEE4B7DC}"/>
+          <p:cNvPr id="8" name="">
+            <a:extLst xmlns:a="http://schemas.openxmlformats.org/drawingml/2006/main">
+              <a:ext uri="{FF2B5EF4-FFF2-40B4-BE49-F238E27FC236}">
+                <a16:creationId xmlns:a16="http://schemas.microsoft.com/office/drawing/2014/main" id="{E1AA2032-8738-47AB-AB7B-27E0A8D5EBC7}"/>
               </a:ext>
             </a:extLst>
           </p:cNvPr>
@@ -8813,10 +8513,10 @@
       </p:sp>
       <p:sp>
         <p:nvSpPr>
-          <p:cNvPr id="10" name="">
-            <a:extLst xmlns:a="http://schemas.openxmlformats.org/drawingml/2006/main">
-              <a:ext uri="{FF2B5EF4-FFF2-40B4-BE49-F238E27FC236}">
-                <a16:creationId xmlns:a16="http://schemas.microsoft.com/office/drawing/2014/main" id="{68096FCD-6937-4F96-B405-7A231801E268}"/>
+          <p:cNvPr id="9" name="">
+            <a:extLst xmlns:a="http://schemas.openxmlformats.org/drawingml/2006/main">
+              <a:ext uri="{FF2B5EF4-FFF2-40B4-BE49-F238E27FC236}">
+                <a16:creationId xmlns:a16="http://schemas.microsoft.com/office/drawing/2014/main" id="{870F07D3-0856-4561-B9D9-EBD013AE3FB4}"/>
               </a:ext>
             </a:extLst>
           </p:cNvPr>
@@ -8863,10 +8563,10 @@
       </p:sp>
       <p:sp>
         <p:nvSpPr>
-          <p:cNvPr id="11" name="">
-            <a:extLst xmlns:a="http://schemas.openxmlformats.org/drawingml/2006/main">
-              <a:ext uri="{FF2B5EF4-FFF2-40B4-BE49-F238E27FC236}">
-                <a16:creationId xmlns:a16="http://schemas.microsoft.com/office/drawing/2014/main" id="{D35C6C6A-0318-417A-8E11-52B33CCDFC4E}"/>
+          <p:cNvPr id="10" name="">
+            <a:extLst xmlns:a="http://schemas.openxmlformats.org/drawingml/2006/main">
+              <a:ext uri="{FF2B5EF4-FFF2-40B4-BE49-F238E27FC236}">
+                <a16:creationId xmlns:a16="http://schemas.microsoft.com/office/drawing/2014/main" id="{84474EF7-84E9-4861-BD5F-1C0F471FCFBA}"/>
               </a:ext>
             </a:extLst>
           </p:cNvPr>
@@ -8898,10 +8598,10 @@
       </p:sp>
       <p:sp>
         <p:nvSpPr>
-          <p:cNvPr id="12" name="">
-            <a:extLst xmlns:a="http://schemas.openxmlformats.org/drawingml/2006/main">
-              <a:ext uri="{FF2B5EF4-FFF2-40B4-BE49-F238E27FC236}">
-                <a16:creationId xmlns:a16="http://schemas.microsoft.com/office/drawing/2014/main" id="{3857B650-BEA1-4A1C-95BC-60B712E302FD}"/>
+          <p:cNvPr id="11" name="">
+            <a:extLst xmlns:a="http://schemas.openxmlformats.org/drawingml/2006/main">
+              <a:ext uri="{FF2B5EF4-FFF2-40B4-BE49-F238E27FC236}">
+                <a16:creationId xmlns:a16="http://schemas.microsoft.com/office/drawing/2014/main" id="{7454963B-2223-44F1-A1AF-FBFB8934136A}"/>
               </a:ext>
             </a:extLst>
           </p:cNvPr>
@@ -8948,10 +8648,10 @@
       </p:sp>
       <p:sp>
         <p:nvSpPr>
-          <p:cNvPr id="13" name="">
-            <a:extLst xmlns:a="http://schemas.openxmlformats.org/drawingml/2006/main">
-              <a:ext uri="{FF2B5EF4-FFF2-40B4-BE49-F238E27FC236}">
-                <a16:creationId xmlns:a16="http://schemas.microsoft.com/office/drawing/2014/main" id="{45E34335-083A-47EB-99CD-2685E6045F28}"/>
+          <p:cNvPr id="12" name="">
+            <a:extLst xmlns:a="http://schemas.openxmlformats.org/drawingml/2006/main">
+              <a:ext uri="{FF2B5EF4-FFF2-40B4-BE49-F238E27FC236}">
+                <a16:creationId xmlns:a16="http://schemas.microsoft.com/office/drawing/2014/main" id="{9B274034-6686-4324-B81B-D91928A1BB5F}"/>
               </a:ext>
             </a:extLst>
           </p:cNvPr>
@@ -8998,10 +8698,10 @@
       </p:sp>
       <p:sp>
         <p:nvSpPr>
-          <p:cNvPr id="14" name="">
-            <a:extLst xmlns:a="http://schemas.openxmlformats.org/drawingml/2006/main">
-              <a:ext uri="{FF2B5EF4-FFF2-40B4-BE49-F238E27FC236}">
-                <a16:creationId xmlns:a16="http://schemas.microsoft.com/office/drawing/2014/main" id="{2B2AA2D7-2FC3-44E9-960D-27948905C035}"/>
+          <p:cNvPr id="13" name="">
+            <a:extLst xmlns:a="http://schemas.openxmlformats.org/drawingml/2006/main">
+              <a:ext uri="{FF2B5EF4-FFF2-40B4-BE49-F238E27FC236}">
+                <a16:creationId xmlns:a16="http://schemas.microsoft.com/office/drawing/2014/main" id="{215F6E66-1181-4F26-9154-7C5AC1E5AEE2}"/>
               </a:ext>
             </a:extLst>
           </p:cNvPr>
@@ -9048,10 +8748,10 @@
       </p:sp>
       <p:sp>
         <p:nvSpPr>
-          <p:cNvPr id="15" name="">
-            <a:extLst xmlns:a="http://schemas.openxmlformats.org/drawingml/2006/main">
-              <a:ext uri="{FF2B5EF4-FFF2-40B4-BE49-F238E27FC236}">
-                <a16:creationId xmlns:a16="http://schemas.microsoft.com/office/drawing/2014/main" id="{024A8C95-599F-4B02-851B-AE4A141F673D}"/>
+          <p:cNvPr id="14" name="">
+            <a:extLst xmlns:a="http://schemas.openxmlformats.org/drawingml/2006/main">
+              <a:ext uri="{FF2B5EF4-FFF2-40B4-BE49-F238E27FC236}">
+                <a16:creationId xmlns:a16="http://schemas.microsoft.com/office/drawing/2014/main" id="{18539F22-85B9-4138-AF43-4F689C9A595A}"/>
               </a:ext>
             </a:extLst>
           </p:cNvPr>
@@ -9098,10 +8798,10 @@
       </p:sp>
       <p:sp>
         <p:nvSpPr>
-          <p:cNvPr id="16" name="">
-            <a:extLst xmlns:a="http://schemas.openxmlformats.org/drawingml/2006/main">
-              <a:ext uri="{FF2B5EF4-FFF2-40B4-BE49-F238E27FC236}">
-                <a16:creationId xmlns:a16="http://schemas.microsoft.com/office/drawing/2014/main" id="{CFB707F9-0F90-449E-94F3-5C0BA1DBFB86}"/>
+          <p:cNvPr id="15" name="">
+            <a:extLst xmlns:a="http://schemas.openxmlformats.org/drawingml/2006/main">
+              <a:ext uri="{FF2B5EF4-FFF2-40B4-BE49-F238E27FC236}">
+                <a16:creationId xmlns:a16="http://schemas.microsoft.com/office/drawing/2014/main" id="{AA996B37-03CE-4E59-B9C4-C4345064C014}"/>
               </a:ext>
             </a:extLst>
           </p:cNvPr>
@@ -9148,10 +8848,10 @@
       </p:sp>
       <p:sp>
         <p:nvSpPr>
-          <p:cNvPr id="17" name="">
-            <a:extLst xmlns:a="http://schemas.openxmlformats.org/drawingml/2006/main">
-              <a:ext uri="{FF2B5EF4-FFF2-40B4-BE49-F238E27FC236}">
-                <a16:creationId xmlns:a16="http://schemas.microsoft.com/office/drawing/2014/main" id="{1754B90F-4BE7-4939-8094-829144876FE6}"/>
+          <p:cNvPr id="16" name="">
+            <a:extLst xmlns:a="http://schemas.openxmlformats.org/drawingml/2006/main">
+              <a:ext uri="{FF2B5EF4-FFF2-40B4-BE49-F238E27FC236}">
+                <a16:creationId xmlns:a16="http://schemas.microsoft.com/office/drawing/2014/main" id="{8982B7FC-AC07-4071-A0E1-F30BBB561AB0}"/>
               </a:ext>
             </a:extLst>
           </p:cNvPr>
@@ -9181,10 +8881,10 @@
       </p:sp>
       <p:sp>
         <p:nvSpPr>
-          <p:cNvPr id="18" name="">
-            <a:extLst xmlns:a="http://schemas.openxmlformats.org/drawingml/2006/main">
-              <a:ext uri="{FF2B5EF4-FFF2-40B4-BE49-F238E27FC236}">
-                <a16:creationId xmlns:a16="http://schemas.microsoft.com/office/drawing/2014/main" id="{DCD43F44-6815-41A3-A6C0-E8F24340B311}"/>
+          <p:cNvPr id="17" name="">
+            <a:extLst xmlns:a="http://schemas.openxmlformats.org/drawingml/2006/main">
+              <a:ext uri="{FF2B5EF4-FFF2-40B4-BE49-F238E27FC236}">
+                <a16:creationId xmlns:a16="http://schemas.microsoft.com/office/drawing/2014/main" id="{F0D9AE8A-1D66-44E6-8523-C1A8E03A9AB9}"/>
               </a:ext>
             </a:extLst>
           </p:cNvPr>
@@ -9231,10 +8931,10 @@
       </p:sp>
       <p:sp>
         <p:nvSpPr>
-          <p:cNvPr id="19" name="">
-            <a:extLst xmlns:a="http://schemas.openxmlformats.org/drawingml/2006/main">
-              <a:ext uri="{FF2B5EF4-FFF2-40B4-BE49-F238E27FC236}">
-                <a16:creationId xmlns:a16="http://schemas.microsoft.com/office/drawing/2014/main" id="{3F376A8D-6C9D-48D5-AD83-43765EE80DB9}"/>
+          <p:cNvPr id="18" name="">
+            <a:extLst xmlns:a="http://schemas.openxmlformats.org/drawingml/2006/main">
+              <a:ext uri="{FF2B5EF4-FFF2-40B4-BE49-F238E27FC236}">
+                <a16:creationId xmlns:a16="http://schemas.microsoft.com/office/drawing/2014/main" id="{6D04F575-FF6C-4871-8245-0151B5B22D7D}"/>
               </a:ext>
             </a:extLst>
           </p:cNvPr>
@@ -9282,7 +8982,7 @@
     </p:spTree>
     <p:extLst>
       <p:ext uri="{BB962C8B-B14F-4D97-AF65-F5344CB8AC3E}">
-        <p14:creationId xmlns:p14="http://schemas.microsoft.com/office/powerpoint/2010/main" val="244947964"/>
+        <p14:creationId xmlns:p14="http://schemas.microsoft.com/office/powerpoint/2010/main" val="1366424623"/>
       </p:ext>
     </p:extLst>
   </p:cSld>
@@ -9310,10 +9010,10 @@
       </p:grpSpPr>
       <p:sp>
         <p:nvSpPr>
-          <p:cNvPr id="17" name="">
-            <a:extLst xmlns:a="http://schemas.openxmlformats.org/drawingml/2006/main">
-              <a:ext uri="{FF2B5EF4-FFF2-40B4-BE49-F238E27FC236}">
-                <a16:creationId xmlns:a16="http://schemas.microsoft.com/office/drawing/2014/main" id="{0B5D7B75-411C-4715-97C8-C93B2B50AB0D}"/>
+          <p:cNvPr id="16" name="">
+            <a:extLst xmlns:a="http://schemas.openxmlformats.org/drawingml/2006/main">
+              <a:ext uri="{FF2B5EF4-FFF2-40B4-BE49-F238E27FC236}">
+                <a16:creationId xmlns:a16="http://schemas.microsoft.com/office/drawing/2014/main" id="{C6F13A57-2433-4EFE-A6FA-22527AFE8BB3}"/>
               </a:ext>
             </a:extLst>
           </p:cNvPr>
@@ -9363,7 +9063,7 @@
           <p:cNvPr id="2" name="">
             <a:extLst xmlns:a="http://schemas.openxmlformats.org/drawingml/2006/main">
               <a:ext uri="{FF2B5EF4-FFF2-40B4-BE49-F238E27FC236}">
-                <a16:creationId xmlns:a16="http://schemas.microsoft.com/office/drawing/2014/main" id="{2ACE7B7E-AE14-4E45-90F4-F85643CEA5EF}"/>
+                <a16:creationId xmlns:a16="http://schemas.microsoft.com/office/drawing/2014/main" id="{3E2C083F-536E-4E28-9CE9-F737CB0AC5E2}"/>
               </a:ext>
             </a:extLst>
           </p:cNvPr>
@@ -9394,69 +9094,19 @@
           <p:cNvPr id="3" name="">
             <a:extLst xmlns:a="http://schemas.openxmlformats.org/drawingml/2006/main">
               <a:ext uri="{FF2B5EF4-FFF2-40B4-BE49-F238E27FC236}">
-                <a16:creationId xmlns:a16="http://schemas.microsoft.com/office/drawing/2014/main" id="{307FD725-8BFA-46CB-ADB7-7DF7E985C4D7}"/>
-              </a:ext>
-            </a:extLst>
-          </p:cNvPr>
-          <p:cNvSpPr>
-            <a:spLocks xmlns:a="http://schemas.openxmlformats.org/drawingml/2006/main" noGrp="1"/>
-          </p:cNvSpPr>
-          <p:nvPr/>
-        </p:nvSpPr>
-        <p:spPr>
-          <a:xfrm xmlns:a="http://schemas.openxmlformats.org/drawingml/2006/main">
-            <a:off x="609600" y="800100"/>
-            <a:ext cx="3429000" cy="228600"/>
-          </a:xfrm>
-          <a:prstGeom xmlns:a="http://schemas.openxmlformats.org/drawingml/2006/main" prst="rect">
-            <a:avLst/>
-          </a:prstGeom>
-          <a:noFill xmlns:a="http://schemas.openxmlformats.org/drawingml/2006/main"/>
-          <a:ln xmlns:a="http://schemas.openxmlformats.org/drawingml/2006/main" w="0">
-            <a:noFill/>
-            <a:prstDash val="solid"/>
-          </a:ln>
-        </p:spPr>
-        <p:txBody>
-          <a:bodyPr xmlns:a="http://schemas.openxmlformats.org/drawingml/2006/main"/>
-          <a:lstStyle xmlns:a="http://schemas.openxmlformats.org/drawingml/2006/main"/>
-          <a:p xmlns:a="http://schemas.openxmlformats.org/drawingml/2006/main">
-            <a:pPr algn="l">
-              <a:defRPr sz="975" b="1">
-                <a:solidFill>
-                  <a:srgbClr val="E63888"/>
-                </a:solidFill>
-              </a:defRPr>
-            </a:pPr>
-            <a:r>
-              <a:rPr sz="975" b="1">
-                <a:solidFill>
-                  <a:srgbClr val="E63888"/>
-                </a:solidFill>
-              </a:rPr>
-              <a:t>THE LADDER</a:t>
-            </a:r>
-          </a:p>
-        </p:txBody>
-      </p:sp>
-      <p:sp>
-        <p:nvSpPr>
-          <p:cNvPr id="4" name="">
-            <a:extLst xmlns:a="http://schemas.openxmlformats.org/drawingml/2006/main">
-              <a:ext uri="{FF2B5EF4-FFF2-40B4-BE49-F238E27FC236}">
-                <a16:creationId xmlns:a16="http://schemas.microsoft.com/office/drawing/2014/main" id="{7BD078AE-E290-4B6E-931F-60B23E9412C1}"/>
-              </a:ext>
-            </a:extLst>
-          </p:cNvPr>
-          <p:cNvSpPr>
-            <a:spLocks xmlns:a="http://schemas.openxmlformats.org/drawingml/2006/main" noGrp="1"/>
-          </p:cNvSpPr>
-          <p:nvPr/>
-        </p:nvSpPr>
-        <p:spPr>
-          <a:xfrm xmlns:a="http://schemas.openxmlformats.org/drawingml/2006/main">
-            <a:off x="609600" y="1066800"/>
-            <a:ext cx="10668000" cy="647700"/>
+                <a16:creationId xmlns:a16="http://schemas.microsoft.com/office/drawing/2014/main" id="{F078CE24-45FF-490D-BC49-E3196599E05D}"/>
+              </a:ext>
+            </a:extLst>
+          </p:cNvPr>
+          <p:cNvSpPr>
+            <a:spLocks xmlns:a="http://schemas.openxmlformats.org/drawingml/2006/main" noGrp="1"/>
+          </p:cNvSpPr>
+          <p:nvPr/>
+        </p:nvSpPr>
+        <p:spPr>
+          <a:xfrm xmlns:a="http://schemas.openxmlformats.org/drawingml/2006/main">
+            <a:off x="609600" y="838200"/>
+            <a:ext cx="10668000" cy="704850"/>
           </a:xfrm>
           <a:prstGeom xmlns:a="http://schemas.openxmlformats.org/drawingml/2006/main" prst="rect">
             <a:avLst/>
@@ -9491,10 +9141,10 @@
       </p:sp>
       <p:sp>
         <p:nvSpPr>
-          <p:cNvPr id="5" name="">
-            <a:extLst xmlns:a="http://schemas.openxmlformats.org/drawingml/2006/main">
-              <a:ext uri="{FF2B5EF4-FFF2-40B4-BE49-F238E27FC236}">
-                <a16:creationId xmlns:a16="http://schemas.microsoft.com/office/drawing/2014/main" id="{61E5EDB9-0734-4697-A1BB-72D28526F687}"/>
+          <p:cNvPr id="4" name="">
+            <a:extLst xmlns:a="http://schemas.openxmlformats.org/drawingml/2006/main">
+              <a:ext uri="{FF2B5EF4-FFF2-40B4-BE49-F238E27FC236}">
+                <a16:creationId xmlns:a16="http://schemas.microsoft.com/office/drawing/2014/main" id="{755A30DC-22E9-4C9D-86BE-F8163369E0F5}"/>
               </a:ext>
             </a:extLst>
           </p:cNvPr>
@@ -9541,10 +9191,10 @@
       </p:sp>
       <p:sp>
         <p:nvSpPr>
-          <p:cNvPr id="6" name="">
-            <a:extLst xmlns:a="http://schemas.openxmlformats.org/drawingml/2006/main">
-              <a:ext uri="{FF2B5EF4-FFF2-40B4-BE49-F238E27FC236}">
-                <a16:creationId xmlns:a16="http://schemas.microsoft.com/office/drawing/2014/main" id="{A796EB93-39F2-461B-8EDE-CF0E570B6D52}"/>
+          <p:cNvPr id="5" name="">
+            <a:extLst xmlns:a="http://schemas.openxmlformats.org/drawingml/2006/main">
+              <a:ext uri="{FF2B5EF4-FFF2-40B4-BE49-F238E27FC236}">
+                <a16:creationId xmlns:a16="http://schemas.microsoft.com/office/drawing/2014/main" id="{1B2D6DF1-05E5-4894-9431-7E9B582D4A04}"/>
               </a:ext>
             </a:extLst>
           </p:cNvPr>
@@ -9591,10 +9241,10 @@
       </p:sp>
       <p:sp>
         <p:nvSpPr>
-          <p:cNvPr id="7" name="">
-            <a:extLst xmlns:a="http://schemas.openxmlformats.org/drawingml/2006/main">
-              <a:ext uri="{FF2B5EF4-FFF2-40B4-BE49-F238E27FC236}">
-                <a16:creationId xmlns:a16="http://schemas.microsoft.com/office/drawing/2014/main" id="{452EF974-3D24-4F42-898E-7C434AE0755E}"/>
+          <p:cNvPr id="6" name="">
+            <a:extLst xmlns:a="http://schemas.openxmlformats.org/drawingml/2006/main">
+              <a:ext uri="{FF2B5EF4-FFF2-40B4-BE49-F238E27FC236}">
+                <a16:creationId xmlns:a16="http://schemas.microsoft.com/office/drawing/2014/main" id="{57BF2306-78AD-464F-A4BA-CC2DCE6AA4FD}"/>
               </a:ext>
             </a:extLst>
           </p:cNvPr>
@@ -9626,10 +9276,10 @@
       </p:sp>
       <p:sp>
         <p:nvSpPr>
-          <p:cNvPr id="8" name="">
-            <a:extLst xmlns:a="http://schemas.openxmlformats.org/drawingml/2006/main">
-              <a:ext uri="{FF2B5EF4-FFF2-40B4-BE49-F238E27FC236}">
-                <a16:creationId xmlns:a16="http://schemas.microsoft.com/office/drawing/2014/main" id="{3896B311-BE96-4938-8E8E-18F975D34DE1}"/>
+          <p:cNvPr id="7" name="">
+            <a:extLst xmlns:a="http://schemas.openxmlformats.org/drawingml/2006/main">
+              <a:ext uri="{FF2B5EF4-FFF2-40B4-BE49-F238E27FC236}">
+                <a16:creationId xmlns:a16="http://schemas.microsoft.com/office/drawing/2014/main" id="{736264B3-EB25-4A51-8BFA-995FF7B6E434}"/>
               </a:ext>
             </a:extLst>
           </p:cNvPr>
@@ -9676,10 +9326,10 @@
       </p:sp>
       <p:sp>
         <p:nvSpPr>
-          <p:cNvPr id="9" name="">
-            <a:extLst xmlns:a="http://schemas.openxmlformats.org/drawingml/2006/main">
-              <a:ext uri="{FF2B5EF4-FFF2-40B4-BE49-F238E27FC236}">
-                <a16:creationId xmlns:a16="http://schemas.microsoft.com/office/drawing/2014/main" id="{84EC06CC-FB98-4DE6-9CAF-9313F4E9F30A}"/>
+          <p:cNvPr id="8" name="">
+            <a:extLst xmlns:a="http://schemas.openxmlformats.org/drawingml/2006/main">
+              <a:ext uri="{FF2B5EF4-FFF2-40B4-BE49-F238E27FC236}">
+                <a16:creationId xmlns:a16="http://schemas.microsoft.com/office/drawing/2014/main" id="{C2A43F1E-9B06-4AE5-9D46-36727A2D6C88}"/>
               </a:ext>
             </a:extLst>
           </p:cNvPr>
@@ -9726,10 +9376,10 @@
       </p:sp>
       <p:sp>
         <p:nvSpPr>
-          <p:cNvPr id="10" name="">
-            <a:extLst xmlns:a="http://schemas.openxmlformats.org/drawingml/2006/main">
-              <a:ext uri="{FF2B5EF4-FFF2-40B4-BE49-F238E27FC236}">
-                <a16:creationId xmlns:a16="http://schemas.microsoft.com/office/drawing/2014/main" id="{CAE4488A-6C0A-448D-B1B4-D88071016EE5}"/>
+          <p:cNvPr id="9" name="">
+            <a:extLst xmlns:a="http://schemas.openxmlformats.org/drawingml/2006/main">
+              <a:ext uri="{FF2B5EF4-FFF2-40B4-BE49-F238E27FC236}">
+                <a16:creationId xmlns:a16="http://schemas.microsoft.com/office/drawing/2014/main" id="{30E4C2B4-D40D-4BA1-926A-016B3C88E192}"/>
               </a:ext>
             </a:extLst>
           </p:cNvPr>
@@ -9759,10 +9409,10 @@
       </p:sp>
       <p:sp>
         <p:nvSpPr>
-          <p:cNvPr id="11" name="">
-            <a:extLst xmlns:a="http://schemas.openxmlformats.org/drawingml/2006/main">
-              <a:ext uri="{FF2B5EF4-FFF2-40B4-BE49-F238E27FC236}">
-                <a16:creationId xmlns:a16="http://schemas.microsoft.com/office/drawing/2014/main" id="{736B191E-6F21-4DBE-8724-4D426E9EDD1B}"/>
+          <p:cNvPr id="10" name="">
+            <a:extLst xmlns:a="http://schemas.openxmlformats.org/drawingml/2006/main">
+              <a:ext uri="{FF2B5EF4-FFF2-40B4-BE49-F238E27FC236}">
+                <a16:creationId xmlns:a16="http://schemas.microsoft.com/office/drawing/2014/main" id="{BD48B5D9-1740-481D-9604-8E57C04B4B3A}"/>
               </a:ext>
             </a:extLst>
           </p:cNvPr>
@@ -9809,10 +9459,10 @@
       </p:sp>
       <p:sp>
         <p:nvSpPr>
-          <p:cNvPr id="12" name="">
-            <a:extLst xmlns:a="http://schemas.openxmlformats.org/drawingml/2006/main">
-              <a:ext uri="{FF2B5EF4-FFF2-40B4-BE49-F238E27FC236}">
-                <a16:creationId xmlns:a16="http://schemas.microsoft.com/office/drawing/2014/main" id="{9CB76DF9-750A-4D21-BC4E-E73803667257}"/>
+          <p:cNvPr id="11" name="">
+            <a:extLst xmlns:a="http://schemas.openxmlformats.org/drawingml/2006/main">
+              <a:ext uri="{FF2B5EF4-FFF2-40B4-BE49-F238E27FC236}">
+                <a16:creationId xmlns:a16="http://schemas.microsoft.com/office/drawing/2014/main" id="{E114A331-183C-46DC-902C-092EECBAEF77}"/>
               </a:ext>
             </a:extLst>
           </p:cNvPr>
@@ -9927,10 +9577,10 @@
       </p:sp>
       <p:sp>
         <p:nvSpPr>
-          <p:cNvPr id="13" name="">
-            <a:extLst xmlns:a="http://schemas.openxmlformats.org/drawingml/2006/main">
-              <a:ext uri="{FF2B5EF4-FFF2-40B4-BE49-F238E27FC236}">
-                <a16:creationId xmlns:a16="http://schemas.microsoft.com/office/drawing/2014/main" id="{8C262789-6150-496F-AAFB-A68A863D9FF2}"/>
+          <p:cNvPr id="12" name="">
+            <a:extLst xmlns:a="http://schemas.openxmlformats.org/drawingml/2006/main">
+              <a:ext uri="{FF2B5EF4-FFF2-40B4-BE49-F238E27FC236}">
+                <a16:creationId xmlns:a16="http://schemas.microsoft.com/office/drawing/2014/main" id="{C871FFDE-503E-4C0E-B749-905D7C0E3183}"/>
               </a:ext>
             </a:extLst>
           </p:cNvPr>
@@ -9977,10 +9627,10 @@
       </p:sp>
       <p:sp>
         <p:nvSpPr>
-          <p:cNvPr id="14" name="">
-            <a:extLst xmlns:a="http://schemas.openxmlformats.org/drawingml/2006/main">
-              <a:ext uri="{FF2B5EF4-FFF2-40B4-BE49-F238E27FC236}">
-                <a16:creationId xmlns:a16="http://schemas.microsoft.com/office/drawing/2014/main" id="{F4D8BDCE-25C6-47B5-B9DC-7FDE943E1D41}"/>
+          <p:cNvPr id="13" name="">
+            <a:extLst xmlns:a="http://schemas.openxmlformats.org/drawingml/2006/main">
+              <a:ext uri="{FF2B5EF4-FFF2-40B4-BE49-F238E27FC236}">
+                <a16:creationId xmlns:a16="http://schemas.microsoft.com/office/drawing/2014/main" id="{2DE203C2-2839-4502-B5FA-BA1D3E6480E5}"/>
               </a:ext>
             </a:extLst>
           </p:cNvPr>
@@ -10010,10 +9660,10 @@
       </p:sp>
       <p:sp>
         <p:nvSpPr>
-          <p:cNvPr id="15" name="">
-            <a:extLst xmlns:a="http://schemas.openxmlformats.org/drawingml/2006/main">
-              <a:ext uri="{FF2B5EF4-FFF2-40B4-BE49-F238E27FC236}">
-                <a16:creationId xmlns:a16="http://schemas.microsoft.com/office/drawing/2014/main" id="{346771B2-BB78-4F18-8DD7-C6AA4BD5B66C}"/>
+          <p:cNvPr id="14" name="">
+            <a:extLst xmlns:a="http://schemas.openxmlformats.org/drawingml/2006/main">
+              <a:ext uri="{FF2B5EF4-FFF2-40B4-BE49-F238E27FC236}">
+                <a16:creationId xmlns:a16="http://schemas.microsoft.com/office/drawing/2014/main" id="{44D1280A-8515-4C36-A78B-9F1BAC2BD3FA}"/>
               </a:ext>
             </a:extLst>
           </p:cNvPr>
@@ -10060,10 +9710,10 @@
       </p:sp>
       <p:sp>
         <p:nvSpPr>
-          <p:cNvPr id="16" name="">
-            <a:extLst xmlns:a="http://schemas.openxmlformats.org/drawingml/2006/main">
-              <a:ext uri="{FF2B5EF4-FFF2-40B4-BE49-F238E27FC236}">
-                <a16:creationId xmlns:a16="http://schemas.microsoft.com/office/drawing/2014/main" id="{838DED99-E453-4AE7-90A7-976745B1A70B}"/>
+          <p:cNvPr id="15" name="">
+            <a:extLst xmlns:a="http://schemas.openxmlformats.org/drawingml/2006/main">
+              <a:ext uri="{FF2B5EF4-FFF2-40B4-BE49-F238E27FC236}">
+                <a16:creationId xmlns:a16="http://schemas.microsoft.com/office/drawing/2014/main" id="{F059C147-19B5-4822-B50F-A33145A41F4D}"/>
               </a:ext>
             </a:extLst>
           </p:cNvPr>
@@ -10111,7 +9761,7 @@
     </p:spTree>
     <p:extLst>
       <p:ext uri="{BB962C8B-B14F-4D97-AF65-F5344CB8AC3E}">
-        <p14:creationId xmlns:p14="http://schemas.microsoft.com/office/powerpoint/2010/main" val="1619950652"/>
+        <p14:creationId xmlns:p14="http://schemas.microsoft.com/office/powerpoint/2010/main" val="506152751"/>
       </p:ext>
     </p:extLst>
   </p:cSld>
@@ -10139,10 +9789,10 @@
       </p:grpSpPr>
       <p:sp>
         <p:nvSpPr>
-          <p:cNvPr id="14" name="">
-            <a:extLst xmlns:a="http://schemas.openxmlformats.org/drawingml/2006/main">
-              <a:ext uri="{FF2B5EF4-FFF2-40B4-BE49-F238E27FC236}">
-                <a16:creationId xmlns:a16="http://schemas.microsoft.com/office/drawing/2014/main" id="{7F0F16D1-BEB6-4577-B456-3B5C957CCCE6}"/>
+          <p:cNvPr id="13" name="">
+            <a:extLst xmlns:a="http://schemas.openxmlformats.org/drawingml/2006/main">
+              <a:ext uri="{FF2B5EF4-FFF2-40B4-BE49-F238E27FC236}">
+                <a16:creationId xmlns:a16="http://schemas.microsoft.com/office/drawing/2014/main" id="{7B5C6A61-53DC-4755-8BFD-B4FF63B8B9F1}"/>
               </a:ext>
             </a:extLst>
           </p:cNvPr>
@@ -10192,7 +9842,7 @@
           <p:cNvPr id="2" name="">
             <a:extLst xmlns:a="http://schemas.openxmlformats.org/drawingml/2006/main">
               <a:ext uri="{FF2B5EF4-FFF2-40B4-BE49-F238E27FC236}">
-                <a16:creationId xmlns:a16="http://schemas.microsoft.com/office/drawing/2014/main" id="{40E552D1-B8D7-462C-93B7-A8978D256194}"/>
+                <a16:creationId xmlns:a16="http://schemas.microsoft.com/office/drawing/2014/main" id="{0EEA8BC4-9B08-4F85-8761-216A5143C7C6}"/>
               </a:ext>
             </a:extLst>
           </p:cNvPr>
@@ -10223,19 +9873,236 @@
           <p:cNvPr id="3" name="">
             <a:extLst xmlns:a="http://schemas.openxmlformats.org/drawingml/2006/main">
               <a:ext uri="{FF2B5EF4-FFF2-40B4-BE49-F238E27FC236}">
-                <a16:creationId xmlns:a16="http://schemas.microsoft.com/office/drawing/2014/main" id="{2488C8DB-3E8A-4A74-8314-86700BD1F370}"/>
-              </a:ext>
-            </a:extLst>
-          </p:cNvPr>
-          <p:cNvSpPr>
-            <a:spLocks xmlns:a="http://schemas.openxmlformats.org/drawingml/2006/main" noGrp="1"/>
-          </p:cNvSpPr>
-          <p:nvPr/>
-        </p:nvSpPr>
-        <p:spPr>
-          <a:xfrm xmlns:a="http://schemas.openxmlformats.org/drawingml/2006/main">
-            <a:off x="609600" y="800100"/>
-            <a:ext cx="3429000" cy="228600"/>
+                <a16:creationId xmlns:a16="http://schemas.microsoft.com/office/drawing/2014/main" id="{3F953A41-D44E-49D1-B795-058459C82A52}"/>
+              </a:ext>
+            </a:extLst>
+          </p:cNvPr>
+          <p:cNvSpPr>
+            <a:spLocks xmlns:a="http://schemas.openxmlformats.org/drawingml/2006/main" noGrp="1"/>
+          </p:cNvSpPr>
+          <p:nvPr/>
+        </p:nvSpPr>
+        <p:spPr>
+          <a:xfrm xmlns:a="http://schemas.openxmlformats.org/drawingml/2006/main">
+            <a:off x="609600" y="838200"/>
+            <a:ext cx="10668000" cy="704850"/>
+          </a:xfrm>
+          <a:prstGeom xmlns:a="http://schemas.openxmlformats.org/drawingml/2006/main" prst="rect">
+            <a:avLst/>
+          </a:prstGeom>
+          <a:noFill xmlns:a="http://schemas.openxmlformats.org/drawingml/2006/main"/>
+          <a:ln xmlns:a="http://schemas.openxmlformats.org/drawingml/2006/main" w="0">
+            <a:noFill/>
+            <a:prstDash val="solid"/>
+          </a:ln>
+        </p:spPr>
+        <p:txBody>
+          <a:bodyPr xmlns:a="http://schemas.openxmlformats.org/drawingml/2006/main"/>
+          <a:lstStyle xmlns:a="http://schemas.openxmlformats.org/drawingml/2006/main"/>
+          <a:p xmlns:a="http://schemas.openxmlformats.org/drawingml/2006/main">
+            <a:pPr algn="l">
+              <a:defRPr sz="3150" b="1">
+                <a:solidFill>
+                  <a:srgbClr val="FFFFFF"/>
+                </a:solidFill>
+              </a:defRPr>
+            </a:pPr>
+            <a:r>
+              <a:rPr sz="3150" b="1">
+                <a:solidFill>
+                  <a:srgbClr val="FFFFFF"/>
+                </a:solidFill>
+              </a:rPr>
+              <a:t>A cron job IN a trench coat</a:t>
+            </a:r>
+          </a:p>
+        </p:txBody>
+      </p:sp>
+      <p:sp>
+        <p:nvSpPr>
+          <p:cNvPr id="4" name="">
+            <a:extLst xmlns:a="http://schemas.openxmlformats.org/drawingml/2006/main">
+              <a:ext uri="{FF2B5EF4-FFF2-40B4-BE49-F238E27FC236}">
+                <a16:creationId xmlns:a16="http://schemas.microsoft.com/office/drawing/2014/main" id="{22864564-AAA7-4C9A-AA1F-1E2912F58658}"/>
+              </a:ext>
+            </a:extLst>
+          </p:cNvPr>
+          <p:cNvSpPr>
+            <a:spLocks xmlns:a="http://schemas.openxmlformats.org/drawingml/2006/main" noGrp="1"/>
+          </p:cNvSpPr>
+          <p:nvPr/>
+        </p:nvSpPr>
+        <p:spPr>
+          <a:xfrm xmlns:a="http://schemas.openxmlformats.org/drawingml/2006/main">
+            <a:off x="609600" y="6515100"/>
+            <a:ext cx="2381250" cy="171450"/>
+          </a:xfrm>
+          <a:prstGeom xmlns:a="http://schemas.openxmlformats.org/drawingml/2006/main" prst="rect">
+            <a:avLst/>
+          </a:prstGeom>
+          <a:noFill xmlns:a="http://schemas.openxmlformats.org/drawingml/2006/main"/>
+          <a:ln xmlns:a="http://schemas.openxmlformats.org/drawingml/2006/main" w="0">
+            <a:noFill/>
+            <a:prstDash val="solid"/>
+          </a:ln>
+        </p:spPr>
+        <p:txBody>
+          <a:bodyPr xmlns:a="http://schemas.openxmlformats.org/drawingml/2006/main"/>
+          <a:lstStyle xmlns:a="http://schemas.openxmlformats.org/drawingml/2006/main"/>
+          <a:p xmlns:a="http://schemas.openxmlformats.org/drawingml/2006/main">
+            <a:pPr algn="l">
+              <a:defRPr sz="750" b="1">
+                <a:solidFill>
+                  <a:srgbClr val="EAE3EC"/>
+                </a:solidFill>
+              </a:defRPr>
+            </a:pPr>
+            <a:r>
+              <a:rPr sz="750" b="1">
+                <a:solidFill>
+                  <a:srgbClr val="EAE3EC"/>
+                </a:solidFill>
+              </a:rPr>
+              <a:t>FORGEX  |  AI FOR ABM</a:t>
+            </a:r>
+          </a:p>
+        </p:txBody>
+      </p:sp>
+      <p:sp>
+        <p:nvSpPr>
+          <p:cNvPr id="5" name="">
+            <a:extLst xmlns:a="http://schemas.openxmlformats.org/drawingml/2006/main">
+              <a:ext uri="{FF2B5EF4-FFF2-40B4-BE49-F238E27FC236}">
+                <a16:creationId xmlns:a16="http://schemas.microsoft.com/office/drawing/2014/main" id="{91DD4602-41CC-4863-BB42-93ADCC9F5A4E}"/>
+              </a:ext>
+            </a:extLst>
+          </p:cNvPr>
+          <p:cNvSpPr>
+            <a:spLocks xmlns:a="http://schemas.openxmlformats.org/drawingml/2006/main" noGrp="1"/>
+          </p:cNvSpPr>
+          <p:nvPr/>
+        </p:nvSpPr>
+        <p:spPr>
+          <a:xfrm xmlns:a="http://schemas.openxmlformats.org/drawingml/2006/main">
+            <a:off x="11239500" y="6496050"/>
+            <a:ext cx="342900" cy="190500"/>
+          </a:xfrm>
+          <a:prstGeom xmlns:a="http://schemas.openxmlformats.org/drawingml/2006/main" prst="rect">
+            <a:avLst/>
+          </a:prstGeom>
+          <a:noFill xmlns:a="http://schemas.openxmlformats.org/drawingml/2006/main"/>
+          <a:ln xmlns:a="http://schemas.openxmlformats.org/drawingml/2006/main" w="0">
+            <a:noFill/>
+            <a:prstDash val="solid"/>
+          </a:ln>
+        </p:spPr>
+        <p:txBody>
+          <a:bodyPr xmlns:a="http://schemas.openxmlformats.org/drawingml/2006/main"/>
+          <a:lstStyle xmlns:a="http://schemas.openxmlformats.org/drawingml/2006/main"/>
+          <a:p xmlns:a="http://schemas.openxmlformats.org/drawingml/2006/main">
+            <a:pPr algn="r">
+              <a:defRPr sz="825" b="1">
+                <a:solidFill>
+                  <a:srgbClr val="C7F25C"/>
+                </a:solidFill>
+              </a:defRPr>
+            </a:pPr>
+            <a:r>
+              <a:rPr sz="825" b="1">
+                <a:solidFill>
+                  <a:srgbClr val="C7F25C"/>
+                </a:solidFill>
+              </a:rPr>
+              <a:t>15</a:t>
+            </a:r>
+          </a:p>
+        </p:txBody>
+      </p:sp>
+      <p:sp>
+        <p:nvSpPr>
+          <p:cNvPr id="6" name="">
+            <a:extLst xmlns:a="http://schemas.openxmlformats.org/drawingml/2006/main">
+              <a:ext uri="{FF2B5EF4-FFF2-40B4-BE49-F238E27FC236}">
+                <a16:creationId xmlns:a16="http://schemas.microsoft.com/office/drawing/2014/main" id="{AA620EBC-E447-465A-87FF-2D4FA2CB214E}"/>
+              </a:ext>
+            </a:extLst>
+          </p:cNvPr>
+          <p:cNvSpPr>
+            <a:spLocks xmlns:a="http://schemas.openxmlformats.org/drawingml/2006/main" noGrp="1"/>
+          </p:cNvSpPr>
+          <p:nvPr/>
+        </p:nvSpPr>
+        <p:spPr>
+          <a:xfrm xmlns:a="http://schemas.openxmlformats.org/drawingml/2006/main">
+            <a:off x="666750" y="2019300"/>
+            <a:ext cx="5810250" cy="952500"/>
+          </a:xfrm>
+          <a:prstGeom xmlns:a="http://schemas.openxmlformats.org/drawingml/2006/main" prst="rect">
+            <a:avLst/>
+          </a:prstGeom>
+          <a:noFill xmlns:a="http://schemas.openxmlformats.org/drawingml/2006/main"/>
+          <a:ln xmlns:a="http://schemas.openxmlformats.org/drawingml/2006/main" w="0">
+            <a:noFill/>
+            <a:prstDash val="solid"/>
+          </a:ln>
+        </p:spPr>
+        <p:txBody>
+          <a:bodyPr xmlns:a="http://schemas.openxmlformats.org/drawingml/2006/main"/>
+          <a:lstStyle xmlns:a="http://schemas.openxmlformats.org/drawingml/2006/main"/>
+          <a:p xmlns:a="http://schemas.openxmlformats.org/drawingml/2006/main">
+            <a:pPr algn="l">
+              <a:defRPr sz="2550" b="1">
+                <a:solidFill>
+                  <a:srgbClr val="FFFFFF"/>
+                </a:solidFill>
+              </a:defRPr>
+            </a:pPr>
+            <a:r>
+              <a:rPr sz="2550" b="1">
+                <a:solidFill>
+                  <a:srgbClr val="FFFFFF"/>
+                </a:solidFill>
+              </a:rPr>
+              <a:t>Do not dress up a brittle automation</a:t>
+            </a:r>
+          </a:p>
+          <a:p xmlns:a="http://schemas.openxmlformats.org/drawingml/2006/main">
+            <a:pPr algn="l">
+              <a:defRPr sz="2550" b="1">
+                <a:solidFill>
+                  <a:srgbClr val="FFFFFF"/>
+                </a:solidFill>
+              </a:defRPr>
+            </a:pPr>
+            <a:r>
+              <a:rPr sz="2550" b="1">
+                <a:solidFill>
+                  <a:srgbClr val="FFFFFF"/>
+                </a:solidFill>
+              </a:rPr>
+              <a:t>and call it an agent.</a:t>
+            </a:r>
+          </a:p>
+        </p:txBody>
+      </p:sp>
+      <p:sp>
+        <p:nvSpPr>
+          <p:cNvPr id="7" name="">
+            <a:extLst xmlns:a="http://schemas.openxmlformats.org/drawingml/2006/main">
+              <a:ext uri="{FF2B5EF4-FFF2-40B4-BE49-F238E27FC236}">
+                <a16:creationId xmlns:a16="http://schemas.microsoft.com/office/drawing/2014/main" id="{F38F42A3-FFA4-496D-A729-015E5FCD6154}"/>
+              </a:ext>
+            </a:extLst>
+          </p:cNvPr>
+          <p:cNvSpPr>
+            <a:spLocks xmlns:a="http://schemas.openxmlformats.org/drawingml/2006/main" noGrp="1"/>
+          </p:cNvSpPr>
+          <p:nvPr/>
+        </p:nvSpPr>
+        <p:spPr>
+          <a:xfrm xmlns:a="http://schemas.openxmlformats.org/drawingml/2006/main">
+            <a:off x="685800" y="3352800"/>
+            <a:ext cx="1714500" cy="228600"/>
           </a:xfrm>
           <a:prstGeom xmlns:a="http://schemas.openxmlformats.org/drawingml/2006/main" prst="rect">
             <a:avLst/>
@@ -10263,29 +10130,29 @@
                   <a:srgbClr val="C7F25C"/>
                 </a:solidFill>
               </a:rPr>
-              <a:t>THE WARNING</a:t>
-            </a:r>
-          </a:p>
-        </p:txBody>
-      </p:sp>
-      <p:sp>
-        <p:nvSpPr>
-          <p:cNvPr id="4" name="">
-            <a:extLst xmlns:a="http://schemas.openxmlformats.org/drawingml/2006/main">
-              <a:ext uri="{FF2B5EF4-FFF2-40B4-BE49-F238E27FC236}">
-                <a16:creationId xmlns:a16="http://schemas.microsoft.com/office/drawing/2014/main" id="{165BFF12-9F0F-4943-9175-B1F912372110}"/>
-              </a:ext>
-            </a:extLst>
-          </p:cNvPr>
-          <p:cNvSpPr>
-            <a:spLocks xmlns:a="http://schemas.openxmlformats.org/drawingml/2006/main" noGrp="1"/>
-          </p:cNvSpPr>
-          <p:nvPr/>
-        </p:nvSpPr>
-        <p:spPr>
-          <a:xfrm xmlns:a="http://schemas.openxmlformats.org/drawingml/2006/main">
-            <a:off x="609600" y="1066800"/>
-            <a:ext cx="10668000" cy="647700"/>
+              <a:t>AUTOMATION</a:t>
+            </a:r>
+          </a:p>
+        </p:txBody>
+      </p:sp>
+      <p:sp>
+        <p:nvSpPr>
+          <p:cNvPr id="8" name="">
+            <a:extLst xmlns:a="http://schemas.openxmlformats.org/drawingml/2006/main">
+              <a:ext uri="{FF2B5EF4-FFF2-40B4-BE49-F238E27FC236}">
+                <a16:creationId xmlns:a16="http://schemas.microsoft.com/office/drawing/2014/main" id="{AD194B35-974A-4F4D-B2E8-326B6785F645}"/>
+              </a:ext>
+            </a:extLst>
+          </p:cNvPr>
+          <p:cNvSpPr>
+            <a:spLocks xmlns:a="http://schemas.openxmlformats.org/drawingml/2006/main" noGrp="1"/>
+          </p:cNvSpPr>
+          <p:nvPr/>
+        </p:nvSpPr>
+        <p:spPr>
+          <a:xfrm xmlns:a="http://schemas.openxmlformats.org/drawingml/2006/main">
+            <a:off x="685800" y="3676650"/>
+            <a:ext cx="4476750" cy="342900"/>
           </a:xfrm>
           <a:prstGeom xmlns:a="http://schemas.openxmlformats.org/drawingml/2006/main" prst="rect">
             <a:avLst/>
@@ -10301,207 +10168,40 @@
           <a:lstStyle xmlns:a="http://schemas.openxmlformats.org/drawingml/2006/main"/>
           <a:p xmlns:a="http://schemas.openxmlformats.org/drawingml/2006/main">
             <a:pPr algn="l">
-              <a:defRPr sz="3150" b="1">
-                <a:solidFill>
-                  <a:srgbClr val="FFFFFF"/>
-                </a:solidFill>
-              </a:defRPr>
-            </a:pPr>
-            <a:r>
-              <a:rPr sz="3150" b="1">
-                <a:solidFill>
-                  <a:srgbClr val="FFFFFF"/>
-                </a:solidFill>
-              </a:rPr>
-              <a:t>A cron job IN a trench coat</a:t>
-            </a:r>
-          </a:p>
-        </p:txBody>
-      </p:sp>
-      <p:sp>
-        <p:nvSpPr>
-          <p:cNvPr id="5" name="">
-            <a:extLst xmlns:a="http://schemas.openxmlformats.org/drawingml/2006/main">
-              <a:ext uri="{FF2B5EF4-FFF2-40B4-BE49-F238E27FC236}">
-                <a16:creationId xmlns:a16="http://schemas.microsoft.com/office/drawing/2014/main" id="{00BB3E56-F405-4ADF-AB38-C7F0FD2632F6}"/>
-              </a:ext>
-            </a:extLst>
-          </p:cNvPr>
-          <p:cNvSpPr>
-            <a:spLocks xmlns:a="http://schemas.openxmlformats.org/drawingml/2006/main" noGrp="1"/>
-          </p:cNvSpPr>
-          <p:nvPr/>
-        </p:nvSpPr>
-        <p:spPr>
-          <a:xfrm xmlns:a="http://schemas.openxmlformats.org/drawingml/2006/main">
-            <a:off x="609600" y="6515100"/>
-            <a:ext cx="2381250" cy="171450"/>
-          </a:xfrm>
-          <a:prstGeom xmlns:a="http://schemas.openxmlformats.org/drawingml/2006/main" prst="rect">
-            <a:avLst/>
-          </a:prstGeom>
-          <a:noFill xmlns:a="http://schemas.openxmlformats.org/drawingml/2006/main"/>
-          <a:ln xmlns:a="http://schemas.openxmlformats.org/drawingml/2006/main" w="0">
-            <a:noFill/>
-            <a:prstDash val="solid"/>
-          </a:ln>
-        </p:spPr>
-        <p:txBody>
-          <a:bodyPr xmlns:a="http://schemas.openxmlformats.org/drawingml/2006/main"/>
-          <a:lstStyle xmlns:a="http://schemas.openxmlformats.org/drawingml/2006/main"/>
-          <a:p xmlns:a="http://schemas.openxmlformats.org/drawingml/2006/main">
-            <a:pPr algn="l">
-              <a:defRPr sz="750" b="1">
+              <a:defRPr sz="1650" b="0">
                 <a:solidFill>
                   <a:srgbClr val="EAE3EC"/>
                 </a:solidFill>
               </a:defRPr>
             </a:pPr>
             <a:r>
-              <a:rPr sz="750" b="1">
+              <a:rPr sz="1650" b="0">
                 <a:solidFill>
                   <a:srgbClr val="EAE3EC"/>
                 </a:solidFill>
               </a:rPr>
-              <a:t>FORGEX  |  AI FOR ABM</a:t>
-            </a:r>
-          </a:p>
-        </p:txBody>
-      </p:sp>
-      <p:sp>
-        <p:nvSpPr>
-          <p:cNvPr id="6" name="">
-            <a:extLst xmlns:a="http://schemas.openxmlformats.org/drawingml/2006/main">
-              <a:ext uri="{FF2B5EF4-FFF2-40B4-BE49-F238E27FC236}">
-                <a16:creationId xmlns:a16="http://schemas.microsoft.com/office/drawing/2014/main" id="{D7ECDD94-50C6-4597-95E3-1232D1BF4CF5}"/>
-              </a:ext>
-            </a:extLst>
-          </p:cNvPr>
-          <p:cNvSpPr>
-            <a:spLocks xmlns:a="http://schemas.openxmlformats.org/drawingml/2006/main" noGrp="1"/>
-          </p:cNvSpPr>
-          <p:nvPr/>
-        </p:nvSpPr>
-        <p:spPr>
-          <a:xfrm xmlns:a="http://schemas.openxmlformats.org/drawingml/2006/main">
-            <a:off x="11239500" y="6496050"/>
-            <a:ext cx="342900" cy="190500"/>
-          </a:xfrm>
-          <a:prstGeom xmlns:a="http://schemas.openxmlformats.org/drawingml/2006/main" prst="rect">
-            <a:avLst/>
-          </a:prstGeom>
-          <a:noFill xmlns:a="http://schemas.openxmlformats.org/drawingml/2006/main"/>
-          <a:ln xmlns:a="http://schemas.openxmlformats.org/drawingml/2006/main" w="0">
-            <a:noFill/>
-            <a:prstDash val="solid"/>
-          </a:ln>
-        </p:spPr>
-        <p:txBody>
-          <a:bodyPr xmlns:a="http://schemas.openxmlformats.org/drawingml/2006/main"/>
-          <a:lstStyle xmlns:a="http://schemas.openxmlformats.org/drawingml/2006/main"/>
-          <a:p xmlns:a="http://schemas.openxmlformats.org/drawingml/2006/main">
-            <a:pPr algn="r">
-              <a:defRPr sz="825" b="1">
-                <a:solidFill>
-                  <a:srgbClr val="C7F25C"/>
-                </a:solidFill>
-              </a:defRPr>
-            </a:pPr>
-            <a:r>
-              <a:rPr sz="825" b="1">
-                <a:solidFill>
-                  <a:srgbClr val="C7F25C"/>
-                </a:solidFill>
-              </a:rPr>
-              <a:t>15</a:t>
-            </a:r>
-          </a:p>
-        </p:txBody>
-      </p:sp>
-      <p:sp>
-        <p:nvSpPr>
-          <p:cNvPr id="7" name="">
-            <a:extLst xmlns:a="http://schemas.openxmlformats.org/drawingml/2006/main">
-              <a:ext uri="{FF2B5EF4-FFF2-40B4-BE49-F238E27FC236}">
-                <a16:creationId xmlns:a16="http://schemas.microsoft.com/office/drawing/2014/main" id="{0ABBD418-A172-46E0-BBA7-75BE82E4C005}"/>
-              </a:ext>
-            </a:extLst>
-          </p:cNvPr>
-          <p:cNvSpPr>
-            <a:spLocks xmlns:a="http://schemas.openxmlformats.org/drawingml/2006/main" noGrp="1"/>
-          </p:cNvSpPr>
-          <p:nvPr/>
-        </p:nvSpPr>
-        <p:spPr>
-          <a:xfrm xmlns:a="http://schemas.openxmlformats.org/drawingml/2006/main">
-            <a:off x="666750" y="2019300"/>
-            <a:ext cx="5810250" cy="952500"/>
-          </a:xfrm>
-          <a:prstGeom xmlns:a="http://schemas.openxmlformats.org/drawingml/2006/main" prst="rect">
-            <a:avLst/>
-          </a:prstGeom>
-          <a:noFill xmlns:a="http://schemas.openxmlformats.org/drawingml/2006/main"/>
-          <a:ln xmlns:a="http://schemas.openxmlformats.org/drawingml/2006/main" w="0">
-            <a:noFill/>
-            <a:prstDash val="solid"/>
-          </a:ln>
-        </p:spPr>
-        <p:txBody>
-          <a:bodyPr xmlns:a="http://schemas.openxmlformats.org/drawingml/2006/main"/>
-          <a:lstStyle xmlns:a="http://schemas.openxmlformats.org/drawingml/2006/main"/>
-          <a:p xmlns:a="http://schemas.openxmlformats.org/drawingml/2006/main">
-            <a:pPr algn="l">
-              <a:defRPr sz="2550" b="1">
-                <a:solidFill>
-                  <a:srgbClr val="FFFFFF"/>
-                </a:solidFill>
-              </a:defRPr>
-            </a:pPr>
-            <a:r>
-              <a:rPr sz="2550" b="1">
-                <a:solidFill>
-                  <a:srgbClr val="FFFFFF"/>
-                </a:solidFill>
-              </a:rPr>
-              <a:t>Do not dress up a brittle automation</a:t>
-            </a:r>
-          </a:p>
-          <a:p xmlns:a="http://schemas.openxmlformats.org/drawingml/2006/main">
-            <a:pPr algn="l">
-              <a:defRPr sz="2550" b="1">
-                <a:solidFill>
-                  <a:srgbClr val="FFFFFF"/>
-                </a:solidFill>
-              </a:defRPr>
-            </a:pPr>
-            <a:r>
-              <a:rPr sz="2550" b="1">
-                <a:solidFill>
-                  <a:srgbClr val="FFFFFF"/>
-                </a:solidFill>
-              </a:rPr>
-              <a:t>and call it an agent.</a:t>
-            </a:r>
-          </a:p>
-        </p:txBody>
-      </p:sp>
-      <p:sp>
-        <p:nvSpPr>
-          <p:cNvPr id="8" name="">
-            <a:extLst xmlns:a="http://schemas.openxmlformats.org/drawingml/2006/main">
-              <a:ext uri="{FF2B5EF4-FFF2-40B4-BE49-F238E27FC236}">
-                <a16:creationId xmlns:a16="http://schemas.microsoft.com/office/drawing/2014/main" id="{0A41A848-D021-48F1-B0DC-C40F59080D72}"/>
-              </a:ext>
-            </a:extLst>
-          </p:cNvPr>
-          <p:cNvSpPr>
-            <a:spLocks xmlns:a="http://schemas.openxmlformats.org/drawingml/2006/main" noGrp="1"/>
-          </p:cNvSpPr>
-          <p:nvPr/>
-        </p:nvSpPr>
-        <p:spPr>
-          <a:xfrm xmlns:a="http://schemas.openxmlformats.org/drawingml/2006/main">
-            <a:off x="685800" y="3352800"/>
+              <a:t>Predetermined path and tools</a:t>
+            </a:r>
+          </a:p>
+        </p:txBody>
+      </p:sp>
+      <p:sp>
+        <p:nvSpPr>
+          <p:cNvPr id="9" name="">
+            <a:extLst xmlns:a="http://schemas.openxmlformats.org/drawingml/2006/main">
+              <a:ext uri="{FF2B5EF4-FFF2-40B4-BE49-F238E27FC236}">
+                <a16:creationId xmlns:a16="http://schemas.microsoft.com/office/drawing/2014/main" id="{CD038EDB-6A7F-48DC-8262-17117CE3BD9B}"/>
+              </a:ext>
+            </a:extLst>
+          </p:cNvPr>
+          <p:cNvSpPr>
+            <a:spLocks xmlns:a="http://schemas.openxmlformats.org/drawingml/2006/main" noGrp="1"/>
+          </p:cNvSpPr>
+          <p:nvPr/>
+        </p:nvSpPr>
+        <p:spPr>
+          <a:xfrm xmlns:a="http://schemas.openxmlformats.org/drawingml/2006/main">
+            <a:off x="685800" y="4438650"/>
             <a:ext cx="1714500" cy="228600"/>
           </a:xfrm>
           <a:prstGeom xmlns:a="http://schemas.openxmlformats.org/drawingml/2006/main" prst="rect">
@@ -10530,29 +10230,29 @@
                   <a:srgbClr val="C7F25C"/>
                 </a:solidFill>
               </a:rPr>
-              <a:t>AUTOMATION</a:t>
-            </a:r>
-          </a:p>
-        </p:txBody>
-      </p:sp>
-      <p:sp>
-        <p:nvSpPr>
-          <p:cNvPr id="9" name="">
-            <a:extLst xmlns:a="http://schemas.openxmlformats.org/drawingml/2006/main">
-              <a:ext uri="{FF2B5EF4-FFF2-40B4-BE49-F238E27FC236}">
-                <a16:creationId xmlns:a16="http://schemas.microsoft.com/office/drawing/2014/main" id="{FC5EA64D-AF49-4247-BA45-D8EB269C7147}"/>
-              </a:ext>
-            </a:extLst>
-          </p:cNvPr>
-          <p:cNvSpPr>
-            <a:spLocks xmlns:a="http://schemas.openxmlformats.org/drawingml/2006/main" noGrp="1"/>
-          </p:cNvSpPr>
-          <p:nvPr/>
-        </p:nvSpPr>
-        <p:spPr>
-          <a:xfrm xmlns:a="http://schemas.openxmlformats.org/drawingml/2006/main">
-            <a:off x="685800" y="3676650"/>
-            <a:ext cx="4476750" cy="342900"/>
+              <a:t>AGENT</a:t>
+            </a:r>
+          </a:p>
+        </p:txBody>
+      </p:sp>
+      <p:sp>
+        <p:nvSpPr>
+          <p:cNvPr id="10" name="">
+            <a:extLst xmlns:a="http://schemas.openxmlformats.org/drawingml/2006/main">
+              <a:ext uri="{FF2B5EF4-FFF2-40B4-BE49-F238E27FC236}">
+                <a16:creationId xmlns:a16="http://schemas.microsoft.com/office/drawing/2014/main" id="{8FDFEE8D-64C2-4B44-808F-8324CCD989B4}"/>
+              </a:ext>
+            </a:extLst>
+          </p:cNvPr>
+          <p:cNvSpPr>
+            <a:spLocks xmlns:a="http://schemas.openxmlformats.org/drawingml/2006/main" noGrp="1"/>
+          </p:cNvSpPr>
+          <p:nvPr/>
+        </p:nvSpPr>
+        <p:spPr>
+          <a:xfrm xmlns:a="http://schemas.openxmlformats.org/drawingml/2006/main">
+            <a:off x="685800" y="4762500"/>
+            <a:ext cx="4953000" cy="342900"/>
           </a:xfrm>
           <a:prstGeom xmlns:a="http://schemas.openxmlformats.org/drawingml/2006/main" prst="rect">
             <a:avLst/>
@@ -10570,67 +10270,17 @@
             <a:pPr algn="l">
               <a:defRPr sz="1650" b="0">
                 <a:solidFill>
-                  <a:srgbClr val="EAE3EC"/>
+                  <a:srgbClr val="FFFFFF"/>
                 </a:solidFill>
               </a:defRPr>
             </a:pPr>
             <a:r>
               <a:rPr sz="1650" b="0">
                 <a:solidFill>
-                  <a:srgbClr val="EAE3EC"/>
-                </a:solidFill>
-              </a:rPr>
-              <a:t>Predetermined path and tools</a:t>
-            </a:r>
-          </a:p>
-        </p:txBody>
-      </p:sp>
-      <p:sp>
-        <p:nvSpPr>
-          <p:cNvPr id="10" name="">
-            <a:extLst xmlns:a="http://schemas.openxmlformats.org/drawingml/2006/main">
-              <a:ext uri="{FF2B5EF4-FFF2-40B4-BE49-F238E27FC236}">
-                <a16:creationId xmlns:a16="http://schemas.microsoft.com/office/drawing/2014/main" id="{64624045-672E-4791-BA7C-1126157F9E80}"/>
-              </a:ext>
-            </a:extLst>
-          </p:cNvPr>
-          <p:cNvSpPr>
-            <a:spLocks xmlns:a="http://schemas.openxmlformats.org/drawingml/2006/main" noGrp="1"/>
-          </p:cNvSpPr>
-          <p:nvPr/>
-        </p:nvSpPr>
-        <p:spPr>
-          <a:xfrm xmlns:a="http://schemas.openxmlformats.org/drawingml/2006/main">
-            <a:off x="685800" y="4438650"/>
-            <a:ext cx="1714500" cy="228600"/>
-          </a:xfrm>
-          <a:prstGeom xmlns:a="http://schemas.openxmlformats.org/drawingml/2006/main" prst="rect">
-            <a:avLst/>
-          </a:prstGeom>
-          <a:noFill xmlns:a="http://schemas.openxmlformats.org/drawingml/2006/main"/>
-          <a:ln xmlns:a="http://schemas.openxmlformats.org/drawingml/2006/main" w="0">
-            <a:noFill/>
-            <a:prstDash val="solid"/>
-          </a:ln>
-        </p:spPr>
-        <p:txBody>
-          <a:bodyPr xmlns:a="http://schemas.openxmlformats.org/drawingml/2006/main"/>
-          <a:lstStyle xmlns:a="http://schemas.openxmlformats.org/drawingml/2006/main"/>
-          <a:p xmlns:a="http://schemas.openxmlformats.org/drawingml/2006/main">
-            <a:pPr algn="l">
-              <a:defRPr sz="975" b="1">
-                <a:solidFill>
-                  <a:srgbClr val="C7F25C"/>
-                </a:solidFill>
-              </a:defRPr>
-            </a:pPr>
-            <a:r>
-              <a:rPr sz="975" b="1">
-                <a:solidFill>
-                  <a:srgbClr val="C7F25C"/>
-                </a:solidFill>
-              </a:rPr>
-              <a:t>AGENT</a:t>
+                  <a:srgbClr val="FFFFFF"/>
+                </a:solidFill>
+              </a:rPr>
+              <a:t>Goal, dynamic planning, and tool choice</a:t>
             </a:r>
           </a:p>
         </p:txBody>
@@ -10640,57 +10290,7 @@
           <p:cNvPr id="11" name="">
             <a:extLst xmlns:a="http://schemas.openxmlformats.org/drawingml/2006/main">
               <a:ext uri="{FF2B5EF4-FFF2-40B4-BE49-F238E27FC236}">
-                <a16:creationId xmlns:a16="http://schemas.microsoft.com/office/drawing/2014/main" id="{EBDC928D-52C1-40BB-BD8E-FCB2DFF00CE1}"/>
-              </a:ext>
-            </a:extLst>
-          </p:cNvPr>
-          <p:cNvSpPr>
-            <a:spLocks xmlns:a="http://schemas.openxmlformats.org/drawingml/2006/main" noGrp="1"/>
-          </p:cNvSpPr>
-          <p:nvPr/>
-        </p:nvSpPr>
-        <p:spPr>
-          <a:xfrm xmlns:a="http://schemas.openxmlformats.org/drawingml/2006/main">
-            <a:off x="685800" y="4762500"/>
-            <a:ext cx="4953000" cy="342900"/>
-          </a:xfrm>
-          <a:prstGeom xmlns:a="http://schemas.openxmlformats.org/drawingml/2006/main" prst="rect">
-            <a:avLst/>
-          </a:prstGeom>
-          <a:noFill xmlns:a="http://schemas.openxmlformats.org/drawingml/2006/main"/>
-          <a:ln xmlns:a="http://schemas.openxmlformats.org/drawingml/2006/main" w="0">
-            <a:noFill/>
-            <a:prstDash val="solid"/>
-          </a:ln>
-        </p:spPr>
-        <p:txBody>
-          <a:bodyPr xmlns:a="http://schemas.openxmlformats.org/drawingml/2006/main"/>
-          <a:lstStyle xmlns:a="http://schemas.openxmlformats.org/drawingml/2006/main"/>
-          <a:p xmlns:a="http://schemas.openxmlformats.org/drawingml/2006/main">
-            <a:pPr algn="l">
-              <a:defRPr sz="1650" b="0">
-                <a:solidFill>
-                  <a:srgbClr val="FFFFFF"/>
-                </a:solidFill>
-              </a:defRPr>
-            </a:pPr>
-            <a:r>
-              <a:rPr sz="1650" b="0">
-                <a:solidFill>
-                  <a:srgbClr val="FFFFFF"/>
-                </a:solidFill>
-              </a:rPr>
-              <a:t>Goal, dynamic planning, and tool choice</a:t>
-            </a:r>
-          </a:p>
-        </p:txBody>
-      </p:sp>
-      <p:sp>
-        <p:nvSpPr>
-          <p:cNvPr id="12" name="">
-            <a:extLst xmlns:a="http://schemas.openxmlformats.org/drawingml/2006/main">
-              <a:ext uri="{FF2B5EF4-FFF2-40B4-BE49-F238E27FC236}">
-                <a16:creationId xmlns:a16="http://schemas.microsoft.com/office/drawing/2014/main" id="{13B0564D-C1B0-4391-8EEF-ECBA97729F8B}"/>
+                <a16:creationId xmlns:a16="http://schemas.microsoft.com/office/drawing/2014/main" id="{F860931C-C461-4192-AD43-68FC4E8967B5}"/>
               </a:ext>
             </a:extLst>
           </p:cNvPr>
@@ -10737,14 +10337,14 @@
       </p:sp>
       <p:pic>
         <p:nvPicPr>
-          <p:cNvPr id="26" name=""/>
+          <p:cNvPr id="24" name=""/>
           <p:cNvPicPr>
             <a:picLocks xmlns:a="http://schemas.openxmlformats.org/drawingml/2006/main" noChangeAspect="1"/>
           </p:cNvPicPr>
           <p:nvPr/>
         </p:nvPicPr>
         <p:blipFill>
-          <a:blip xmlns:r="http://schemas.openxmlformats.org/officeDocument/2006/relationships" xmlns:a="http://schemas.openxmlformats.org/drawingml/2006/main" r:embed="Rad071b778bec4dad"/>
+          <a:blip xmlns:r="http://schemas.openxmlformats.org/officeDocument/2006/relationships" xmlns:a="http://schemas.openxmlformats.org/drawingml/2006/main" r:embed="R66bfc8904f52442d"/>
           <a:stretch xmlns:a="http://schemas.openxmlformats.org/drawingml/2006/main"/>
         </p:blipFill>
         <p:spPr>
@@ -10760,7 +10360,7 @@
     </p:spTree>
     <p:extLst>
       <p:ext uri="{BB962C8B-B14F-4D97-AF65-F5344CB8AC3E}">
-        <p14:creationId xmlns:p14="http://schemas.microsoft.com/office/powerpoint/2010/main" val="144154060"/>
+        <p14:creationId xmlns:p14="http://schemas.microsoft.com/office/powerpoint/2010/main" val="422766764"/>
       </p:ext>
     </p:extLst>
   </p:cSld>
@@ -10788,10 +10388,10 @@
       </p:grpSpPr>
       <p:sp>
         <p:nvSpPr>
-          <p:cNvPr id="25" name="">
-            <a:extLst xmlns:a="http://schemas.openxmlformats.org/drawingml/2006/main">
-              <a:ext uri="{FF2B5EF4-FFF2-40B4-BE49-F238E27FC236}">
-                <a16:creationId xmlns:a16="http://schemas.microsoft.com/office/drawing/2014/main" id="{431BC852-0853-44B2-98D5-EB70D410F426}"/>
+          <p:cNvPr id="24" name="">
+            <a:extLst xmlns:a="http://schemas.openxmlformats.org/drawingml/2006/main">
+              <a:ext uri="{FF2B5EF4-FFF2-40B4-BE49-F238E27FC236}">
+                <a16:creationId xmlns:a16="http://schemas.microsoft.com/office/drawing/2014/main" id="{9B2A7D6D-B9EA-4A9D-BD25-03EF8E45F92E}"/>
               </a:ext>
             </a:extLst>
           </p:cNvPr>
@@ -10841,7 +10441,7 @@
           <p:cNvPr id="2" name="">
             <a:extLst xmlns:a="http://schemas.openxmlformats.org/drawingml/2006/main">
               <a:ext uri="{FF2B5EF4-FFF2-40B4-BE49-F238E27FC236}">
-                <a16:creationId xmlns:a16="http://schemas.microsoft.com/office/drawing/2014/main" id="{3BE6B65D-7C9F-4AC3-ACD0-851243F8905F}"/>
+                <a16:creationId xmlns:a16="http://schemas.microsoft.com/office/drawing/2014/main" id="{9B5B88C8-0F86-47A9-B60F-364C7B13E6A2}"/>
               </a:ext>
             </a:extLst>
           </p:cNvPr>
@@ -10872,69 +10472,19 @@
           <p:cNvPr id="3" name="">
             <a:extLst xmlns:a="http://schemas.openxmlformats.org/drawingml/2006/main">
               <a:ext uri="{FF2B5EF4-FFF2-40B4-BE49-F238E27FC236}">
-                <a16:creationId xmlns:a16="http://schemas.microsoft.com/office/drawing/2014/main" id="{A0B0C6EB-5E4B-4753-B156-AA58E83F666B}"/>
-              </a:ext>
-            </a:extLst>
-          </p:cNvPr>
-          <p:cNvSpPr>
-            <a:spLocks xmlns:a="http://schemas.openxmlformats.org/drawingml/2006/main" noGrp="1"/>
-          </p:cNvSpPr>
-          <p:nvPr/>
-        </p:nvSpPr>
-        <p:spPr>
-          <a:xfrm xmlns:a="http://schemas.openxmlformats.org/drawingml/2006/main">
-            <a:off x="609600" y="800100"/>
-            <a:ext cx="3429000" cy="228600"/>
-          </a:xfrm>
-          <a:prstGeom xmlns:a="http://schemas.openxmlformats.org/drawingml/2006/main" prst="rect">
-            <a:avLst/>
-          </a:prstGeom>
-          <a:noFill xmlns:a="http://schemas.openxmlformats.org/drawingml/2006/main"/>
-          <a:ln xmlns:a="http://schemas.openxmlformats.org/drawingml/2006/main" w="0">
-            <a:noFill/>
-            <a:prstDash val="solid"/>
-          </a:ln>
-        </p:spPr>
-        <p:txBody>
-          <a:bodyPr xmlns:a="http://schemas.openxmlformats.org/drawingml/2006/main"/>
-          <a:lstStyle xmlns:a="http://schemas.openxmlformats.org/drawingml/2006/main"/>
-          <a:p xmlns:a="http://schemas.openxmlformats.org/drawingml/2006/main">
-            <a:pPr algn="l">
-              <a:defRPr sz="975" b="1">
-                <a:solidFill>
-                  <a:srgbClr val="E63888"/>
-                </a:solidFill>
-              </a:defRPr>
-            </a:pPr>
-            <a:r>
-              <a:rPr sz="975" b="1">
-                <a:solidFill>
-                  <a:srgbClr val="E63888"/>
-                </a:solidFill>
-              </a:rPr>
-              <a:t>THE SYSTEM</a:t>
-            </a:r>
-          </a:p>
-        </p:txBody>
-      </p:sp>
-      <p:sp>
-        <p:nvSpPr>
-          <p:cNvPr id="4" name="">
-            <a:extLst xmlns:a="http://schemas.openxmlformats.org/drawingml/2006/main">
-              <a:ext uri="{FF2B5EF4-FFF2-40B4-BE49-F238E27FC236}">
-                <a16:creationId xmlns:a16="http://schemas.microsoft.com/office/drawing/2014/main" id="{CE638E3F-9FCD-4DE5-9BCA-7D13FD2D9F61}"/>
-              </a:ext>
-            </a:extLst>
-          </p:cNvPr>
-          <p:cNvSpPr>
-            <a:spLocks xmlns:a="http://schemas.openxmlformats.org/drawingml/2006/main" noGrp="1"/>
-          </p:cNvSpPr>
-          <p:nvPr/>
-        </p:nvSpPr>
-        <p:spPr>
-          <a:xfrm xmlns:a="http://schemas.openxmlformats.org/drawingml/2006/main">
-            <a:off x="609600" y="1066800"/>
-            <a:ext cx="10668000" cy="647700"/>
+                <a16:creationId xmlns:a16="http://schemas.microsoft.com/office/drawing/2014/main" id="{FD01FAEB-44F5-4535-8579-FE7868E61CFD}"/>
+              </a:ext>
+            </a:extLst>
+          </p:cNvPr>
+          <p:cNvSpPr>
+            <a:spLocks xmlns:a="http://schemas.openxmlformats.org/drawingml/2006/main" noGrp="1"/>
+          </p:cNvSpPr>
+          <p:nvPr/>
+        </p:nvSpPr>
+        <p:spPr>
+          <a:xfrm xmlns:a="http://schemas.openxmlformats.org/drawingml/2006/main">
+            <a:off x="609600" y="838200"/>
+            <a:ext cx="10668000" cy="704850"/>
           </a:xfrm>
           <a:prstGeom xmlns:a="http://schemas.openxmlformats.org/drawingml/2006/main" prst="rect">
             <a:avLst/>
@@ -10969,10 +10519,10 @@
       </p:sp>
       <p:sp>
         <p:nvSpPr>
-          <p:cNvPr id="5" name="">
-            <a:extLst xmlns:a="http://schemas.openxmlformats.org/drawingml/2006/main">
-              <a:ext uri="{FF2B5EF4-FFF2-40B4-BE49-F238E27FC236}">
-                <a16:creationId xmlns:a16="http://schemas.microsoft.com/office/drawing/2014/main" id="{DC67E342-927D-406D-83BC-88C37C1D96C3}"/>
+          <p:cNvPr id="4" name="">
+            <a:extLst xmlns:a="http://schemas.openxmlformats.org/drawingml/2006/main">
+              <a:ext uri="{FF2B5EF4-FFF2-40B4-BE49-F238E27FC236}">
+                <a16:creationId xmlns:a16="http://schemas.microsoft.com/office/drawing/2014/main" id="{D06DEC60-AEAF-4339-A8A2-8D201E6DCA1D}"/>
               </a:ext>
             </a:extLst>
           </p:cNvPr>
@@ -11019,10 +10569,10 @@
       </p:sp>
       <p:sp>
         <p:nvSpPr>
-          <p:cNvPr id="6" name="">
-            <a:extLst xmlns:a="http://schemas.openxmlformats.org/drawingml/2006/main">
-              <a:ext uri="{FF2B5EF4-FFF2-40B4-BE49-F238E27FC236}">
-                <a16:creationId xmlns:a16="http://schemas.microsoft.com/office/drawing/2014/main" id="{39BC8315-58F0-4679-95FF-73B1CF8BD805}"/>
+          <p:cNvPr id="5" name="">
+            <a:extLst xmlns:a="http://schemas.openxmlformats.org/drawingml/2006/main">
+              <a:ext uri="{FF2B5EF4-FFF2-40B4-BE49-F238E27FC236}">
+                <a16:creationId xmlns:a16="http://schemas.microsoft.com/office/drawing/2014/main" id="{E4C229CD-67A9-428C-9B23-601F78467B53}"/>
               </a:ext>
             </a:extLst>
           </p:cNvPr>
@@ -11069,10 +10619,10 @@
       </p:sp>
       <p:sp>
         <p:nvSpPr>
-          <p:cNvPr id="7" name="">
-            <a:extLst xmlns:a="http://schemas.openxmlformats.org/drawingml/2006/main">
-              <a:ext uri="{FF2B5EF4-FFF2-40B4-BE49-F238E27FC236}">
-                <a16:creationId xmlns:a16="http://schemas.microsoft.com/office/drawing/2014/main" id="{C0D114AD-7448-4157-98FF-B0A3BC7F2C4E}"/>
+          <p:cNvPr id="6" name="">
+            <a:extLst xmlns:a="http://schemas.openxmlformats.org/drawingml/2006/main">
+              <a:ext uri="{FF2B5EF4-FFF2-40B4-BE49-F238E27FC236}">
+                <a16:creationId xmlns:a16="http://schemas.microsoft.com/office/drawing/2014/main" id="{B5811E66-2A5D-4233-8C57-7F2F9DD06228}"/>
               </a:ext>
             </a:extLst>
           </p:cNvPr>
@@ -11102,10 +10652,10 @@
       </p:sp>
       <p:sp>
         <p:nvSpPr>
-          <p:cNvPr id="8" name="">
-            <a:extLst xmlns:a="http://schemas.openxmlformats.org/drawingml/2006/main">
-              <a:ext uri="{FF2B5EF4-FFF2-40B4-BE49-F238E27FC236}">
-                <a16:creationId xmlns:a16="http://schemas.microsoft.com/office/drawing/2014/main" id="{C0808A57-65C6-4BB3-A622-70125C3B9FFC}"/>
+          <p:cNvPr id="7" name="">
+            <a:extLst xmlns:a="http://schemas.openxmlformats.org/drawingml/2006/main">
+              <a:ext uri="{FF2B5EF4-FFF2-40B4-BE49-F238E27FC236}">
+                <a16:creationId xmlns:a16="http://schemas.microsoft.com/office/drawing/2014/main" id="{2995F378-5E32-49EE-984B-027E056F15FF}"/>
               </a:ext>
             </a:extLst>
           </p:cNvPr>
@@ -11133,10 +10683,10 @@
       </p:sp>
       <p:sp>
         <p:nvSpPr>
-          <p:cNvPr id="9" name="">
-            <a:extLst xmlns:a="http://schemas.openxmlformats.org/drawingml/2006/main">
-              <a:ext uri="{FF2B5EF4-FFF2-40B4-BE49-F238E27FC236}">
-                <a16:creationId xmlns:a16="http://schemas.microsoft.com/office/drawing/2014/main" id="{6CD1D2A5-3A8F-476F-829A-202721A64C9B}"/>
+          <p:cNvPr id="8" name="">
+            <a:extLst xmlns:a="http://schemas.openxmlformats.org/drawingml/2006/main">
+              <a:ext uri="{FF2B5EF4-FFF2-40B4-BE49-F238E27FC236}">
+                <a16:creationId xmlns:a16="http://schemas.microsoft.com/office/drawing/2014/main" id="{B5CFAB9B-17FF-4A60-9AEC-FFDB5F3AF142}"/>
               </a:ext>
             </a:extLst>
           </p:cNvPr>
@@ -11183,10 +10733,10 @@
       </p:sp>
       <p:sp>
         <p:nvSpPr>
-          <p:cNvPr id="10" name="">
-            <a:extLst xmlns:a="http://schemas.openxmlformats.org/drawingml/2006/main">
-              <a:ext uri="{FF2B5EF4-FFF2-40B4-BE49-F238E27FC236}">
-                <a16:creationId xmlns:a16="http://schemas.microsoft.com/office/drawing/2014/main" id="{51F24668-DB60-4BFA-A4A2-E43C85975D67}"/>
+          <p:cNvPr id="9" name="">
+            <a:extLst xmlns:a="http://schemas.openxmlformats.org/drawingml/2006/main">
+              <a:ext uri="{FF2B5EF4-FFF2-40B4-BE49-F238E27FC236}">
+                <a16:creationId xmlns:a16="http://schemas.microsoft.com/office/drawing/2014/main" id="{01260BB6-84C5-47FF-8BBC-48E0F955728C}"/>
               </a:ext>
             </a:extLst>
           </p:cNvPr>
@@ -11233,10 +10783,10 @@
       </p:sp>
       <p:sp>
         <p:nvSpPr>
-          <p:cNvPr id="11" name="">
-            <a:extLst xmlns:a="http://schemas.openxmlformats.org/drawingml/2006/main">
-              <a:ext uri="{FF2B5EF4-FFF2-40B4-BE49-F238E27FC236}">
-                <a16:creationId xmlns:a16="http://schemas.microsoft.com/office/drawing/2014/main" id="{2EAE6E7E-41D4-456E-8F17-B66ABC4D8E79}"/>
+          <p:cNvPr id="10" name="">
+            <a:extLst xmlns:a="http://schemas.openxmlformats.org/drawingml/2006/main">
+              <a:ext uri="{FF2B5EF4-FFF2-40B4-BE49-F238E27FC236}">
+                <a16:creationId xmlns:a16="http://schemas.microsoft.com/office/drawing/2014/main" id="{7428AB3F-C4E4-4DC6-BB06-A47220A92045}"/>
               </a:ext>
             </a:extLst>
           </p:cNvPr>
@@ -11283,10 +10833,10 @@
       </p:sp>
       <p:sp>
         <p:nvSpPr>
-          <p:cNvPr id="12" name="">
-            <a:extLst xmlns:a="http://schemas.openxmlformats.org/drawingml/2006/main">
-              <a:ext uri="{FF2B5EF4-FFF2-40B4-BE49-F238E27FC236}">
-                <a16:creationId xmlns:a16="http://schemas.microsoft.com/office/drawing/2014/main" id="{4CF4EE19-9ABE-4999-A560-BEF172909491}"/>
+          <p:cNvPr id="11" name="">
+            <a:extLst xmlns:a="http://schemas.openxmlformats.org/drawingml/2006/main">
+              <a:ext uri="{FF2B5EF4-FFF2-40B4-BE49-F238E27FC236}">
+                <a16:creationId xmlns:a16="http://schemas.microsoft.com/office/drawing/2014/main" id="{26EB59A4-6813-4416-B0C7-B8E9C77DB926}"/>
               </a:ext>
             </a:extLst>
           </p:cNvPr>
@@ -11314,10 +10864,10 @@
       </p:sp>
       <p:sp>
         <p:nvSpPr>
-          <p:cNvPr id="13" name="">
-            <a:extLst xmlns:a="http://schemas.openxmlformats.org/drawingml/2006/main">
-              <a:ext uri="{FF2B5EF4-FFF2-40B4-BE49-F238E27FC236}">
-                <a16:creationId xmlns:a16="http://schemas.microsoft.com/office/drawing/2014/main" id="{0DD7DEA4-CCD0-4DDA-AACC-D3B80BBF427A}"/>
+          <p:cNvPr id="12" name="">
+            <a:extLst xmlns:a="http://schemas.openxmlformats.org/drawingml/2006/main">
+              <a:ext uri="{FF2B5EF4-FFF2-40B4-BE49-F238E27FC236}">
+                <a16:creationId xmlns:a16="http://schemas.microsoft.com/office/drawing/2014/main" id="{E97C1ED6-F538-46C9-9977-A35C6C93A30A}"/>
               </a:ext>
             </a:extLst>
           </p:cNvPr>
@@ -11364,10 +10914,10 @@
       </p:sp>
       <p:sp>
         <p:nvSpPr>
-          <p:cNvPr id="14" name="">
-            <a:extLst xmlns:a="http://schemas.openxmlformats.org/drawingml/2006/main">
-              <a:ext uri="{FF2B5EF4-FFF2-40B4-BE49-F238E27FC236}">
-                <a16:creationId xmlns:a16="http://schemas.microsoft.com/office/drawing/2014/main" id="{77E7C8B5-D54B-4611-97E2-2F50241DEF33}"/>
+          <p:cNvPr id="13" name="">
+            <a:extLst xmlns:a="http://schemas.openxmlformats.org/drawingml/2006/main">
+              <a:ext uri="{FF2B5EF4-FFF2-40B4-BE49-F238E27FC236}">
+                <a16:creationId xmlns:a16="http://schemas.microsoft.com/office/drawing/2014/main" id="{920C096A-DDAE-4FC1-91D4-540E98C4FDAA}"/>
               </a:ext>
             </a:extLst>
           </p:cNvPr>
@@ -11414,10 +10964,10 @@
       </p:sp>
       <p:sp>
         <p:nvSpPr>
-          <p:cNvPr id="15" name="">
-            <a:extLst xmlns:a="http://schemas.openxmlformats.org/drawingml/2006/main">
-              <a:ext uri="{FF2B5EF4-FFF2-40B4-BE49-F238E27FC236}">
-                <a16:creationId xmlns:a16="http://schemas.microsoft.com/office/drawing/2014/main" id="{588C3E9A-BCAB-496A-BB6D-C77308445F25}"/>
+          <p:cNvPr id="14" name="">
+            <a:extLst xmlns:a="http://schemas.openxmlformats.org/drawingml/2006/main">
+              <a:ext uri="{FF2B5EF4-FFF2-40B4-BE49-F238E27FC236}">
+                <a16:creationId xmlns:a16="http://schemas.microsoft.com/office/drawing/2014/main" id="{9C37347A-A946-41D7-8B37-CBE0CE9FA63D}"/>
               </a:ext>
             </a:extLst>
           </p:cNvPr>
@@ -11464,10 +11014,10 @@
       </p:sp>
       <p:sp>
         <p:nvSpPr>
-          <p:cNvPr id="16" name="">
-            <a:extLst xmlns:a="http://schemas.openxmlformats.org/drawingml/2006/main">
-              <a:ext uri="{FF2B5EF4-FFF2-40B4-BE49-F238E27FC236}">
-                <a16:creationId xmlns:a16="http://schemas.microsoft.com/office/drawing/2014/main" id="{4C942A33-AB49-4B48-86B3-B607DFDA8A16}"/>
+          <p:cNvPr id="15" name="">
+            <a:extLst xmlns:a="http://schemas.openxmlformats.org/drawingml/2006/main">
+              <a:ext uri="{FF2B5EF4-FFF2-40B4-BE49-F238E27FC236}">
+                <a16:creationId xmlns:a16="http://schemas.microsoft.com/office/drawing/2014/main" id="{D6962FBE-9714-41D8-9627-6A660F4FFF12}"/>
               </a:ext>
             </a:extLst>
           </p:cNvPr>
@@ -11495,10 +11045,10 @@
       </p:sp>
       <p:sp>
         <p:nvSpPr>
-          <p:cNvPr id="17" name="">
-            <a:extLst xmlns:a="http://schemas.openxmlformats.org/drawingml/2006/main">
-              <a:ext uri="{FF2B5EF4-FFF2-40B4-BE49-F238E27FC236}">
-                <a16:creationId xmlns:a16="http://schemas.microsoft.com/office/drawing/2014/main" id="{CF3C9AFC-5374-4CF7-AC15-CD1F159BA28B}"/>
+          <p:cNvPr id="16" name="">
+            <a:extLst xmlns:a="http://schemas.openxmlformats.org/drawingml/2006/main">
+              <a:ext uri="{FF2B5EF4-FFF2-40B4-BE49-F238E27FC236}">
+                <a16:creationId xmlns:a16="http://schemas.microsoft.com/office/drawing/2014/main" id="{88503C8A-7EE4-458A-9620-BA2C534E5B4E}"/>
               </a:ext>
             </a:extLst>
           </p:cNvPr>
@@ -11545,10 +11095,10 @@
       </p:sp>
       <p:sp>
         <p:nvSpPr>
-          <p:cNvPr id="18" name="">
-            <a:extLst xmlns:a="http://schemas.openxmlformats.org/drawingml/2006/main">
-              <a:ext uri="{FF2B5EF4-FFF2-40B4-BE49-F238E27FC236}">
-                <a16:creationId xmlns:a16="http://schemas.microsoft.com/office/drawing/2014/main" id="{CBE21AE3-16EA-4936-86F7-065F9F161399}"/>
+          <p:cNvPr id="17" name="">
+            <a:extLst xmlns:a="http://schemas.openxmlformats.org/drawingml/2006/main">
+              <a:ext uri="{FF2B5EF4-FFF2-40B4-BE49-F238E27FC236}">
+                <a16:creationId xmlns:a16="http://schemas.microsoft.com/office/drawing/2014/main" id="{79DD8BF3-74D7-4347-992B-94AE57FE8684}"/>
               </a:ext>
             </a:extLst>
           </p:cNvPr>
@@ -11595,10 +11145,10 @@
       </p:sp>
       <p:sp>
         <p:nvSpPr>
-          <p:cNvPr id="19" name="">
-            <a:extLst xmlns:a="http://schemas.openxmlformats.org/drawingml/2006/main">
-              <a:ext uri="{FF2B5EF4-FFF2-40B4-BE49-F238E27FC236}">
-                <a16:creationId xmlns:a16="http://schemas.microsoft.com/office/drawing/2014/main" id="{FE840367-BE12-4DDA-AFF9-5E04FFA552B1}"/>
+          <p:cNvPr id="18" name="">
+            <a:extLst xmlns:a="http://schemas.openxmlformats.org/drawingml/2006/main">
+              <a:ext uri="{FF2B5EF4-FFF2-40B4-BE49-F238E27FC236}">
+                <a16:creationId xmlns:a16="http://schemas.microsoft.com/office/drawing/2014/main" id="{82D6A8E3-77DD-4FE1-A900-4525BE424314}"/>
               </a:ext>
             </a:extLst>
           </p:cNvPr>
@@ -11645,10 +11195,10 @@
       </p:sp>
       <p:sp>
         <p:nvSpPr>
-          <p:cNvPr id="20" name="">
-            <a:extLst xmlns:a="http://schemas.openxmlformats.org/drawingml/2006/main">
-              <a:ext uri="{FF2B5EF4-FFF2-40B4-BE49-F238E27FC236}">
-                <a16:creationId xmlns:a16="http://schemas.microsoft.com/office/drawing/2014/main" id="{C4EF7A1B-C5A3-4937-BC77-D57A517AAB79}"/>
+          <p:cNvPr id="19" name="">
+            <a:extLst xmlns:a="http://schemas.openxmlformats.org/drawingml/2006/main">
+              <a:ext uri="{FF2B5EF4-FFF2-40B4-BE49-F238E27FC236}">
+                <a16:creationId xmlns:a16="http://schemas.microsoft.com/office/drawing/2014/main" id="{3EAB0A91-C1F7-4CFC-B17A-A9D7AF91E695}"/>
               </a:ext>
             </a:extLst>
           </p:cNvPr>
@@ -11676,10 +11226,10 @@
       </p:sp>
       <p:sp>
         <p:nvSpPr>
-          <p:cNvPr id="21" name="">
-            <a:extLst xmlns:a="http://schemas.openxmlformats.org/drawingml/2006/main">
-              <a:ext uri="{FF2B5EF4-FFF2-40B4-BE49-F238E27FC236}">
-                <a16:creationId xmlns:a16="http://schemas.microsoft.com/office/drawing/2014/main" id="{2F1458A6-17DD-44BE-B3AF-25E691C01514}"/>
+          <p:cNvPr id="20" name="">
+            <a:extLst xmlns:a="http://schemas.openxmlformats.org/drawingml/2006/main">
+              <a:ext uri="{FF2B5EF4-FFF2-40B4-BE49-F238E27FC236}">
+                <a16:creationId xmlns:a16="http://schemas.microsoft.com/office/drawing/2014/main" id="{A5D5A440-FC1B-45D7-AC81-4C0BFBED60DD}"/>
               </a:ext>
             </a:extLst>
           </p:cNvPr>
@@ -11726,10 +11276,10 @@
       </p:sp>
       <p:sp>
         <p:nvSpPr>
-          <p:cNvPr id="22" name="">
-            <a:extLst xmlns:a="http://schemas.openxmlformats.org/drawingml/2006/main">
-              <a:ext uri="{FF2B5EF4-FFF2-40B4-BE49-F238E27FC236}">
-                <a16:creationId xmlns:a16="http://schemas.microsoft.com/office/drawing/2014/main" id="{42601722-0D67-4ACC-917F-E8133644FD63}"/>
+          <p:cNvPr id="21" name="">
+            <a:extLst xmlns:a="http://schemas.openxmlformats.org/drawingml/2006/main">
+              <a:ext uri="{FF2B5EF4-FFF2-40B4-BE49-F238E27FC236}">
+                <a16:creationId xmlns:a16="http://schemas.microsoft.com/office/drawing/2014/main" id="{6F36E8B6-72C9-45AF-99CB-F28F76DF7103}"/>
               </a:ext>
             </a:extLst>
           </p:cNvPr>
@@ -11776,10 +11326,10 @@
       </p:sp>
       <p:sp>
         <p:nvSpPr>
-          <p:cNvPr id="23" name="">
-            <a:extLst xmlns:a="http://schemas.openxmlformats.org/drawingml/2006/main">
-              <a:ext uri="{FF2B5EF4-FFF2-40B4-BE49-F238E27FC236}">
-                <a16:creationId xmlns:a16="http://schemas.microsoft.com/office/drawing/2014/main" id="{9C172A48-393B-4CF2-8A66-1C8B2BD02B92}"/>
+          <p:cNvPr id="22" name="">
+            <a:extLst xmlns:a="http://schemas.openxmlformats.org/drawingml/2006/main">
+              <a:ext uri="{FF2B5EF4-FFF2-40B4-BE49-F238E27FC236}">
+                <a16:creationId xmlns:a16="http://schemas.microsoft.com/office/drawing/2014/main" id="{2E25ED5B-333A-4BDB-881D-1083CC77D4E1}"/>
               </a:ext>
             </a:extLst>
           </p:cNvPr>
@@ -11826,10 +11376,10 @@
       </p:sp>
       <p:sp>
         <p:nvSpPr>
-          <p:cNvPr id="24" name="">
-            <a:extLst xmlns:a="http://schemas.openxmlformats.org/drawingml/2006/main">
-              <a:ext uri="{FF2B5EF4-FFF2-40B4-BE49-F238E27FC236}">
-                <a16:creationId xmlns:a16="http://schemas.microsoft.com/office/drawing/2014/main" id="{D9FAB648-76D9-4ECF-B1E8-734B95DCEDAB}"/>
+          <p:cNvPr id="23" name="">
+            <a:extLst xmlns:a="http://schemas.openxmlformats.org/drawingml/2006/main">
+              <a:ext uri="{FF2B5EF4-FFF2-40B4-BE49-F238E27FC236}">
+                <a16:creationId xmlns:a16="http://schemas.microsoft.com/office/drawing/2014/main" id="{86A086F0-E63E-4B5A-AB38-0C038CABAB42}"/>
               </a:ext>
             </a:extLst>
           </p:cNvPr>
@@ -11877,7 +11427,7 @@
     </p:spTree>
     <p:extLst>
       <p:ext uri="{BB962C8B-B14F-4D97-AF65-F5344CB8AC3E}">
-        <p14:creationId xmlns:p14="http://schemas.microsoft.com/office/powerpoint/2010/main" val="128351932"/>
+        <p14:creationId xmlns:p14="http://schemas.microsoft.com/office/powerpoint/2010/main" val="706053734"/>
       </p:ext>
     </p:extLst>
   </p:cSld>
@@ -11905,10 +11455,10 @@
       </p:grpSpPr>
       <p:sp>
         <p:nvSpPr>
-          <p:cNvPr id="19" name="">
-            <a:extLst xmlns:a="http://schemas.openxmlformats.org/drawingml/2006/main">
-              <a:ext uri="{FF2B5EF4-FFF2-40B4-BE49-F238E27FC236}">
-                <a16:creationId xmlns:a16="http://schemas.microsoft.com/office/drawing/2014/main" id="{BEC20D83-9353-4374-B810-CF5113688B23}"/>
+          <p:cNvPr id="18" name="">
+            <a:extLst xmlns:a="http://schemas.openxmlformats.org/drawingml/2006/main">
+              <a:ext uri="{FF2B5EF4-FFF2-40B4-BE49-F238E27FC236}">
+                <a16:creationId xmlns:a16="http://schemas.microsoft.com/office/drawing/2014/main" id="{D65CDB12-2336-47EB-91BB-656B3F3F6D0D}"/>
               </a:ext>
             </a:extLst>
           </p:cNvPr>
@@ -11958,7 +11508,7 @@
           <p:cNvPr id="2" name="">
             <a:extLst xmlns:a="http://schemas.openxmlformats.org/drawingml/2006/main">
               <a:ext uri="{FF2B5EF4-FFF2-40B4-BE49-F238E27FC236}">
-                <a16:creationId xmlns:a16="http://schemas.microsoft.com/office/drawing/2014/main" id="{D56AE97A-63E3-4084-982B-3E9108D016B5}"/>
+                <a16:creationId xmlns:a16="http://schemas.microsoft.com/office/drawing/2014/main" id="{5F727A8E-BCDB-46A2-9562-2DCD756251B3}"/>
               </a:ext>
             </a:extLst>
           </p:cNvPr>
@@ -11989,69 +11539,19 @@
           <p:cNvPr id="3" name="">
             <a:extLst xmlns:a="http://schemas.openxmlformats.org/drawingml/2006/main">
               <a:ext uri="{FF2B5EF4-FFF2-40B4-BE49-F238E27FC236}">
-                <a16:creationId xmlns:a16="http://schemas.microsoft.com/office/drawing/2014/main" id="{14BB94DD-C9A0-4BB4-8BDD-1FDDB524E4AC}"/>
-              </a:ext>
-            </a:extLst>
-          </p:cNvPr>
-          <p:cNvSpPr>
-            <a:spLocks xmlns:a="http://schemas.openxmlformats.org/drawingml/2006/main" noGrp="1"/>
-          </p:cNvSpPr>
-          <p:nvPr/>
-        </p:nvSpPr>
-        <p:spPr>
-          <a:xfrm xmlns:a="http://schemas.openxmlformats.org/drawingml/2006/main">
-            <a:off x="609600" y="800100"/>
-            <a:ext cx="3429000" cy="228600"/>
-          </a:xfrm>
-          <a:prstGeom xmlns:a="http://schemas.openxmlformats.org/drawingml/2006/main" prst="rect">
-            <a:avLst/>
-          </a:prstGeom>
-          <a:noFill xmlns:a="http://schemas.openxmlformats.org/drawingml/2006/main"/>
-          <a:ln xmlns:a="http://schemas.openxmlformats.org/drawingml/2006/main" w="0">
-            <a:noFill/>
-            <a:prstDash val="solid"/>
-          </a:ln>
-        </p:spPr>
-        <p:txBody>
-          <a:bodyPr xmlns:a="http://schemas.openxmlformats.org/drawingml/2006/main"/>
-          <a:lstStyle xmlns:a="http://schemas.openxmlformats.org/drawingml/2006/main"/>
-          <a:p xmlns:a="http://schemas.openxmlformats.org/drawingml/2006/main">
-            <a:pPr algn="l">
-              <a:defRPr sz="975" b="1">
-                <a:solidFill>
-                  <a:srgbClr val="C7F25C"/>
-                </a:solidFill>
-              </a:defRPr>
-            </a:pPr>
-            <a:r>
-              <a:rPr sz="975" b="1">
-                <a:solidFill>
-                  <a:srgbClr val="C7F25C"/>
-                </a:solidFill>
-              </a:rPr>
-              <a:t>THE LADDER</a:t>
-            </a:r>
-          </a:p>
-        </p:txBody>
-      </p:sp>
-      <p:sp>
-        <p:nvSpPr>
-          <p:cNvPr id="4" name="">
-            <a:extLst xmlns:a="http://schemas.openxmlformats.org/drawingml/2006/main">
-              <a:ext uri="{FF2B5EF4-FFF2-40B4-BE49-F238E27FC236}">
-                <a16:creationId xmlns:a16="http://schemas.microsoft.com/office/drawing/2014/main" id="{3A8250EA-2D26-4DC5-9502-E15BF0539EEF}"/>
-              </a:ext>
-            </a:extLst>
-          </p:cNvPr>
-          <p:cNvSpPr>
-            <a:spLocks xmlns:a="http://schemas.openxmlformats.org/drawingml/2006/main" noGrp="1"/>
-          </p:cNvSpPr>
-          <p:nvPr/>
-        </p:nvSpPr>
-        <p:spPr>
-          <a:xfrm xmlns:a="http://schemas.openxmlformats.org/drawingml/2006/main">
-            <a:off x="609600" y="1066800"/>
-            <a:ext cx="10668000" cy="647700"/>
+                <a16:creationId xmlns:a16="http://schemas.microsoft.com/office/drawing/2014/main" id="{F0BAF49F-CAFD-4972-BA68-E3ADBA8B601B}"/>
+              </a:ext>
+            </a:extLst>
+          </p:cNvPr>
+          <p:cNvSpPr>
+            <a:spLocks xmlns:a="http://schemas.openxmlformats.org/drawingml/2006/main" noGrp="1"/>
+          </p:cNvSpPr>
+          <p:nvPr/>
+        </p:nvSpPr>
+        <p:spPr>
+          <a:xfrm xmlns:a="http://schemas.openxmlformats.org/drawingml/2006/main">
+            <a:off x="609600" y="838200"/>
+            <a:ext cx="10668000" cy="704850"/>
           </a:xfrm>
           <a:prstGeom xmlns:a="http://schemas.openxmlformats.org/drawingml/2006/main" prst="rect">
             <a:avLst/>
@@ -12086,10 +11586,10 @@
       </p:sp>
       <p:sp>
         <p:nvSpPr>
-          <p:cNvPr id="5" name="">
-            <a:extLst xmlns:a="http://schemas.openxmlformats.org/drawingml/2006/main">
-              <a:ext uri="{FF2B5EF4-FFF2-40B4-BE49-F238E27FC236}">
-                <a16:creationId xmlns:a16="http://schemas.microsoft.com/office/drawing/2014/main" id="{0DD1A881-928B-4CE3-97D8-B65157EBD8D5}"/>
+          <p:cNvPr id="4" name="">
+            <a:extLst xmlns:a="http://schemas.openxmlformats.org/drawingml/2006/main">
+              <a:ext uri="{FF2B5EF4-FFF2-40B4-BE49-F238E27FC236}">
+                <a16:creationId xmlns:a16="http://schemas.microsoft.com/office/drawing/2014/main" id="{5DEA5427-38C2-46C6-9D3E-9DE1087698FD}"/>
               </a:ext>
             </a:extLst>
           </p:cNvPr>
@@ -12136,10 +11636,10 @@
       </p:sp>
       <p:sp>
         <p:nvSpPr>
-          <p:cNvPr id="6" name="">
-            <a:extLst xmlns:a="http://schemas.openxmlformats.org/drawingml/2006/main">
-              <a:ext uri="{FF2B5EF4-FFF2-40B4-BE49-F238E27FC236}">
-                <a16:creationId xmlns:a16="http://schemas.microsoft.com/office/drawing/2014/main" id="{947A807E-9826-44BD-A488-88109AB26CA8}"/>
+          <p:cNvPr id="5" name="">
+            <a:extLst xmlns:a="http://schemas.openxmlformats.org/drawingml/2006/main">
+              <a:ext uri="{FF2B5EF4-FFF2-40B4-BE49-F238E27FC236}">
+                <a16:creationId xmlns:a16="http://schemas.microsoft.com/office/drawing/2014/main" id="{9A3CB36D-799F-4463-AB51-5851C921288E}"/>
               </a:ext>
             </a:extLst>
           </p:cNvPr>
@@ -12186,10 +11686,10 @@
       </p:sp>
       <p:sp>
         <p:nvSpPr>
-          <p:cNvPr id="7" name="">
-            <a:extLst xmlns:a="http://schemas.openxmlformats.org/drawingml/2006/main">
-              <a:ext uri="{FF2B5EF4-FFF2-40B4-BE49-F238E27FC236}">
-                <a16:creationId xmlns:a16="http://schemas.microsoft.com/office/drawing/2014/main" id="{78916D7E-7099-4435-B694-5ED49E9CB677}"/>
+          <p:cNvPr id="6" name="">
+            <a:extLst xmlns:a="http://schemas.openxmlformats.org/drawingml/2006/main">
+              <a:ext uri="{FF2B5EF4-FFF2-40B4-BE49-F238E27FC236}">
+                <a16:creationId xmlns:a16="http://schemas.microsoft.com/office/drawing/2014/main" id="{477BB3B8-37F7-47CE-BFF8-3706CC875FCA}"/>
               </a:ext>
             </a:extLst>
           </p:cNvPr>
@@ -12253,10 +11753,10 @@
       </p:sp>
       <p:sp>
         <p:nvSpPr>
-          <p:cNvPr id="8" name="">
-            <a:extLst xmlns:a="http://schemas.openxmlformats.org/drawingml/2006/main">
-              <a:ext uri="{FF2B5EF4-FFF2-40B4-BE49-F238E27FC236}">
-                <a16:creationId xmlns:a16="http://schemas.microsoft.com/office/drawing/2014/main" id="{0F97DE96-E710-4838-BD68-C97D02E40C37}"/>
+          <p:cNvPr id="7" name="">
+            <a:extLst xmlns:a="http://schemas.openxmlformats.org/drawingml/2006/main">
+              <a:ext uri="{FF2B5EF4-FFF2-40B4-BE49-F238E27FC236}">
+                <a16:creationId xmlns:a16="http://schemas.microsoft.com/office/drawing/2014/main" id="{E6EA87F3-9479-468D-A6CB-4107AB603106}"/>
               </a:ext>
             </a:extLst>
           </p:cNvPr>
@@ -12303,10 +11803,10 @@
       </p:sp>
       <p:sp>
         <p:nvSpPr>
-          <p:cNvPr id="9" name="">
-            <a:extLst xmlns:a="http://schemas.openxmlformats.org/drawingml/2006/main">
-              <a:ext uri="{FF2B5EF4-FFF2-40B4-BE49-F238E27FC236}">
-                <a16:creationId xmlns:a16="http://schemas.microsoft.com/office/drawing/2014/main" id="{EB01E539-8809-4F79-8254-2D0E6C778B0F}"/>
+          <p:cNvPr id="8" name="">
+            <a:extLst xmlns:a="http://schemas.openxmlformats.org/drawingml/2006/main">
+              <a:ext uri="{FF2B5EF4-FFF2-40B4-BE49-F238E27FC236}">
+                <a16:creationId xmlns:a16="http://schemas.microsoft.com/office/drawing/2014/main" id="{ED69307B-5F98-419F-A148-503E7AF6A9D2}"/>
               </a:ext>
             </a:extLst>
           </p:cNvPr>
@@ -12370,10 +11870,10 @@
       </p:sp>
       <p:sp>
         <p:nvSpPr>
-          <p:cNvPr id="10" name="">
-            <a:extLst xmlns:a="http://schemas.openxmlformats.org/drawingml/2006/main">
-              <a:ext uri="{FF2B5EF4-FFF2-40B4-BE49-F238E27FC236}">
-                <a16:creationId xmlns:a16="http://schemas.microsoft.com/office/drawing/2014/main" id="{C4B0AA13-CB69-496B-8F53-3DEBD38CF148}"/>
+          <p:cNvPr id="9" name="">
+            <a:extLst xmlns:a="http://schemas.openxmlformats.org/drawingml/2006/main">
+              <a:ext uri="{FF2B5EF4-FFF2-40B4-BE49-F238E27FC236}">
+                <a16:creationId xmlns:a16="http://schemas.microsoft.com/office/drawing/2014/main" id="{E03B633D-92AC-4B8A-A109-3768BADF939C}"/>
               </a:ext>
             </a:extLst>
           </p:cNvPr>
@@ -12405,10 +11905,10 @@
       </p:sp>
       <p:sp>
         <p:nvSpPr>
-          <p:cNvPr id="11" name="">
-            <a:extLst xmlns:a="http://schemas.openxmlformats.org/drawingml/2006/main">
-              <a:ext uri="{FF2B5EF4-FFF2-40B4-BE49-F238E27FC236}">
-                <a16:creationId xmlns:a16="http://schemas.microsoft.com/office/drawing/2014/main" id="{1C1550A1-0B33-453F-8D34-A24B865BAA67}"/>
+          <p:cNvPr id="10" name="">
+            <a:extLst xmlns:a="http://schemas.openxmlformats.org/drawingml/2006/main">
+              <a:ext uri="{FF2B5EF4-FFF2-40B4-BE49-F238E27FC236}">
+                <a16:creationId xmlns:a16="http://schemas.microsoft.com/office/drawing/2014/main" id="{825E4B35-2D9D-416C-BB5F-4FDBAF8D9A3B}"/>
               </a:ext>
             </a:extLst>
           </p:cNvPr>
@@ -12455,10 +11955,10 @@
       </p:sp>
       <p:sp>
         <p:nvSpPr>
-          <p:cNvPr id="12" name="">
-            <a:extLst xmlns:a="http://schemas.openxmlformats.org/drawingml/2006/main">
-              <a:ext uri="{FF2B5EF4-FFF2-40B4-BE49-F238E27FC236}">
-                <a16:creationId xmlns:a16="http://schemas.microsoft.com/office/drawing/2014/main" id="{BE290F64-1043-472D-BC11-591C8BC9301E}"/>
+          <p:cNvPr id="11" name="">
+            <a:extLst xmlns:a="http://schemas.openxmlformats.org/drawingml/2006/main">
+              <a:ext uri="{FF2B5EF4-FFF2-40B4-BE49-F238E27FC236}">
+                <a16:creationId xmlns:a16="http://schemas.microsoft.com/office/drawing/2014/main" id="{E24A8216-3D23-4B7F-AB32-9B101DD1B401}"/>
               </a:ext>
             </a:extLst>
           </p:cNvPr>
@@ -12505,10 +12005,10 @@
       </p:sp>
       <p:sp>
         <p:nvSpPr>
-          <p:cNvPr id="13" name="">
-            <a:extLst xmlns:a="http://schemas.openxmlformats.org/drawingml/2006/main">
-              <a:ext uri="{FF2B5EF4-FFF2-40B4-BE49-F238E27FC236}">
-                <a16:creationId xmlns:a16="http://schemas.microsoft.com/office/drawing/2014/main" id="{BE2E6740-4D4C-4337-A41D-9C534D8DE132}"/>
+          <p:cNvPr id="12" name="">
+            <a:extLst xmlns:a="http://schemas.openxmlformats.org/drawingml/2006/main">
+              <a:ext uri="{FF2B5EF4-FFF2-40B4-BE49-F238E27FC236}">
+                <a16:creationId xmlns:a16="http://schemas.microsoft.com/office/drawing/2014/main" id="{98411F8E-2DBC-49FB-95A8-72357A518DC2}"/>
               </a:ext>
             </a:extLst>
           </p:cNvPr>
@@ -12538,10 +12038,10 @@
       </p:sp>
       <p:sp>
         <p:nvSpPr>
-          <p:cNvPr id="14" name="">
-            <a:extLst xmlns:a="http://schemas.openxmlformats.org/drawingml/2006/main">
-              <a:ext uri="{FF2B5EF4-FFF2-40B4-BE49-F238E27FC236}">
-                <a16:creationId xmlns:a16="http://schemas.microsoft.com/office/drawing/2014/main" id="{DF3F407C-438C-4A7B-8283-E090DDBD9930}"/>
+          <p:cNvPr id="13" name="">
+            <a:extLst xmlns:a="http://schemas.openxmlformats.org/drawingml/2006/main">
+              <a:ext uri="{FF2B5EF4-FFF2-40B4-BE49-F238E27FC236}">
+                <a16:creationId xmlns:a16="http://schemas.microsoft.com/office/drawing/2014/main" id="{C41A849A-5F71-4675-A601-3FD6A98FCCAB}"/>
               </a:ext>
             </a:extLst>
           </p:cNvPr>
@@ -12588,10 +12088,10 @@
       </p:sp>
       <p:sp>
         <p:nvSpPr>
-          <p:cNvPr id="15" name="">
-            <a:extLst xmlns:a="http://schemas.openxmlformats.org/drawingml/2006/main">
-              <a:ext uri="{FF2B5EF4-FFF2-40B4-BE49-F238E27FC236}">
-                <a16:creationId xmlns:a16="http://schemas.microsoft.com/office/drawing/2014/main" id="{4FF24D35-AE83-4E8F-965C-FE8CC6FF9522}"/>
+          <p:cNvPr id="14" name="">
+            <a:extLst xmlns:a="http://schemas.openxmlformats.org/drawingml/2006/main">
+              <a:ext uri="{FF2B5EF4-FFF2-40B4-BE49-F238E27FC236}">
+                <a16:creationId xmlns:a16="http://schemas.microsoft.com/office/drawing/2014/main" id="{CBFED068-9921-4D2D-8A03-3ACBB0450503}"/>
               </a:ext>
             </a:extLst>
           </p:cNvPr>
@@ -12638,10 +12138,10 @@
       </p:sp>
       <p:sp>
         <p:nvSpPr>
-          <p:cNvPr id="16" name="">
-            <a:extLst xmlns:a="http://schemas.openxmlformats.org/drawingml/2006/main">
-              <a:ext uri="{FF2B5EF4-FFF2-40B4-BE49-F238E27FC236}">
-                <a16:creationId xmlns:a16="http://schemas.microsoft.com/office/drawing/2014/main" id="{B4499F40-2465-4891-956A-BE540BCA9BA5}"/>
+          <p:cNvPr id="15" name="">
+            <a:extLst xmlns:a="http://schemas.openxmlformats.org/drawingml/2006/main">
+              <a:ext uri="{FF2B5EF4-FFF2-40B4-BE49-F238E27FC236}">
+                <a16:creationId xmlns:a16="http://schemas.microsoft.com/office/drawing/2014/main" id="{ED239476-2F4C-4167-A057-01192E73BC85}"/>
               </a:ext>
             </a:extLst>
           </p:cNvPr>
@@ -12671,10 +12171,10 @@
       </p:sp>
       <p:sp>
         <p:nvSpPr>
-          <p:cNvPr id="17" name="">
-            <a:extLst xmlns:a="http://schemas.openxmlformats.org/drawingml/2006/main">
-              <a:ext uri="{FF2B5EF4-FFF2-40B4-BE49-F238E27FC236}">
-                <a16:creationId xmlns:a16="http://schemas.microsoft.com/office/drawing/2014/main" id="{B3577D3D-37DF-42A8-9BE5-12CB2D54C4D2}"/>
+          <p:cNvPr id="16" name="">
+            <a:extLst xmlns:a="http://schemas.openxmlformats.org/drawingml/2006/main">
+              <a:ext uri="{FF2B5EF4-FFF2-40B4-BE49-F238E27FC236}">
+                <a16:creationId xmlns:a16="http://schemas.microsoft.com/office/drawing/2014/main" id="{6BE2B4F1-D240-4A03-A057-BDB342249B0F}"/>
               </a:ext>
             </a:extLst>
           </p:cNvPr>
@@ -12721,10 +12221,10 @@
       </p:sp>
       <p:sp>
         <p:nvSpPr>
-          <p:cNvPr id="18" name="">
-            <a:extLst xmlns:a="http://schemas.openxmlformats.org/drawingml/2006/main">
-              <a:ext uri="{FF2B5EF4-FFF2-40B4-BE49-F238E27FC236}">
-                <a16:creationId xmlns:a16="http://schemas.microsoft.com/office/drawing/2014/main" id="{5E1C13CD-9C84-436D-B7C6-1F0D67B439CF}"/>
+          <p:cNvPr id="17" name="">
+            <a:extLst xmlns:a="http://schemas.openxmlformats.org/drawingml/2006/main">
+              <a:ext uri="{FF2B5EF4-FFF2-40B4-BE49-F238E27FC236}">
+                <a16:creationId xmlns:a16="http://schemas.microsoft.com/office/drawing/2014/main" id="{DEC21339-C4E5-4921-A000-4E4C12087819}"/>
               </a:ext>
             </a:extLst>
           </p:cNvPr>
@@ -12772,7 +12272,7 @@
     </p:spTree>
     <p:extLst>
       <p:ext uri="{BB962C8B-B14F-4D97-AF65-F5344CB8AC3E}">
-        <p14:creationId xmlns:p14="http://schemas.microsoft.com/office/powerpoint/2010/main" val="1781204462"/>
+        <p14:creationId xmlns:p14="http://schemas.microsoft.com/office/powerpoint/2010/main" val="1446781679"/>
       </p:ext>
     </p:extLst>
   </p:cSld>
@@ -12800,10 +12300,10 @@
       </p:grpSpPr>
       <p:sp>
         <p:nvSpPr>
-          <p:cNvPr id="27" name="">
-            <a:extLst xmlns:a="http://schemas.openxmlformats.org/drawingml/2006/main">
-              <a:ext uri="{FF2B5EF4-FFF2-40B4-BE49-F238E27FC236}">
-                <a16:creationId xmlns:a16="http://schemas.microsoft.com/office/drawing/2014/main" id="{194D89BC-6EEA-4F23-9F0B-DC59147FC830}"/>
+          <p:cNvPr id="25" name="">
+            <a:extLst xmlns:a="http://schemas.openxmlformats.org/drawingml/2006/main">
+              <a:ext uri="{FF2B5EF4-FFF2-40B4-BE49-F238E27FC236}">
+                <a16:creationId xmlns:a16="http://schemas.microsoft.com/office/drawing/2014/main" id="{D491065D-1B43-479A-8158-045CBD9D7C09}"/>
               </a:ext>
             </a:extLst>
           </p:cNvPr>
@@ -12853,7 +12353,7 @@
           <p:cNvPr id="2" name="">
             <a:extLst xmlns:a="http://schemas.openxmlformats.org/drawingml/2006/main">
               <a:ext uri="{FF2B5EF4-FFF2-40B4-BE49-F238E27FC236}">
-                <a16:creationId xmlns:a16="http://schemas.microsoft.com/office/drawing/2014/main" id="{BEB1618F-36EB-4E74-9028-B8638B1CDB02}"/>
+                <a16:creationId xmlns:a16="http://schemas.microsoft.com/office/drawing/2014/main" id="{3720FE96-8D7D-460C-8E09-14C37336459E}"/>
               </a:ext>
             </a:extLst>
           </p:cNvPr>
@@ -12884,69 +12384,19 @@
           <p:cNvPr id="3" name="">
             <a:extLst xmlns:a="http://schemas.openxmlformats.org/drawingml/2006/main">
               <a:ext uri="{FF2B5EF4-FFF2-40B4-BE49-F238E27FC236}">
-                <a16:creationId xmlns:a16="http://schemas.microsoft.com/office/drawing/2014/main" id="{62C25444-EB17-441A-9783-8B1DFD4B780B}"/>
-              </a:ext>
-            </a:extLst>
-          </p:cNvPr>
-          <p:cNvSpPr>
-            <a:spLocks xmlns:a="http://schemas.openxmlformats.org/drawingml/2006/main" noGrp="1"/>
-          </p:cNvSpPr>
-          <p:nvPr/>
-        </p:nvSpPr>
-        <p:spPr>
-          <a:xfrm xmlns:a="http://schemas.openxmlformats.org/drawingml/2006/main">
-            <a:off x="609600" y="800100"/>
-            <a:ext cx="3429000" cy="228600"/>
-          </a:xfrm>
-          <a:prstGeom xmlns:a="http://schemas.openxmlformats.org/drawingml/2006/main" prst="rect">
-            <a:avLst/>
-          </a:prstGeom>
-          <a:noFill xmlns:a="http://schemas.openxmlformats.org/drawingml/2006/main"/>
-          <a:ln xmlns:a="http://schemas.openxmlformats.org/drawingml/2006/main" w="0">
-            <a:noFill/>
-            <a:prstDash val="solid"/>
-          </a:ln>
-        </p:spPr>
-        <p:txBody>
-          <a:bodyPr xmlns:a="http://schemas.openxmlformats.org/drawingml/2006/main"/>
-          <a:lstStyle xmlns:a="http://schemas.openxmlformats.org/drawingml/2006/main"/>
-          <a:p xmlns:a="http://schemas.openxmlformats.org/drawingml/2006/main">
-            <a:pPr algn="l">
-              <a:defRPr sz="975" b="1">
-                <a:solidFill>
-                  <a:srgbClr val="E63888"/>
-                </a:solidFill>
-              </a:defRPr>
-            </a:pPr>
-            <a:r>
-              <a:rPr sz="975" b="1">
-                <a:solidFill>
-                  <a:srgbClr val="E63888"/>
-                </a:solidFill>
-              </a:rPr>
-              <a:t>THE SAME JOB</a:t>
-            </a:r>
-          </a:p>
-        </p:txBody>
-      </p:sp>
-      <p:sp>
-        <p:nvSpPr>
-          <p:cNvPr id="4" name="">
-            <a:extLst xmlns:a="http://schemas.openxmlformats.org/drawingml/2006/main">
-              <a:ext uri="{FF2B5EF4-FFF2-40B4-BE49-F238E27FC236}">
-                <a16:creationId xmlns:a16="http://schemas.microsoft.com/office/drawing/2014/main" id="{EFEA6E00-9D0E-4D6D-9C49-88B340D852E0}"/>
-              </a:ext>
-            </a:extLst>
-          </p:cNvPr>
-          <p:cNvSpPr>
-            <a:spLocks xmlns:a="http://schemas.openxmlformats.org/drawingml/2006/main" noGrp="1"/>
-          </p:cNvSpPr>
-          <p:nvPr/>
-        </p:nvSpPr>
-        <p:spPr>
-          <a:xfrm xmlns:a="http://schemas.openxmlformats.org/drawingml/2006/main">
-            <a:off x="609600" y="1066800"/>
-            <a:ext cx="10668000" cy="647700"/>
+                <a16:creationId xmlns:a16="http://schemas.microsoft.com/office/drawing/2014/main" id="{161ADD6C-5385-4FDE-96DD-FDE55D821C73}"/>
+              </a:ext>
+            </a:extLst>
+          </p:cNvPr>
+          <p:cNvSpPr>
+            <a:spLocks xmlns:a="http://schemas.openxmlformats.org/drawingml/2006/main" noGrp="1"/>
+          </p:cNvSpPr>
+          <p:nvPr/>
+        </p:nvSpPr>
+        <p:spPr>
+          <a:xfrm xmlns:a="http://schemas.openxmlformats.org/drawingml/2006/main">
+            <a:off x="609600" y="838200"/>
+            <a:ext cx="10668000" cy="704850"/>
           </a:xfrm>
           <a:prstGeom xmlns:a="http://schemas.openxmlformats.org/drawingml/2006/main" prst="rect">
             <a:avLst/>
@@ -12974,17 +12424,17 @@
                   <a:srgbClr val="26232A"/>
                 </a:solidFill>
               </a:rPr>
-              <a:t>One ABM job across all six levels</a:t>
-            </a:r>
-          </a:p>
-        </p:txBody>
-      </p:sp>
-      <p:sp>
-        <p:nvSpPr>
-          <p:cNvPr id="5" name="">
-            <a:extLst xmlns:a="http://schemas.openxmlformats.org/drawingml/2006/main">
-              <a:ext uri="{FF2B5EF4-FFF2-40B4-BE49-F238E27FC236}">
-                <a16:creationId xmlns:a16="http://schemas.microsoft.com/office/drawing/2014/main" id="{A1CA2AE5-3E09-4E0D-B30B-75C7505A8206}"/>
+              <a:t>Keep one ABM campaign current across all six levels.</a:t>
+            </a:r>
+          </a:p>
+        </p:txBody>
+      </p:sp>
+      <p:sp>
+        <p:nvSpPr>
+          <p:cNvPr id="4" name="">
+            <a:extLst xmlns:a="http://schemas.openxmlformats.org/drawingml/2006/main">
+              <a:ext uri="{FF2B5EF4-FFF2-40B4-BE49-F238E27FC236}">
+                <a16:creationId xmlns:a16="http://schemas.microsoft.com/office/drawing/2014/main" id="{EE132526-511A-41C4-9CE3-7E62AA52A29A}"/>
               </a:ext>
             </a:extLst>
           </p:cNvPr>
@@ -13031,10 +12481,10 @@
       </p:sp>
       <p:sp>
         <p:nvSpPr>
-          <p:cNvPr id="6" name="">
-            <a:extLst xmlns:a="http://schemas.openxmlformats.org/drawingml/2006/main">
-              <a:ext uri="{FF2B5EF4-FFF2-40B4-BE49-F238E27FC236}">
-                <a16:creationId xmlns:a16="http://schemas.microsoft.com/office/drawing/2014/main" id="{E1FCA30B-8395-4BB5-8D8C-DB102D1CED69}"/>
+          <p:cNvPr id="5" name="">
+            <a:extLst xmlns:a="http://schemas.openxmlformats.org/drawingml/2006/main">
+              <a:ext uri="{FF2B5EF4-FFF2-40B4-BE49-F238E27FC236}">
+                <a16:creationId xmlns:a16="http://schemas.microsoft.com/office/drawing/2014/main" id="{5A2C4CD9-CF34-44C5-A79A-8C929000594C}"/>
               </a:ext>
             </a:extLst>
           </p:cNvPr>
@@ -13081,60 +12531,10 @@
       </p:sp>
       <p:sp>
         <p:nvSpPr>
-          <p:cNvPr id="7" name="">
-            <a:extLst xmlns:a="http://schemas.openxmlformats.org/drawingml/2006/main">
-              <a:ext uri="{FF2B5EF4-FFF2-40B4-BE49-F238E27FC236}">
-                <a16:creationId xmlns:a16="http://schemas.microsoft.com/office/drawing/2014/main" id="{5FAD2447-B4D2-4A2C-A540-926745A03180}"/>
-              </a:ext>
-            </a:extLst>
-          </p:cNvPr>
-          <p:cNvSpPr>
-            <a:spLocks xmlns:a="http://schemas.openxmlformats.org/drawingml/2006/main" noGrp="1"/>
-          </p:cNvSpPr>
-          <p:nvPr/>
-        </p:nvSpPr>
-        <p:spPr>
-          <a:xfrm xmlns:a="http://schemas.openxmlformats.org/drawingml/2006/main">
-            <a:off x="666750" y="1790700"/>
-            <a:ext cx="10858500" cy="381000"/>
-          </a:xfrm>
-          <a:prstGeom xmlns:a="http://schemas.openxmlformats.org/drawingml/2006/main" prst="rect">
-            <a:avLst/>
-          </a:prstGeom>
-          <a:noFill xmlns:a="http://schemas.openxmlformats.org/drawingml/2006/main"/>
-          <a:ln xmlns:a="http://schemas.openxmlformats.org/drawingml/2006/main" w="0">
-            <a:noFill/>
-            <a:prstDash val="solid"/>
-          </a:ln>
-        </p:spPr>
-        <p:txBody>
-          <a:bodyPr xmlns:a="http://schemas.openxmlformats.org/drawingml/2006/main"/>
-          <a:lstStyle xmlns:a="http://schemas.openxmlformats.org/drawingml/2006/main"/>
-          <a:p xmlns:a="http://schemas.openxmlformats.org/drawingml/2006/main">
-            <a:pPr algn="l">
-              <a:defRPr sz="1800" b="1">
-                <a:solidFill>
-                  <a:srgbClr val="E63888"/>
-                </a:solidFill>
-              </a:defRPr>
-            </a:pPr>
-            <a:r>
-              <a:rPr sz="1800" b="1">
-                <a:solidFill>
-                  <a:srgbClr val="E63888"/>
-                </a:solidFill>
-              </a:rPr>
-              <a:t>Keep North Peak's Alder campaign current.</a:t>
-            </a:r>
-          </a:p>
-        </p:txBody>
-      </p:sp>
-      <p:sp>
-        <p:nvSpPr>
-          <p:cNvPr id="8" name="">
-            <a:extLst xmlns:a="http://schemas.openxmlformats.org/drawingml/2006/main">
-              <a:ext uri="{FF2B5EF4-FFF2-40B4-BE49-F238E27FC236}">
-                <a16:creationId xmlns:a16="http://schemas.microsoft.com/office/drawing/2014/main" id="{CF3240E4-DBBA-42ED-AE57-E30C6C22798C}"/>
+          <p:cNvPr id="6" name="">
+            <a:extLst xmlns:a="http://schemas.openxmlformats.org/drawingml/2006/main">
+              <a:ext uri="{FF2B5EF4-FFF2-40B4-BE49-F238E27FC236}">
+                <a16:creationId xmlns:a16="http://schemas.microsoft.com/office/drawing/2014/main" id="{4F79D4E3-7716-464E-BEB4-E9916AA1D5E2}"/>
               </a:ext>
             </a:extLst>
           </p:cNvPr>
@@ -13166,10 +12566,10 @@
       </p:sp>
       <p:sp>
         <p:nvSpPr>
-          <p:cNvPr id="9" name="">
-            <a:extLst xmlns:a="http://schemas.openxmlformats.org/drawingml/2006/main">
-              <a:ext uri="{FF2B5EF4-FFF2-40B4-BE49-F238E27FC236}">
-                <a16:creationId xmlns:a16="http://schemas.microsoft.com/office/drawing/2014/main" id="{20291393-2907-4643-9F25-8A1A5748AED1}"/>
+          <p:cNvPr id="7" name="">
+            <a:extLst xmlns:a="http://schemas.openxmlformats.org/drawingml/2006/main">
+              <a:ext uri="{FF2B5EF4-FFF2-40B4-BE49-F238E27FC236}">
+                <a16:creationId xmlns:a16="http://schemas.microsoft.com/office/drawing/2014/main" id="{03D347CE-1DCB-4678-9977-C5622BDB779E}"/>
               </a:ext>
             </a:extLst>
           </p:cNvPr>
@@ -13216,10 +12616,10 @@
       </p:sp>
       <p:sp>
         <p:nvSpPr>
-          <p:cNvPr id="10" name="">
-            <a:extLst xmlns:a="http://schemas.openxmlformats.org/drawingml/2006/main">
-              <a:ext uri="{FF2B5EF4-FFF2-40B4-BE49-F238E27FC236}">
-                <a16:creationId xmlns:a16="http://schemas.microsoft.com/office/drawing/2014/main" id="{2B329411-0090-4FEE-AE2E-4442FE56060C}"/>
+          <p:cNvPr id="8" name="">
+            <a:extLst xmlns:a="http://schemas.openxmlformats.org/drawingml/2006/main">
+              <a:ext uri="{FF2B5EF4-FFF2-40B4-BE49-F238E27FC236}">
+                <a16:creationId xmlns:a16="http://schemas.microsoft.com/office/drawing/2014/main" id="{A49B33AE-F7EE-43A9-B335-1D8694B3DECE}"/>
               </a:ext>
             </a:extLst>
           </p:cNvPr>
@@ -13266,10 +12666,10 @@
       </p:sp>
       <p:sp>
         <p:nvSpPr>
-          <p:cNvPr id="11" name="">
-            <a:extLst xmlns:a="http://schemas.openxmlformats.org/drawingml/2006/main">
-              <a:ext uri="{FF2B5EF4-FFF2-40B4-BE49-F238E27FC236}">
-                <a16:creationId xmlns:a16="http://schemas.microsoft.com/office/drawing/2014/main" id="{85CF7A73-6CAD-4780-A50D-75D159F2D517}"/>
+          <p:cNvPr id="9" name="">
+            <a:extLst xmlns:a="http://schemas.openxmlformats.org/drawingml/2006/main">
+              <a:ext uri="{FF2B5EF4-FFF2-40B4-BE49-F238E27FC236}">
+                <a16:creationId xmlns:a16="http://schemas.microsoft.com/office/drawing/2014/main" id="{BC1BC67F-CFDB-46E8-A0B3-1036B0400E61}"/>
               </a:ext>
             </a:extLst>
           </p:cNvPr>
@@ -13301,10 +12701,10 @@
       </p:sp>
       <p:sp>
         <p:nvSpPr>
-          <p:cNvPr id="12" name="">
-            <a:extLst xmlns:a="http://schemas.openxmlformats.org/drawingml/2006/main">
-              <a:ext uri="{FF2B5EF4-FFF2-40B4-BE49-F238E27FC236}">
-                <a16:creationId xmlns:a16="http://schemas.microsoft.com/office/drawing/2014/main" id="{E82EE845-0F84-4A0D-9E23-67FB5AC74E0A}"/>
+          <p:cNvPr id="10" name="">
+            <a:extLst xmlns:a="http://schemas.openxmlformats.org/drawingml/2006/main">
+              <a:ext uri="{FF2B5EF4-FFF2-40B4-BE49-F238E27FC236}">
+                <a16:creationId xmlns:a16="http://schemas.microsoft.com/office/drawing/2014/main" id="{E55CDFD0-202F-4F8A-8BC7-A4023F4EE15E}"/>
               </a:ext>
             </a:extLst>
           </p:cNvPr>
@@ -13351,10 +12751,10 @@
       </p:sp>
       <p:sp>
         <p:nvSpPr>
-          <p:cNvPr id="13" name="">
-            <a:extLst xmlns:a="http://schemas.openxmlformats.org/drawingml/2006/main">
-              <a:ext uri="{FF2B5EF4-FFF2-40B4-BE49-F238E27FC236}">
-                <a16:creationId xmlns:a16="http://schemas.microsoft.com/office/drawing/2014/main" id="{8D474AF9-E68C-47B1-80F9-234840AFB4D5}"/>
+          <p:cNvPr id="11" name="">
+            <a:extLst xmlns:a="http://schemas.openxmlformats.org/drawingml/2006/main">
+              <a:ext uri="{FF2B5EF4-FFF2-40B4-BE49-F238E27FC236}">
+                <a16:creationId xmlns:a16="http://schemas.microsoft.com/office/drawing/2014/main" id="{BEFDC4EC-4BC6-4372-B571-01E12D2A34C5}"/>
               </a:ext>
             </a:extLst>
           </p:cNvPr>
@@ -13401,10 +12801,10 @@
       </p:sp>
       <p:sp>
         <p:nvSpPr>
-          <p:cNvPr id="14" name="">
-            <a:extLst xmlns:a="http://schemas.openxmlformats.org/drawingml/2006/main">
-              <a:ext uri="{FF2B5EF4-FFF2-40B4-BE49-F238E27FC236}">
-                <a16:creationId xmlns:a16="http://schemas.microsoft.com/office/drawing/2014/main" id="{CA3D9A1F-FEAE-4EE4-A695-225537D7CFB2}"/>
+          <p:cNvPr id="12" name="">
+            <a:extLst xmlns:a="http://schemas.openxmlformats.org/drawingml/2006/main">
+              <a:ext uri="{FF2B5EF4-FFF2-40B4-BE49-F238E27FC236}">
+                <a16:creationId xmlns:a16="http://schemas.microsoft.com/office/drawing/2014/main" id="{ED25CFFD-688E-43A6-BA62-D438B8AF74BF}"/>
               </a:ext>
             </a:extLst>
           </p:cNvPr>
@@ -13436,10 +12836,10 @@
       </p:sp>
       <p:sp>
         <p:nvSpPr>
-          <p:cNvPr id="15" name="">
-            <a:extLst xmlns:a="http://schemas.openxmlformats.org/drawingml/2006/main">
-              <a:ext uri="{FF2B5EF4-FFF2-40B4-BE49-F238E27FC236}">
-                <a16:creationId xmlns:a16="http://schemas.microsoft.com/office/drawing/2014/main" id="{1EE306FB-1EC6-49C5-B18D-40966F5BF46D}"/>
+          <p:cNvPr id="13" name="">
+            <a:extLst xmlns:a="http://schemas.openxmlformats.org/drawingml/2006/main">
+              <a:ext uri="{FF2B5EF4-FFF2-40B4-BE49-F238E27FC236}">
+                <a16:creationId xmlns:a16="http://schemas.microsoft.com/office/drawing/2014/main" id="{6AFE496B-C134-45A7-9E23-E33D7099FCA0}"/>
               </a:ext>
             </a:extLst>
           </p:cNvPr>
@@ -13486,10 +12886,10 @@
       </p:sp>
       <p:sp>
         <p:nvSpPr>
-          <p:cNvPr id="16" name="">
-            <a:extLst xmlns:a="http://schemas.openxmlformats.org/drawingml/2006/main">
-              <a:ext uri="{FF2B5EF4-FFF2-40B4-BE49-F238E27FC236}">
-                <a16:creationId xmlns:a16="http://schemas.microsoft.com/office/drawing/2014/main" id="{90F0BC70-70A0-45F4-B4F3-111748798EA0}"/>
+          <p:cNvPr id="14" name="">
+            <a:extLst xmlns:a="http://schemas.openxmlformats.org/drawingml/2006/main">
+              <a:ext uri="{FF2B5EF4-FFF2-40B4-BE49-F238E27FC236}">
+                <a16:creationId xmlns:a16="http://schemas.microsoft.com/office/drawing/2014/main" id="{CB3F4E09-B349-4D68-8973-A7910ED2C17F}"/>
               </a:ext>
             </a:extLst>
           </p:cNvPr>
@@ -13536,10 +12936,10 @@
       </p:sp>
       <p:sp>
         <p:nvSpPr>
-          <p:cNvPr id="17" name="">
-            <a:extLst xmlns:a="http://schemas.openxmlformats.org/drawingml/2006/main">
-              <a:ext uri="{FF2B5EF4-FFF2-40B4-BE49-F238E27FC236}">
-                <a16:creationId xmlns:a16="http://schemas.microsoft.com/office/drawing/2014/main" id="{C7680BFB-A135-45D9-9C13-1C7B443DEC47}"/>
+          <p:cNvPr id="15" name="">
+            <a:extLst xmlns:a="http://schemas.openxmlformats.org/drawingml/2006/main">
+              <a:ext uri="{FF2B5EF4-FFF2-40B4-BE49-F238E27FC236}">
+                <a16:creationId xmlns:a16="http://schemas.microsoft.com/office/drawing/2014/main" id="{6A12685E-6F0E-4219-944D-91A7FB1F5544}"/>
               </a:ext>
             </a:extLst>
           </p:cNvPr>
@@ -13571,10 +12971,10 @@
       </p:sp>
       <p:sp>
         <p:nvSpPr>
-          <p:cNvPr id="18" name="">
-            <a:extLst xmlns:a="http://schemas.openxmlformats.org/drawingml/2006/main">
-              <a:ext uri="{FF2B5EF4-FFF2-40B4-BE49-F238E27FC236}">
-                <a16:creationId xmlns:a16="http://schemas.microsoft.com/office/drawing/2014/main" id="{4FBBFDF8-6461-4EBF-8A6C-3452A18DEBF7}"/>
+          <p:cNvPr id="16" name="">
+            <a:extLst xmlns:a="http://schemas.openxmlformats.org/drawingml/2006/main">
+              <a:ext uri="{FF2B5EF4-FFF2-40B4-BE49-F238E27FC236}">
+                <a16:creationId xmlns:a16="http://schemas.microsoft.com/office/drawing/2014/main" id="{86C6BE37-12DB-44FB-A24C-7D53AF3718A5}"/>
               </a:ext>
             </a:extLst>
           </p:cNvPr>
@@ -13621,10 +13021,10 @@
       </p:sp>
       <p:sp>
         <p:nvSpPr>
-          <p:cNvPr id="19" name="">
-            <a:extLst xmlns:a="http://schemas.openxmlformats.org/drawingml/2006/main">
-              <a:ext uri="{FF2B5EF4-FFF2-40B4-BE49-F238E27FC236}">
-                <a16:creationId xmlns:a16="http://schemas.microsoft.com/office/drawing/2014/main" id="{F8340505-60D9-4315-8027-8693915784C7}"/>
+          <p:cNvPr id="17" name="">
+            <a:extLst xmlns:a="http://schemas.openxmlformats.org/drawingml/2006/main">
+              <a:ext uri="{FF2B5EF4-FFF2-40B4-BE49-F238E27FC236}">
+                <a16:creationId xmlns:a16="http://schemas.microsoft.com/office/drawing/2014/main" id="{DA10CE64-62E4-4026-898D-646C792F9948}"/>
               </a:ext>
             </a:extLst>
           </p:cNvPr>
@@ -13671,10 +13071,10 @@
       </p:sp>
       <p:sp>
         <p:nvSpPr>
-          <p:cNvPr id="20" name="">
-            <a:extLst xmlns:a="http://schemas.openxmlformats.org/drawingml/2006/main">
-              <a:ext uri="{FF2B5EF4-FFF2-40B4-BE49-F238E27FC236}">
-                <a16:creationId xmlns:a16="http://schemas.microsoft.com/office/drawing/2014/main" id="{58C29829-A7B1-4BB9-AD5A-258886B45AEF}"/>
+          <p:cNvPr id="18" name="">
+            <a:extLst xmlns:a="http://schemas.openxmlformats.org/drawingml/2006/main">
+              <a:ext uri="{FF2B5EF4-FFF2-40B4-BE49-F238E27FC236}">
+                <a16:creationId xmlns:a16="http://schemas.microsoft.com/office/drawing/2014/main" id="{E3EEFC99-7470-44E3-8149-40D8D0E1A4C1}"/>
               </a:ext>
             </a:extLst>
           </p:cNvPr>
@@ -13706,10 +13106,10 @@
       </p:sp>
       <p:sp>
         <p:nvSpPr>
-          <p:cNvPr id="21" name="">
-            <a:extLst xmlns:a="http://schemas.openxmlformats.org/drawingml/2006/main">
-              <a:ext uri="{FF2B5EF4-FFF2-40B4-BE49-F238E27FC236}">
-                <a16:creationId xmlns:a16="http://schemas.microsoft.com/office/drawing/2014/main" id="{A97F80E9-1034-484D-9641-FA434AEDEE95}"/>
+          <p:cNvPr id="19" name="">
+            <a:extLst xmlns:a="http://schemas.openxmlformats.org/drawingml/2006/main">
+              <a:ext uri="{FF2B5EF4-FFF2-40B4-BE49-F238E27FC236}">
+                <a16:creationId xmlns:a16="http://schemas.microsoft.com/office/drawing/2014/main" id="{BABF31E0-0780-4AEF-92AB-91B3678CA448}"/>
               </a:ext>
             </a:extLst>
           </p:cNvPr>
@@ -13756,10 +13156,10 @@
       </p:sp>
       <p:sp>
         <p:nvSpPr>
-          <p:cNvPr id="22" name="">
-            <a:extLst xmlns:a="http://schemas.openxmlformats.org/drawingml/2006/main">
-              <a:ext uri="{FF2B5EF4-FFF2-40B4-BE49-F238E27FC236}">
-                <a16:creationId xmlns:a16="http://schemas.microsoft.com/office/drawing/2014/main" id="{6E67BF40-5C59-473C-9997-0E10C459C7C4}"/>
+          <p:cNvPr id="20" name="">
+            <a:extLst xmlns:a="http://schemas.openxmlformats.org/drawingml/2006/main">
+              <a:ext uri="{FF2B5EF4-FFF2-40B4-BE49-F238E27FC236}">
+                <a16:creationId xmlns:a16="http://schemas.microsoft.com/office/drawing/2014/main" id="{D0C31E6B-5CF4-49CB-B38C-5AAD32F88072}"/>
               </a:ext>
             </a:extLst>
           </p:cNvPr>
@@ -13806,10 +13206,10 @@
       </p:sp>
       <p:sp>
         <p:nvSpPr>
-          <p:cNvPr id="23" name="">
-            <a:extLst xmlns:a="http://schemas.openxmlformats.org/drawingml/2006/main">
-              <a:ext uri="{FF2B5EF4-FFF2-40B4-BE49-F238E27FC236}">
-                <a16:creationId xmlns:a16="http://schemas.microsoft.com/office/drawing/2014/main" id="{7EA0648D-82B9-442E-89B4-27D46229143A}"/>
+          <p:cNvPr id="21" name="">
+            <a:extLst xmlns:a="http://schemas.openxmlformats.org/drawingml/2006/main">
+              <a:ext uri="{FF2B5EF4-FFF2-40B4-BE49-F238E27FC236}">
+                <a16:creationId xmlns:a16="http://schemas.microsoft.com/office/drawing/2014/main" id="{81340E85-B9C8-4BE5-B6DA-D14D40A4D716}"/>
               </a:ext>
             </a:extLst>
           </p:cNvPr>
@@ -13841,10 +13241,10 @@
       </p:sp>
       <p:sp>
         <p:nvSpPr>
-          <p:cNvPr id="24" name="">
-            <a:extLst xmlns:a="http://schemas.openxmlformats.org/drawingml/2006/main">
-              <a:ext uri="{FF2B5EF4-FFF2-40B4-BE49-F238E27FC236}">
-                <a16:creationId xmlns:a16="http://schemas.microsoft.com/office/drawing/2014/main" id="{9AC648AE-4AD5-4FB3-ACAB-7634F4B37FE3}"/>
+          <p:cNvPr id="22" name="">
+            <a:extLst xmlns:a="http://schemas.openxmlformats.org/drawingml/2006/main">
+              <a:ext uri="{FF2B5EF4-FFF2-40B4-BE49-F238E27FC236}">
+                <a16:creationId xmlns:a16="http://schemas.microsoft.com/office/drawing/2014/main" id="{892C5338-D95A-4D8C-97A7-AB757653BC9C}"/>
               </a:ext>
             </a:extLst>
           </p:cNvPr>
@@ -13891,10 +13291,10 @@
       </p:sp>
       <p:sp>
         <p:nvSpPr>
-          <p:cNvPr id="25" name="">
-            <a:extLst xmlns:a="http://schemas.openxmlformats.org/drawingml/2006/main">
-              <a:ext uri="{FF2B5EF4-FFF2-40B4-BE49-F238E27FC236}">
-                <a16:creationId xmlns:a16="http://schemas.microsoft.com/office/drawing/2014/main" id="{92719139-70DF-45AA-A7EC-BCDEE3096BBE}"/>
+          <p:cNvPr id="23" name="">
+            <a:extLst xmlns:a="http://schemas.openxmlformats.org/drawingml/2006/main">
+              <a:ext uri="{FF2B5EF4-FFF2-40B4-BE49-F238E27FC236}">
+                <a16:creationId xmlns:a16="http://schemas.microsoft.com/office/drawing/2014/main" id="{3F57AECE-AD4E-49BC-A054-F126268C4152}"/>
               </a:ext>
             </a:extLst>
           </p:cNvPr>
@@ -13941,10 +13341,10 @@
       </p:sp>
       <p:sp>
         <p:nvSpPr>
-          <p:cNvPr id="26" name="">
-            <a:extLst xmlns:a="http://schemas.openxmlformats.org/drawingml/2006/main">
-              <a:ext uri="{FF2B5EF4-FFF2-40B4-BE49-F238E27FC236}">
-                <a16:creationId xmlns:a16="http://schemas.microsoft.com/office/drawing/2014/main" id="{E2AEA0B0-8A4E-4771-9EC4-F81948A01D84}"/>
+          <p:cNvPr id="24" name="">
+            <a:extLst xmlns:a="http://schemas.openxmlformats.org/drawingml/2006/main">
+              <a:ext uri="{FF2B5EF4-FFF2-40B4-BE49-F238E27FC236}">
+                <a16:creationId xmlns:a16="http://schemas.microsoft.com/office/drawing/2014/main" id="{25275628-632A-4026-963C-9445CCB0907C}"/>
               </a:ext>
             </a:extLst>
           </p:cNvPr>
@@ -13992,7 +13392,7 @@
     </p:spTree>
     <p:extLst>
       <p:ext uri="{BB962C8B-B14F-4D97-AF65-F5344CB8AC3E}">
-        <p14:creationId xmlns:p14="http://schemas.microsoft.com/office/powerpoint/2010/main" val="111716054"/>
+        <p14:creationId xmlns:p14="http://schemas.microsoft.com/office/powerpoint/2010/main" val="70778352"/>
       </p:ext>
     </p:extLst>
   </p:cSld>
@@ -14020,10 +13420,10 @@
       </p:grpSpPr>
       <p:sp>
         <p:nvSpPr>
-          <p:cNvPr id="14" name="">
-            <a:extLst xmlns:a="http://schemas.openxmlformats.org/drawingml/2006/main">
-              <a:ext uri="{FF2B5EF4-FFF2-40B4-BE49-F238E27FC236}">
-                <a16:creationId xmlns:a16="http://schemas.microsoft.com/office/drawing/2014/main" id="{F2A5A3E4-528F-4C53-8A9E-947DEA214383}"/>
+          <p:cNvPr id="13" name="">
+            <a:extLst xmlns:a="http://schemas.openxmlformats.org/drawingml/2006/main">
+              <a:ext uri="{FF2B5EF4-FFF2-40B4-BE49-F238E27FC236}">
+                <a16:creationId xmlns:a16="http://schemas.microsoft.com/office/drawing/2014/main" id="{9DD91164-3F31-467A-A31E-D48DD822C376}"/>
               </a:ext>
             </a:extLst>
           </p:cNvPr>
@@ -14073,7 +13473,7 @@
           <p:cNvPr id="2" name="">
             <a:extLst xmlns:a="http://schemas.openxmlformats.org/drawingml/2006/main">
               <a:ext uri="{FF2B5EF4-FFF2-40B4-BE49-F238E27FC236}">
-                <a16:creationId xmlns:a16="http://schemas.microsoft.com/office/drawing/2014/main" id="{3B61B889-8562-408F-95D2-37840AE2528F}"/>
+                <a16:creationId xmlns:a16="http://schemas.microsoft.com/office/drawing/2014/main" id="{0D091ACB-D162-43E4-BD73-2013D638FE61}"/>
               </a:ext>
             </a:extLst>
           </p:cNvPr>
@@ -14104,69 +13504,19 @@
           <p:cNvPr id="3" name="">
             <a:extLst xmlns:a="http://schemas.openxmlformats.org/drawingml/2006/main">
               <a:ext uri="{FF2B5EF4-FFF2-40B4-BE49-F238E27FC236}">
-                <a16:creationId xmlns:a16="http://schemas.microsoft.com/office/drawing/2014/main" id="{C66FDA9B-9493-4106-B4B2-E4490F51CA31}"/>
-              </a:ext>
-            </a:extLst>
-          </p:cNvPr>
-          <p:cNvSpPr>
-            <a:spLocks xmlns:a="http://schemas.openxmlformats.org/drawingml/2006/main" noGrp="1"/>
-          </p:cNvSpPr>
-          <p:nvPr/>
-        </p:nvSpPr>
-        <p:spPr>
-          <a:xfrm xmlns:a="http://schemas.openxmlformats.org/drawingml/2006/main">
-            <a:off x="609600" y="800100"/>
-            <a:ext cx="3429000" cy="228600"/>
-          </a:xfrm>
-          <a:prstGeom xmlns:a="http://schemas.openxmlformats.org/drawingml/2006/main" prst="rect">
-            <a:avLst/>
-          </a:prstGeom>
-          <a:noFill xmlns:a="http://schemas.openxmlformats.org/drawingml/2006/main"/>
-          <a:ln xmlns:a="http://schemas.openxmlformats.org/drawingml/2006/main" w="0">
-            <a:noFill/>
-            <a:prstDash val="solid"/>
-          </a:ln>
-        </p:spPr>
-        <p:txBody>
-          <a:bodyPr xmlns:a="http://schemas.openxmlformats.org/drawingml/2006/main"/>
-          <a:lstStyle xmlns:a="http://schemas.openxmlformats.org/drawingml/2006/main"/>
-          <a:p xmlns:a="http://schemas.openxmlformats.org/drawingml/2006/main">
-            <a:pPr algn="l">
-              <a:defRPr sz="975" b="1">
-                <a:solidFill>
-                  <a:srgbClr val="C7F25C"/>
-                </a:solidFill>
-              </a:defRPr>
-            </a:pPr>
-            <a:r>
-              <a:rPr sz="975" b="1">
-                <a:solidFill>
-                  <a:srgbClr val="C7F25C"/>
-                </a:solidFill>
-              </a:rPr>
-              <a:t>THE SCORECARD</a:t>
-            </a:r>
-          </a:p>
-        </p:txBody>
-      </p:sp>
-      <p:sp>
-        <p:nvSpPr>
-          <p:cNvPr id="4" name="">
-            <a:extLst xmlns:a="http://schemas.openxmlformats.org/drawingml/2006/main">
-              <a:ext uri="{FF2B5EF4-FFF2-40B4-BE49-F238E27FC236}">
-                <a16:creationId xmlns:a16="http://schemas.microsoft.com/office/drawing/2014/main" id="{DC05B4DB-BA33-4AFF-9ED2-2A4496365407}"/>
-              </a:ext>
-            </a:extLst>
-          </p:cNvPr>
-          <p:cNvSpPr>
-            <a:spLocks xmlns:a="http://schemas.openxmlformats.org/drawingml/2006/main" noGrp="1"/>
-          </p:cNvSpPr>
-          <p:nvPr/>
-        </p:nvSpPr>
-        <p:spPr>
-          <a:xfrm xmlns:a="http://schemas.openxmlformats.org/drawingml/2006/main">
-            <a:off x="609600" y="1066800"/>
-            <a:ext cx="10668000" cy="647700"/>
+                <a16:creationId xmlns:a16="http://schemas.microsoft.com/office/drawing/2014/main" id="{8010B6C8-CCF0-4036-87CF-F1A19A2FA5B2}"/>
+              </a:ext>
+            </a:extLst>
+          </p:cNvPr>
+          <p:cNvSpPr>
+            <a:spLocks xmlns:a="http://schemas.openxmlformats.org/drawingml/2006/main" noGrp="1"/>
+          </p:cNvSpPr>
+          <p:nvPr/>
+        </p:nvSpPr>
+        <p:spPr>
+          <a:xfrm xmlns:a="http://schemas.openxmlformats.org/drawingml/2006/main">
+            <a:off x="609600" y="838200"/>
+            <a:ext cx="10668000" cy="704850"/>
           </a:xfrm>
           <a:prstGeom xmlns:a="http://schemas.openxmlformats.org/drawingml/2006/main" prst="rect">
             <a:avLst/>
@@ -14201,10 +13551,10 @@
       </p:sp>
       <p:sp>
         <p:nvSpPr>
-          <p:cNvPr id="5" name="">
-            <a:extLst xmlns:a="http://schemas.openxmlformats.org/drawingml/2006/main">
-              <a:ext uri="{FF2B5EF4-FFF2-40B4-BE49-F238E27FC236}">
-                <a16:creationId xmlns:a16="http://schemas.microsoft.com/office/drawing/2014/main" id="{17136D14-9E4E-4B48-9007-8908A5B58157}"/>
+          <p:cNvPr id="4" name="">
+            <a:extLst xmlns:a="http://schemas.openxmlformats.org/drawingml/2006/main">
+              <a:ext uri="{FF2B5EF4-FFF2-40B4-BE49-F238E27FC236}">
+                <a16:creationId xmlns:a16="http://schemas.microsoft.com/office/drawing/2014/main" id="{B44F2440-1605-4070-8E70-2B2D506EE46F}"/>
               </a:ext>
             </a:extLst>
           </p:cNvPr>
@@ -14251,10 +13601,10 @@
       </p:sp>
       <p:sp>
         <p:nvSpPr>
-          <p:cNvPr id="6" name="">
-            <a:extLst xmlns:a="http://schemas.openxmlformats.org/drawingml/2006/main">
-              <a:ext uri="{FF2B5EF4-FFF2-40B4-BE49-F238E27FC236}">
-                <a16:creationId xmlns:a16="http://schemas.microsoft.com/office/drawing/2014/main" id="{14D23618-2F61-46C7-98EB-23318472A6F5}"/>
+          <p:cNvPr id="5" name="">
+            <a:extLst xmlns:a="http://schemas.openxmlformats.org/drawingml/2006/main">
+              <a:ext uri="{FF2B5EF4-FFF2-40B4-BE49-F238E27FC236}">
+                <a16:creationId xmlns:a16="http://schemas.microsoft.com/office/drawing/2014/main" id="{7A3B719D-E2DB-470A-8979-34F20687365B}"/>
               </a:ext>
             </a:extLst>
           </p:cNvPr>
@@ -14301,10 +13651,10 @@
       </p:sp>
       <p:sp>
         <p:nvSpPr>
-          <p:cNvPr id="7" name="">
-            <a:extLst xmlns:a="http://schemas.openxmlformats.org/drawingml/2006/main">
-              <a:ext uri="{FF2B5EF4-FFF2-40B4-BE49-F238E27FC236}">
-                <a16:creationId xmlns:a16="http://schemas.microsoft.com/office/drawing/2014/main" id="{BE82AF9B-9ADE-44AA-A7EF-1D57F8A9A014}"/>
+          <p:cNvPr id="6" name="">
+            <a:extLst xmlns:a="http://schemas.openxmlformats.org/drawingml/2006/main">
+              <a:ext uri="{FF2B5EF4-FFF2-40B4-BE49-F238E27FC236}">
+                <a16:creationId xmlns:a16="http://schemas.microsoft.com/office/drawing/2014/main" id="{EFF62717-F218-483F-9D8E-85F2E42F33C2}"/>
               </a:ext>
             </a:extLst>
           </p:cNvPr>
@@ -14351,10 +13701,10 @@
       </p:sp>
       <p:sp>
         <p:nvSpPr>
-          <p:cNvPr id="8" name="">
-            <a:extLst xmlns:a="http://schemas.openxmlformats.org/drawingml/2006/main">
-              <a:ext uri="{FF2B5EF4-FFF2-40B4-BE49-F238E27FC236}">
-                <a16:creationId xmlns:a16="http://schemas.microsoft.com/office/drawing/2014/main" id="{74514145-0894-4115-9D52-11ABCE20CA9E}"/>
+          <p:cNvPr id="7" name="">
+            <a:extLst xmlns:a="http://schemas.openxmlformats.org/drawingml/2006/main">
+              <a:ext uri="{FF2B5EF4-FFF2-40B4-BE49-F238E27FC236}">
+                <a16:creationId xmlns:a16="http://schemas.microsoft.com/office/drawing/2014/main" id="{646508A0-E117-4016-BB9C-FC3926CA6C3E}"/>
               </a:ext>
             </a:extLst>
           </p:cNvPr>
@@ -14401,10 +13751,10 @@
       </p:sp>
       <p:sp>
         <p:nvSpPr>
-          <p:cNvPr id="9" name="">
-            <a:extLst xmlns:a="http://schemas.openxmlformats.org/drawingml/2006/main">
-              <a:ext uri="{FF2B5EF4-FFF2-40B4-BE49-F238E27FC236}">
-                <a16:creationId xmlns:a16="http://schemas.microsoft.com/office/drawing/2014/main" id="{0B4B8B7A-F454-4DE2-8778-952D2957887E}"/>
+          <p:cNvPr id="8" name="">
+            <a:extLst xmlns:a="http://schemas.openxmlformats.org/drawingml/2006/main">
+              <a:ext uri="{FF2B5EF4-FFF2-40B4-BE49-F238E27FC236}">
+                <a16:creationId xmlns:a16="http://schemas.microsoft.com/office/drawing/2014/main" id="{331D6C9A-B6D1-45F0-BBB2-08E33E0B2387}"/>
               </a:ext>
             </a:extLst>
           </p:cNvPr>
@@ -14451,10 +13801,10 @@
       </p:sp>
       <p:sp>
         <p:nvSpPr>
-          <p:cNvPr id="10" name="">
-            <a:extLst xmlns:a="http://schemas.openxmlformats.org/drawingml/2006/main">
-              <a:ext uri="{FF2B5EF4-FFF2-40B4-BE49-F238E27FC236}">
-                <a16:creationId xmlns:a16="http://schemas.microsoft.com/office/drawing/2014/main" id="{3276F54F-6881-4345-9DF5-0307D8392C5D}"/>
+          <p:cNvPr id="9" name="">
+            <a:extLst xmlns:a="http://schemas.openxmlformats.org/drawingml/2006/main">
+              <a:ext uri="{FF2B5EF4-FFF2-40B4-BE49-F238E27FC236}">
+                <a16:creationId xmlns:a16="http://schemas.microsoft.com/office/drawing/2014/main" id="{020FF1BE-9FE0-4E75-871F-1DFFDAF18C68}"/>
               </a:ext>
             </a:extLst>
           </p:cNvPr>
@@ -14501,10 +13851,10 @@
       </p:sp>
       <p:sp>
         <p:nvSpPr>
-          <p:cNvPr id="11" name="">
-            <a:extLst xmlns:a="http://schemas.openxmlformats.org/drawingml/2006/main">
-              <a:ext uri="{FF2B5EF4-FFF2-40B4-BE49-F238E27FC236}">
-                <a16:creationId xmlns:a16="http://schemas.microsoft.com/office/drawing/2014/main" id="{F29BD2ED-2657-42A2-B702-22817B8D38AB}"/>
+          <p:cNvPr id="10" name="">
+            <a:extLst xmlns:a="http://schemas.openxmlformats.org/drawingml/2006/main">
+              <a:ext uri="{FF2B5EF4-FFF2-40B4-BE49-F238E27FC236}">
+                <a16:creationId xmlns:a16="http://schemas.microsoft.com/office/drawing/2014/main" id="{70A63EE1-8EF6-4E83-BB29-682524FDA16B}"/>
               </a:ext>
             </a:extLst>
           </p:cNvPr>
@@ -14551,10 +13901,10 @@
       </p:sp>
       <p:sp>
         <p:nvSpPr>
-          <p:cNvPr id="12" name="">
-            <a:extLst xmlns:a="http://schemas.openxmlformats.org/drawingml/2006/main">
-              <a:ext uri="{FF2B5EF4-FFF2-40B4-BE49-F238E27FC236}">
-                <a16:creationId xmlns:a16="http://schemas.microsoft.com/office/drawing/2014/main" id="{90045582-C116-4AC6-971A-F8F21E742BD0}"/>
+          <p:cNvPr id="11" name="">
+            <a:extLst xmlns:a="http://schemas.openxmlformats.org/drawingml/2006/main">
+              <a:ext uri="{FF2B5EF4-FFF2-40B4-BE49-F238E27FC236}">
+                <a16:creationId xmlns:a16="http://schemas.microsoft.com/office/drawing/2014/main" id="{11406927-91B4-49EF-BD6D-70D944D02665}"/>
               </a:ext>
             </a:extLst>
           </p:cNvPr>
@@ -14582,10 +13932,10 @@
       </p:sp>
       <p:sp>
         <p:nvSpPr>
-          <p:cNvPr id="13" name="">
-            <a:extLst xmlns:a="http://schemas.openxmlformats.org/drawingml/2006/main">
-              <a:ext uri="{FF2B5EF4-FFF2-40B4-BE49-F238E27FC236}">
-                <a16:creationId xmlns:a16="http://schemas.microsoft.com/office/drawing/2014/main" id="{D4EC3869-EA65-403F-8A5D-748A895A1B7E}"/>
+          <p:cNvPr id="12" name="">
+            <a:extLst xmlns:a="http://schemas.openxmlformats.org/drawingml/2006/main">
+              <a:ext uri="{FF2B5EF4-FFF2-40B4-BE49-F238E27FC236}">
+                <a16:creationId xmlns:a16="http://schemas.microsoft.com/office/drawing/2014/main" id="{440AB4CE-79C8-4C6A-9BEA-D466D6EFA413}"/>
               </a:ext>
             </a:extLst>
           </p:cNvPr>
@@ -14633,7 +13983,7 @@
     </p:spTree>
     <p:extLst>
       <p:ext uri="{BB962C8B-B14F-4D97-AF65-F5344CB8AC3E}">
-        <p14:creationId xmlns:p14="http://schemas.microsoft.com/office/powerpoint/2010/main" val="1909715001"/>
+        <p14:creationId xmlns:p14="http://schemas.microsoft.com/office/powerpoint/2010/main" val="1307088959"/>
       </p:ext>
     </p:extLst>
   </p:cSld>
@@ -14661,10 +14011,10 @@
       </p:grpSpPr>
       <p:sp>
         <p:nvSpPr>
-          <p:cNvPr id="27" name="">
-            <a:extLst xmlns:a="http://schemas.openxmlformats.org/drawingml/2006/main">
-              <a:ext uri="{FF2B5EF4-FFF2-40B4-BE49-F238E27FC236}">
-                <a16:creationId xmlns:a16="http://schemas.microsoft.com/office/drawing/2014/main" id="{AC2E0E67-6D6E-4181-8A21-6AF241F362C6}"/>
+          <p:cNvPr id="26" name="">
+            <a:extLst xmlns:a="http://schemas.openxmlformats.org/drawingml/2006/main">
+              <a:ext uri="{FF2B5EF4-FFF2-40B4-BE49-F238E27FC236}">
+                <a16:creationId xmlns:a16="http://schemas.microsoft.com/office/drawing/2014/main" id="{BCC5231C-3FAD-4EEF-9854-D4AF328F2531}"/>
               </a:ext>
             </a:extLst>
           </p:cNvPr>
@@ -14714,7 +14064,7 @@
           <p:cNvPr id="2" name="">
             <a:extLst xmlns:a="http://schemas.openxmlformats.org/drawingml/2006/main">
               <a:ext uri="{FF2B5EF4-FFF2-40B4-BE49-F238E27FC236}">
-                <a16:creationId xmlns:a16="http://schemas.microsoft.com/office/drawing/2014/main" id="{F805CF69-521A-4E11-B971-990CCBCCF92E}"/>
+                <a16:creationId xmlns:a16="http://schemas.microsoft.com/office/drawing/2014/main" id="{C1230601-DBBA-4579-8C62-7DE0B999CAE7}"/>
               </a:ext>
             </a:extLst>
           </p:cNvPr>
@@ -14745,69 +14095,19 @@
           <p:cNvPr id="3" name="">
             <a:extLst xmlns:a="http://schemas.openxmlformats.org/drawingml/2006/main">
               <a:ext uri="{FF2B5EF4-FFF2-40B4-BE49-F238E27FC236}">
-                <a16:creationId xmlns:a16="http://schemas.microsoft.com/office/drawing/2014/main" id="{6D958DA5-F9C5-41D0-B79D-1A8AFA5262FD}"/>
-              </a:ext>
-            </a:extLst>
-          </p:cNvPr>
-          <p:cNvSpPr>
-            <a:spLocks xmlns:a="http://schemas.openxmlformats.org/drawingml/2006/main" noGrp="1"/>
-          </p:cNvSpPr>
-          <p:nvPr/>
-        </p:nvSpPr>
-        <p:spPr>
-          <a:xfrm xmlns:a="http://schemas.openxmlformats.org/drawingml/2006/main">
-            <a:off x="609600" y="800100"/>
-            <a:ext cx="3429000" cy="228600"/>
-          </a:xfrm>
-          <a:prstGeom xmlns:a="http://schemas.openxmlformats.org/drawingml/2006/main" prst="rect">
-            <a:avLst/>
-          </a:prstGeom>
-          <a:noFill xmlns:a="http://schemas.openxmlformats.org/drawingml/2006/main"/>
-          <a:ln xmlns:a="http://schemas.openxmlformats.org/drawingml/2006/main" w="0">
-            <a:noFill/>
-            <a:prstDash val="solid"/>
-          </a:ln>
-        </p:spPr>
-        <p:txBody>
-          <a:bodyPr xmlns:a="http://schemas.openxmlformats.org/drawingml/2006/main"/>
-          <a:lstStyle xmlns:a="http://schemas.openxmlformats.org/drawingml/2006/main"/>
-          <a:p xmlns:a="http://schemas.openxmlformats.org/drawingml/2006/main">
-            <a:pPr algn="l">
-              <a:defRPr sz="975" b="1">
-                <a:solidFill>
-                  <a:srgbClr val="E63888"/>
-                </a:solidFill>
-              </a:defRPr>
-            </a:pPr>
-            <a:r>
-              <a:rPr sz="975" b="1">
-                <a:solidFill>
-                  <a:srgbClr val="E63888"/>
-                </a:solidFill>
-              </a:rPr>
-              <a:t>THE BRIDGE</a:t>
-            </a:r>
-          </a:p>
-        </p:txBody>
-      </p:sp>
-      <p:sp>
-        <p:nvSpPr>
-          <p:cNvPr id="4" name="">
-            <a:extLst xmlns:a="http://schemas.openxmlformats.org/drawingml/2006/main">
-              <a:ext uri="{FF2B5EF4-FFF2-40B4-BE49-F238E27FC236}">
-                <a16:creationId xmlns:a16="http://schemas.microsoft.com/office/drawing/2014/main" id="{41BDA56E-DB7C-4165-8C4E-A40BE95AF345}"/>
-              </a:ext>
-            </a:extLst>
-          </p:cNvPr>
-          <p:cNvSpPr>
-            <a:spLocks xmlns:a="http://schemas.openxmlformats.org/drawingml/2006/main" noGrp="1"/>
-          </p:cNvSpPr>
-          <p:nvPr/>
-        </p:nvSpPr>
-        <p:spPr>
-          <a:xfrm xmlns:a="http://schemas.openxmlformats.org/drawingml/2006/main">
-            <a:off x="609600" y="1066800"/>
-            <a:ext cx="10668000" cy="647700"/>
+                <a16:creationId xmlns:a16="http://schemas.microsoft.com/office/drawing/2014/main" id="{E5B21675-F0DD-4778-84CD-E2DAFA74C11C}"/>
+              </a:ext>
+            </a:extLst>
+          </p:cNvPr>
+          <p:cNvSpPr>
+            <a:spLocks xmlns:a="http://schemas.openxmlformats.org/drawingml/2006/main" noGrp="1"/>
+          </p:cNvSpPr>
+          <p:nvPr/>
+        </p:nvSpPr>
+        <p:spPr>
+          <a:xfrm xmlns:a="http://schemas.openxmlformats.org/drawingml/2006/main">
+            <a:off x="609600" y="838200"/>
+            <a:ext cx="10668000" cy="704850"/>
           </a:xfrm>
           <a:prstGeom xmlns:a="http://schemas.openxmlformats.org/drawingml/2006/main" prst="rect">
             <a:avLst/>
@@ -14842,10 +14142,10 @@
       </p:sp>
       <p:sp>
         <p:nvSpPr>
-          <p:cNvPr id="5" name="">
-            <a:extLst xmlns:a="http://schemas.openxmlformats.org/drawingml/2006/main">
-              <a:ext uri="{FF2B5EF4-FFF2-40B4-BE49-F238E27FC236}">
-                <a16:creationId xmlns:a16="http://schemas.microsoft.com/office/drawing/2014/main" id="{309D3EAA-4CD2-4B13-9A38-F11605FE9716}"/>
+          <p:cNvPr id="4" name="">
+            <a:extLst xmlns:a="http://schemas.openxmlformats.org/drawingml/2006/main">
+              <a:ext uri="{FF2B5EF4-FFF2-40B4-BE49-F238E27FC236}">
+                <a16:creationId xmlns:a16="http://schemas.microsoft.com/office/drawing/2014/main" id="{368D3BC4-236E-4D93-BF6E-44033FFA6240}"/>
               </a:ext>
             </a:extLst>
           </p:cNvPr>
@@ -14892,10 +14192,10 @@
       </p:sp>
       <p:sp>
         <p:nvSpPr>
-          <p:cNvPr id="6" name="">
-            <a:extLst xmlns:a="http://schemas.openxmlformats.org/drawingml/2006/main">
-              <a:ext uri="{FF2B5EF4-FFF2-40B4-BE49-F238E27FC236}">
-                <a16:creationId xmlns:a16="http://schemas.microsoft.com/office/drawing/2014/main" id="{908EE026-2928-4514-A6E5-0DF07549C73A}"/>
+          <p:cNvPr id="5" name="">
+            <a:extLst xmlns:a="http://schemas.openxmlformats.org/drawingml/2006/main">
+              <a:ext uri="{FF2B5EF4-FFF2-40B4-BE49-F238E27FC236}">
+                <a16:creationId xmlns:a16="http://schemas.microsoft.com/office/drawing/2014/main" id="{047DA1B2-A30E-4E7F-BEF0-633A4817998B}"/>
               </a:ext>
             </a:extLst>
           </p:cNvPr>
@@ -14942,10 +14242,10 @@
       </p:sp>
       <p:sp>
         <p:nvSpPr>
-          <p:cNvPr id="7" name="">
-            <a:extLst xmlns:a="http://schemas.openxmlformats.org/drawingml/2006/main">
-              <a:ext uri="{FF2B5EF4-FFF2-40B4-BE49-F238E27FC236}">
-                <a16:creationId xmlns:a16="http://schemas.microsoft.com/office/drawing/2014/main" id="{D9F154FF-F525-4E53-BEBA-B2DAF176DC38}"/>
+          <p:cNvPr id="6" name="">
+            <a:extLst xmlns:a="http://schemas.openxmlformats.org/drawingml/2006/main">
+              <a:ext uri="{FF2B5EF4-FFF2-40B4-BE49-F238E27FC236}">
+                <a16:creationId xmlns:a16="http://schemas.microsoft.com/office/drawing/2014/main" id="{91809788-FF30-4083-A930-8E01E2FB1E19}"/>
               </a:ext>
             </a:extLst>
           </p:cNvPr>
@@ -14977,10 +14277,10 @@
       </p:sp>
       <p:sp>
         <p:nvSpPr>
-          <p:cNvPr id="8" name="">
-            <a:extLst xmlns:a="http://schemas.openxmlformats.org/drawingml/2006/main">
-              <a:ext uri="{FF2B5EF4-FFF2-40B4-BE49-F238E27FC236}">
-                <a16:creationId xmlns:a16="http://schemas.microsoft.com/office/drawing/2014/main" id="{C8412E9E-8E71-421E-925E-1FDACFCF853B}"/>
+          <p:cNvPr id="7" name="">
+            <a:extLst xmlns:a="http://schemas.openxmlformats.org/drawingml/2006/main">
+              <a:ext uri="{FF2B5EF4-FFF2-40B4-BE49-F238E27FC236}">
+                <a16:creationId xmlns:a16="http://schemas.microsoft.com/office/drawing/2014/main" id="{F093385F-B2FB-4BD1-BFDD-A95C426E602B}"/>
               </a:ext>
             </a:extLst>
           </p:cNvPr>
@@ -15027,10 +14327,10 @@
       </p:sp>
       <p:sp>
         <p:nvSpPr>
-          <p:cNvPr id="9" name="">
-            <a:extLst xmlns:a="http://schemas.openxmlformats.org/drawingml/2006/main">
-              <a:ext uri="{FF2B5EF4-FFF2-40B4-BE49-F238E27FC236}">
-                <a16:creationId xmlns:a16="http://schemas.microsoft.com/office/drawing/2014/main" id="{7F4A0024-5B00-4975-BCFD-360746F7333C}"/>
+          <p:cNvPr id="8" name="">
+            <a:extLst xmlns:a="http://schemas.openxmlformats.org/drawingml/2006/main">
+              <a:ext uri="{FF2B5EF4-FFF2-40B4-BE49-F238E27FC236}">
+                <a16:creationId xmlns:a16="http://schemas.microsoft.com/office/drawing/2014/main" id="{B82C1F34-BA47-4902-B037-57962E894A78}"/>
               </a:ext>
             </a:extLst>
           </p:cNvPr>
@@ -15077,10 +14377,10 @@
       </p:sp>
       <p:sp>
         <p:nvSpPr>
-          <p:cNvPr id="10" name="">
-            <a:extLst xmlns:a="http://schemas.openxmlformats.org/drawingml/2006/main">
-              <a:ext uri="{FF2B5EF4-FFF2-40B4-BE49-F238E27FC236}">
-                <a16:creationId xmlns:a16="http://schemas.microsoft.com/office/drawing/2014/main" id="{0880F824-6F08-4EBF-823E-482228078D36}"/>
+          <p:cNvPr id="9" name="">
+            <a:extLst xmlns:a="http://schemas.openxmlformats.org/drawingml/2006/main">
+              <a:ext uri="{FF2B5EF4-FFF2-40B4-BE49-F238E27FC236}">
+                <a16:creationId xmlns:a16="http://schemas.microsoft.com/office/drawing/2014/main" id="{94C4E7A8-3187-4490-B70D-9B82C0FC8215}"/>
               </a:ext>
             </a:extLst>
           </p:cNvPr>
@@ -15127,10 +14427,10 @@
       </p:sp>
       <p:sp>
         <p:nvSpPr>
-          <p:cNvPr id="11" name="">
-            <a:extLst xmlns:a="http://schemas.openxmlformats.org/drawingml/2006/main">
-              <a:ext uri="{FF2B5EF4-FFF2-40B4-BE49-F238E27FC236}">
-                <a16:creationId xmlns:a16="http://schemas.microsoft.com/office/drawing/2014/main" id="{80513D68-627C-493C-BAC4-6B9B6F3C9475}"/>
+          <p:cNvPr id="10" name="">
+            <a:extLst xmlns:a="http://schemas.openxmlformats.org/drawingml/2006/main">
+              <a:ext uri="{FF2B5EF4-FFF2-40B4-BE49-F238E27FC236}">
+                <a16:creationId xmlns:a16="http://schemas.microsoft.com/office/drawing/2014/main" id="{DA7D0D40-C7C2-42C6-8F17-2C697BA4AF05}"/>
               </a:ext>
             </a:extLst>
           </p:cNvPr>
@@ -15177,10 +14477,10 @@
       </p:sp>
       <p:sp>
         <p:nvSpPr>
-          <p:cNvPr id="12" name="">
-            <a:extLst xmlns:a="http://schemas.openxmlformats.org/drawingml/2006/main">
-              <a:ext uri="{FF2B5EF4-FFF2-40B4-BE49-F238E27FC236}">
-                <a16:creationId xmlns:a16="http://schemas.microsoft.com/office/drawing/2014/main" id="{70FED82D-E3B0-4121-AB46-F06A620AC573}"/>
+          <p:cNvPr id="11" name="">
+            <a:extLst xmlns:a="http://schemas.openxmlformats.org/drawingml/2006/main">
+              <a:ext uri="{FF2B5EF4-FFF2-40B4-BE49-F238E27FC236}">
+                <a16:creationId xmlns:a16="http://schemas.microsoft.com/office/drawing/2014/main" id="{79982B8E-6C61-4F8F-BABC-A9C0B535510B}"/>
               </a:ext>
             </a:extLst>
           </p:cNvPr>
@@ -15212,10 +14512,10 @@
       </p:sp>
       <p:sp>
         <p:nvSpPr>
-          <p:cNvPr id="13" name="">
-            <a:extLst xmlns:a="http://schemas.openxmlformats.org/drawingml/2006/main">
-              <a:ext uri="{FF2B5EF4-FFF2-40B4-BE49-F238E27FC236}">
-                <a16:creationId xmlns:a16="http://schemas.microsoft.com/office/drawing/2014/main" id="{F6A41881-6D90-4068-BEA7-A10BBAB106B7}"/>
+          <p:cNvPr id="12" name="">
+            <a:extLst xmlns:a="http://schemas.openxmlformats.org/drawingml/2006/main">
+              <a:ext uri="{FF2B5EF4-FFF2-40B4-BE49-F238E27FC236}">
+                <a16:creationId xmlns:a16="http://schemas.microsoft.com/office/drawing/2014/main" id="{7B794A98-1E1F-439C-B7BE-F7BD6A323862}"/>
               </a:ext>
             </a:extLst>
           </p:cNvPr>
@@ -15262,10 +14562,10 @@
       </p:sp>
       <p:sp>
         <p:nvSpPr>
-          <p:cNvPr id="14" name="">
-            <a:extLst xmlns:a="http://schemas.openxmlformats.org/drawingml/2006/main">
-              <a:ext uri="{FF2B5EF4-FFF2-40B4-BE49-F238E27FC236}">
-                <a16:creationId xmlns:a16="http://schemas.microsoft.com/office/drawing/2014/main" id="{256AFACB-104F-4520-AD64-C15542A77CA3}"/>
+          <p:cNvPr id="13" name="">
+            <a:extLst xmlns:a="http://schemas.openxmlformats.org/drawingml/2006/main">
+              <a:ext uri="{FF2B5EF4-FFF2-40B4-BE49-F238E27FC236}">
+                <a16:creationId xmlns:a16="http://schemas.microsoft.com/office/drawing/2014/main" id="{281A4619-D52C-4CCD-A9BF-ED8DEF8D4905}"/>
               </a:ext>
             </a:extLst>
           </p:cNvPr>
@@ -15312,10 +14612,10 @@
       </p:sp>
       <p:sp>
         <p:nvSpPr>
-          <p:cNvPr id="15" name="">
-            <a:extLst xmlns:a="http://schemas.openxmlformats.org/drawingml/2006/main">
-              <a:ext uri="{FF2B5EF4-FFF2-40B4-BE49-F238E27FC236}">
-                <a16:creationId xmlns:a16="http://schemas.microsoft.com/office/drawing/2014/main" id="{9470D215-D187-484C-B8BB-7C609CFC9D60}"/>
+          <p:cNvPr id="14" name="">
+            <a:extLst xmlns:a="http://schemas.openxmlformats.org/drawingml/2006/main">
+              <a:ext uri="{FF2B5EF4-FFF2-40B4-BE49-F238E27FC236}">
+                <a16:creationId xmlns:a16="http://schemas.microsoft.com/office/drawing/2014/main" id="{A106C1C7-6039-48C7-8CE5-5D1760AA9665}"/>
               </a:ext>
             </a:extLst>
           </p:cNvPr>
@@ -15362,10 +14662,10 @@
       </p:sp>
       <p:sp>
         <p:nvSpPr>
-          <p:cNvPr id="16" name="">
-            <a:extLst xmlns:a="http://schemas.openxmlformats.org/drawingml/2006/main">
-              <a:ext uri="{FF2B5EF4-FFF2-40B4-BE49-F238E27FC236}">
-                <a16:creationId xmlns:a16="http://schemas.microsoft.com/office/drawing/2014/main" id="{F60B6B17-0BF1-4B21-813B-BD167C85289E}"/>
+          <p:cNvPr id="15" name="">
+            <a:extLst xmlns:a="http://schemas.openxmlformats.org/drawingml/2006/main">
+              <a:ext uri="{FF2B5EF4-FFF2-40B4-BE49-F238E27FC236}">
+                <a16:creationId xmlns:a16="http://schemas.microsoft.com/office/drawing/2014/main" id="{9A21FA5C-1A86-4405-A82A-525C76BC76F6}"/>
               </a:ext>
             </a:extLst>
           </p:cNvPr>
@@ -15412,10 +14712,10 @@
       </p:sp>
       <p:sp>
         <p:nvSpPr>
-          <p:cNvPr id="17" name="">
-            <a:extLst xmlns:a="http://schemas.openxmlformats.org/drawingml/2006/main">
-              <a:ext uri="{FF2B5EF4-FFF2-40B4-BE49-F238E27FC236}">
-                <a16:creationId xmlns:a16="http://schemas.microsoft.com/office/drawing/2014/main" id="{4004220D-2FF1-4150-9E59-7E82D7D2324C}"/>
+          <p:cNvPr id="16" name="">
+            <a:extLst xmlns:a="http://schemas.openxmlformats.org/drawingml/2006/main">
+              <a:ext uri="{FF2B5EF4-FFF2-40B4-BE49-F238E27FC236}">
+                <a16:creationId xmlns:a16="http://schemas.microsoft.com/office/drawing/2014/main" id="{1CEB7A12-173B-4D6B-A561-D05A73FB7630}"/>
               </a:ext>
             </a:extLst>
           </p:cNvPr>
@@ -15447,10 +14747,10 @@
       </p:sp>
       <p:sp>
         <p:nvSpPr>
-          <p:cNvPr id="18" name="">
-            <a:extLst xmlns:a="http://schemas.openxmlformats.org/drawingml/2006/main">
-              <a:ext uri="{FF2B5EF4-FFF2-40B4-BE49-F238E27FC236}">
-                <a16:creationId xmlns:a16="http://schemas.microsoft.com/office/drawing/2014/main" id="{49FB587D-B45C-4730-95A9-124B270FD088}"/>
+          <p:cNvPr id="17" name="">
+            <a:extLst xmlns:a="http://schemas.openxmlformats.org/drawingml/2006/main">
+              <a:ext uri="{FF2B5EF4-FFF2-40B4-BE49-F238E27FC236}">
+                <a16:creationId xmlns:a16="http://schemas.microsoft.com/office/drawing/2014/main" id="{756B78FF-FBF2-44F7-BF55-17F4BF2A072E}"/>
               </a:ext>
             </a:extLst>
           </p:cNvPr>
@@ -15497,10 +14797,10 @@
       </p:sp>
       <p:sp>
         <p:nvSpPr>
-          <p:cNvPr id="19" name="">
-            <a:extLst xmlns:a="http://schemas.openxmlformats.org/drawingml/2006/main">
-              <a:ext uri="{FF2B5EF4-FFF2-40B4-BE49-F238E27FC236}">
-                <a16:creationId xmlns:a16="http://schemas.microsoft.com/office/drawing/2014/main" id="{D6A5C050-8040-4C69-968B-6BA9EB9375F7}"/>
+          <p:cNvPr id="18" name="">
+            <a:extLst xmlns:a="http://schemas.openxmlformats.org/drawingml/2006/main">
+              <a:ext uri="{FF2B5EF4-FFF2-40B4-BE49-F238E27FC236}">
+                <a16:creationId xmlns:a16="http://schemas.microsoft.com/office/drawing/2014/main" id="{532D4ED1-5412-4B4C-9CAF-AF80C4EBFD13}"/>
               </a:ext>
             </a:extLst>
           </p:cNvPr>
@@ -15547,10 +14847,10 @@
       </p:sp>
       <p:sp>
         <p:nvSpPr>
-          <p:cNvPr id="20" name="">
-            <a:extLst xmlns:a="http://schemas.openxmlformats.org/drawingml/2006/main">
-              <a:ext uri="{FF2B5EF4-FFF2-40B4-BE49-F238E27FC236}">
-                <a16:creationId xmlns:a16="http://schemas.microsoft.com/office/drawing/2014/main" id="{1D675671-40CD-4FB3-9199-C68776A8735B}"/>
+          <p:cNvPr id="19" name="">
+            <a:extLst xmlns:a="http://schemas.openxmlformats.org/drawingml/2006/main">
+              <a:ext uri="{FF2B5EF4-FFF2-40B4-BE49-F238E27FC236}">
+                <a16:creationId xmlns:a16="http://schemas.microsoft.com/office/drawing/2014/main" id="{160A7ADB-C5D1-4BBB-B0D1-7DC582F822EE}"/>
               </a:ext>
             </a:extLst>
           </p:cNvPr>
@@ -15597,10 +14897,10 @@
       </p:sp>
       <p:sp>
         <p:nvSpPr>
-          <p:cNvPr id="21" name="">
-            <a:extLst xmlns:a="http://schemas.openxmlformats.org/drawingml/2006/main">
-              <a:ext uri="{FF2B5EF4-FFF2-40B4-BE49-F238E27FC236}">
-                <a16:creationId xmlns:a16="http://schemas.microsoft.com/office/drawing/2014/main" id="{3BF2E5A2-E7CE-4E5B-8849-C7F84E3AC574}"/>
+          <p:cNvPr id="20" name="">
+            <a:extLst xmlns:a="http://schemas.openxmlformats.org/drawingml/2006/main">
+              <a:ext uri="{FF2B5EF4-FFF2-40B4-BE49-F238E27FC236}">
+                <a16:creationId xmlns:a16="http://schemas.microsoft.com/office/drawing/2014/main" id="{89D19C89-3321-4946-B388-48B52B8EB40E}"/>
               </a:ext>
             </a:extLst>
           </p:cNvPr>
@@ -15647,10 +14947,10 @@
       </p:sp>
       <p:sp>
         <p:nvSpPr>
-          <p:cNvPr id="22" name="">
-            <a:extLst xmlns:a="http://schemas.openxmlformats.org/drawingml/2006/main">
-              <a:ext uri="{FF2B5EF4-FFF2-40B4-BE49-F238E27FC236}">
-                <a16:creationId xmlns:a16="http://schemas.microsoft.com/office/drawing/2014/main" id="{EA673731-AFD0-4D4C-80C8-B32D12C2C803}"/>
+          <p:cNvPr id="21" name="">
+            <a:extLst xmlns:a="http://schemas.openxmlformats.org/drawingml/2006/main">
+              <a:ext uri="{FF2B5EF4-FFF2-40B4-BE49-F238E27FC236}">
+                <a16:creationId xmlns:a16="http://schemas.microsoft.com/office/drawing/2014/main" id="{E8CE2206-F315-43A5-92DC-29B8F23E60D2}"/>
               </a:ext>
             </a:extLst>
           </p:cNvPr>
@@ -15682,10 +14982,10 @@
       </p:sp>
       <p:sp>
         <p:nvSpPr>
-          <p:cNvPr id="23" name="">
-            <a:extLst xmlns:a="http://schemas.openxmlformats.org/drawingml/2006/main">
-              <a:ext uri="{FF2B5EF4-FFF2-40B4-BE49-F238E27FC236}">
-                <a16:creationId xmlns:a16="http://schemas.microsoft.com/office/drawing/2014/main" id="{749C7C6D-7D10-4015-AFF5-EDD421C57869}"/>
+          <p:cNvPr id="22" name="">
+            <a:extLst xmlns:a="http://schemas.openxmlformats.org/drawingml/2006/main">
+              <a:ext uri="{FF2B5EF4-FFF2-40B4-BE49-F238E27FC236}">
+                <a16:creationId xmlns:a16="http://schemas.microsoft.com/office/drawing/2014/main" id="{3411D879-8BBF-4F5D-9947-56E073DAB5C6}"/>
               </a:ext>
             </a:extLst>
           </p:cNvPr>
@@ -15732,10 +15032,10 @@
       </p:sp>
       <p:sp>
         <p:nvSpPr>
-          <p:cNvPr id="24" name="">
-            <a:extLst xmlns:a="http://schemas.openxmlformats.org/drawingml/2006/main">
-              <a:ext uri="{FF2B5EF4-FFF2-40B4-BE49-F238E27FC236}">
-                <a16:creationId xmlns:a16="http://schemas.microsoft.com/office/drawing/2014/main" id="{758E39B2-CBFF-4D68-B266-45503ACFD8BF}"/>
+          <p:cNvPr id="23" name="">
+            <a:extLst xmlns:a="http://schemas.openxmlformats.org/drawingml/2006/main">
+              <a:ext uri="{FF2B5EF4-FFF2-40B4-BE49-F238E27FC236}">
+                <a16:creationId xmlns:a16="http://schemas.microsoft.com/office/drawing/2014/main" id="{3583F104-8B45-4259-8B60-44BE287BEE0C}"/>
               </a:ext>
             </a:extLst>
           </p:cNvPr>
@@ -15782,10 +15082,10 @@
       </p:sp>
       <p:sp>
         <p:nvSpPr>
-          <p:cNvPr id="25" name="">
-            <a:extLst xmlns:a="http://schemas.openxmlformats.org/drawingml/2006/main">
-              <a:ext uri="{FF2B5EF4-FFF2-40B4-BE49-F238E27FC236}">
-                <a16:creationId xmlns:a16="http://schemas.microsoft.com/office/drawing/2014/main" id="{D2F7C02F-793E-4069-98D6-30CB3FE09EEF}"/>
+          <p:cNvPr id="24" name="">
+            <a:extLst xmlns:a="http://schemas.openxmlformats.org/drawingml/2006/main">
+              <a:ext uri="{FF2B5EF4-FFF2-40B4-BE49-F238E27FC236}">
+                <a16:creationId xmlns:a16="http://schemas.microsoft.com/office/drawing/2014/main" id="{8263E045-424F-4874-88DB-15B33D299892}"/>
               </a:ext>
             </a:extLst>
           </p:cNvPr>
@@ -15832,10 +15132,10 @@
       </p:sp>
       <p:sp>
         <p:nvSpPr>
-          <p:cNvPr id="26" name="">
-            <a:extLst xmlns:a="http://schemas.openxmlformats.org/drawingml/2006/main">
-              <a:ext uri="{FF2B5EF4-FFF2-40B4-BE49-F238E27FC236}">
-                <a16:creationId xmlns:a16="http://schemas.microsoft.com/office/drawing/2014/main" id="{F21F2AD6-EA40-4334-9E2D-1FEB26D0095B}"/>
+          <p:cNvPr id="25" name="">
+            <a:extLst xmlns:a="http://schemas.openxmlformats.org/drawingml/2006/main">
+              <a:ext uri="{FF2B5EF4-FFF2-40B4-BE49-F238E27FC236}">
+                <a16:creationId xmlns:a16="http://schemas.microsoft.com/office/drawing/2014/main" id="{7F7F4C1B-A640-4D52-AA13-F87053B4FE91}"/>
               </a:ext>
             </a:extLst>
           </p:cNvPr>
@@ -15883,7 +15183,7 @@
     </p:spTree>
     <p:extLst>
       <p:ext uri="{BB962C8B-B14F-4D97-AF65-F5344CB8AC3E}">
-        <p14:creationId xmlns:p14="http://schemas.microsoft.com/office/powerpoint/2010/main" val="456841845"/>
+        <p14:creationId xmlns:p14="http://schemas.microsoft.com/office/powerpoint/2010/main" val="1279504906"/>
       </p:ext>
     </p:extLst>
   </p:cSld>
@@ -15911,10 +15211,10 @@
       </p:grpSpPr>
       <p:sp>
         <p:nvSpPr>
-          <p:cNvPr id="19" name="">
-            <a:extLst xmlns:a="http://schemas.openxmlformats.org/drawingml/2006/main">
-              <a:ext uri="{FF2B5EF4-FFF2-40B4-BE49-F238E27FC236}">
-                <a16:creationId xmlns:a16="http://schemas.microsoft.com/office/drawing/2014/main" id="{BF285B68-505B-4CE7-8C52-B4CBBEFB44AD}"/>
+          <p:cNvPr id="18" name="">
+            <a:extLst xmlns:a="http://schemas.openxmlformats.org/drawingml/2006/main">
+              <a:ext uri="{FF2B5EF4-FFF2-40B4-BE49-F238E27FC236}">
+                <a16:creationId xmlns:a16="http://schemas.microsoft.com/office/drawing/2014/main" id="{8CA782E4-DA57-4801-AB48-E53A50251D83}"/>
               </a:ext>
             </a:extLst>
           </p:cNvPr>
@@ -15964,7 +15264,7 @@
           <p:cNvPr id="2" name="">
             <a:extLst xmlns:a="http://schemas.openxmlformats.org/drawingml/2006/main">
               <a:ext uri="{FF2B5EF4-FFF2-40B4-BE49-F238E27FC236}">
-                <a16:creationId xmlns:a16="http://schemas.microsoft.com/office/drawing/2014/main" id="{AFA650EC-75EA-41DB-BD85-B8F9CDCE0B97}"/>
+                <a16:creationId xmlns:a16="http://schemas.microsoft.com/office/drawing/2014/main" id="{9882F4C8-D197-4D29-95F8-E17798E69CE0}"/>
               </a:ext>
             </a:extLst>
           </p:cNvPr>
@@ -15995,69 +15295,19 @@
           <p:cNvPr id="3" name="">
             <a:extLst xmlns:a="http://schemas.openxmlformats.org/drawingml/2006/main">
               <a:ext uri="{FF2B5EF4-FFF2-40B4-BE49-F238E27FC236}">
-                <a16:creationId xmlns:a16="http://schemas.microsoft.com/office/drawing/2014/main" id="{73685DDB-A97E-4592-9D91-152F0D6456F1}"/>
-              </a:ext>
-            </a:extLst>
-          </p:cNvPr>
-          <p:cNvSpPr>
-            <a:spLocks xmlns:a="http://schemas.openxmlformats.org/drawingml/2006/main" noGrp="1"/>
-          </p:cNvSpPr>
-          <p:nvPr/>
-        </p:nvSpPr>
-        <p:spPr>
-          <a:xfrm xmlns:a="http://schemas.openxmlformats.org/drawingml/2006/main">
-            <a:off x="609600" y="800100"/>
-            <a:ext cx="3429000" cy="228600"/>
-          </a:xfrm>
-          <a:prstGeom xmlns:a="http://schemas.openxmlformats.org/drawingml/2006/main" prst="rect">
-            <a:avLst/>
-          </a:prstGeom>
-          <a:noFill xmlns:a="http://schemas.openxmlformats.org/drawingml/2006/main"/>
-          <a:ln xmlns:a="http://schemas.openxmlformats.org/drawingml/2006/main" w="0">
-            <a:noFill/>
-            <a:prstDash val="solid"/>
-          </a:ln>
-        </p:spPr>
-        <p:txBody>
-          <a:bodyPr xmlns:a="http://schemas.openxmlformats.org/drawingml/2006/main"/>
-          <a:lstStyle xmlns:a="http://schemas.openxmlformats.org/drawingml/2006/main"/>
-          <a:p xmlns:a="http://schemas.openxmlformats.org/drawingml/2006/main">
-            <a:pPr algn="l">
-              <a:defRPr sz="975" b="1">
-                <a:solidFill>
-                  <a:srgbClr val="E63888"/>
-                </a:solidFill>
-              </a:defRPr>
-            </a:pPr>
-            <a:r>
-              <a:rPr sz="975" b="1">
-                <a:solidFill>
-                  <a:srgbClr val="E63888"/>
-                </a:solidFill>
-              </a:rPr>
-              <a:t>THE PRACTICAL UPGRADE</a:t>
-            </a:r>
-          </a:p>
-        </p:txBody>
-      </p:sp>
-      <p:sp>
-        <p:nvSpPr>
-          <p:cNvPr id="4" name="">
-            <a:extLst xmlns:a="http://schemas.openxmlformats.org/drawingml/2006/main">
-              <a:ext uri="{FF2B5EF4-FFF2-40B4-BE49-F238E27FC236}">
-                <a16:creationId xmlns:a16="http://schemas.microsoft.com/office/drawing/2014/main" id="{CEF44129-7D79-405E-9E10-B3C993D39D25}"/>
-              </a:ext>
-            </a:extLst>
-          </p:cNvPr>
-          <p:cNvSpPr>
-            <a:spLocks xmlns:a="http://schemas.openxmlformats.org/drawingml/2006/main" noGrp="1"/>
-          </p:cNvSpPr>
-          <p:nvPr/>
-        </p:nvSpPr>
-        <p:spPr>
-          <a:xfrm xmlns:a="http://schemas.openxmlformats.org/drawingml/2006/main">
-            <a:off x="609600" y="1066800"/>
-            <a:ext cx="10668000" cy="647700"/>
+                <a16:creationId xmlns:a16="http://schemas.microsoft.com/office/drawing/2014/main" id="{88AB06FB-9CCB-41F8-B724-ED4AC0E62534}"/>
+              </a:ext>
+            </a:extLst>
+          </p:cNvPr>
+          <p:cNvSpPr>
+            <a:spLocks xmlns:a="http://schemas.openxmlformats.org/drawingml/2006/main" noGrp="1"/>
+          </p:cNvSpPr>
+          <p:nvPr/>
+        </p:nvSpPr>
+        <p:spPr>
+          <a:xfrm xmlns:a="http://schemas.openxmlformats.org/drawingml/2006/main">
+            <a:off x="609600" y="838200"/>
+            <a:ext cx="10668000" cy="704850"/>
           </a:xfrm>
           <a:prstGeom xmlns:a="http://schemas.openxmlformats.org/drawingml/2006/main" prst="rect">
             <a:avLst/>
@@ -16092,10 +15342,10 @@
       </p:sp>
       <p:sp>
         <p:nvSpPr>
-          <p:cNvPr id="5" name="">
-            <a:extLst xmlns:a="http://schemas.openxmlformats.org/drawingml/2006/main">
-              <a:ext uri="{FF2B5EF4-FFF2-40B4-BE49-F238E27FC236}">
-                <a16:creationId xmlns:a16="http://schemas.microsoft.com/office/drawing/2014/main" id="{2DBFC3ED-39C3-4181-8F00-82D7F6E94FC7}"/>
+          <p:cNvPr id="4" name="">
+            <a:extLst xmlns:a="http://schemas.openxmlformats.org/drawingml/2006/main">
+              <a:ext uri="{FF2B5EF4-FFF2-40B4-BE49-F238E27FC236}">
+                <a16:creationId xmlns:a16="http://schemas.microsoft.com/office/drawing/2014/main" id="{7625A5AB-D0E8-404A-9D64-F277001E4653}"/>
               </a:ext>
             </a:extLst>
           </p:cNvPr>
@@ -16142,10 +15392,10 @@
       </p:sp>
       <p:sp>
         <p:nvSpPr>
-          <p:cNvPr id="6" name="">
-            <a:extLst xmlns:a="http://schemas.openxmlformats.org/drawingml/2006/main">
-              <a:ext uri="{FF2B5EF4-FFF2-40B4-BE49-F238E27FC236}">
-                <a16:creationId xmlns:a16="http://schemas.microsoft.com/office/drawing/2014/main" id="{ED6B3E7E-35D4-4D9C-B1BC-724877F2BC01}"/>
+          <p:cNvPr id="5" name="">
+            <a:extLst xmlns:a="http://schemas.openxmlformats.org/drawingml/2006/main">
+              <a:ext uri="{FF2B5EF4-FFF2-40B4-BE49-F238E27FC236}">
+                <a16:creationId xmlns:a16="http://schemas.microsoft.com/office/drawing/2014/main" id="{D123BD64-3C90-4B9D-AE0C-02426B0A275D}"/>
               </a:ext>
             </a:extLst>
           </p:cNvPr>
@@ -16192,10 +15442,10 @@
       </p:sp>
       <p:sp>
         <p:nvSpPr>
-          <p:cNvPr id="7" name="">
-            <a:extLst xmlns:a="http://schemas.openxmlformats.org/drawingml/2006/main">
-              <a:ext uri="{FF2B5EF4-FFF2-40B4-BE49-F238E27FC236}">
-                <a16:creationId xmlns:a16="http://schemas.microsoft.com/office/drawing/2014/main" id="{B74CBD30-CA4C-400C-8415-BBBFA023061C}"/>
+          <p:cNvPr id="6" name="">
+            <a:extLst xmlns:a="http://schemas.openxmlformats.org/drawingml/2006/main">
+              <a:ext uri="{FF2B5EF4-FFF2-40B4-BE49-F238E27FC236}">
+                <a16:creationId xmlns:a16="http://schemas.microsoft.com/office/drawing/2014/main" id="{668610CA-BE21-4A95-9EF3-4C5DB92EFBF4}"/>
               </a:ext>
             </a:extLst>
           </p:cNvPr>
@@ -16242,10 +15492,10 @@
       </p:sp>
       <p:sp>
         <p:nvSpPr>
-          <p:cNvPr id="8" name="">
-            <a:extLst xmlns:a="http://schemas.openxmlformats.org/drawingml/2006/main">
-              <a:ext uri="{FF2B5EF4-FFF2-40B4-BE49-F238E27FC236}">
-                <a16:creationId xmlns:a16="http://schemas.microsoft.com/office/drawing/2014/main" id="{BA5012A0-6953-4DFB-93B8-F5742EAA62EC}"/>
+          <p:cNvPr id="7" name="">
+            <a:extLst xmlns:a="http://schemas.openxmlformats.org/drawingml/2006/main">
+              <a:ext uri="{FF2B5EF4-FFF2-40B4-BE49-F238E27FC236}">
+                <a16:creationId xmlns:a16="http://schemas.microsoft.com/office/drawing/2014/main" id="{6D3573A7-99DA-42CC-B6AC-E88F9DBCBC4F}"/>
               </a:ext>
             </a:extLst>
           </p:cNvPr>
@@ -16292,10 +15542,10 @@
       </p:sp>
       <p:sp>
         <p:nvSpPr>
-          <p:cNvPr id="9" name="">
-            <a:extLst xmlns:a="http://schemas.openxmlformats.org/drawingml/2006/main">
-              <a:ext uri="{FF2B5EF4-FFF2-40B4-BE49-F238E27FC236}">
-                <a16:creationId xmlns:a16="http://schemas.microsoft.com/office/drawing/2014/main" id="{A88A5812-1FD9-497A-89F2-8412AFCEA3EE}"/>
+          <p:cNvPr id="8" name="">
+            <a:extLst xmlns:a="http://schemas.openxmlformats.org/drawingml/2006/main">
+              <a:ext uri="{FF2B5EF4-FFF2-40B4-BE49-F238E27FC236}">
+                <a16:creationId xmlns:a16="http://schemas.microsoft.com/office/drawing/2014/main" id="{CE42D00A-E597-49F6-9198-DC71054761DF}"/>
               </a:ext>
             </a:extLst>
           </p:cNvPr>
@@ -16342,10 +15592,10 @@
       </p:sp>
       <p:sp>
         <p:nvSpPr>
-          <p:cNvPr id="10" name="">
-            <a:extLst xmlns:a="http://schemas.openxmlformats.org/drawingml/2006/main">
-              <a:ext uri="{FF2B5EF4-FFF2-40B4-BE49-F238E27FC236}">
-                <a16:creationId xmlns:a16="http://schemas.microsoft.com/office/drawing/2014/main" id="{5618652E-A886-4C38-A612-3362E5DF0A35}"/>
+          <p:cNvPr id="9" name="">
+            <a:extLst xmlns:a="http://schemas.openxmlformats.org/drawingml/2006/main">
+              <a:ext uri="{FF2B5EF4-FFF2-40B4-BE49-F238E27FC236}">
+                <a16:creationId xmlns:a16="http://schemas.microsoft.com/office/drawing/2014/main" id="{5A46214D-7305-4FEC-831E-3A518977F255}"/>
               </a:ext>
             </a:extLst>
           </p:cNvPr>
@@ -16392,10 +15642,10 @@
       </p:sp>
       <p:sp>
         <p:nvSpPr>
-          <p:cNvPr id="11" name="">
-            <a:extLst xmlns:a="http://schemas.openxmlformats.org/drawingml/2006/main">
-              <a:ext uri="{FF2B5EF4-FFF2-40B4-BE49-F238E27FC236}">
-                <a16:creationId xmlns:a16="http://schemas.microsoft.com/office/drawing/2014/main" id="{A62E9F35-8488-408C-B2DC-B74818A9D51F}"/>
+          <p:cNvPr id="10" name="">
+            <a:extLst xmlns:a="http://schemas.openxmlformats.org/drawingml/2006/main">
+              <a:ext uri="{FF2B5EF4-FFF2-40B4-BE49-F238E27FC236}">
+                <a16:creationId xmlns:a16="http://schemas.microsoft.com/office/drawing/2014/main" id="{229654AD-FB28-4DDC-90E1-4F789ABC66BC}"/>
               </a:ext>
             </a:extLst>
           </p:cNvPr>
@@ -16442,10 +15692,10 @@
       </p:sp>
       <p:sp>
         <p:nvSpPr>
-          <p:cNvPr id="12" name="">
-            <a:extLst xmlns:a="http://schemas.openxmlformats.org/drawingml/2006/main">
-              <a:ext uri="{FF2B5EF4-FFF2-40B4-BE49-F238E27FC236}">
-                <a16:creationId xmlns:a16="http://schemas.microsoft.com/office/drawing/2014/main" id="{886C8DA7-9D3E-41C5-91C4-71728B4599A6}"/>
+          <p:cNvPr id="11" name="">
+            <a:extLst xmlns:a="http://schemas.openxmlformats.org/drawingml/2006/main">
+              <a:ext uri="{FF2B5EF4-FFF2-40B4-BE49-F238E27FC236}">
+                <a16:creationId xmlns:a16="http://schemas.microsoft.com/office/drawing/2014/main" id="{67909282-FCED-49A3-84B9-D82FE2BE8C1C}"/>
               </a:ext>
             </a:extLst>
           </p:cNvPr>
@@ -16492,10 +15742,10 @@
       </p:sp>
       <p:sp>
         <p:nvSpPr>
-          <p:cNvPr id="13" name="">
-            <a:extLst xmlns:a="http://schemas.openxmlformats.org/drawingml/2006/main">
-              <a:ext uri="{FF2B5EF4-FFF2-40B4-BE49-F238E27FC236}">
-                <a16:creationId xmlns:a16="http://schemas.microsoft.com/office/drawing/2014/main" id="{109BA1BB-5D89-49A1-9A99-D4A624B2FDE0}"/>
+          <p:cNvPr id="12" name="">
+            <a:extLst xmlns:a="http://schemas.openxmlformats.org/drawingml/2006/main">
+              <a:ext uri="{FF2B5EF4-FFF2-40B4-BE49-F238E27FC236}">
+                <a16:creationId xmlns:a16="http://schemas.microsoft.com/office/drawing/2014/main" id="{F9BE0456-51F4-45A4-A802-7D8DE0A57DA1}"/>
               </a:ext>
             </a:extLst>
           </p:cNvPr>
@@ -16542,10 +15792,10 @@
       </p:sp>
       <p:sp>
         <p:nvSpPr>
-          <p:cNvPr id="14" name="">
-            <a:extLst xmlns:a="http://schemas.openxmlformats.org/drawingml/2006/main">
-              <a:ext uri="{FF2B5EF4-FFF2-40B4-BE49-F238E27FC236}">
-                <a16:creationId xmlns:a16="http://schemas.microsoft.com/office/drawing/2014/main" id="{CB217947-726A-4A90-8898-C5AA57EBC67E}"/>
+          <p:cNvPr id="13" name="">
+            <a:extLst xmlns:a="http://schemas.openxmlformats.org/drawingml/2006/main">
+              <a:ext uri="{FF2B5EF4-FFF2-40B4-BE49-F238E27FC236}">
+                <a16:creationId xmlns:a16="http://schemas.microsoft.com/office/drawing/2014/main" id="{EF6A8B00-7A8F-4192-BED2-F2B7022AC1AE}"/>
               </a:ext>
             </a:extLst>
           </p:cNvPr>
@@ -16592,10 +15842,10 @@
       </p:sp>
       <p:sp>
         <p:nvSpPr>
-          <p:cNvPr id="15" name="">
-            <a:extLst xmlns:a="http://schemas.openxmlformats.org/drawingml/2006/main">
-              <a:ext uri="{FF2B5EF4-FFF2-40B4-BE49-F238E27FC236}">
-                <a16:creationId xmlns:a16="http://schemas.microsoft.com/office/drawing/2014/main" id="{4434BC86-7098-41E8-B48B-FD7360577673}"/>
+          <p:cNvPr id="14" name="">
+            <a:extLst xmlns:a="http://schemas.openxmlformats.org/drawingml/2006/main">
+              <a:ext uri="{FF2B5EF4-FFF2-40B4-BE49-F238E27FC236}">
+                <a16:creationId xmlns:a16="http://schemas.microsoft.com/office/drawing/2014/main" id="{6FD58616-3807-4863-A1F3-272A9443DB56}"/>
               </a:ext>
             </a:extLst>
           </p:cNvPr>
@@ -16625,10 +15875,10 @@
       </p:sp>
       <p:sp>
         <p:nvSpPr>
-          <p:cNvPr id="16" name="">
-            <a:extLst xmlns:a="http://schemas.openxmlformats.org/drawingml/2006/main">
-              <a:ext uri="{FF2B5EF4-FFF2-40B4-BE49-F238E27FC236}">
-                <a16:creationId xmlns:a16="http://schemas.microsoft.com/office/drawing/2014/main" id="{3D000E7C-A6B9-4F48-9403-069346D33C8B}"/>
+          <p:cNvPr id="15" name="">
+            <a:extLst xmlns:a="http://schemas.openxmlformats.org/drawingml/2006/main">
+              <a:ext uri="{FF2B5EF4-FFF2-40B4-BE49-F238E27FC236}">
+                <a16:creationId xmlns:a16="http://schemas.microsoft.com/office/drawing/2014/main" id="{BBF425B7-65A2-4083-8E59-7D55EBE8F178}"/>
               </a:ext>
             </a:extLst>
           </p:cNvPr>
@@ -16675,10 +15925,10 @@
       </p:sp>
       <p:sp>
         <p:nvSpPr>
-          <p:cNvPr id="17" name="">
-            <a:extLst xmlns:a="http://schemas.openxmlformats.org/drawingml/2006/main">
-              <a:ext uri="{FF2B5EF4-FFF2-40B4-BE49-F238E27FC236}">
-                <a16:creationId xmlns:a16="http://schemas.microsoft.com/office/drawing/2014/main" id="{B31AE459-788F-4EA8-A152-81C06D6AD141}"/>
+          <p:cNvPr id="16" name="">
+            <a:extLst xmlns:a="http://schemas.openxmlformats.org/drawingml/2006/main">
+              <a:ext uri="{FF2B5EF4-FFF2-40B4-BE49-F238E27FC236}">
+                <a16:creationId xmlns:a16="http://schemas.microsoft.com/office/drawing/2014/main" id="{ADD7C32D-FFDE-44B2-96C6-40B88682C62C}"/>
               </a:ext>
             </a:extLst>
           </p:cNvPr>
@@ -16776,10 +16026,10 @@
       </p:sp>
       <p:sp>
         <p:nvSpPr>
-          <p:cNvPr id="18" name="">
-            <a:extLst xmlns:a="http://schemas.openxmlformats.org/drawingml/2006/main">
-              <a:ext uri="{FF2B5EF4-FFF2-40B4-BE49-F238E27FC236}">
-                <a16:creationId xmlns:a16="http://schemas.microsoft.com/office/drawing/2014/main" id="{351C424E-08A1-4CC7-88D4-655EE34D65FA}"/>
+          <p:cNvPr id="17" name="">
+            <a:extLst xmlns:a="http://schemas.openxmlformats.org/drawingml/2006/main">
+              <a:ext uri="{FF2B5EF4-FFF2-40B4-BE49-F238E27FC236}">
+                <a16:creationId xmlns:a16="http://schemas.microsoft.com/office/drawing/2014/main" id="{1CB50A7B-078D-4985-ACF7-8AD92183827F}"/>
               </a:ext>
             </a:extLst>
           </p:cNvPr>
@@ -16827,7 +16077,7 @@
     </p:spTree>
     <p:extLst>
       <p:ext uri="{BB962C8B-B14F-4D97-AF65-F5344CB8AC3E}">
-        <p14:creationId xmlns:p14="http://schemas.microsoft.com/office/powerpoint/2010/main" val="2053639705"/>
+        <p14:creationId xmlns:p14="http://schemas.microsoft.com/office/powerpoint/2010/main" val="435140512"/>
       </p:ext>
     </p:extLst>
   </p:cSld>
@@ -16855,10 +16105,10 @@
       </p:grpSpPr>
       <p:sp>
         <p:nvSpPr>
-          <p:cNvPr id="27" name="">
-            <a:extLst xmlns:a="http://schemas.openxmlformats.org/drawingml/2006/main">
-              <a:ext uri="{FF2B5EF4-FFF2-40B4-BE49-F238E27FC236}">
-                <a16:creationId xmlns:a16="http://schemas.microsoft.com/office/drawing/2014/main" id="{E5F6AA55-F587-4B44-9D23-B2372222195F}"/>
+          <p:cNvPr id="26" name="">
+            <a:extLst xmlns:a="http://schemas.openxmlformats.org/drawingml/2006/main">
+              <a:ext uri="{FF2B5EF4-FFF2-40B4-BE49-F238E27FC236}">
+                <a16:creationId xmlns:a16="http://schemas.microsoft.com/office/drawing/2014/main" id="{C1C2B1FB-48F4-49F0-910A-D2458139FD88}"/>
               </a:ext>
             </a:extLst>
           </p:cNvPr>
@@ -16908,7 +16158,7 @@
           <p:cNvPr id="2" name="">
             <a:extLst xmlns:a="http://schemas.openxmlformats.org/drawingml/2006/main">
               <a:ext uri="{FF2B5EF4-FFF2-40B4-BE49-F238E27FC236}">
-                <a16:creationId xmlns:a16="http://schemas.microsoft.com/office/drawing/2014/main" id="{36145F42-76A1-4428-9E07-5166482AB973}"/>
+                <a16:creationId xmlns:a16="http://schemas.microsoft.com/office/drawing/2014/main" id="{6E2A5266-DC7E-4A8C-845B-518AEB4D8C0B}"/>
               </a:ext>
             </a:extLst>
           </p:cNvPr>
@@ -16939,69 +16189,19 @@
           <p:cNvPr id="3" name="">
             <a:extLst xmlns:a="http://schemas.openxmlformats.org/drawingml/2006/main">
               <a:ext uri="{FF2B5EF4-FFF2-40B4-BE49-F238E27FC236}">
-                <a16:creationId xmlns:a16="http://schemas.microsoft.com/office/drawing/2014/main" id="{FD1B2727-6C06-4DED-A26A-D06CC26035EC}"/>
-              </a:ext>
-            </a:extLst>
-          </p:cNvPr>
-          <p:cNvSpPr>
-            <a:spLocks xmlns:a="http://schemas.openxmlformats.org/drawingml/2006/main" noGrp="1"/>
-          </p:cNvSpPr>
-          <p:nvPr/>
-        </p:nvSpPr>
-        <p:spPr>
-          <a:xfrm xmlns:a="http://schemas.openxmlformats.org/drawingml/2006/main">
-            <a:off x="609600" y="800100"/>
-            <a:ext cx="3429000" cy="228600"/>
-          </a:xfrm>
-          <a:prstGeom xmlns:a="http://schemas.openxmlformats.org/drawingml/2006/main" prst="rect">
-            <a:avLst/>
-          </a:prstGeom>
-          <a:noFill xmlns:a="http://schemas.openxmlformats.org/drawingml/2006/main"/>
-          <a:ln xmlns:a="http://schemas.openxmlformats.org/drawingml/2006/main" w="0">
-            <a:noFill/>
-            <a:prstDash val="solid"/>
-          </a:ln>
-        </p:spPr>
-        <p:txBody>
-          <a:bodyPr xmlns:a="http://schemas.openxmlformats.org/drawingml/2006/main"/>
-          <a:lstStyle xmlns:a="http://schemas.openxmlformats.org/drawingml/2006/main"/>
-          <a:p xmlns:a="http://schemas.openxmlformats.org/drawingml/2006/main">
-            <a:pPr algn="l">
-              <a:defRPr sz="975" b="1">
-                <a:solidFill>
-                  <a:srgbClr val="C7F25C"/>
-                </a:solidFill>
-              </a:defRPr>
-            </a:pPr>
-            <a:r>
-              <a:rPr sz="975" b="1">
-                <a:solidFill>
-                  <a:srgbClr val="C7F25C"/>
-                </a:solidFill>
-              </a:rPr>
-              <a:t>15-MINUTE DEMONSTRATION</a:t>
-            </a:r>
-          </a:p>
-        </p:txBody>
-      </p:sp>
-      <p:sp>
-        <p:nvSpPr>
-          <p:cNvPr id="4" name="">
-            <a:extLst xmlns:a="http://schemas.openxmlformats.org/drawingml/2006/main">
-              <a:ext uri="{FF2B5EF4-FFF2-40B4-BE49-F238E27FC236}">
-                <a16:creationId xmlns:a16="http://schemas.microsoft.com/office/drawing/2014/main" id="{0EE17F7C-1169-4FB2-97A9-EA83FAAA6C81}"/>
-              </a:ext>
-            </a:extLst>
-          </p:cNvPr>
-          <p:cNvSpPr>
-            <a:spLocks xmlns:a="http://schemas.openxmlformats.org/drawingml/2006/main" noGrp="1"/>
-          </p:cNvSpPr>
-          <p:nvPr/>
-        </p:nvSpPr>
-        <p:spPr>
-          <a:xfrm xmlns:a="http://schemas.openxmlformats.org/drawingml/2006/main">
-            <a:off x="609600" y="1066800"/>
-            <a:ext cx="10668000" cy="647700"/>
+                <a16:creationId xmlns:a16="http://schemas.microsoft.com/office/drawing/2014/main" id="{BEF4537E-0E90-40D5-A3A5-38DE48B13298}"/>
+              </a:ext>
+            </a:extLst>
+          </p:cNvPr>
+          <p:cNvSpPr>
+            <a:spLocks xmlns:a="http://schemas.openxmlformats.org/drawingml/2006/main" noGrp="1"/>
+          </p:cNvSpPr>
+          <p:nvPr/>
+        </p:nvSpPr>
+        <p:spPr>
+          <a:xfrm xmlns:a="http://schemas.openxmlformats.org/drawingml/2006/main">
+            <a:off x="609600" y="838200"/>
+            <a:ext cx="10668000" cy="704850"/>
           </a:xfrm>
           <a:prstGeom xmlns:a="http://schemas.openxmlformats.org/drawingml/2006/main" prst="rect">
             <a:avLst/>
@@ -17036,10 +16236,10 @@
       </p:sp>
       <p:sp>
         <p:nvSpPr>
-          <p:cNvPr id="5" name="">
-            <a:extLst xmlns:a="http://schemas.openxmlformats.org/drawingml/2006/main">
-              <a:ext uri="{FF2B5EF4-FFF2-40B4-BE49-F238E27FC236}">
-                <a16:creationId xmlns:a16="http://schemas.microsoft.com/office/drawing/2014/main" id="{38D16660-D415-4C7F-B3F0-0D34A26C19D4}"/>
+          <p:cNvPr id="4" name="">
+            <a:extLst xmlns:a="http://schemas.openxmlformats.org/drawingml/2006/main">
+              <a:ext uri="{FF2B5EF4-FFF2-40B4-BE49-F238E27FC236}">
+                <a16:creationId xmlns:a16="http://schemas.microsoft.com/office/drawing/2014/main" id="{E39CDD24-B54C-40D7-80BB-B38DAA9E6A55}"/>
               </a:ext>
             </a:extLst>
           </p:cNvPr>
@@ -17086,10 +16286,10 @@
       </p:sp>
       <p:sp>
         <p:nvSpPr>
-          <p:cNvPr id="6" name="">
-            <a:extLst xmlns:a="http://schemas.openxmlformats.org/drawingml/2006/main">
-              <a:ext uri="{FF2B5EF4-FFF2-40B4-BE49-F238E27FC236}">
-                <a16:creationId xmlns:a16="http://schemas.microsoft.com/office/drawing/2014/main" id="{EE40C1AB-12E2-4273-9F8C-C8529A67F816}"/>
+          <p:cNvPr id="5" name="">
+            <a:extLst xmlns:a="http://schemas.openxmlformats.org/drawingml/2006/main">
+              <a:ext uri="{FF2B5EF4-FFF2-40B4-BE49-F238E27FC236}">
+                <a16:creationId xmlns:a16="http://schemas.microsoft.com/office/drawing/2014/main" id="{AB0E3F22-9879-475F-81E2-6866D16646F2}"/>
               </a:ext>
             </a:extLst>
           </p:cNvPr>
@@ -17136,10 +16336,10 @@
       </p:sp>
       <p:sp>
         <p:nvSpPr>
-          <p:cNvPr id="7" name="">
-            <a:extLst xmlns:a="http://schemas.openxmlformats.org/drawingml/2006/main">
-              <a:ext uri="{FF2B5EF4-FFF2-40B4-BE49-F238E27FC236}">
-                <a16:creationId xmlns:a16="http://schemas.microsoft.com/office/drawing/2014/main" id="{43D09EFC-4D99-4998-9D1D-1BC195A6D8CD}"/>
+          <p:cNvPr id="6" name="">
+            <a:extLst xmlns:a="http://schemas.openxmlformats.org/drawingml/2006/main">
+              <a:ext uri="{FF2B5EF4-FFF2-40B4-BE49-F238E27FC236}">
+                <a16:creationId xmlns:a16="http://schemas.microsoft.com/office/drawing/2014/main" id="{DD24D341-28C7-42E9-946D-63C1A111EEAF}"/>
               </a:ext>
             </a:extLst>
           </p:cNvPr>
@@ -17167,10 +16367,10 @@
       </p:sp>
       <p:sp>
         <p:nvSpPr>
-          <p:cNvPr id="8" name="">
-            <a:extLst xmlns:a="http://schemas.openxmlformats.org/drawingml/2006/main">
-              <a:ext uri="{FF2B5EF4-FFF2-40B4-BE49-F238E27FC236}">
-                <a16:creationId xmlns:a16="http://schemas.microsoft.com/office/drawing/2014/main" id="{AA7D6EE2-FF0B-4AC5-A00F-CF96BC53FB6F}"/>
+          <p:cNvPr id="7" name="">
+            <a:extLst xmlns:a="http://schemas.openxmlformats.org/drawingml/2006/main">
+              <a:ext uri="{FF2B5EF4-FFF2-40B4-BE49-F238E27FC236}">
+                <a16:creationId xmlns:a16="http://schemas.microsoft.com/office/drawing/2014/main" id="{12D674BE-76F1-4C81-A120-1B2B7ABB2328}"/>
               </a:ext>
             </a:extLst>
           </p:cNvPr>
@@ -17217,10 +16417,10 @@
       </p:sp>
       <p:sp>
         <p:nvSpPr>
-          <p:cNvPr id="9" name="">
-            <a:extLst xmlns:a="http://schemas.openxmlformats.org/drawingml/2006/main">
-              <a:ext uri="{FF2B5EF4-FFF2-40B4-BE49-F238E27FC236}">
-                <a16:creationId xmlns:a16="http://schemas.microsoft.com/office/drawing/2014/main" id="{AFF5D6D2-5EB1-48FF-A714-C9087F29A773}"/>
+          <p:cNvPr id="8" name="">
+            <a:extLst xmlns:a="http://schemas.openxmlformats.org/drawingml/2006/main">
+              <a:ext uri="{FF2B5EF4-FFF2-40B4-BE49-F238E27FC236}">
+                <a16:creationId xmlns:a16="http://schemas.microsoft.com/office/drawing/2014/main" id="{E2155BFE-221E-4A97-BDAB-B5CBA89D4843}"/>
               </a:ext>
             </a:extLst>
           </p:cNvPr>
@@ -17267,10 +16467,10 @@
       </p:sp>
       <p:sp>
         <p:nvSpPr>
-          <p:cNvPr id="10" name="">
-            <a:extLst xmlns:a="http://schemas.openxmlformats.org/drawingml/2006/main">
-              <a:ext uri="{FF2B5EF4-FFF2-40B4-BE49-F238E27FC236}">
-                <a16:creationId xmlns:a16="http://schemas.microsoft.com/office/drawing/2014/main" id="{95E326AD-2620-4424-B28C-E8C2F99C8F19}"/>
+          <p:cNvPr id="9" name="">
+            <a:extLst xmlns:a="http://schemas.openxmlformats.org/drawingml/2006/main">
+              <a:ext uri="{FF2B5EF4-FFF2-40B4-BE49-F238E27FC236}">
+                <a16:creationId xmlns:a16="http://schemas.microsoft.com/office/drawing/2014/main" id="{FE707B65-19CC-4249-9344-B95F414BC99D}"/>
               </a:ext>
             </a:extLst>
           </p:cNvPr>
@@ -17298,10 +16498,10 @@
       </p:sp>
       <p:sp>
         <p:nvSpPr>
-          <p:cNvPr id="11" name="">
-            <a:extLst xmlns:a="http://schemas.openxmlformats.org/drawingml/2006/main">
-              <a:ext uri="{FF2B5EF4-FFF2-40B4-BE49-F238E27FC236}">
-                <a16:creationId xmlns:a16="http://schemas.microsoft.com/office/drawing/2014/main" id="{2A27FEED-6A28-4C6E-961A-9636F86E3565}"/>
+          <p:cNvPr id="10" name="">
+            <a:extLst xmlns:a="http://schemas.openxmlformats.org/drawingml/2006/main">
+              <a:ext uri="{FF2B5EF4-FFF2-40B4-BE49-F238E27FC236}">
+                <a16:creationId xmlns:a16="http://schemas.microsoft.com/office/drawing/2014/main" id="{7EC2CEB9-2BAA-415C-AD24-A6B5BB0A1C2F}"/>
               </a:ext>
             </a:extLst>
           </p:cNvPr>
@@ -17348,10 +16548,10 @@
       </p:sp>
       <p:sp>
         <p:nvSpPr>
-          <p:cNvPr id="12" name="">
-            <a:extLst xmlns:a="http://schemas.openxmlformats.org/drawingml/2006/main">
-              <a:ext uri="{FF2B5EF4-FFF2-40B4-BE49-F238E27FC236}">
-                <a16:creationId xmlns:a16="http://schemas.microsoft.com/office/drawing/2014/main" id="{45AD9D84-8515-49EB-A6CF-4BB21CB85577}"/>
+          <p:cNvPr id="11" name="">
+            <a:extLst xmlns:a="http://schemas.openxmlformats.org/drawingml/2006/main">
+              <a:ext uri="{FF2B5EF4-FFF2-40B4-BE49-F238E27FC236}">
+                <a16:creationId xmlns:a16="http://schemas.microsoft.com/office/drawing/2014/main" id="{621784CA-0418-40B0-A373-7D2DEF8594D7}"/>
               </a:ext>
             </a:extLst>
           </p:cNvPr>
@@ -17398,10 +16598,10 @@
       </p:sp>
       <p:sp>
         <p:nvSpPr>
-          <p:cNvPr id="13" name="">
-            <a:extLst xmlns:a="http://schemas.openxmlformats.org/drawingml/2006/main">
-              <a:ext uri="{FF2B5EF4-FFF2-40B4-BE49-F238E27FC236}">
-                <a16:creationId xmlns:a16="http://schemas.microsoft.com/office/drawing/2014/main" id="{07FBB622-ED59-48A2-8CF6-B3555CBFB10F}"/>
+          <p:cNvPr id="12" name="">
+            <a:extLst xmlns:a="http://schemas.openxmlformats.org/drawingml/2006/main">
+              <a:ext uri="{FF2B5EF4-FFF2-40B4-BE49-F238E27FC236}">
+                <a16:creationId xmlns:a16="http://schemas.microsoft.com/office/drawing/2014/main" id="{8F6A5656-C405-421B-846C-31A5BE45C4F9}"/>
               </a:ext>
             </a:extLst>
           </p:cNvPr>
@@ -17429,10 +16629,10 @@
       </p:sp>
       <p:sp>
         <p:nvSpPr>
-          <p:cNvPr id="14" name="">
-            <a:extLst xmlns:a="http://schemas.openxmlformats.org/drawingml/2006/main">
-              <a:ext uri="{FF2B5EF4-FFF2-40B4-BE49-F238E27FC236}">
-                <a16:creationId xmlns:a16="http://schemas.microsoft.com/office/drawing/2014/main" id="{BC93731D-4595-42D0-9A11-FC194D02FF9E}"/>
+          <p:cNvPr id="13" name="">
+            <a:extLst xmlns:a="http://schemas.openxmlformats.org/drawingml/2006/main">
+              <a:ext uri="{FF2B5EF4-FFF2-40B4-BE49-F238E27FC236}">
+                <a16:creationId xmlns:a16="http://schemas.microsoft.com/office/drawing/2014/main" id="{6D38536F-0B6F-45CF-8FD0-C17C2AE97961}"/>
               </a:ext>
             </a:extLst>
           </p:cNvPr>
@@ -17479,10 +16679,10 @@
       </p:sp>
       <p:sp>
         <p:nvSpPr>
-          <p:cNvPr id="15" name="">
-            <a:extLst xmlns:a="http://schemas.openxmlformats.org/drawingml/2006/main">
-              <a:ext uri="{FF2B5EF4-FFF2-40B4-BE49-F238E27FC236}">
-                <a16:creationId xmlns:a16="http://schemas.microsoft.com/office/drawing/2014/main" id="{236D907D-CCA6-4D53-ABC3-B014D24F90AC}"/>
+          <p:cNvPr id="14" name="">
+            <a:extLst xmlns:a="http://schemas.openxmlformats.org/drawingml/2006/main">
+              <a:ext uri="{FF2B5EF4-FFF2-40B4-BE49-F238E27FC236}">
+                <a16:creationId xmlns:a16="http://schemas.microsoft.com/office/drawing/2014/main" id="{FED451AC-90C1-4257-B3BC-64A919EAFB09}"/>
               </a:ext>
             </a:extLst>
           </p:cNvPr>
@@ -17529,10 +16729,10 @@
       </p:sp>
       <p:sp>
         <p:nvSpPr>
-          <p:cNvPr id="16" name="">
-            <a:extLst xmlns:a="http://schemas.openxmlformats.org/drawingml/2006/main">
-              <a:ext uri="{FF2B5EF4-FFF2-40B4-BE49-F238E27FC236}">
-                <a16:creationId xmlns:a16="http://schemas.microsoft.com/office/drawing/2014/main" id="{A115D471-BE21-46CE-A910-8ACDCE548B91}"/>
+          <p:cNvPr id="15" name="">
+            <a:extLst xmlns:a="http://schemas.openxmlformats.org/drawingml/2006/main">
+              <a:ext uri="{FF2B5EF4-FFF2-40B4-BE49-F238E27FC236}">
+                <a16:creationId xmlns:a16="http://schemas.microsoft.com/office/drawing/2014/main" id="{40CF75BD-6DFD-45F7-9E9A-67AE75993E7A}"/>
               </a:ext>
             </a:extLst>
           </p:cNvPr>
@@ -17560,10 +16760,10 @@
       </p:sp>
       <p:sp>
         <p:nvSpPr>
-          <p:cNvPr id="17" name="">
-            <a:extLst xmlns:a="http://schemas.openxmlformats.org/drawingml/2006/main">
-              <a:ext uri="{FF2B5EF4-FFF2-40B4-BE49-F238E27FC236}">
-                <a16:creationId xmlns:a16="http://schemas.microsoft.com/office/drawing/2014/main" id="{A31300A9-4FBE-4F63-B27A-9E2F251DF29F}"/>
+          <p:cNvPr id="16" name="">
+            <a:extLst xmlns:a="http://schemas.openxmlformats.org/drawingml/2006/main">
+              <a:ext uri="{FF2B5EF4-FFF2-40B4-BE49-F238E27FC236}">
+                <a16:creationId xmlns:a16="http://schemas.microsoft.com/office/drawing/2014/main" id="{7F003C51-38F1-4E03-96F5-82700E78D7E8}"/>
               </a:ext>
             </a:extLst>
           </p:cNvPr>
@@ -17610,10 +16810,10 @@
       </p:sp>
       <p:sp>
         <p:nvSpPr>
-          <p:cNvPr id="18" name="">
-            <a:extLst xmlns:a="http://schemas.openxmlformats.org/drawingml/2006/main">
-              <a:ext uri="{FF2B5EF4-FFF2-40B4-BE49-F238E27FC236}">
-                <a16:creationId xmlns:a16="http://schemas.microsoft.com/office/drawing/2014/main" id="{9D4438AD-E9F6-4DCD-A382-04C19124C847}"/>
+          <p:cNvPr id="17" name="">
+            <a:extLst xmlns:a="http://schemas.openxmlformats.org/drawingml/2006/main">
+              <a:ext uri="{FF2B5EF4-FFF2-40B4-BE49-F238E27FC236}">
+                <a16:creationId xmlns:a16="http://schemas.microsoft.com/office/drawing/2014/main" id="{3E075C0B-16F4-4B88-9EE9-75C58F7C1C59}"/>
               </a:ext>
             </a:extLst>
           </p:cNvPr>
@@ -17660,10 +16860,10 @@
       </p:sp>
       <p:sp>
         <p:nvSpPr>
-          <p:cNvPr id="19" name="">
-            <a:extLst xmlns:a="http://schemas.openxmlformats.org/drawingml/2006/main">
-              <a:ext uri="{FF2B5EF4-FFF2-40B4-BE49-F238E27FC236}">
-                <a16:creationId xmlns:a16="http://schemas.microsoft.com/office/drawing/2014/main" id="{5886D431-5CD5-463C-A363-DF6D350F17E5}"/>
+          <p:cNvPr id="18" name="">
+            <a:extLst xmlns:a="http://schemas.openxmlformats.org/drawingml/2006/main">
+              <a:ext uri="{FF2B5EF4-FFF2-40B4-BE49-F238E27FC236}">
+                <a16:creationId xmlns:a16="http://schemas.microsoft.com/office/drawing/2014/main" id="{153EB7EB-F0D7-4C06-B373-CC2AA11811A6}"/>
               </a:ext>
             </a:extLst>
           </p:cNvPr>
@@ -17691,10 +16891,10 @@
       </p:sp>
       <p:sp>
         <p:nvSpPr>
-          <p:cNvPr id="20" name="">
-            <a:extLst xmlns:a="http://schemas.openxmlformats.org/drawingml/2006/main">
-              <a:ext uri="{FF2B5EF4-FFF2-40B4-BE49-F238E27FC236}">
-                <a16:creationId xmlns:a16="http://schemas.microsoft.com/office/drawing/2014/main" id="{353B213F-AC5B-4E84-8BE7-21319AB712A1}"/>
+          <p:cNvPr id="19" name="">
+            <a:extLst xmlns:a="http://schemas.openxmlformats.org/drawingml/2006/main">
+              <a:ext uri="{FF2B5EF4-FFF2-40B4-BE49-F238E27FC236}">
+                <a16:creationId xmlns:a16="http://schemas.microsoft.com/office/drawing/2014/main" id="{E8E932F4-9E8F-47C1-80F1-952DD0B340F7}"/>
               </a:ext>
             </a:extLst>
           </p:cNvPr>
@@ -17741,10 +16941,10 @@
       </p:sp>
       <p:sp>
         <p:nvSpPr>
-          <p:cNvPr id="21" name="">
-            <a:extLst xmlns:a="http://schemas.openxmlformats.org/drawingml/2006/main">
-              <a:ext uri="{FF2B5EF4-FFF2-40B4-BE49-F238E27FC236}">
-                <a16:creationId xmlns:a16="http://schemas.microsoft.com/office/drawing/2014/main" id="{A3FF32E3-741A-4833-A644-49A3DF11A8AE}"/>
+          <p:cNvPr id="20" name="">
+            <a:extLst xmlns:a="http://schemas.openxmlformats.org/drawingml/2006/main">
+              <a:ext uri="{FF2B5EF4-FFF2-40B4-BE49-F238E27FC236}">
+                <a16:creationId xmlns:a16="http://schemas.microsoft.com/office/drawing/2014/main" id="{B18089DD-966E-4FCD-B7D6-39115CA7CE4B}"/>
               </a:ext>
             </a:extLst>
           </p:cNvPr>
@@ -17791,10 +16991,10 @@
       </p:sp>
       <p:sp>
         <p:nvSpPr>
-          <p:cNvPr id="22" name="">
-            <a:extLst xmlns:a="http://schemas.openxmlformats.org/drawingml/2006/main">
-              <a:ext uri="{FF2B5EF4-FFF2-40B4-BE49-F238E27FC236}">
-                <a16:creationId xmlns:a16="http://schemas.microsoft.com/office/drawing/2014/main" id="{A87224CD-E2EF-42C7-A154-03BF14E69FB7}"/>
+          <p:cNvPr id="21" name="">
+            <a:extLst xmlns:a="http://schemas.openxmlformats.org/drawingml/2006/main">
+              <a:ext uri="{FF2B5EF4-FFF2-40B4-BE49-F238E27FC236}">
+                <a16:creationId xmlns:a16="http://schemas.microsoft.com/office/drawing/2014/main" id="{C55A6A5A-491F-4FF6-929A-B62B2F13A440}"/>
               </a:ext>
             </a:extLst>
           </p:cNvPr>
@@ -17822,10 +17022,10 @@
       </p:sp>
       <p:sp>
         <p:nvSpPr>
-          <p:cNvPr id="23" name="">
-            <a:extLst xmlns:a="http://schemas.openxmlformats.org/drawingml/2006/main">
-              <a:ext uri="{FF2B5EF4-FFF2-40B4-BE49-F238E27FC236}">
-                <a16:creationId xmlns:a16="http://schemas.microsoft.com/office/drawing/2014/main" id="{51DC167C-0EB7-4FCC-B464-D61B706D1087}"/>
+          <p:cNvPr id="22" name="">
+            <a:extLst xmlns:a="http://schemas.openxmlformats.org/drawingml/2006/main">
+              <a:ext uri="{FF2B5EF4-FFF2-40B4-BE49-F238E27FC236}">
+                <a16:creationId xmlns:a16="http://schemas.microsoft.com/office/drawing/2014/main" id="{BD3C55EB-1FBE-473C-A8C5-61533E8EF2F2}"/>
               </a:ext>
             </a:extLst>
           </p:cNvPr>
@@ -17853,10 +17053,10 @@
       </p:sp>
       <p:sp>
         <p:nvSpPr>
-          <p:cNvPr id="24" name="">
-            <a:extLst xmlns:a="http://schemas.openxmlformats.org/drawingml/2006/main">
-              <a:ext uri="{FF2B5EF4-FFF2-40B4-BE49-F238E27FC236}">
-                <a16:creationId xmlns:a16="http://schemas.microsoft.com/office/drawing/2014/main" id="{784D069A-8DCA-4286-B7D1-DA14720EBFE2}"/>
+          <p:cNvPr id="23" name="">
+            <a:extLst xmlns:a="http://schemas.openxmlformats.org/drawingml/2006/main">
+              <a:ext uri="{FF2B5EF4-FFF2-40B4-BE49-F238E27FC236}">
+                <a16:creationId xmlns:a16="http://schemas.microsoft.com/office/drawing/2014/main" id="{49A11346-ABA6-42EA-8166-20D0372DC333}"/>
               </a:ext>
             </a:extLst>
           </p:cNvPr>
@@ -17903,10 +17103,10 @@
       </p:sp>
       <p:sp>
         <p:nvSpPr>
-          <p:cNvPr id="25" name="">
-            <a:extLst xmlns:a="http://schemas.openxmlformats.org/drawingml/2006/main">
-              <a:ext uri="{FF2B5EF4-FFF2-40B4-BE49-F238E27FC236}">
-                <a16:creationId xmlns:a16="http://schemas.microsoft.com/office/drawing/2014/main" id="{FAC6C37C-B79C-445A-A172-82E8CA8039E7}"/>
+          <p:cNvPr id="24" name="">
+            <a:extLst xmlns:a="http://schemas.openxmlformats.org/drawingml/2006/main">
+              <a:ext uri="{FF2B5EF4-FFF2-40B4-BE49-F238E27FC236}">
+                <a16:creationId xmlns:a16="http://schemas.microsoft.com/office/drawing/2014/main" id="{840288B3-5359-4C2D-8045-514BACD2E459}"/>
               </a:ext>
             </a:extLst>
           </p:cNvPr>
@@ -17953,10 +17153,10 @@
       </p:sp>
       <p:sp>
         <p:nvSpPr>
-          <p:cNvPr id="26" name="">
-            <a:extLst xmlns:a="http://schemas.openxmlformats.org/drawingml/2006/main">
-              <a:ext uri="{FF2B5EF4-FFF2-40B4-BE49-F238E27FC236}">
-                <a16:creationId xmlns:a16="http://schemas.microsoft.com/office/drawing/2014/main" id="{F9AD0854-334F-4AA1-A160-D72DFE0CA480}"/>
+          <p:cNvPr id="25" name="">
+            <a:extLst xmlns:a="http://schemas.openxmlformats.org/drawingml/2006/main">
+              <a:ext uri="{FF2B5EF4-FFF2-40B4-BE49-F238E27FC236}">
+                <a16:creationId xmlns:a16="http://schemas.microsoft.com/office/drawing/2014/main" id="{38BDA6B2-AE47-4FF3-9663-BAD8D9660E5E}"/>
               </a:ext>
             </a:extLst>
           </p:cNvPr>
@@ -18004,7 +17204,7 @@
     </p:spTree>
     <p:extLst>
       <p:ext uri="{BB962C8B-B14F-4D97-AF65-F5344CB8AC3E}">
-        <p14:creationId xmlns:p14="http://schemas.microsoft.com/office/powerpoint/2010/main" val="1835312332"/>
+        <p14:creationId xmlns:p14="http://schemas.microsoft.com/office/powerpoint/2010/main" val="2094763344"/>
       </p:ext>
     </p:extLst>
   </p:cSld>
@@ -18032,10 +17232,10 @@
       </p:grpSpPr>
       <p:sp>
         <p:nvSpPr>
-          <p:cNvPr id="27" name="">
-            <a:extLst xmlns:a="http://schemas.openxmlformats.org/drawingml/2006/main">
-              <a:ext uri="{FF2B5EF4-FFF2-40B4-BE49-F238E27FC236}">
-                <a16:creationId xmlns:a16="http://schemas.microsoft.com/office/drawing/2014/main" id="{8C9CF7F1-F9DB-4D70-9422-6B5B11C9AD84}"/>
+          <p:cNvPr id="26" name="">
+            <a:extLst xmlns:a="http://schemas.openxmlformats.org/drawingml/2006/main">
+              <a:ext uri="{FF2B5EF4-FFF2-40B4-BE49-F238E27FC236}">
+                <a16:creationId xmlns:a16="http://schemas.microsoft.com/office/drawing/2014/main" id="{781F6024-C363-4470-91E6-C7E139E430ED}"/>
               </a:ext>
             </a:extLst>
           </p:cNvPr>
@@ -18085,7 +17285,7 @@
           <p:cNvPr id="2" name="">
             <a:extLst xmlns:a="http://schemas.openxmlformats.org/drawingml/2006/main">
               <a:ext uri="{FF2B5EF4-FFF2-40B4-BE49-F238E27FC236}">
-                <a16:creationId xmlns:a16="http://schemas.microsoft.com/office/drawing/2014/main" id="{2D1B4A0F-664C-4950-B993-FBF01DACDE2B}"/>
+                <a16:creationId xmlns:a16="http://schemas.microsoft.com/office/drawing/2014/main" id="{FF599F1D-C44F-4F48-A83A-369A615FBB0F}"/>
               </a:ext>
             </a:extLst>
           </p:cNvPr>
@@ -18116,69 +17316,19 @@
           <p:cNvPr id="3" name="">
             <a:extLst xmlns:a="http://schemas.openxmlformats.org/drawingml/2006/main">
               <a:ext uri="{FF2B5EF4-FFF2-40B4-BE49-F238E27FC236}">
-                <a16:creationId xmlns:a16="http://schemas.microsoft.com/office/drawing/2014/main" id="{0898F49C-FA24-4F3A-B322-61F316951276}"/>
-              </a:ext>
-            </a:extLst>
-          </p:cNvPr>
-          <p:cNvSpPr>
-            <a:spLocks xmlns:a="http://schemas.openxmlformats.org/drawingml/2006/main" noGrp="1"/>
-          </p:cNvSpPr>
-          <p:nvPr/>
-        </p:nvSpPr>
-        <p:spPr>
-          <a:xfrm xmlns:a="http://schemas.openxmlformats.org/drawingml/2006/main">
-            <a:off x="609600" y="800100"/>
-            <a:ext cx="3429000" cy="228600"/>
-          </a:xfrm>
-          <a:prstGeom xmlns:a="http://schemas.openxmlformats.org/drawingml/2006/main" prst="rect">
-            <a:avLst/>
-          </a:prstGeom>
-          <a:noFill xmlns:a="http://schemas.openxmlformats.org/drawingml/2006/main"/>
-          <a:ln xmlns:a="http://schemas.openxmlformats.org/drawingml/2006/main" w="0">
-            <a:noFill/>
-            <a:prstDash val="solid"/>
-          </a:ln>
-        </p:spPr>
-        <p:txBody>
-          <a:bodyPr xmlns:a="http://schemas.openxmlformats.org/drawingml/2006/main"/>
-          <a:lstStyle xmlns:a="http://schemas.openxmlformats.org/drawingml/2006/main"/>
-          <a:p xmlns:a="http://schemas.openxmlformats.org/drawingml/2006/main">
-            <a:pPr algn="l">
-              <a:defRPr sz="975" b="1">
-                <a:solidFill>
-                  <a:srgbClr val="E63888"/>
-                </a:solidFill>
-              </a:defRPr>
-            </a:pPr>
-            <a:r>
-              <a:rPr sz="975" b="1">
-                <a:solidFill>
-                  <a:srgbClr val="E63888"/>
-                </a:solidFill>
-              </a:rPr>
-              <a:t>SHARED VOCABULARY</a:t>
-            </a:r>
-          </a:p>
-        </p:txBody>
-      </p:sp>
-      <p:sp>
-        <p:nvSpPr>
-          <p:cNvPr id="4" name="">
-            <a:extLst xmlns:a="http://schemas.openxmlformats.org/drawingml/2006/main">
-              <a:ext uri="{FF2B5EF4-FFF2-40B4-BE49-F238E27FC236}">
-                <a16:creationId xmlns:a16="http://schemas.microsoft.com/office/drawing/2014/main" id="{6F4DF99A-0041-4AB3-976A-98EF1FE7F1EF}"/>
-              </a:ext>
-            </a:extLst>
-          </p:cNvPr>
-          <p:cNvSpPr>
-            <a:spLocks xmlns:a="http://schemas.openxmlformats.org/drawingml/2006/main" noGrp="1"/>
-          </p:cNvSpPr>
-          <p:nvPr/>
-        </p:nvSpPr>
-        <p:spPr>
-          <a:xfrm xmlns:a="http://schemas.openxmlformats.org/drawingml/2006/main">
-            <a:off x="609600" y="1066800"/>
-            <a:ext cx="10668000" cy="647700"/>
+                <a16:creationId xmlns:a16="http://schemas.microsoft.com/office/drawing/2014/main" id="{1D5D77FA-644F-4A21-9D05-AD1665020605}"/>
+              </a:ext>
+            </a:extLst>
+          </p:cNvPr>
+          <p:cNvSpPr>
+            <a:spLocks xmlns:a="http://schemas.openxmlformats.org/drawingml/2006/main" noGrp="1"/>
+          </p:cNvSpPr>
+          <p:nvPr/>
+        </p:nvSpPr>
+        <p:spPr>
+          <a:xfrm xmlns:a="http://schemas.openxmlformats.org/drawingml/2006/main">
+            <a:off x="609600" y="838200"/>
+            <a:ext cx="10668000" cy="704850"/>
           </a:xfrm>
           <a:prstGeom xmlns:a="http://schemas.openxmlformats.org/drawingml/2006/main" prst="rect">
             <a:avLst/>
@@ -18213,10 +17363,10 @@
       </p:sp>
       <p:sp>
         <p:nvSpPr>
-          <p:cNvPr id="5" name="">
-            <a:extLst xmlns:a="http://schemas.openxmlformats.org/drawingml/2006/main">
-              <a:ext uri="{FF2B5EF4-FFF2-40B4-BE49-F238E27FC236}">
-                <a16:creationId xmlns:a16="http://schemas.microsoft.com/office/drawing/2014/main" id="{5C806E5A-C4BC-492F-8813-A9B6392638E5}"/>
+          <p:cNvPr id="4" name="">
+            <a:extLst xmlns:a="http://schemas.openxmlformats.org/drawingml/2006/main">
+              <a:ext uri="{FF2B5EF4-FFF2-40B4-BE49-F238E27FC236}">
+                <a16:creationId xmlns:a16="http://schemas.microsoft.com/office/drawing/2014/main" id="{4D46826A-295B-4F51-B9BF-E8E04CC38A5B}"/>
               </a:ext>
             </a:extLst>
           </p:cNvPr>
@@ -18263,10 +17413,10 @@
       </p:sp>
       <p:sp>
         <p:nvSpPr>
-          <p:cNvPr id="6" name="">
-            <a:extLst xmlns:a="http://schemas.openxmlformats.org/drawingml/2006/main">
-              <a:ext uri="{FF2B5EF4-FFF2-40B4-BE49-F238E27FC236}">
-                <a16:creationId xmlns:a16="http://schemas.microsoft.com/office/drawing/2014/main" id="{49C8165D-BFB2-461E-A409-2AC8BDC96C7C}"/>
+          <p:cNvPr id="5" name="">
+            <a:extLst xmlns:a="http://schemas.openxmlformats.org/drawingml/2006/main">
+              <a:ext uri="{FF2B5EF4-FFF2-40B4-BE49-F238E27FC236}">
+                <a16:creationId xmlns:a16="http://schemas.microsoft.com/office/drawing/2014/main" id="{8832CA98-4A09-4DC1-A19E-C843529CE45A}"/>
               </a:ext>
             </a:extLst>
           </p:cNvPr>
@@ -18313,10 +17463,10 @@
       </p:sp>
       <p:sp>
         <p:nvSpPr>
-          <p:cNvPr id="7" name="">
-            <a:extLst xmlns:a="http://schemas.openxmlformats.org/drawingml/2006/main">
-              <a:ext uri="{FF2B5EF4-FFF2-40B4-BE49-F238E27FC236}">
-                <a16:creationId xmlns:a16="http://schemas.microsoft.com/office/drawing/2014/main" id="{D4F49FDB-2F51-4EF5-BCB7-456E45991FC8}"/>
+          <p:cNvPr id="6" name="">
+            <a:extLst xmlns:a="http://schemas.openxmlformats.org/drawingml/2006/main">
+              <a:ext uri="{FF2B5EF4-FFF2-40B4-BE49-F238E27FC236}">
+                <a16:creationId xmlns:a16="http://schemas.microsoft.com/office/drawing/2014/main" id="{A6749AD2-B779-4129-A2C2-649D52F273D3}"/>
               </a:ext>
             </a:extLst>
           </p:cNvPr>
@@ -18346,10 +17496,10 @@
       </p:sp>
       <p:sp>
         <p:nvSpPr>
-          <p:cNvPr id="8" name="">
-            <a:extLst xmlns:a="http://schemas.openxmlformats.org/drawingml/2006/main">
-              <a:ext uri="{FF2B5EF4-FFF2-40B4-BE49-F238E27FC236}">
-                <a16:creationId xmlns:a16="http://schemas.microsoft.com/office/drawing/2014/main" id="{E50D106B-2451-412E-8102-61C66EA87DE3}"/>
+          <p:cNvPr id="7" name="">
+            <a:extLst xmlns:a="http://schemas.openxmlformats.org/drawingml/2006/main">
+              <a:ext uri="{FF2B5EF4-FFF2-40B4-BE49-F238E27FC236}">
+                <a16:creationId xmlns:a16="http://schemas.microsoft.com/office/drawing/2014/main" id="{EADFA240-60CB-4CA9-9D5D-5F6A73CAA42B}"/>
               </a:ext>
             </a:extLst>
           </p:cNvPr>
@@ -18396,10 +17546,10 @@
       </p:sp>
       <p:sp>
         <p:nvSpPr>
-          <p:cNvPr id="9" name="">
-            <a:extLst xmlns:a="http://schemas.openxmlformats.org/drawingml/2006/main">
-              <a:ext uri="{FF2B5EF4-FFF2-40B4-BE49-F238E27FC236}">
-                <a16:creationId xmlns:a16="http://schemas.microsoft.com/office/drawing/2014/main" id="{6ED716DD-7525-4185-BA84-33BA93FF50F1}"/>
+          <p:cNvPr id="8" name="">
+            <a:extLst xmlns:a="http://schemas.openxmlformats.org/drawingml/2006/main">
+              <a:ext uri="{FF2B5EF4-FFF2-40B4-BE49-F238E27FC236}">
+                <a16:creationId xmlns:a16="http://schemas.microsoft.com/office/drawing/2014/main" id="{8DC11002-FDC3-4604-954E-1F29DE326C8D}"/>
               </a:ext>
             </a:extLst>
           </p:cNvPr>
@@ -18446,10 +17596,10 @@
       </p:sp>
       <p:sp>
         <p:nvSpPr>
-          <p:cNvPr id="10" name="">
-            <a:extLst xmlns:a="http://schemas.openxmlformats.org/drawingml/2006/main">
-              <a:ext uri="{FF2B5EF4-FFF2-40B4-BE49-F238E27FC236}">
-                <a16:creationId xmlns:a16="http://schemas.microsoft.com/office/drawing/2014/main" id="{9D1FD020-55AB-430D-BBEF-8B159BF796CB}"/>
+          <p:cNvPr id="9" name="">
+            <a:extLst xmlns:a="http://schemas.openxmlformats.org/drawingml/2006/main">
+              <a:ext uri="{FF2B5EF4-FFF2-40B4-BE49-F238E27FC236}">
+                <a16:creationId xmlns:a16="http://schemas.microsoft.com/office/drawing/2014/main" id="{341F1999-7F17-4D37-8C97-DA0AF4EBF0C6}"/>
               </a:ext>
             </a:extLst>
           </p:cNvPr>
@@ -18496,10 +17646,10 @@
       </p:sp>
       <p:sp>
         <p:nvSpPr>
-          <p:cNvPr id="11" name="">
-            <a:extLst xmlns:a="http://schemas.openxmlformats.org/drawingml/2006/main">
-              <a:ext uri="{FF2B5EF4-FFF2-40B4-BE49-F238E27FC236}">
-                <a16:creationId xmlns:a16="http://schemas.microsoft.com/office/drawing/2014/main" id="{717FFF00-4AE9-401E-86D7-3622ED6C1DB4}"/>
+          <p:cNvPr id="10" name="">
+            <a:extLst xmlns:a="http://schemas.openxmlformats.org/drawingml/2006/main">
+              <a:ext uri="{FF2B5EF4-FFF2-40B4-BE49-F238E27FC236}">
+                <a16:creationId xmlns:a16="http://schemas.microsoft.com/office/drawing/2014/main" id="{B0ED4B55-442B-456C-BE23-96BAB17A3A54}"/>
               </a:ext>
             </a:extLst>
           </p:cNvPr>
@@ -18546,10 +17696,10 @@
       </p:sp>
       <p:sp>
         <p:nvSpPr>
-          <p:cNvPr id="12" name="">
-            <a:extLst xmlns:a="http://schemas.openxmlformats.org/drawingml/2006/main">
-              <a:ext uri="{FF2B5EF4-FFF2-40B4-BE49-F238E27FC236}">
-                <a16:creationId xmlns:a16="http://schemas.microsoft.com/office/drawing/2014/main" id="{407583E8-B1BE-4BC9-A18F-5FCCA3EB0E6E}"/>
+          <p:cNvPr id="11" name="">
+            <a:extLst xmlns:a="http://schemas.openxmlformats.org/drawingml/2006/main">
+              <a:ext uri="{FF2B5EF4-FFF2-40B4-BE49-F238E27FC236}">
+                <a16:creationId xmlns:a16="http://schemas.microsoft.com/office/drawing/2014/main" id="{9B136C15-5A46-40BB-BCB4-E6A9299372D7}"/>
               </a:ext>
             </a:extLst>
           </p:cNvPr>
@@ -18596,10 +17746,10 @@
       </p:sp>
       <p:sp>
         <p:nvSpPr>
-          <p:cNvPr id="13" name="">
-            <a:extLst xmlns:a="http://schemas.openxmlformats.org/drawingml/2006/main">
-              <a:ext uri="{FF2B5EF4-FFF2-40B4-BE49-F238E27FC236}">
-                <a16:creationId xmlns:a16="http://schemas.microsoft.com/office/drawing/2014/main" id="{BB7CA439-F925-4FBF-B153-BC7DE52DCFCE}"/>
+          <p:cNvPr id="12" name="">
+            <a:extLst xmlns:a="http://schemas.openxmlformats.org/drawingml/2006/main">
+              <a:ext uri="{FF2B5EF4-FFF2-40B4-BE49-F238E27FC236}">
+                <a16:creationId xmlns:a16="http://schemas.microsoft.com/office/drawing/2014/main" id="{594CB1CB-71B2-4662-A9F0-FDA27F2708B8}"/>
               </a:ext>
             </a:extLst>
           </p:cNvPr>
@@ -18646,10 +17796,10 @@
       </p:sp>
       <p:sp>
         <p:nvSpPr>
-          <p:cNvPr id="14" name="">
-            <a:extLst xmlns:a="http://schemas.openxmlformats.org/drawingml/2006/main">
-              <a:ext uri="{FF2B5EF4-FFF2-40B4-BE49-F238E27FC236}">
-                <a16:creationId xmlns:a16="http://schemas.microsoft.com/office/drawing/2014/main" id="{4488FCF5-9033-4F9B-B90B-2B233556E9C4}"/>
+          <p:cNvPr id="13" name="">
+            <a:extLst xmlns:a="http://schemas.openxmlformats.org/drawingml/2006/main">
+              <a:ext uri="{FF2B5EF4-FFF2-40B4-BE49-F238E27FC236}">
+                <a16:creationId xmlns:a16="http://schemas.microsoft.com/office/drawing/2014/main" id="{89F3E30B-CEE9-4428-BAFE-320D87C0CC48}"/>
               </a:ext>
             </a:extLst>
           </p:cNvPr>
@@ -18696,10 +17846,10 @@
       </p:sp>
       <p:sp>
         <p:nvSpPr>
-          <p:cNvPr id="15" name="">
-            <a:extLst xmlns:a="http://schemas.openxmlformats.org/drawingml/2006/main">
-              <a:ext uri="{FF2B5EF4-FFF2-40B4-BE49-F238E27FC236}">
-                <a16:creationId xmlns:a16="http://schemas.microsoft.com/office/drawing/2014/main" id="{B45644C8-E954-4BF9-B05C-245BE3BF6F25}"/>
+          <p:cNvPr id="14" name="">
+            <a:extLst xmlns:a="http://schemas.openxmlformats.org/drawingml/2006/main">
+              <a:ext uri="{FF2B5EF4-FFF2-40B4-BE49-F238E27FC236}">
+                <a16:creationId xmlns:a16="http://schemas.microsoft.com/office/drawing/2014/main" id="{57394BB8-FF3B-41C1-B805-927396FF8115}"/>
               </a:ext>
             </a:extLst>
           </p:cNvPr>
@@ -18746,10 +17896,10 @@
       </p:sp>
       <p:sp>
         <p:nvSpPr>
-          <p:cNvPr id="16" name="">
-            <a:extLst xmlns:a="http://schemas.openxmlformats.org/drawingml/2006/main">
-              <a:ext uri="{FF2B5EF4-FFF2-40B4-BE49-F238E27FC236}">
-                <a16:creationId xmlns:a16="http://schemas.microsoft.com/office/drawing/2014/main" id="{29BCA2E5-603C-4FAA-B267-53512A768B5D}"/>
+          <p:cNvPr id="15" name="">
+            <a:extLst xmlns:a="http://schemas.openxmlformats.org/drawingml/2006/main">
+              <a:ext uri="{FF2B5EF4-FFF2-40B4-BE49-F238E27FC236}">
+                <a16:creationId xmlns:a16="http://schemas.microsoft.com/office/drawing/2014/main" id="{F838EBD9-7FC9-4A17-8C5B-11D829024C6F}"/>
               </a:ext>
             </a:extLst>
           </p:cNvPr>
@@ -18796,10 +17946,10 @@
       </p:sp>
       <p:sp>
         <p:nvSpPr>
-          <p:cNvPr id="17" name="">
-            <a:extLst xmlns:a="http://schemas.openxmlformats.org/drawingml/2006/main">
-              <a:ext uri="{FF2B5EF4-FFF2-40B4-BE49-F238E27FC236}">
-                <a16:creationId xmlns:a16="http://schemas.microsoft.com/office/drawing/2014/main" id="{F2E5C657-5536-4B0C-A6B8-17C50A1A4E3B}"/>
+          <p:cNvPr id="16" name="">
+            <a:extLst xmlns:a="http://schemas.openxmlformats.org/drawingml/2006/main">
+              <a:ext uri="{FF2B5EF4-FFF2-40B4-BE49-F238E27FC236}">
+                <a16:creationId xmlns:a16="http://schemas.microsoft.com/office/drawing/2014/main" id="{EACAABE7-55EA-4C6A-ADC2-B9AE7D65D829}"/>
               </a:ext>
             </a:extLst>
           </p:cNvPr>
@@ -18846,10 +17996,10 @@
       </p:sp>
       <p:sp>
         <p:nvSpPr>
-          <p:cNvPr id="18" name="">
-            <a:extLst xmlns:a="http://schemas.openxmlformats.org/drawingml/2006/main">
-              <a:ext uri="{FF2B5EF4-FFF2-40B4-BE49-F238E27FC236}">
-                <a16:creationId xmlns:a16="http://schemas.microsoft.com/office/drawing/2014/main" id="{E1B2C34B-8C7B-4482-A375-73B70824C61E}"/>
+          <p:cNvPr id="17" name="">
+            <a:extLst xmlns:a="http://schemas.openxmlformats.org/drawingml/2006/main">
+              <a:ext uri="{FF2B5EF4-FFF2-40B4-BE49-F238E27FC236}">
+                <a16:creationId xmlns:a16="http://schemas.microsoft.com/office/drawing/2014/main" id="{C4B6C83D-3921-434D-AE21-A8BF850DEF00}"/>
               </a:ext>
             </a:extLst>
           </p:cNvPr>
@@ -18896,10 +18046,10 @@
       </p:sp>
       <p:sp>
         <p:nvSpPr>
-          <p:cNvPr id="19" name="">
-            <a:extLst xmlns:a="http://schemas.openxmlformats.org/drawingml/2006/main">
-              <a:ext uri="{FF2B5EF4-FFF2-40B4-BE49-F238E27FC236}">
-                <a16:creationId xmlns:a16="http://schemas.microsoft.com/office/drawing/2014/main" id="{7C2DD2BE-E9DA-4563-97A2-6DB4BEF2B7B0}"/>
+          <p:cNvPr id="18" name="">
+            <a:extLst xmlns:a="http://schemas.openxmlformats.org/drawingml/2006/main">
+              <a:ext uri="{FF2B5EF4-FFF2-40B4-BE49-F238E27FC236}">
+                <a16:creationId xmlns:a16="http://schemas.microsoft.com/office/drawing/2014/main" id="{24BBF51D-665B-4880-9950-A4A4983694D8}"/>
               </a:ext>
             </a:extLst>
           </p:cNvPr>
@@ -18946,10 +18096,10 @@
       </p:sp>
       <p:sp>
         <p:nvSpPr>
-          <p:cNvPr id="20" name="">
-            <a:extLst xmlns:a="http://schemas.openxmlformats.org/drawingml/2006/main">
-              <a:ext uri="{FF2B5EF4-FFF2-40B4-BE49-F238E27FC236}">
-                <a16:creationId xmlns:a16="http://schemas.microsoft.com/office/drawing/2014/main" id="{155E73EB-18A7-4085-A51E-59D420C9B15A}"/>
+          <p:cNvPr id="19" name="">
+            <a:extLst xmlns:a="http://schemas.openxmlformats.org/drawingml/2006/main">
+              <a:ext uri="{FF2B5EF4-FFF2-40B4-BE49-F238E27FC236}">
+                <a16:creationId xmlns:a16="http://schemas.microsoft.com/office/drawing/2014/main" id="{14840260-7E27-4BA3-95AA-DE9CD9924AC4}"/>
               </a:ext>
             </a:extLst>
           </p:cNvPr>
@@ -18996,10 +18146,10 @@
       </p:sp>
       <p:sp>
         <p:nvSpPr>
-          <p:cNvPr id="21" name="">
-            <a:extLst xmlns:a="http://schemas.openxmlformats.org/drawingml/2006/main">
-              <a:ext uri="{FF2B5EF4-FFF2-40B4-BE49-F238E27FC236}">
-                <a16:creationId xmlns:a16="http://schemas.microsoft.com/office/drawing/2014/main" id="{E3BDE34D-A123-4288-BD1D-FF121D224D90}"/>
+          <p:cNvPr id="20" name="">
+            <a:extLst xmlns:a="http://schemas.openxmlformats.org/drawingml/2006/main">
+              <a:ext uri="{FF2B5EF4-FFF2-40B4-BE49-F238E27FC236}">
+                <a16:creationId xmlns:a16="http://schemas.microsoft.com/office/drawing/2014/main" id="{F99AC765-A1D1-4A93-9CAB-40877D2A8993}"/>
               </a:ext>
             </a:extLst>
           </p:cNvPr>
@@ -19046,10 +18196,10 @@
       </p:sp>
       <p:sp>
         <p:nvSpPr>
-          <p:cNvPr id="22" name="">
-            <a:extLst xmlns:a="http://schemas.openxmlformats.org/drawingml/2006/main">
-              <a:ext uri="{FF2B5EF4-FFF2-40B4-BE49-F238E27FC236}">
-                <a16:creationId xmlns:a16="http://schemas.microsoft.com/office/drawing/2014/main" id="{B046C77D-440A-4785-AB7B-9315AA402A14}"/>
+          <p:cNvPr id="21" name="">
+            <a:extLst xmlns:a="http://schemas.openxmlformats.org/drawingml/2006/main">
+              <a:ext uri="{FF2B5EF4-FFF2-40B4-BE49-F238E27FC236}">
+                <a16:creationId xmlns:a16="http://schemas.microsoft.com/office/drawing/2014/main" id="{38D7B7ED-AAEE-42E8-8F41-8D0119148346}"/>
               </a:ext>
             </a:extLst>
           </p:cNvPr>
@@ -19096,10 +18246,10 @@
       </p:sp>
       <p:sp>
         <p:nvSpPr>
-          <p:cNvPr id="23" name="">
-            <a:extLst xmlns:a="http://schemas.openxmlformats.org/drawingml/2006/main">
-              <a:ext uri="{FF2B5EF4-FFF2-40B4-BE49-F238E27FC236}">
-                <a16:creationId xmlns:a16="http://schemas.microsoft.com/office/drawing/2014/main" id="{69D46889-BDCA-435A-B051-42FD6895A986}"/>
+          <p:cNvPr id="22" name="">
+            <a:extLst xmlns:a="http://schemas.openxmlformats.org/drawingml/2006/main">
+              <a:ext uri="{FF2B5EF4-FFF2-40B4-BE49-F238E27FC236}">
+                <a16:creationId xmlns:a16="http://schemas.microsoft.com/office/drawing/2014/main" id="{EB0CDD8E-6582-4205-8D30-212C325F6CE3}"/>
               </a:ext>
             </a:extLst>
           </p:cNvPr>
@@ -19146,10 +18296,10 @@
       </p:sp>
       <p:sp>
         <p:nvSpPr>
-          <p:cNvPr id="24" name="">
-            <a:extLst xmlns:a="http://schemas.openxmlformats.org/drawingml/2006/main">
-              <a:ext uri="{FF2B5EF4-FFF2-40B4-BE49-F238E27FC236}">
-                <a16:creationId xmlns:a16="http://schemas.microsoft.com/office/drawing/2014/main" id="{2A232037-C2DF-45C9-8205-6B373E2803A4}"/>
+          <p:cNvPr id="23" name="">
+            <a:extLst xmlns:a="http://schemas.openxmlformats.org/drawingml/2006/main">
+              <a:ext uri="{FF2B5EF4-FFF2-40B4-BE49-F238E27FC236}">
+                <a16:creationId xmlns:a16="http://schemas.microsoft.com/office/drawing/2014/main" id="{84306793-3B5A-49FB-BF2D-A49A4A4965E2}"/>
               </a:ext>
             </a:extLst>
           </p:cNvPr>
@@ -19196,10 +18346,10 @@
       </p:sp>
       <p:sp>
         <p:nvSpPr>
-          <p:cNvPr id="25" name="">
-            <a:extLst xmlns:a="http://schemas.openxmlformats.org/drawingml/2006/main">
-              <a:ext uri="{FF2B5EF4-FFF2-40B4-BE49-F238E27FC236}">
-                <a16:creationId xmlns:a16="http://schemas.microsoft.com/office/drawing/2014/main" id="{30F99E10-1C54-4382-A2E6-7E4BBD32EEAE}"/>
+          <p:cNvPr id="24" name="">
+            <a:extLst xmlns:a="http://schemas.openxmlformats.org/drawingml/2006/main">
+              <a:ext uri="{FF2B5EF4-FFF2-40B4-BE49-F238E27FC236}">
+                <a16:creationId xmlns:a16="http://schemas.microsoft.com/office/drawing/2014/main" id="{26AEDBED-80A2-4952-BEC2-5043D2AABE69}"/>
               </a:ext>
             </a:extLst>
           </p:cNvPr>
@@ -19246,10 +18396,10 @@
       </p:sp>
       <p:sp>
         <p:nvSpPr>
-          <p:cNvPr id="26" name="">
-            <a:extLst xmlns:a="http://schemas.openxmlformats.org/drawingml/2006/main">
-              <a:ext uri="{FF2B5EF4-FFF2-40B4-BE49-F238E27FC236}">
-                <a16:creationId xmlns:a16="http://schemas.microsoft.com/office/drawing/2014/main" id="{4C278179-8802-45F0-9112-86D69A21A151}"/>
+          <p:cNvPr id="25" name="">
+            <a:extLst xmlns:a="http://schemas.openxmlformats.org/drawingml/2006/main">
+              <a:ext uri="{FF2B5EF4-FFF2-40B4-BE49-F238E27FC236}">
+                <a16:creationId xmlns:a16="http://schemas.microsoft.com/office/drawing/2014/main" id="{C89F9AC1-0553-4246-A5A3-4ED1831C605D}"/>
               </a:ext>
             </a:extLst>
           </p:cNvPr>
@@ -19297,7 +18447,7 @@
     </p:spTree>
     <p:extLst>
       <p:ext uri="{BB962C8B-B14F-4D97-AF65-F5344CB8AC3E}">
-        <p14:creationId xmlns:p14="http://schemas.microsoft.com/office/powerpoint/2010/main" val="141894452"/>
+        <p14:creationId xmlns:p14="http://schemas.microsoft.com/office/powerpoint/2010/main" val="949499127"/>
       </p:ext>
     </p:extLst>
   </p:cSld>
@@ -19325,10 +18475,10 @@
       </p:grpSpPr>
       <p:sp>
         <p:nvSpPr>
-          <p:cNvPr id="13" name="">
-            <a:extLst xmlns:a="http://schemas.openxmlformats.org/drawingml/2006/main">
-              <a:ext uri="{FF2B5EF4-FFF2-40B4-BE49-F238E27FC236}">
-                <a16:creationId xmlns:a16="http://schemas.microsoft.com/office/drawing/2014/main" id="{F3A5AD2D-92E3-4AFD-8640-F34B9CC4F05A}"/>
+          <p:cNvPr id="12" name="">
+            <a:extLst xmlns:a="http://schemas.openxmlformats.org/drawingml/2006/main">
+              <a:ext uri="{FF2B5EF4-FFF2-40B4-BE49-F238E27FC236}">
+                <a16:creationId xmlns:a16="http://schemas.microsoft.com/office/drawing/2014/main" id="{1FB3EDF1-F056-4277-BB6C-038C123008A2}"/>
               </a:ext>
             </a:extLst>
           </p:cNvPr>
@@ -19378,7 +18528,7 @@
           <p:cNvPr id="2" name="">
             <a:extLst xmlns:a="http://schemas.openxmlformats.org/drawingml/2006/main">
               <a:ext uri="{FF2B5EF4-FFF2-40B4-BE49-F238E27FC236}">
-                <a16:creationId xmlns:a16="http://schemas.microsoft.com/office/drawing/2014/main" id="{80CACE1D-2DC9-423E-8F9F-47270453DA81}"/>
+                <a16:creationId xmlns:a16="http://schemas.microsoft.com/office/drawing/2014/main" id="{25E8C4AD-3289-457D-A4E7-FBBFFDCF69E1}"/>
               </a:ext>
             </a:extLst>
           </p:cNvPr>
@@ -19409,69 +18559,19 @@
           <p:cNvPr id="3" name="">
             <a:extLst xmlns:a="http://schemas.openxmlformats.org/drawingml/2006/main">
               <a:ext uri="{FF2B5EF4-FFF2-40B4-BE49-F238E27FC236}">
-                <a16:creationId xmlns:a16="http://schemas.microsoft.com/office/drawing/2014/main" id="{D43F6D15-06A5-4DA9-8AB4-1741F4D610CF}"/>
-              </a:ext>
-            </a:extLst>
-          </p:cNvPr>
-          <p:cNvSpPr>
-            <a:spLocks xmlns:a="http://schemas.openxmlformats.org/drawingml/2006/main" noGrp="1"/>
-          </p:cNvSpPr>
-          <p:nvPr/>
-        </p:nvSpPr>
-        <p:spPr>
-          <a:xfrm xmlns:a="http://schemas.openxmlformats.org/drawingml/2006/main">
-            <a:off x="609600" y="800100"/>
-            <a:ext cx="3429000" cy="228600"/>
-          </a:xfrm>
-          <a:prstGeom xmlns:a="http://schemas.openxmlformats.org/drawingml/2006/main" prst="rect">
-            <a:avLst/>
-          </a:prstGeom>
-          <a:noFill xmlns:a="http://schemas.openxmlformats.org/drawingml/2006/main"/>
-          <a:ln xmlns:a="http://schemas.openxmlformats.org/drawingml/2006/main" w="0">
-            <a:noFill/>
-            <a:prstDash val="solid"/>
-          </a:ln>
-        </p:spPr>
-        <p:txBody>
-          <a:bodyPr xmlns:a="http://schemas.openxmlformats.org/drawingml/2006/main"/>
-          <a:lstStyle xmlns:a="http://schemas.openxmlformats.org/drawingml/2006/main"/>
-          <a:p xmlns:a="http://schemas.openxmlformats.org/drawingml/2006/main">
-            <a:pPr algn="l">
-              <a:defRPr sz="975" b="1">
-                <a:solidFill>
-                  <a:srgbClr val="C7F25C"/>
-                </a:solidFill>
-              </a:defRPr>
-            </a:pPr>
-            <a:r>
-              <a:rPr sz="975" b="1">
-                <a:solidFill>
-                  <a:srgbClr val="C7F25C"/>
-                </a:solidFill>
-              </a:rPr>
-              <a:t>ZAPIER V2 REFERENCE</a:t>
-            </a:r>
-          </a:p>
-        </p:txBody>
-      </p:sp>
-      <p:sp>
-        <p:nvSpPr>
-          <p:cNvPr id="4" name="">
-            <a:extLst xmlns:a="http://schemas.openxmlformats.org/drawingml/2006/main">
-              <a:ext uri="{FF2B5EF4-FFF2-40B4-BE49-F238E27FC236}">
-                <a16:creationId xmlns:a16="http://schemas.microsoft.com/office/drawing/2014/main" id="{9C4C841A-D130-4B8F-9B09-DFE1D4588E0E}"/>
-              </a:ext>
-            </a:extLst>
-          </p:cNvPr>
-          <p:cNvSpPr>
-            <a:spLocks xmlns:a="http://schemas.openxmlformats.org/drawingml/2006/main" noGrp="1"/>
-          </p:cNvSpPr>
-          <p:nvPr/>
-        </p:nvSpPr>
-        <p:spPr>
-          <a:xfrm xmlns:a="http://schemas.openxmlformats.org/drawingml/2006/main">
-            <a:off x="609600" y="1066800"/>
-            <a:ext cx="10668000" cy="647700"/>
+                <a16:creationId xmlns:a16="http://schemas.microsoft.com/office/drawing/2014/main" id="{718490D1-9D4D-4CC5-AF58-300867E889A4}"/>
+              </a:ext>
+            </a:extLst>
+          </p:cNvPr>
+          <p:cNvSpPr>
+            <a:spLocks xmlns:a="http://schemas.openxmlformats.org/drawingml/2006/main" noGrp="1"/>
+          </p:cNvSpPr>
+          <p:nvPr/>
+        </p:nvSpPr>
+        <p:spPr>
+          <a:xfrm xmlns:a="http://schemas.openxmlformats.org/drawingml/2006/main">
+            <a:off x="609600" y="838200"/>
+            <a:ext cx="10668000" cy="704850"/>
           </a:xfrm>
           <a:prstGeom xmlns:a="http://schemas.openxmlformats.org/drawingml/2006/main" prst="rect">
             <a:avLst/>
@@ -19506,10 +18606,10 @@
       </p:sp>
       <p:sp>
         <p:nvSpPr>
-          <p:cNvPr id="5" name="">
-            <a:extLst xmlns:a="http://schemas.openxmlformats.org/drawingml/2006/main">
-              <a:ext uri="{FF2B5EF4-FFF2-40B4-BE49-F238E27FC236}">
-                <a16:creationId xmlns:a16="http://schemas.microsoft.com/office/drawing/2014/main" id="{DB4EA574-AD55-4931-A984-959922458299}"/>
+          <p:cNvPr id="4" name="">
+            <a:extLst xmlns:a="http://schemas.openxmlformats.org/drawingml/2006/main">
+              <a:ext uri="{FF2B5EF4-FFF2-40B4-BE49-F238E27FC236}">
+                <a16:creationId xmlns:a16="http://schemas.microsoft.com/office/drawing/2014/main" id="{A6EB3CDC-D019-4035-8FCA-B6805BFC09C6}"/>
               </a:ext>
             </a:extLst>
           </p:cNvPr>
@@ -19556,10 +18656,10 @@
       </p:sp>
       <p:sp>
         <p:nvSpPr>
-          <p:cNvPr id="6" name="">
-            <a:extLst xmlns:a="http://schemas.openxmlformats.org/drawingml/2006/main">
-              <a:ext uri="{FF2B5EF4-FFF2-40B4-BE49-F238E27FC236}">
-                <a16:creationId xmlns:a16="http://schemas.microsoft.com/office/drawing/2014/main" id="{CB42D0B9-7E81-4B0F-A91E-7F8794B78795}"/>
+          <p:cNvPr id="5" name="">
+            <a:extLst xmlns:a="http://schemas.openxmlformats.org/drawingml/2006/main">
+              <a:ext uri="{FF2B5EF4-FFF2-40B4-BE49-F238E27FC236}">
+                <a16:creationId xmlns:a16="http://schemas.microsoft.com/office/drawing/2014/main" id="{C1811C45-7D3E-4000-8EE6-1B57DD7CE66A}"/>
               </a:ext>
             </a:extLst>
           </p:cNvPr>
@@ -19606,10 +18706,10 @@
       </p:sp>
       <p:sp>
         <p:nvSpPr>
-          <p:cNvPr id="7" name="">
-            <a:extLst xmlns:a="http://schemas.openxmlformats.org/drawingml/2006/main">
-              <a:ext uri="{FF2B5EF4-FFF2-40B4-BE49-F238E27FC236}">
-                <a16:creationId xmlns:a16="http://schemas.microsoft.com/office/drawing/2014/main" id="{1FBD810A-8B7A-4F36-9CD1-32DB18282B1F}"/>
+          <p:cNvPr id="6" name="">
+            <a:extLst xmlns:a="http://schemas.openxmlformats.org/drawingml/2006/main">
+              <a:ext uri="{FF2B5EF4-FFF2-40B4-BE49-F238E27FC236}">
+                <a16:creationId xmlns:a16="http://schemas.microsoft.com/office/drawing/2014/main" id="{3100F714-0BE4-4876-9396-6F44C2B8B022}"/>
               </a:ext>
             </a:extLst>
           </p:cNvPr>
@@ -19656,10 +18756,10 @@
       </p:sp>
       <p:sp>
         <p:nvSpPr>
-          <p:cNvPr id="8" name="">
-            <a:extLst xmlns:a="http://schemas.openxmlformats.org/drawingml/2006/main">
-              <a:ext uri="{FF2B5EF4-FFF2-40B4-BE49-F238E27FC236}">
-                <a16:creationId xmlns:a16="http://schemas.microsoft.com/office/drawing/2014/main" id="{27E28331-975D-48F0-88F0-039134B92977}"/>
+          <p:cNvPr id="7" name="">
+            <a:extLst xmlns:a="http://schemas.openxmlformats.org/drawingml/2006/main">
+              <a:ext uri="{FF2B5EF4-FFF2-40B4-BE49-F238E27FC236}">
+                <a16:creationId xmlns:a16="http://schemas.microsoft.com/office/drawing/2014/main" id="{F4DC791C-6D10-4C7A-9EEC-FD5E907F6754}"/>
               </a:ext>
             </a:extLst>
           </p:cNvPr>
@@ -19706,10 +18806,10 @@
       </p:sp>
       <p:sp>
         <p:nvSpPr>
-          <p:cNvPr id="9" name="">
-            <a:extLst xmlns:a="http://schemas.openxmlformats.org/drawingml/2006/main">
-              <a:ext uri="{FF2B5EF4-FFF2-40B4-BE49-F238E27FC236}">
-                <a16:creationId xmlns:a16="http://schemas.microsoft.com/office/drawing/2014/main" id="{33201805-4BE1-4D42-8C27-1096E4B96BCF}"/>
+          <p:cNvPr id="8" name="">
+            <a:extLst xmlns:a="http://schemas.openxmlformats.org/drawingml/2006/main">
+              <a:ext uri="{FF2B5EF4-FFF2-40B4-BE49-F238E27FC236}">
+                <a16:creationId xmlns:a16="http://schemas.microsoft.com/office/drawing/2014/main" id="{E3548585-D36B-4F76-BD36-6F67192EEADD}"/>
               </a:ext>
             </a:extLst>
           </p:cNvPr>
@@ -19756,10 +18856,10 @@
       </p:sp>
       <p:sp>
         <p:nvSpPr>
-          <p:cNvPr id="10" name="">
-            <a:extLst xmlns:a="http://schemas.openxmlformats.org/drawingml/2006/main">
-              <a:ext uri="{FF2B5EF4-FFF2-40B4-BE49-F238E27FC236}">
-                <a16:creationId xmlns:a16="http://schemas.microsoft.com/office/drawing/2014/main" id="{71B6CEFE-8FFA-4EF9-B97E-EC2EBB0B3759}"/>
+          <p:cNvPr id="9" name="">
+            <a:extLst xmlns:a="http://schemas.openxmlformats.org/drawingml/2006/main">
+              <a:ext uri="{FF2B5EF4-FFF2-40B4-BE49-F238E27FC236}">
+                <a16:creationId xmlns:a16="http://schemas.microsoft.com/office/drawing/2014/main" id="{3B6E7E26-E248-42CA-B39F-95AAABB264F0}"/>
               </a:ext>
             </a:extLst>
           </p:cNvPr>
@@ -19806,10 +18906,10 @@
       </p:sp>
       <p:sp>
         <p:nvSpPr>
-          <p:cNvPr id="11" name="">
-            <a:extLst xmlns:a="http://schemas.openxmlformats.org/drawingml/2006/main">
-              <a:ext uri="{FF2B5EF4-FFF2-40B4-BE49-F238E27FC236}">
-                <a16:creationId xmlns:a16="http://schemas.microsoft.com/office/drawing/2014/main" id="{3F298A10-566F-4312-BC4C-F331789B21C5}"/>
+          <p:cNvPr id="10" name="">
+            <a:extLst xmlns:a="http://schemas.openxmlformats.org/drawingml/2006/main">
+              <a:ext uri="{FF2B5EF4-FFF2-40B4-BE49-F238E27FC236}">
+                <a16:creationId xmlns:a16="http://schemas.microsoft.com/office/drawing/2014/main" id="{07C017F7-C8F7-430B-AFA2-35F201F81AAF}"/>
               </a:ext>
             </a:extLst>
           </p:cNvPr>
@@ -19856,14 +18956,14 @@
       </p:sp>
       <p:pic>
         <p:nvPicPr>
-          <p:cNvPr id="24" name=""/>
+          <p:cNvPr id="22" name=""/>
           <p:cNvPicPr>
             <a:picLocks xmlns:a="http://schemas.openxmlformats.org/drawingml/2006/main" noChangeAspect="1"/>
           </p:cNvPicPr>
           <p:nvPr/>
         </p:nvPicPr>
         <p:blipFill>
-          <a:blip xmlns:r="http://schemas.openxmlformats.org/officeDocument/2006/relationships" xmlns:a="http://schemas.openxmlformats.org/drawingml/2006/main" r:embed="Rdbc10d1003154b06"/>
+          <a:blip xmlns:r="http://schemas.openxmlformats.org/officeDocument/2006/relationships" xmlns:a="http://schemas.openxmlformats.org/drawingml/2006/main" r:embed="R3505a2f4fe5d42d5"/>
           <a:stretch xmlns:a="http://schemas.openxmlformats.org/drawingml/2006/main"/>
         </p:blipFill>
         <p:spPr>
@@ -19879,7 +18979,7 @@
     </p:spTree>
     <p:extLst>
       <p:ext uri="{BB962C8B-B14F-4D97-AF65-F5344CB8AC3E}">
-        <p14:creationId xmlns:p14="http://schemas.microsoft.com/office/powerpoint/2010/main" val="1644438753"/>
+        <p14:creationId xmlns:p14="http://schemas.microsoft.com/office/powerpoint/2010/main" val="1114074988"/>
       </p:ext>
     </p:extLst>
   </p:cSld>
@@ -19907,10 +19007,10 @@
       </p:grpSpPr>
       <p:sp>
         <p:nvSpPr>
-          <p:cNvPr id="26" name="">
-            <a:extLst xmlns:a="http://schemas.openxmlformats.org/drawingml/2006/main">
-              <a:ext uri="{FF2B5EF4-FFF2-40B4-BE49-F238E27FC236}">
-                <a16:creationId xmlns:a16="http://schemas.microsoft.com/office/drawing/2014/main" id="{C7DE1EBC-724A-45FC-B441-1513B9133E6B}"/>
+          <p:cNvPr id="25" name="">
+            <a:extLst xmlns:a="http://schemas.openxmlformats.org/drawingml/2006/main">
+              <a:ext uri="{FF2B5EF4-FFF2-40B4-BE49-F238E27FC236}">
+                <a16:creationId xmlns:a16="http://schemas.microsoft.com/office/drawing/2014/main" id="{7B05FB2E-34BC-4960-BECF-C5E2855B3F9E}"/>
               </a:ext>
             </a:extLst>
           </p:cNvPr>
@@ -19960,7 +19060,7 @@
           <p:cNvPr id="2" name="">
             <a:extLst xmlns:a="http://schemas.openxmlformats.org/drawingml/2006/main">
               <a:ext uri="{FF2B5EF4-FFF2-40B4-BE49-F238E27FC236}">
-                <a16:creationId xmlns:a16="http://schemas.microsoft.com/office/drawing/2014/main" id="{A0BBC6BC-62B2-433C-A616-A569A75DEE52}"/>
+                <a16:creationId xmlns:a16="http://schemas.microsoft.com/office/drawing/2014/main" id="{A68C9ADA-EE99-4715-9903-D83B2E8B98B2}"/>
               </a:ext>
             </a:extLst>
           </p:cNvPr>
@@ -19991,69 +19091,19 @@
           <p:cNvPr id="3" name="">
             <a:extLst xmlns:a="http://schemas.openxmlformats.org/drawingml/2006/main">
               <a:ext uri="{FF2B5EF4-FFF2-40B4-BE49-F238E27FC236}">
-                <a16:creationId xmlns:a16="http://schemas.microsoft.com/office/drawing/2014/main" id="{CDD7ACA7-A734-4752-AA5C-0C6ABABC792A}"/>
-              </a:ext>
-            </a:extLst>
-          </p:cNvPr>
-          <p:cNvSpPr>
-            <a:spLocks xmlns:a="http://schemas.openxmlformats.org/drawingml/2006/main" noGrp="1"/>
-          </p:cNvSpPr>
-          <p:nvPr/>
-        </p:nvSpPr>
-        <p:spPr>
-          <a:xfrm xmlns:a="http://schemas.openxmlformats.org/drawingml/2006/main">
-            <a:off x="609600" y="800100"/>
-            <a:ext cx="3429000" cy="228600"/>
-          </a:xfrm>
-          <a:prstGeom xmlns:a="http://schemas.openxmlformats.org/drawingml/2006/main" prst="rect">
-            <a:avLst/>
-          </a:prstGeom>
-          <a:noFill xmlns:a="http://schemas.openxmlformats.org/drawingml/2006/main"/>
-          <a:ln xmlns:a="http://schemas.openxmlformats.org/drawingml/2006/main" w="0">
-            <a:noFill/>
-            <a:prstDash val="solid"/>
-          </a:ln>
-        </p:spPr>
-        <p:txBody>
-          <a:bodyPr xmlns:a="http://schemas.openxmlformats.org/drawingml/2006/main"/>
-          <a:lstStyle xmlns:a="http://schemas.openxmlformats.org/drawingml/2006/main"/>
-          <a:p xmlns:a="http://schemas.openxmlformats.org/drawingml/2006/main">
-            <a:pPr algn="l">
-              <a:defRPr sz="975" b="1">
-                <a:solidFill>
-                  <a:srgbClr val="C7F25C"/>
-                </a:solidFill>
-              </a:defRPr>
-            </a:pPr>
-            <a:r>
-              <a:rPr sz="975" b="1">
-                <a:solidFill>
-                  <a:srgbClr val="C7F25C"/>
-                </a:solidFill>
-              </a:rPr>
-              <a:t>THE FORGEX AI FOR ABM LADDER</a:t>
-            </a:r>
-          </a:p>
-        </p:txBody>
-      </p:sp>
-      <p:sp>
-        <p:nvSpPr>
-          <p:cNvPr id="4" name="">
-            <a:extLst xmlns:a="http://schemas.openxmlformats.org/drawingml/2006/main">
-              <a:ext uri="{FF2B5EF4-FFF2-40B4-BE49-F238E27FC236}">
-                <a16:creationId xmlns:a16="http://schemas.microsoft.com/office/drawing/2014/main" id="{6D87DBF0-FED5-4C59-AA5D-1DF7A236CA4E}"/>
-              </a:ext>
-            </a:extLst>
-          </p:cNvPr>
-          <p:cNvSpPr>
-            <a:spLocks xmlns:a="http://schemas.openxmlformats.org/drawingml/2006/main" noGrp="1"/>
-          </p:cNvSpPr>
-          <p:nvPr/>
-        </p:nvSpPr>
-        <p:spPr>
-          <a:xfrm xmlns:a="http://schemas.openxmlformats.org/drawingml/2006/main">
-            <a:off x="609600" y="1066800"/>
-            <a:ext cx="10668000" cy="647700"/>
+                <a16:creationId xmlns:a16="http://schemas.microsoft.com/office/drawing/2014/main" id="{A2E5E58A-9EBC-454B-930F-EF3D0BABA67A}"/>
+              </a:ext>
+            </a:extLst>
+          </p:cNvPr>
+          <p:cNvSpPr>
+            <a:spLocks xmlns:a="http://schemas.openxmlformats.org/drawingml/2006/main" noGrp="1"/>
+          </p:cNvSpPr>
+          <p:nvPr/>
+        </p:nvSpPr>
+        <p:spPr>
+          <a:xfrm xmlns:a="http://schemas.openxmlformats.org/drawingml/2006/main">
+            <a:off x="609600" y="838200"/>
+            <a:ext cx="10668000" cy="704850"/>
           </a:xfrm>
           <a:prstGeom xmlns:a="http://schemas.openxmlformats.org/drawingml/2006/main" prst="rect">
             <a:avLst/>
@@ -20088,10 +19138,10 @@
       </p:sp>
       <p:sp>
         <p:nvSpPr>
-          <p:cNvPr id="5" name="">
-            <a:extLst xmlns:a="http://schemas.openxmlformats.org/drawingml/2006/main">
-              <a:ext uri="{FF2B5EF4-FFF2-40B4-BE49-F238E27FC236}">
-                <a16:creationId xmlns:a16="http://schemas.microsoft.com/office/drawing/2014/main" id="{1C7CD021-CF91-4BCD-9DBA-17A164C885A0}"/>
+          <p:cNvPr id="4" name="">
+            <a:extLst xmlns:a="http://schemas.openxmlformats.org/drawingml/2006/main">
+              <a:ext uri="{FF2B5EF4-FFF2-40B4-BE49-F238E27FC236}">
+                <a16:creationId xmlns:a16="http://schemas.microsoft.com/office/drawing/2014/main" id="{4C21AB8E-01C5-49A5-98CC-DB15CEA8FDEF}"/>
               </a:ext>
             </a:extLst>
           </p:cNvPr>
@@ -20138,10 +19188,10 @@
       </p:sp>
       <p:sp>
         <p:nvSpPr>
-          <p:cNvPr id="6" name="">
-            <a:extLst xmlns:a="http://schemas.openxmlformats.org/drawingml/2006/main">
-              <a:ext uri="{FF2B5EF4-FFF2-40B4-BE49-F238E27FC236}">
-                <a16:creationId xmlns:a16="http://schemas.microsoft.com/office/drawing/2014/main" id="{0B239D64-DFA9-4232-A480-016D252DB613}"/>
+          <p:cNvPr id="5" name="">
+            <a:extLst xmlns:a="http://schemas.openxmlformats.org/drawingml/2006/main">
+              <a:ext uri="{FF2B5EF4-FFF2-40B4-BE49-F238E27FC236}">
+                <a16:creationId xmlns:a16="http://schemas.microsoft.com/office/drawing/2014/main" id="{C323147C-40CE-46EE-ABFE-1863787B8308}"/>
               </a:ext>
             </a:extLst>
           </p:cNvPr>
@@ -20188,10 +19238,10 @@
       </p:sp>
       <p:sp>
         <p:nvSpPr>
-          <p:cNvPr id="7" name="">
-            <a:extLst xmlns:a="http://schemas.openxmlformats.org/drawingml/2006/main">
-              <a:ext uri="{FF2B5EF4-FFF2-40B4-BE49-F238E27FC236}">
-                <a16:creationId xmlns:a16="http://schemas.microsoft.com/office/drawing/2014/main" id="{7C9B929D-A372-4313-9E29-A19D28726FD2}"/>
+          <p:cNvPr id="6" name="">
+            <a:extLst xmlns:a="http://schemas.openxmlformats.org/drawingml/2006/main">
+              <a:ext uri="{FF2B5EF4-FFF2-40B4-BE49-F238E27FC236}">
+                <a16:creationId xmlns:a16="http://schemas.microsoft.com/office/drawing/2014/main" id="{4CCCD7F5-8CB1-42C5-BC41-9FEC7B05BB89}"/>
               </a:ext>
             </a:extLst>
           </p:cNvPr>
@@ -20223,10 +19273,10 @@
       </p:sp>
       <p:sp>
         <p:nvSpPr>
-          <p:cNvPr id="8" name="">
-            <a:extLst xmlns:a="http://schemas.openxmlformats.org/drawingml/2006/main">
-              <a:ext uri="{FF2B5EF4-FFF2-40B4-BE49-F238E27FC236}">
-                <a16:creationId xmlns:a16="http://schemas.microsoft.com/office/drawing/2014/main" id="{C2C60CFB-B3FA-4B3D-8BE7-9ED41472B9DF}"/>
+          <p:cNvPr id="7" name="">
+            <a:extLst xmlns:a="http://schemas.openxmlformats.org/drawingml/2006/main">
+              <a:ext uri="{FF2B5EF4-FFF2-40B4-BE49-F238E27FC236}">
+                <a16:creationId xmlns:a16="http://schemas.microsoft.com/office/drawing/2014/main" id="{48402217-631E-4AA7-BBA2-EFE4631B9817}"/>
               </a:ext>
             </a:extLst>
           </p:cNvPr>
@@ -20273,10 +19323,10 @@
       </p:sp>
       <p:sp>
         <p:nvSpPr>
-          <p:cNvPr id="9" name="">
-            <a:extLst xmlns:a="http://schemas.openxmlformats.org/drawingml/2006/main">
-              <a:ext uri="{FF2B5EF4-FFF2-40B4-BE49-F238E27FC236}">
-                <a16:creationId xmlns:a16="http://schemas.microsoft.com/office/drawing/2014/main" id="{91D5A474-A498-4CBB-90FC-F3E2A15089A5}"/>
+          <p:cNvPr id="8" name="">
+            <a:extLst xmlns:a="http://schemas.openxmlformats.org/drawingml/2006/main">
+              <a:ext uri="{FF2B5EF4-FFF2-40B4-BE49-F238E27FC236}">
+                <a16:creationId xmlns:a16="http://schemas.microsoft.com/office/drawing/2014/main" id="{F943EBB6-38ED-461C-95EA-E03ABE1C765F}"/>
               </a:ext>
             </a:extLst>
           </p:cNvPr>
@@ -20340,10 +19390,10 @@
       </p:sp>
       <p:sp>
         <p:nvSpPr>
-          <p:cNvPr id="10" name="">
-            <a:extLst xmlns:a="http://schemas.openxmlformats.org/drawingml/2006/main">
-              <a:ext uri="{FF2B5EF4-FFF2-40B4-BE49-F238E27FC236}">
-                <a16:creationId xmlns:a16="http://schemas.microsoft.com/office/drawing/2014/main" id="{59A891E6-A500-4C42-932A-61108D3DB9B2}"/>
+          <p:cNvPr id="9" name="">
+            <a:extLst xmlns:a="http://schemas.openxmlformats.org/drawingml/2006/main">
+              <a:ext uri="{FF2B5EF4-FFF2-40B4-BE49-F238E27FC236}">
+                <a16:creationId xmlns:a16="http://schemas.microsoft.com/office/drawing/2014/main" id="{1DC23966-B4FF-4BBD-89B7-651D742D9699}"/>
               </a:ext>
             </a:extLst>
           </p:cNvPr>
@@ -20375,10 +19425,10 @@
       </p:sp>
       <p:sp>
         <p:nvSpPr>
-          <p:cNvPr id="11" name="">
-            <a:extLst xmlns:a="http://schemas.openxmlformats.org/drawingml/2006/main">
-              <a:ext uri="{FF2B5EF4-FFF2-40B4-BE49-F238E27FC236}">
-                <a16:creationId xmlns:a16="http://schemas.microsoft.com/office/drawing/2014/main" id="{814C8408-F7C6-4A6A-A2B9-6C46970F9ED4}"/>
+          <p:cNvPr id="10" name="">
+            <a:extLst xmlns:a="http://schemas.openxmlformats.org/drawingml/2006/main">
+              <a:ext uri="{FF2B5EF4-FFF2-40B4-BE49-F238E27FC236}">
+                <a16:creationId xmlns:a16="http://schemas.microsoft.com/office/drawing/2014/main" id="{5005C748-8591-4972-A506-B8B9CEA9F585}"/>
               </a:ext>
             </a:extLst>
           </p:cNvPr>
@@ -20425,10 +19475,10 @@
       </p:sp>
       <p:sp>
         <p:nvSpPr>
-          <p:cNvPr id="12" name="">
-            <a:extLst xmlns:a="http://schemas.openxmlformats.org/drawingml/2006/main">
-              <a:ext uri="{FF2B5EF4-FFF2-40B4-BE49-F238E27FC236}">
-                <a16:creationId xmlns:a16="http://schemas.microsoft.com/office/drawing/2014/main" id="{7042C48B-F065-4C87-857A-286F891DA021}"/>
+          <p:cNvPr id="11" name="">
+            <a:extLst xmlns:a="http://schemas.openxmlformats.org/drawingml/2006/main">
+              <a:ext uri="{FF2B5EF4-FFF2-40B4-BE49-F238E27FC236}">
+                <a16:creationId xmlns:a16="http://schemas.microsoft.com/office/drawing/2014/main" id="{C9102AAA-EB94-4C4A-8CA7-4849A6A6DFBF}"/>
               </a:ext>
             </a:extLst>
           </p:cNvPr>
@@ -20492,10 +19542,10 @@
       </p:sp>
       <p:sp>
         <p:nvSpPr>
-          <p:cNvPr id="13" name="">
-            <a:extLst xmlns:a="http://schemas.openxmlformats.org/drawingml/2006/main">
-              <a:ext uri="{FF2B5EF4-FFF2-40B4-BE49-F238E27FC236}">
-                <a16:creationId xmlns:a16="http://schemas.microsoft.com/office/drawing/2014/main" id="{18DCD40D-BFE9-4A7E-9422-58F45312B3D0}"/>
+          <p:cNvPr id="12" name="">
+            <a:extLst xmlns:a="http://schemas.openxmlformats.org/drawingml/2006/main">
+              <a:ext uri="{FF2B5EF4-FFF2-40B4-BE49-F238E27FC236}">
+                <a16:creationId xmlns:a16="http://schemas.microsoft.com/office/drawing/2014/main" id="{3ED75E48-A5DB-4080-8827-AB53F054D9EF}"/>
               </a:ext>
             </a:extLst>
           </p:cNvPr>
@@ -20527,10 +19577,10 @@
       </p:sp>
       <p:sp>
         <p:nvSpPr>
-          <p:cNvPr id="14" name="">
-            <a:extLst xmlns:a="http://schemas.openxmlformats.org/drawingml/2006/main">
-              <a:ext uri="{FF2B5EF4-FFF2-40B4-BE49-F238E27FC236}">
-                <a16:creationId xmlns:a16="http://schemas.microsoft.com/office/drawing/2014/main" id="{5B607CCA-4140-4633-9D1F-96997A72A151}"/>
+          <p:cNvPr id="13" name="">
+            <a:extLst xmlns:a="http://schemas.openxmlformats.org/drawingml/2006/main">
+              <a:ext uri="{FF2B5EF4-FFF2-40B4-BE49-F238E27FC236}">
+                <a16:creationId xmlns:a16="http://schemas.microsoft.com/office/drawing/2014/main" id="{6674804B-D461-45ED-942E-F2900B9BA82F}"/>
               </a:ext>
             </a:extLst>
           </p:cNvPr>
@@ -20577,10 +19627,10 @@
       </p:sp>
       <p:sp>
         <p:nvSpPr>
-          <p:cNvPr id="15" name="">
-            <a:extLst xmlns:a="http://schemas.openxmlformats.org/drawingml/2006/main">
-              <a:ext uri="{FF2B5EF4-FFF2-40B4-BE49-F238E27FC236}">
-                <a16:creationId xmlns:a16="http://schemas.microsoft.com/office/drawing/2014/main" id="{B794F2C3-347B-4710-A090-0F9E8CBD28F4}"/>
+          <p:cNvPr id="14" name="">
+            <a:extLst xmlns:a="http://schemas.openxmlformats.org/drawingml/2006/main">
+              <a:ext uri="{FF2B5EF4-FFF2-40B4-BE49-F238E27FC236}">
+                <a16:creationId xmlns:a16="http://schemas.microsoft.com/office/drawing/2014/main" id="{01C42643-FC37-4F46-BF51-CBFB80441603}"/>
               </a:ext>
             </a:extLst>
           </p:cNvPr>
@@ -20644,10 +19694,10 @@
       </p:sp>
       <p:sp>
         <p:nvSpPr>
-          <p:cNvPr id="16" name="">
-            <a:extLst xmlns:a="http://schemas.openxmlformats.org/drawingml/2006/main">
-              <a:ext uri="{FF2B5EF4-FFF2-40B4-BE49-F238E27FC236}">
-                <a16:creationId xmlns:a16="http://schemas.microsoft.com/office/drawing/2014/main" id="{1273CCD5-0E84-4A2B-BF7C-157ACDE42368}"/>
+          <p:cNvPr id="15" name="">
+            <a:extLst xmlns:a="http://schemas.openxmlformats.org/drawingml/2006/main">
+              <a:ext uri="{FF2B5EF4-FFF2-40B4-BE49-F238E27FC236}">
+                <a16:creationId xmlns:a16="http://schemas.microsoft.com/office/drawing/2014/main" id="{8678A908-426F-4FC2-8EED-A70D2450BC59}"/>
               </a:ext>
             </a:extLst>
           </p:cNvPr>
@@ -20679,10 +19729,10 @@
       </p:sp>
       <p:sp>
         <p:nvSpPr>
-          <p:cNvPr id="17" name="">
-            <a:extLst xmlns:a="http://schemas.openxmlformats.org/drawingml/2006/main">
-              <a:ext uri="{FF2B5EF4-FFF2-40B4-BE49-F238E27FC236}">
-                <a16:creationId xmlns:a16="http://schemas.microsoft.com/office/drawing/2014/main" id="{60E3A85E-78B5-440D-B671-146A3D38BE73}"/>
+          <p:cNvPr id="16" name="">
+            <a:extLst xmlns:a="http://schemas.openxmlformats.org/drawingml/2006/main">
+              <a:ext uri="{FF2B5EF4-FFF2-40B4-BE49-F238E27FC236}">
+                <a16:creationId xmlns:a16="http://schemas.microsoft.com/office/drawing/2014/main" id="{3E9E3D18-8F46-4E54-9763-6D4B58B0548A}"/>
               </a:ext>
             </a:extLst>
           </p:cNvPr>
@@ -20729,10 +19779,10 @@
       </p:sp>
       <p:sp>
         <p:nvSpPr>
-          <p:cNvPr id="18" name="">
-            <a:extLst xmlns:a="http://schemas.openxmlformats.org/drawingml/2006/main">
-              <a:ext uri="{FF2B5EF4-FFF2-40B4-BE49-F238E27FC236}">
-                <a16:creationId xmlns:a16="http://schemas.microsoft.com/office/drawing/2014/main" id="{4E6C312A-0C7B-4BB8-A7DF-A6440E91A65B}"/>
+          <p:cNvPr id="17" name="">
+            <a:extLst xmlns:a="http://schemas.openxmlformats.org/drawingml/2006/main">
+              <a:ext uri="{FF2B5EF4-FFF2-40B4-BE49-F238E27FC236}">
+                <a16:creationId xmlns:a16="http://schemas.microsoft.com/office/drawing/2014/main" id="{CA9E8848-7340-4098-A1D7-B5FF3C0ACB88}"/>
               </a:ext>
             </a:extLst>
           </p:cNvPr>
@@ -20796,10 +19846,10 @@
       </p:sp>
       <p:sp>
         <p:nvSpPr>
-          <p:cNvPr id="19" name="">
-            <a:extLst xmlns:a="http://schemas.openxmlformats.org/drawingml/2006/main">
-              <a:ext uri="{FF2B5EF4-FFF2-40B4-BE49-F238E27FC236}">
-                <a16:creationId xmlns:a16="http://schemas.microsoft.com/office/drawing/2014/main" id="{EEE3CC54-BFE8-4F3B-BEE0-45386D157316}"/>
+          <p:cNvPr id="18" name="">
+            <a:extLst xmlns:a="http://schemas.openxmlformats.org/drawingml/2006/main">
+              <a:ext uri="{FF2B5EF4-FFF2-40B4-BE49-F238E27FC236}">
+                <a16:creationId xmlns:a16="http://schemas.microsoft.com/office/drawing/2014/main" id="{C16FBBB6-949F-44EA-8D0B-8649B034A506}"/>
               </a:ext>
             </a:extLst>
           </p:cNvPr>
@@ -20831,10 +19881,10 @@
       </p:sp>
       <p:sp>
         <p:nvSpPr>
-          <p:cNvPr id="20" name="">
-            <a:extLst xmlns:a="http://schemas.openxmlformats.org/drawingml/2006/main">
-              <a:ext uri="{FF2B5EF4-FFF2-40B4-BE49-F238E27FC236}">
-                <a16:creationId xmlns:a16="http://schemas.microsoft.com/office/drawing/2014/main" id="{827247AB-E184-4BBD-B793-5D8A2DDFEE11}"/>
+          <p:cNvPr id="19" name="">
+            <a:extLst xmlns:a="http://schemas.openxmlformats.org/drawingml/2006/main">
+              <a:ext uri="{FF2B5EF4-FFF2-40B4-BE49-F238E27FC236}">
+                <a16:creationId xmlns:a16="http://schemas.microsoft.com/office/drawing/2014/main" id="{BFA078A9-5D67-4287-AC7F-7D40151EFBBB}"/>
               </a:ext>
             </a:extLst>
           </p:cNvPr>
@@ -20881,10 +19931,10 @@
       </p:sp>
       <p:sp>
         <p:nvSpPr>
-          <p:cNvPr id="21" name="">
-            <a:extLst xmlns:a="http://schemas.openxmlformats.org/drawingml/2006/main">
-              <a:ext uri="{FF2B5EF4-FFF2-40B4-BE49-F238E27FC236}">
-                <a16:creationId xmlns:a16="http://schemas.microsoft.com/office/drawing/2014/main" id="{61ED991D-3F0E-40E3-96B8-2757B792193C}"/>
+          <p:cNvPr id="20" name="">
+            <a:extLst xmlns:a="http://schemas.openxmlformats.org/drawingml/2006/main">
+              <a:ext uri="{FF2B5EF4-FFF2-40B4-BE49-F238E27FC236}">
+                <a16:creationId xmlns:a16="http://schemas.microsoft.com/office/drawing/2014/main" id="{11570EAC-9F7C-4B62-9172-DF0FE7EA608E}"/>
               </a:ext>
             </a:extLst>
           </p:cNvPr>
@@ -20948,10 +19998,10 @@
       </p:sp>
       <p:sp>
         <p:nvSpPr>
-          <p:cNvPr id="22" name="">
-            <a:extLst xmlns:a="http://schemas.openxmlformats.org/drawingml/2006/main">
-              <a:ext uri="{FF2B5EF4-FFF2-40B4-BE49-F238E27FC236}">
-                <a16:creationId xmlns:a16="http://schemas.microsoft.com/office/drawing/2014/main" id="{12188D09-7000-4AA3-A7A4-119E585168AE}"/>
+          <p:cNvPr id="21" name="">
+            <a:extLst xmlns:a="http://schemas.openxmlformats.org/drawingml/2006/main">
+              <a:ext uri="{FF2B5EF4-FFF2-40B4-BE49-F238E27FC236}">
+                <a16:creationId xmlns:a16="http://schemas.microsoft.com/office/drawing/2014/main" id="{4D8EA5B9-CBE7-48DD-8F8A-032FBAD63721}"/>
               </a:ext>
             </a:extLst>
           </p:cNvPr>
@@ -20983,10 +20033,10 @@
       </p:sp>
       <p:sp>
         <p:nvSpPr>
-          <p:cNvPr id="23" name="">
-            <a:extLst xmlns:a="http://schemas.openxmlformats.org/drawingml/2006/main">
-              <a:ext uri="{FF2B5EF4-FFF2-40B4-BE49-F238E27FC236}">
-                <a16:creationId xmlns:a16="http://schemas.microsoft.com/office/drawing/2014/main" id="{A8710083-FE07-4448-8CDC-C868C3E7001A}"/>
+          <p:cNvPr id="22" name="">
+            <a:extLst xmlns:a="http://schemas.openxmlformats.org/drawingml/2006/main">
+              <a:ext uri="{FF2B5EF4-FFF2-40B4-BE49-F238E27FC236}">
+                <a16:creationId xmlns:a16="http://schemas.microsoft.com/office/drawing/2014/main" id="{FAB1C674-2226-42D5-B394-ACBAAB61D666}"/>
               </a:ext>
             </a:extLst>
           </p:cNvPr>
@@ -21033,10 +20083,10 @@
       </p:sp>
       <p:sp>
         <p:nvSpPr>
-          <p:cNvPr id="24" name="">
-            <a:extLst xmlns:a="http://schemas.openxmlformats.org/drawingml/2006/main">
-              <a:ext uri="{FF2B5EF4-FFF2-40B4-BE49-F238E27FC236}">
-                <a16:creationId xmlns:a16="http://schemas.microsoft.com/office/drawing/2014/main" id="{C81B64C4-5CDE-4F41-9105-C83505FC8D76}"/>
+          <p:cNvPr id="23" name="">
+            <a:extLst xmlns:a="http://schemas.openxmlformats.org/drawingml/2006/main">
+              <a:ext uri="{FF2B5EF4-FFF2-40B4-BE49-F238E27FC236}">
+                <a16:creationId xmlns:a16="http://schemas.microsoft.com/office/drawing/2014/main" id="{A96D11C9-39F3-4794-BDE6-449B7EF1B9F0}"/>
               </a:ext>
             </a:extLst>
           </p:cNvPr>
@@ -21100,10 +20150,10 @@
       </p:sp>
       <p:sp>
         <p:nvSpPr>
-          <p:cNvPr id="25" name="">
-            <a:extLst xmlns:a="http://schemas.openxmlformats.org/drawingml/2006/main">
-              <a:ext uri="{FF2B5EF4-FFF2-40B4-BE49-F238E27FC236}">
-                <a16:creationId xmlns:a16="http://schemas.microsoft.com/office/drawing/2014/main" id="{8D68B0F6-4A3D-4F6A-96C3-3873C9FBA8B4}"/>
+          <p:cNvPr id="24" name="">
+            <a:extLst xmlns:a="http://schemas.openxmlformats.org/drawingml/2006/main">
+              <a:ext uri="{FF2B5EF4-FFF2-40B4-BE49-F238E27FC236}">
+                <a16:creationId xmlns:a16="http://schemas.microsoft.com/office/drawing/2014/main" id="{9160F85F-6CFA-4466-8AB2-190D723CA534}"/>
               </a:ext>
             </a:extLst>
           </p:cNvPr>
@@ -21151,7 +20201,7 @@
     </p:spTree>
     <p:extLst>
       <p:ext uri="{BB962C8B-B14F-4D97-AF65-F5344CB8AC3E}">
-        <p14:creationId xmlns:p14="http://schemas.microsoft.com/office/powerpoint/2010/main" val="1133016403"/>
+        <p14:creationId xmlns:p14="http://schemas.microsoft.com/office/powerpoint/2010/main" val="1682012732"/>
       </p:ext>
     </p:extLst>
   </p:cSld>
@@ -21179,10 +20229,10 @@
       </p:grpSpPr>
       <p:sp>
         <p:nvSpPr>
-          <p:cNvPr id="17" name="">
-            <a:extLst xmlns:a="http://schemas.openxmlformats.org/drawingml/2006/main">
-              <a:ext uri="{FF2B5EF4-FFF2-40B4-BE49-F238E27FC236}">
-                <a16:creationId xmlns:a16="http://schemas.microsoft.com/office/drawing/2014/main" id="{C4A97CE4-3F03-4579-B2A0-B6FC7327C972}"/>
+          <p:cNvPr id="16" name="">
+            <a:extLst xmlns:a="http://schemas.openxmlformats.org/drawingml/2006/main">
+              <a:ext uri="{FF2B5EF4-FFF2-40B4-BE49-F238E27FC236}">
+                <a16:creationId xmlns:a16="http://schemas.microsoft.com/office/drawing/2014/main" id="{EF5C4253-21BC-4B2C-A357-918D5E6AF708}"/>
               </a:ext>
             </a:extLst>
           </p:cNvPr>
@@ -21232,7 +20282,7 @@
           <p:cNvPr id="2" name="">
             <a:extLst xmlns:a="http://schemas.openxmlformats.org/drawingml/2006/main">
               <a:ext uri="{FF2B5EF4-FFF2-40B4-BE49-F238E27FC236}">
-                <a16:creationId xmlns:a16="http://schemas.microsoft.com/office/drawing/2014/main" id="{58EFEAFA-6AA6-4C86-911C-8C34DEA56CB4}"/>
+                <a16:creationId xmlns:a16="http://schemas.microsoft.com/office/drawing/2014/main" id="{66ED4CD8-DC43-4C1A-B6C8-8737F5234CAD}"/>
               </a:ext>
             </a:extLst>
           </p:cNvPr>
@@ -21263,69 +20313,19 @@
           <p:cNvPr id="3" name="">
             <a:extLst xmlns:a="http://schemas.openxmlformats.org/drawingml/2006/main">
               <a:ext uri="{FF2B5EF4-FFF2-40B4-BE49-F238E27FC236}">
-                <a16:creationId xmlns:a16="http://schemas.microsoft.com/office/drawing/2014/main" id="{5585401D-F40A-4A63-9DF1-D17DCE498842}"/>
-              </a:ext>
-            </a:extLst>
-          </p:cNvPr>
-          <p:cNvSpPr>
-            <a:spLocks xmlns:a="http://schemas.openxmlformats.org/drawingml/2006/main" noGrp="1"/>
-          </p:cNvSpPr>
-          <p:nvPr/>
-        </p:nvSpPr>
-        <p:spPr>
-          <a:xfrm xmlns:a="http://schemas.openxmlformats.org/drawingml/2006/main">
-            <a:off x="609600" y="800100"/>
-            <a:ext cx="3429000" cy="228600"/>
-          </a:xfrm>
-          <a:prstGeom xmlns:a="http://schemas.openxmlformats.org/drawingml/2006/main" prst="rect">
-            <a:avLst/>
-          </a:prstGeom>
-          <a:noFill xmlns:a="http://schemas.openxmlformats.org/drawingml/2006/main"/>
-          <a:ln xmlns:a="http://schemas.openxmlformats.org/drawingml/2006/main" w="0">
-            <a:noFill/>
-            <a:prstDash val="solid"/>
-          </a:ln>
-        </p:spPr>
-        <p:txBody>
-          <a:bodyPr xmlns:a="http://schemas.openxmlformats.org/drawingml/2006/main"/>
-          <a:lstStyle xmlns:a="http://schemas.openxmlformats.org/drawingml/2006/main"/>
-          <a:p xmlns:a="http://schemas.openxmlformats.org/drawingml/2006/main">
-            <a:pPr algn="l">
-              <a:defRPr sz="975" b="1">
-                <a:solidFill>
-                  <a:srgbClr val="E63888"/>
-                </a:solidFill>
-              </a:defRPr>
-            </a:pPr>
-            <a:r>
-              <a:rPr sz="975" b="1">
-                <a:solidFill>
-                  <a:srgbClr val="E63888"/>
-                </a:solidFill>
-              </a:rPr>
-              <a:t>THE LADDER</a:t>
-            </a:r>
-          </a:p>
-        </p:txBody>
-      </p:sp>
-      <p:sp>
-        <p:nvSpPr>
-          <p:cNvPr id="4" name="">
-            <a:extLst xmlns:a="http://schemas.openxmlformats.org/drawingml/2006/main">
-              <a:ext uri="{FF2B5EF4-FFF2-40B4-BE49-F238E27FC236}">
-                <a16:creationId xmlns:a16="http://schemas.microsoft.com/office/drawing/2014/main" id="{3F536410-C704-4596-8E05-DEB48FCECAAD}"/>
-              </a:ext>
-            </a:extLst>
-          </p:cNvPr>
-          <p:cNvSpPr>
-            <a:spLocks xmlns:a="http://schemas.openxmlformats.org/drawingml/2006/main" noGrp="1"/>
-          </p:cNvSpPr>
-          <p:nvPr/>
-        </p:nvSpPr>
-        <p:spPr>
-          <a:xfrm xmlns:a="http://schemas.openxmlformats.org/drawingml/2006/main">
-            <a:off x="609600" y="1066800"/>
-            <a:ext cx="10668000" cy="647700"/>
+                <a16:creationId xmlns:a16="http://schemas.microsoft.com/office/drawing/2014/main" id="{291875F8-553F-4EA4-B55E-08D4AF5BEB4D}"/>
+              </a:ext>
+            </a:extLst>
+          </p:cNvPr>
+          <p:cNvSpPr>
+            <a:spLocks xmlns:a="http://schemas.openxmlformats.org/drawingml/2006/main" noGrp="1"/>
+          </p:cNvSpPr>
+          <p:nvPr/>
+        </p:nvSpPr>
+        <p:spPr>
+          <a:xfrm xmlns:a="http://schemas.openxmlformats.org/drawingml/2006/main">
+            <a:off x="609600" y="838200"/>
+            <a:ext cx="10668000" cy="704850"/>
           </a:xfrm>
           <a:prstGeom xmlns:a="http://schemas.openxmlformats.org/drawingml/2006/main" prst="rect">
             <a:avLst/>
@@ -21360,10 +20360,10 @@
       </p:sp>
       <p:sp>
         <p:nvSpPr>
-          <p:cNvPr id="5" name="">
-            <a:extLst xmlns:a="http://schemas.openxmlformats.org/drawingml/2006/main">
-              <a:ext uri="{FF2B5EF4-FFF2-40B4-BE49-F238E27FC236}">
-                <a16:creationId xmlns:a16="http://schemas.microsoft.com/office/drawing/2014/main" id="{C02C42DC-B54E-4AD8-BFE8-E3D70300F9A1}"/>
+          <p:cNvPr id="4" name="">
+            <a:extLst xmlns:a="http://schemas.openxmlformats.org/drawingml/2006/main">
+              <a:ext uri="{FF2B5EF4-FFF2-40B4-BE49-F238E27FC236}">
+                <a16:creationId xmlns:a16="http://schemas.microsoft.com/office/drawing/2014/main" id="{C8C1E687-77E7-4D8B-B7B9-1E3EB43607EF}"/>
               </a:ext>
             </a:extLst>
           </p:cNvPr>
@@ -21410,10 +20410,10 @@
       </p:sp>
       <p:sp>
         <p:nvSpPr>
-          <p:cNvPr id="6" name="">
-            <a:extLst xmlns:a="http://schemas.openxmlformats.org/drawingml/2006/main">
-              <a:ext uri="{FF2B5EF4-FFF2-40B4-BE49-F238E27FC236}">
-                <a16:creationId xmlns:a16="http://schemas.microsoft.com/office/drawing/2014/main" id="{0DD0EA75-584D-4EFE-A9DC-F6F30D66FFBB}"/>
+          <p:cNvPr id="5" name="">
+            <a:extLst xmlns:a="http://schemas.openxmlformats.org/drawingml/2006/main">
+              <a:ext uri="{FF2B5EF4-FFF2-40B4-BE49-F238E27FC236}">
+                <a16:creationId xmlns:a16="http://schemas.microsoft.com/office/drawing/2014/main" id="{6AFF2D9D-07CF-4369-BCE7-9976EF1B9C2D}"/>
               </a:ext>
             </a:extLst>
           </p:cNvPr>
@@ -21460,10 +20460,10 @@
       </p:sp>
       <p:sp>
         <p:nvSpPr>
-          <p:cNvPr id="7" name="">
-            <a:extLst xmlns:a="http://schemas.openxmlformats.org/drawingml/2006/main">
-              <a:ext uri="{FF2B5EF4-FFF2-40B4-BE49-F238E27FC236}">
-                <a16:creationId xmlns:a16="http://schemas.microsoft.com/office/drawing/2014/main" id="{DBE03C86-CF05-4576-9431-C8CD608FF29E}"/>
+          <p:cNvPr id="6" name="">
+            <a:extLst xmlns:a="http://schemas.openxmlformats.org/drawingml/2006/main">
+              <a:ext uri="{FF2B5EF4-FFF2-40B4-BE49-F238E27FC236}">
+                <a16:creationId xmlns:a16="http://schemas.microsoft.com/office/drawing/2014/main" id="{BA4C8DFD-AF97-4A74-AC48-032D9AB9315B}"/>
               </a:ext>
             </a:extLst>
           </p:cNvPr>
@@ -21495,10 +20495,10 @@
       </p:sp>
       <p:sp>
         <p:nvSpPr>
-          <p:cNvPr id="8" name="">
-            <a:extLst xmlns:a="http://schemas.openxmlformats.org/drawingml/2006/main">
-              <a:ext uri="{FF2B5EF4-FFF2-40B4-BE49-F238E27FC236}">
-                <a16:creationId xmlns:a16="http://schemas.microsoft.com/office/drawing/2014/main" id="{E2DE8872-114B-497B-8D6C-80981E6FC7B0}"/>
+          <p:cNvPr id="7" name="">
+            <a:extLst xmlns:a="http://schemas.openxmlformats.org/drawingml/2006/main">
+              <a:ext uri="{FF2B5EF4-FFF2-40B4-BE49-F238E27FC236}">
+                <a16:creationId xmlns:a16="http://schemas.microsoft.com/office/drawing/2014/main" id="{77E665BC-1186-47B2-BA75-D3EE10F97167}"/>
               </a:ext>
             </a:extLst>
           </p:cNvPr>
@@ -21545,10 +20545,10 @@
       </p:sp>
       <p:sp>
         <p:nvSpPr>
-          <p:cNvPr id="9" name="">
-            <a:extLst xmlns:a="http://schemas.openxmlformats.org/drawingml/2006/main">
-              <a:ext uri="{FF2B5EF4-FFF2-40B4-BE49-F238E27FC236}">
-                <a16:creationId xmlns:a16="http://schemas.microsoft.com/office/drawing/2014/main" id="{E23B02E3-D289-4994-A8D9-DBE8FEA1491F}"/>
+          <p:cNvPr id="8" name="">
+            <a:extLst xmlns:a="http://schemas.openxmlformats.org/drawingml/2006/main">
+              <a:ext uri="{FF2B5EF4-FFF2-40B4-BE49-F238E27FC236}">
+                <a16:creationId xmlns:a16="http://schemas.microsoft.com/office/drawing/2014/main" id="{921C0661-7A10-4D9E-8ADE-0AC3D0C62B17}"/>
               </a:ext>
             </a:extLst>
           </p:cNvPr>
@@ -21595,10 +20595,10 @@
       </p:sp>
       <p:sp>
         <p:nvSpPr>
-          <p:cNvPr id="10" name="">
-            <a:extLst xmlns:a="http://schemas.openxmlformats.org/drawingml/2006/main">
-              <a:ext uri="{FF2B5EF4-FFF2-40B4-BE49-F238E27FC236}">
-                <a16:creationId xmlns:a16="http://schemas.microsoft.com/office/drawing/2014/main" id="{E6325EE5-25F2-4895-9868-B699239437ED}"/>
+          <p:cNvPr id="9" name="">
+            <a:extLst xmlns:a="http://schemas.openxmlformats.org/drawingml/2006/main">
+              <a:ext uri="{FF2B5EF4-FFF2-40B4-BE49-F238E27FC236}">
+                <a16:creationId xmlns:a16="http://schemas.microsoft.com/office/drawing/2014/main" id="{FBEDC94B-7417-4A15-9B87-79E76A1988EE}"/>
               </a:ext>
             </a:extLst>
           </p:cNvPr>
@@ -21628,10 +20628,10 @@
       </p:sp>
       <p:sp>
         <p:nvSpPr>
-          <p:cNvPr id="11" name="">
-            <a:extLst xmlns:a="http://schemas.openxmlformats.org/drawingml/2006/main">
-              <a:ext uri="{FF2B5EF4-FFF2-40B4-BE49-F238E27FC236}">
-                <a16:creationId xmlns:a16="http://schemas.microsoft.com/office/drawing/2014/main" id="{C1015CD8-C127-467D-B92A-53D1B90429E2}"/>
+          <p:cNvPr id="10" name="">
+            <a:extLst xmlns:a="http://schemas.openxmlformats.org/drawingml/2006/main">
+              <a:ext uri="{FF2B5EF4-FFF2-40B4-BE49-F238E27FC236}">
+                <a16:creationId xmlns:a16="http://schemas.microsoft.com/office/drawing/2014/main" id="{B43EEF0F-E11C-4626-88A7-6CB12931D5AF}"/>
               </a:ext>
             </a:extLst>
           </p:cNvPr>
@@ -21678,10 +20678,10 @@
       </p:sp>
       <p:sp>
         <p:nvSpPr>
-          <p:cNvPr id="12" name="">
-            <a:extLst xmlns:a="http://schemas.openxmlformats.org/drawingml/2006/main">
-              <a:ext uri="{FF2B5EF4-FFF2-40B4-BE49-F238E27FC236}">
-                <a16:creationId xmlns:a16="http://schemas.microsoft.com/office/drawing/2014/main" id="{3D049F64-4FA0-41B1-ACDA-C4EEF12A2C5F}"/>
+          <p:cNvPr id="11" name="">
+            <a:extLst xmlns:a="http://schemas.openxmlformats.org/drawingml/2006/main">
+              <a:ext uri="{FF2B5EF4-FFF2-40B4-BE49-F238E27FC236}">
+                <a16:creationId xmlns:a16="http://schemas.microsoft.com/office/drawing/2014/main" id="{AE91812C-E49F-486B-8B3D-4C9778C6F9F7}"/>
               </a:ext>
             </a:extLst>
           </p:cNvPr>
@@ -21728,10 +20728,10 @@
       </p:sp>
       <p:sp>
         <p:nvSpPr>
-          <p:cNvPr id="13" name="">
-            <a:extLst xmlns:a="http://schemas.openxmlformats.org/drawingml/2006/main">
-              <a:ext uri="{FF2B5EF4-FFF2-40B4-BE49-F238E27FC236}">
-                <a16:creationId xmlns:a16="http://schemas.microsoft.com/office/drawing/2014/main" id="{8A6308FC-AB3F-47AE-98DA-30ACD6108969}"/>
+          <p:cNvPr id="12" name="">
+            <a:extLst xmlns:a="http://schemas.openxmlformats.org/drawingml/2006/main">
+              <a:ext uri="{FF2B5EF4-FFF2-40B4-BE49-F238E27FC236}">
+                <a16:creationId xmlns:a16="http://schemas.microsoft.com/office/drawing/2014/main" id="{DA3337F9-DD18-4E1B-ADC5-7C7C6784A2F7}"/>
               </a:ext>
             </a:extLst>
           </p:cNvPr>
@@ -21778,10 +20778,10 @@
       </p:sp>
       <p:sp>
         <p:nvSpPr>
-          <p:cNvPr id="14" name="">
-            <a:extLst xmlns:a="http://schemas.openxmlformats.org/drawingml/2006/main">
-              <a:ext uri="{FF2B5EF4-FFF2-40B4-BE49-F238E27FC236}">
-                <a16:creationId xmlns:a16="http://schemas.microsoft.com/office/drawing/2014/main" id="{FDFA02E0-AA70-4A0B-8176-8920A6D3FA70}"/>
+          <p:cNvPr id="13" name="">
+            <a:extLst xmlns:a="http://schemas.openxmlformats.org/drawingml/2006/main">
+              <a:ext uri="{FF2B5EF4-FFF2-40B4-BE49-F238E27FC236}">
+                <a16:creationId xmlns:a16="http://schemas.microsoft.com/office/drawing/2014/main" id="{E0CCA819-495A-4884-887A-EC7B8EC3C0D8}"/>
               </a:ext>
             </a:extLst>
           </p:cNvPr>
@@ -21811,10 +20811,10 @@
       </p:sp>
       <p:sp>
         <p:nvSpPr>
-          <p:cNvPr id="15" name="">
-            <a:extLst xmlns:a="http://schemas.openxmlformats.org/drawingml/2006/main">
-              <a:ext uri="{FF2B5EF4-FFF2-40B4-BE49-F238E27FC236}">
-                <a16:creationId xmlns:a16="http://schemas.microsoft.com/office/drawing/2014/main" id="{533A13B0-3640-4040-A5F5-49A0DEC22805}"/>
+          <p:cNvPr id="14" name="">
+            <a:extLst xmlns:a="http://schemas.openxmlformats.org/drawingml/2006/main">
+              <a:ext uri="{FF2B5EF4-FFF2-40B4-BE49-F238E27FC236}">
+                <a16:creationId xmlns:a16="http://schemas.microsoft.com/office/drawing/2014/main" id="{81FFD1EA-1BC9-4319-BFDE-AD99FC700901}"/>
               </a:ext>
             </a:extLst>
           </p:cNvPr>
@@ -21861,10 +20861,10 @@
       </p:sp>
       <p:sp>
         <p:nvSpPr>
-          <p:cNvPr id="16" name="">
-            <a:extLst xmlns:a="http://schemas.openxmlformats.org/drawingml/2006/main">
-              <a:ext uri="{FF2B5EF4-FFF2-40B4-BE49-F238E27FC236}">
-                <a16:creationId xmlns:a16="http://schemas.microsoft.com/office/drawing/2014/main" id="{F5B7E5B6-CB79-4249-8796-61D2FDDF5612}"/>
+          <p:cNvPr id="15" name="">
+            <a:extLst xmlns:a="http://schemas.openxmlformats.org/drawingml/2006/main">
+              <a:ext uri="{FF2B5EF4-FFF2-40B4-BE49-F238E27FC236}">
+                <a16:creationId xmlns:a16="http://schemas.microsoft.com/office/drawing/2014/main" id="{38831EF5-9200-4DE3-BFFA-CD2A7598216C}"/>
               </a:ext>
             </a:extLst>
           </p:cNvPr>
@@ -21912,7 +20912,7 @@
     </p:spTree>
     <p:extLst>
       <p:ext uri="{BB962C8B-B14F-4D97-AF65-F5344CB8AC3E}">
-        <p14:creationId xmlns:p14="http://schemas.microsoft.com/office/powerpoint/2010/main" val="1647428998"/>
+        <p14:creationId xmlns:p14="http://schemas.microsoft.com/office/powerpoint/2010/main" val="2009002146"/>
       </p:ext>
     </p:extLst>
   </p:cSld>
@@ -21940,10 +20940,10 @@
       </p:grpSpPr>
       <p:sp>
         <p:nvSpPr>
-          <p:cNvPr id="17" name="">
-            <a:extLst xmlns:a="http://schemas.openxmlformats.org/drawingml/2006/main">
-              <a:ext uri="{FF2B5EF4-FFF2-40B4-BE49-F238E27FC236}">
-                <a16:creationId xmlns:a16="http://schemas.microsoft.com/office/drawing/2014/main" id="{6E02F722-2756-43C9-9F8A-057606120B25}"/>
+          <p:cNvPr id="16" name="">
+            <a:extLst xmlns:a="http://schemas.openxmlformats.org/drawingml/2006/main">
+              <a:ext uri="{FF2B5EF4-FFF2-40B4-BE49-F238E27FC236}">
+                <a16:creationId xmlns:a16="http://schemas.microsoft.com/office/drawing/2014/main" id="{C912D1C2-A2A4-44B3-9D05-B8B469D5844C}"/>
               </a:ext>
             </a:extLst>
           </p:cNvPr>
@@ -21993,7 +20993,7 @@
           <p:cNvPr id="2" name="">
             <a:extLst xmlns:a="http://schemas.openxmlformats.org/drawingml/2006/main">
               <a:ext uri="{FF2B5EF4-FFF2-40B4-BE49-F238E27FC236}">
-                <a16:creationId xmlns:a16="http://schemas.microsoft.com/office/drawing/2014/main" id="{5F8279A0-5A6A-4FFA-ABC1-1A8EA6229A5C}"/>
+                <a16:creationId xmlns:a16="http://schemas.microsoft.com/office/drawing/2014/main" id="{AFC6887C-FD91-489E-AAC5-E83A9E64DFF9}"/>
               </a:ext>
             </a:extLst>
           </p:cNvPr>
@@ -22024,69 +21024,19 @@
           <p:cNvPr id="3" name="">
             <a:extLst xmlns:a="http://schemas.openxmlformats.org/drawingml/2006/main">
               <a:ext uri="{FF2B5EF4-FFF2-40B4-BE49-F238E27FC236}">
-                <a16:creationId xmlns:a16="http://schemas.microsoft.com/office/drawing/2014/main" id="{E2E9E4C6-AFE2-45E6-8613-258C9DF85724}"/>
-              </a:ext>
-            </a:extLst>
-          </p:cNvPr>
-          <p:cNvSpPr>
-            <a:spLocks xmlns:a="http://schemas.openxmlformats.org/drawingml/2006/main" noGrp="1"/>
-          </p:cNvSpPr>
-          <p:nvPr/>
-        </p:nvSpPr>
-        <p:spPr>
-          <a:xfrm xmlns:a="http://schemas.openxmlformats.org/drawingml/2006/main">
-            <a:off x="609600" y="800100"/>
-            <a:ext cx="3429000" cy="228600"/>
-          </a:xfrm>
-          <a:prstGeom xmlns:a="http://schemas.openxmlformats.org/drawingml/2006/main" prst="rect">
-            <a:avLst/>
-          </a:prstGeom>
-          <a:noFill xmlns:a="http://schemas.openxmlformats.org/drawingml/2006/main"/>
-          <a:ln xmlns:a="http://schemas.openxmlformats.org/drawingml/2006/main" w="0">
-            <a:noFill/>
-            <a:prstDash val="solid"/>
-          </a:ln>
-        </p:spPr>
-        <p:txBody>
-          <a:bodyPr xmlns:a="http://schemas.openxmlformats.org/drawingml/2006/main"/>
-          <a:lstStyle xmlns:a="http://schemas.openxmlformats.org/drawingml/2006/main"/>
-          <a:p xmlns:a="http://schemas.openxmlformats.org/drawingml/2006/main">
-            <a:pPr algn="l">
-              <a:defRPr sz="975" b="1">
-                <a:solidFill>
-                  <a:srgbClr val="E63888"/>
-                </a:solidFill>
-              </a:defRPr>
-            </a:pPr>
-            <a:r>
-              <a:rPr sz="975" b="1">
-                <a:solidFill>
-                  <a:srgbClr val="E63888"/>
-                </a:solidFill>
-              </a:rPr>
-              <a:t>THE LADDER</a:t>
-            </a:r>
-          </a:p>
-        </p:txBody>
-      </p:sp>
-      <p:sp>
-        <p:nvSpPr>
-          <p:cNvPr id="4" name="">
-            <a:extLst xmlns:a="http://schemas.openxmlformats.org/drawingml/2006/main">
-              <a:ext uri="{FF2B5EF4-FFF2-40B4-BE49-F238E27FC236}">
-                <a16:creationId xmlns:a16="http://schemas.microsoft.com/office/drawing/2014/main" id="{6E127497-7FD5-435B-94C1-A5C7631D8B09}"/>
-              </a:ext>
-            </a:extLst>
-          </p:cNvPr>
-          <p:cNvSpPr>
-            <a:spLocks xmlns:a="http://schemas.openxmlformats.org/drawingml/2006/main" noGrp="1"/>
-          </p:cNvSpPr>
-          <p:nvPr/>
-        </p:nvSpPr>
-        <p:spPr>
-          <a:xfrm xmlns:a="http://schemas.openxmlformats.org/drawingml/2006/main">
-            <a:off x="609600" y="1066800"/>
-            <a:ext cx="10668000" cy="647700"/>
+                <a16:creationId xmlns:a16="http://schemas.microsoft.com/office/drawing/2014/main" id="{61CCAB3D-B907-47BC-9EF3-5999DC7DC20B}"/>
+              </a:ext>
+            </a:extLst>
+          </p:cNvPr>
+          <p:cNvSpPr>
+            <a:spLocks xmlns:a="http://schemas.openxmlformats.org/drawingml/2006/main" noGrp="1"/>
+          </p:cNvSpPr>
+          <p:nvPr/>
+        </p:nvSpPr>
+        <p:spPr>
+          <a:xfrm xmlns:a="http://schemas.openxmlformats.org/drawingml/2006/main">
+            <a:off x="609600" y="838200"/>
+            <a:ext cx="10668000" cy="704850"/>
           </a:xfrm>
           <a:prstGeom xmlns:a="http://schemas.openxmlformats.org/drawingml/2006/main" prst="rect">
             <a:avLst/>
@@ -22121,10 +21071,10 @@
       </p:sp>
       <p:sp>
         <p:nvSpPr>
-          <p:cNvPr id="5" name="">
-            <a:extLst xmlns:a="http://schemas.openxmlformats.org/drawingml/2006/main">
-              <a:ext uri="{FF2B5EF4-FFF2-40B4-BE49-F238E27FC236}">
-                <a16:creationId xmlns:a16="http://schemas.microsoft.com/office/drawing/2014/main" id="{CA6CBCF9-297A-40EC-8C93-F06641152D6D}"/>
+          <p:cNvPr id="4" name="">
+            <a:extLst xmlns:a="http://schemas.openxmlformats.org/drawingml/2006/main">
+              <a:ext uri="{FF2B5EF4-FFF2-40B4-BE49-F238E27FC236}">
+                <a16:creationId xmlns:a16="http://schemas.microsoft.com/office/drawing/2014/main" id="{12C4D910-58BA-4341-B126-C9293D62DA4C}"/>
               </a:ext>
             </a:extLst>
           </p:cNvPr>
@@ -22171,10 +21121,10 @@
       </p:sp>
       <p:sp>
         <p:nvSpPr>
-          <p:cNvPr id="6" name="">
-            <a:extLst xmlns:a="http://schemas.openxmlformats.org/drawingml/2006/main">
-              <a:ext uri="{FF2B5EF4-FFF2-40B4-BE49-F238E27FC236}">
-                <a16:creationId xmlns:a16="http://schemas.microsoft.com/office/drawing/2014/main" id="{81CFE01B-6FD1-4CBC-8AF4-DC899861B8C9}"/>
+          <p:cNvPr id="5" name="">
+            <a:extLst xmlns:a="http://schemas.openxmlformats.org/drawingml/2006/main">
+              <a:ext uri="{FF2B5EF4-FFF2-40B4-BE49-F238E27FC236}">
+                <a16:creationId xmlns:a16="http://schemas.microsoft.com/office/drawing/2014/main" id="{42D94331-2219-4F35-9C3C-5C616B09D429}"/>
               </a:ext>
             </a:extLst>
           </p:cNvPr>
@@ -22221,10 +21171,10 @@
       </p:sp>
       <p:sp>
         <p:nvSpPr>
-          <p:cNvPr id="7" name="">
-            <a:extLst xmlns:a="http://schemas.openxmlformats.org/drawingml/2006/main">
-              <a:ext uri="{FF2B5EF4-FFF2-40B4-BE49-F238E27FC236}">
-                <a16:creationId xmlns:a16="http://schemas.microsoft.com/office/drawing/2014/main" id="{DB076640-982D-45A3-8B33-B806D9C2DBE8}"/>
+          <p:cNvPr id="6" name="">
+            <a:extLst xmlns:a="http://schemas.openxmlformats.org/drawingml/2006/main">
+              <a:ext uri="{FF2B5EF4-FFF2-40B4-BE49-F238E27FC236}">
+                <a16:creationId xmlns:a16="http://schemas.microsoft.com/office/drawing/2014/main" id="{8251684A-A56C-463E-A15C-5BE8B459C3AC}"/>
               </a:ext>
             </a:extLst>
           </p:cNvPr>
@@ -22256,10 +21206,10 @@
       </p:sp>
       <p:sp>
         <p:nvSpPr>
-          <p:cNvPr id="8" name="">
-            <a:extLst xmlns:a="http://schemas.openxmlformats.org/drawingml/2006/main">
-              <a:ext uri="{FF2B5EF4-FFF2-40B4-BE49-F238E27FC236}">
-                <a16:creationId xmlns:a16="http://schemas.microsoft.com/office/drawing/2014/main" id="{2BE85B15-BAE7-4D5F-8CDD-A00C95EB4EB8}"/>
+          <p:cNvPr id="7" name="">
+            <a:extLst xmlns:a="http://schemas.openxmlformats.org/drawingml/2006/main">
+              <a:ext uri="{FF2B5EF4-FFF2-40B4-BE49-F238E27FC236}">
+                <a16:creationId xmlns:a16="http://schemas.microsoft.com/office/drawing/2014/main" id="{83E29F17-A572-4CC7-84FB-506D1E1849BA}"/>
               </a:ext>
             </a:extLst>
           </p:cNvPr>
@@ -22306,10 +21256,10 @@
       </p:sp>
       <p:sp>
         <p:nvSpPr>
-          <p:cNvPr id="9" name="">
-            <a:extLst xmlns:a="http://schemas.openxmlformats.org/drawingml/2006/main">
-              <a:ext uri="{FF2B5EF4-FFF2-40B4-BE49-F238E27FC236}">
-                <a16:creationId xmlns:a16="http://schemas.microsoft.com/office/drawing/2014/main" id="{7B92B976-BFD0-4108-8990-53791A4A4E6F}"/>
+          <p:cNvPr id="8" name="">
+            <a:extLst xmlns:a="http://schemas.openxmlformats.org/drawingml/2006/main">
+              <a:ext uri="{FF2B5EF4-FFF2-40B4-BE49-F238E27FC236}">
+                <a16:creationId xmlns:a16="http://schemas.microsoft.com/office/drawing/2014/main" id="{51A815B1-E1BC-432B-AC28-A86877E2B6F6}"/>
               </a:ext>
             </a:extLst>
           </p:cNvPr>
@@ -22356,10 +21306,10 @@
       </p:sp>
       <p:sp>
         <p:nvSpPr>
-          <p:cNvPr id="10" name="">
-            <a:extLst xmlns:a="http://schemas.openxmlformats.org/drawingml/2006/main">
-              <a:ext uri="{FF2B5EF4-FFF2-40B4-BE49-F238E27FC236}">
-                <a16:creationId xmlns:a16="http://schemas.microsoft.com/office/drawing/2014/main" id="{D984B088-F6ED-4BA3-812C-2D74B23CDA9F}"/>
+          <p:cNvPr id="9" name="">
+            <a:extLst xmlns:a="http://schemas.openxmlformats.org/drawingml/2006/main">
+              <a:ext uri="{FF2B5EF4-FFF2-40B4-BE49-F238E27FC236}">
+                <a16:creationId xmlns:a16="http://schemas.microsoft.com/office/drawing/2014/main" id="{F52149BA-24A6-4D2B-A2C0-FFA8918F3BA9}"/>
               </a:ext>
             </a:extLst>
           </p:cNvPr>
@@ -22389,10 +21339,10 @@
       </p:sp>
       <p:sp>
         <p:nvSpPr>
-          <p:cNvPr id="11" name="">
-            <a:extLst xmlns:a="http://schemas.openxmlformats.org/drawingml/2006/main">
-              <a:ext uri="{FF2B5EF4-FFF2-40B4-BE49-F238E27FC236}">
-                <a16:creationId xmlns:a16="http://schemas.microsoft.com/office/drawing/2014/main" id="{E31E495D-43A3-491A-A1A1-BFA4BBA61EDC}"/>
+          <p:cNvPr id="10" name="">
+            <a:extLst xmlns:a="http://schemas.openxmlformats.org/drawingml/2006/main">
+              <a:ext uri="{FF2B5EF4-FFF2-40B4-BE49-F238E27FC236}">
+                <a16:creationId xmlns:a16="http://schemas.microsoft.com/office/drawing/2014/main" id="{336FEABD-0E9E-42B9-9DE6-1FB648BAE2F9}"/>
               </a:ext>
             </a:extLst>
           </p:cNvPr>
@@ -22439,10 +21389,10 @@
       </p:sp>
       <p:sp>
         <p:nvSpPr>
-          <p:cNvPr id="12" name="">
-            <a:extLst xmlns:a="http://schemas.openxmlformats.org/drawingml/2006/main">
-              <a:ext uri="{FF2B5EF4-FFF2-40B4-BE49-F238E27FC236}">
-                <a16:creationId xmlns:a16="http://schemas.microsoft.com/office/drawing/2014/main" id="{631BEC1F-8300-4441-B4E4-19DC6EF3EA19}"/>
+          <p:cNvPr id="11" name="">
+            <a:extLst xmlns:a="http://schemas.openxmlformats.org/drawingml/2006/main">
+              <a:ext uri="{FF2B5EF4-FFF2-40B4-BE49-F238E27FC236}">
+                <a16:creationId xmlns:a16="http://schemas.microsoft.com/office/drawing/2014/main" id="{E17F1028-816B-4BD1-85AC-3D8AF5E67693}"/>
               </a:ext>
             </a:extLst>
           </p:cNvPr>
@@ -22489,10 +21439,10 @@
       </p:sp>
       <p:sp>
         <p:nvSpPr>
-          <p:cNvPr id="13" name="">
-            <a:extLst xmlns:a="http://schemas.openxmlformats.org/drawingml/2006/main">
-              <a:ext uri="{FF2B5EF4-FFF2-40B4-BE49-F238E27FC236}">
-                <a16:creationId xmlns:a16="http://schemas.microsoft.com/office/drawing/2014/main" id="{76ED324B-2A41-487A-B776-AED4102999E5}"/>
+          <p:cNvPr id="12" name="">
+            <a:extLst xmlns:a="http://schemas.openxmlformats.org/drawingml/2006/main">
+              <a:ext uri="{FF2B5EF4-FFF2-40B4-BE49-F238E27FC236}">
+                <a16:creationId xmlns:a16="http://schemas.microsoft.com/office/drawing/2014/main" id="{ED2C0902-D39D-4C21-A1CE-C0D6DF946B99}"/>
               </a:ext>
             </a:extLst>
           </p:cNvPr>
@@ -22539,10 +21489,10 @@
       </p:sp>
       <p:sp>
         <p:nvSpPr>
-          <p:cNvPr id="14" name="">
-            <a:extLst xmlns:a="http://schemas.openxmlformats.org/drawingml/2006/main">
-              <a:ext uri="{FF2B5EF4-FFF2-40B4-BE49-F238E27FC236}">
-                <a16:creationId xmlns:a16="http://schemas.microsoft.com/office/drawing/2014/main" id="{D9C979C6-10B6-4273-904F-72B3F5F31546}"/>
+          <p:cNvPr id="13" name="">
+            <a:extLst xmlns:a="http://schemas.openxmlformats.org/drawingml/2006/main">
+              <a:ext uri="{FF2B5EF4-FFF2-40B4-BE49-F238E27FC236}">
+                <a16:creationId xmlns:a16="http://schemas.microsoft.com/office/drawing/2014/main" id="{B4384A95-8D5D-4318-8643-39C7B07750E6}"/>
               </a:ext>
             </a:extLst>
           </p:cNvPr>
@@ -22572,10 +21522,10 @@
       </p:sp>
       <p:sp>
         <p:nvSpPr>
-          <p:cNvPr id="15" name="">
-            <a:extLst xmlns:a="http://schemas.openxmlformats.org/drawingml/2006/main">
-              <a:ext uri="{FF2B5EF4-FFF2-40B4-BE49-F238E27FC236}">
-                <a16:creationId xmlns:a16="http://schemas.microsoft.com/office/drawing/2014/main" id="{02E9D35D-5396-4908-B051-78479CF47BE0}"/>
+          <p:cNvPr id="14" name="">
+            <a:extLst xmlns:a="http://schemas.openxmlformats.org/drawingml/2006/main">
+              <a:ext uri="{FF2B5EF4-FFF2-40B4-BE49-F238E27FC236}">
+                <a16:creationId xmlns:a16="http://schemas.microsoft.com/office/drawing/2014/main" id="{75FBA3AF-A163-4ED2-B4B7-A675057A8473}"/>
               </a:ext>
             </a:extLst>
           </p:cNvPr>
@@ -22622,10 +21572,10 @@
       </p:sp>
       <p:sp>
         <p:nvSpPr>
-          <p:cNvPr id="16" name="">
-            <a:extLst xmlns:a="http://schemas.openxmlformats.org/drawingml/2006/main">
-              <a:ext uri="{FF2B5EF4-FFF2-40B4-BE49-F238E27FC236}">
-                <a16:creationId xmlns:a16="http://schemas.microsoft.com/office/drawing/2014/main" id="{54A43102-2403-4508-8234-95EE1AFFA948}"/>
+          <p:cNvPr id="15" name="">
+            <a:extLst xmlns:a="http://schemas.openxmlformats.org/drawingml/2006/main">
+              <a:ext uri="{FF2B5EF4-FFF2-40B4-BE49-F238E27FC236}">
+                <a16:creationId xmlns:a16="http://schemas.microsoft.com/office/drawing/2014/main" id="{65A7B713-7FDA-4CD9-8F82-0875B49987B0}"/>
               </a:ext>
             </a:extLst>
           </p:cNvPr>
@@ -22673,7 +21623,7 @@
     </p:spTree>
     <p:extLst>
       <p:ext uri="{BB962C8B-B14F-4D97-AF65-F5344CB8AC3E}">
-        <p14:creationId xmlns:p14="http://schemas.microsoft.com/office/powerpoint/2010/main" val="1236844495"/>
+        <p14:creationId xmlns:p14="http://schemas.microsoft.com/office/powerpoint/2010/main" val="883484750"/>
       </p:ext>
     </p:extLst>
   </p:cSld>
@@ -22701,10 +21651,10 @@
       </p:grpSpPr>
       <p:sp>
         <p:nvSpPr>
-          <p:cNvPr id="17" name="">
-            <a:extLst xmlns:a="http://schemas.openxmlformats.org/drawingml/2006/main">
-              <a:ext uri="{FF2B5EF4-FFF2-40B4-BE49-F238E27FC236}">
-                <a16:creationId xmlns:a16="http://schemas.microsoft.com/office/drawing/2014/main" id="{62BA4E60-EEE5-44ED-A653-22D82AA394BF}"/>
+          <p:cNvPr id="16" name="">
+            <a:extLst xmlns:a="http://schemas.openxmlformats.org/drawingml/2006/main">
+              <a:ext uri="{FF2B5EF4-FFF2-40B4-BE49-F238E27FC236}">
+                <a16:creationId xmlns:a16="http://schemas.microsoft.com/office/drawing/2014/main" id="{249FA136-706D-4E43-AC3B-CF4056743B52}"/>
               </a:ext>
             </a:extLst>
           </p:cNvPr>
@@ -22754,7 +21704,7 @@
           <p:cNvPr id="2" name="">
             <a:extLst xmlns:a="http://schemas.openxmlformats.org/drawingml/2006/main">
               <a:ext uri="{FF2B5EF4-FFF2-40B4-BE49-F238E27FC236}">
-                <a16:creationId xmlns:a16="http://schemas.microsoft.com/office/drawing/2014/main" id="{2355FCAB-9045-473D-BF03-D8CE3BB620BD}"/>
+                <a16:creationId xmlns:a16="http://schemas.microsoft.com/office/drawing/2014/main" id="{61DF9DBB-5127-400F-975D-1A654AD40A58}"/>
               </a:ext>
             </a:extLst>
           </p:cNvPr>
@@ -22785,69 +21735,19 @@
           <p:cNvPr id="3" name="">
             <a:extLst xmlns:a="http://schemas.openxmlformats.org/drawingml/2006/main">
               <a:ext uri="{FF2B5EF4-FFF2-40B4-BE49-F238E27FC236}">
-                <a16:creationId xmlns:a16="http://schemas.microsoft.com/office/drawing/2014/main" id="{E3EBA9CD-DC2F-4816-BB59-E79878794C49}"/>
-              </a:ext>
-            </a:extLst>
-          </p:cNvPr>
-          <p:cNvSpPr>
-            <a:spLocks xmlns:a="http://schemas.openxmlformats.org/drawingml/2006/main" noGrp="1"/>
-          </p:cNvSpPr>
-          <p:nvPr/>
-        </p:nvSpPr>
-        <p:spPr>
-          <a:xfrm xmlns:a="http://schemas.openxmlformats.org/drawingml/2006/main">
-            <a:off x="609600" y="800100"/>
-            <a:ext cx="3429000" cy="228600"/>
-          </a:xfrm>
-          <a:prstGeom xmlns:a="http://schemas.openxmlformats.org/drawingml/2006/main" prst="rect">
-            <a:avLst/>
-          </a:prstGeom>
-          <a:noFill xmlns:a="http://schemas.openxmlformats.org/drawingml/2006/main"/>
-          <a:ln xmlns:a="http://schemas.openxmlformats.org/drawingml/2006/main" w="0">
-            <a:noFill/>
-            <a:prstDash val="solid"/>
-          </a:ln>
-        </p:spPr>
-        <p:txBody>
-          <a:bodyPr xmlns:a="http://schemas.openxmlformats.org/drawingml/2006/main"/>
-          <a:lstStyle xmlns:a="http://schemas.openxmlformats.org/drawingml/2006/main"/>
-          <a:p xmlns:a="http://schemas.openxmlformats.org/drawingml/2006/main">
-            <a:pPr algn="l">
-              <a:defRPr sz="975" b="1">
-                <a:solidFill>
-                  <a:srgbClr val="E63888"/>
-                </a:solidFill>
-              </a:defRPr>
-            </a:pPr>
-            <a:r>
-              <a:rPr sz="975" b="1">
-                <a:solidFill>
-                  <a:srgbClr val="E63888"/>
-                </a:solidFill>
-              </a:rPr>
-              <a:t>THE LADDER</a:t>
-            </a:r>
-          </a:p>
-        </p:txBody>
-      </p:sp>
-      <p:sp>
-        <p:nvSpPr>
-          <p:cNvPr id="4" name="">
-            <a:extLst xmlns:a="http://schemas.openxmlformats.org/drawingml/2006/main">
-              <a:ext uri="{FF2B5EF4-FFF2-40B4-BE49-F238E27FC236}">
-                <a16:creationId xmlns:a16="http://schemas.microsoft.com/office/drawing/2014/main" id="{3EE5095C-4460-40FA-839E-FDADB1C3E8CA}"/>
-              </a:ext>
-            </a:extLst>
-          </p:cNvPr>
-          <p:cNvSpPr>
-            <a:spLocks xmlns:a="http://schemas.openxmlformats.org/drawingml/2006/main" noGrp="1"/>
-          </p:cNvSpPr>
-          <p:nvPr/>
-        </p:nvSpPr>
-        <p:spPr>
-          <a:xfrm xmlns:a="http://schemas.openxmlformats.org/drawingml/2006/main">
-            <a:off x="609600" y="1066800"/>
-            <a:ext cx="10668000" cy="647700"/>
+                <a16:creationId xmlns:a16="http://schemas.microsoft.com/office/drawing/2014/main" id="{A417DBDD-9CF7-442B-9AE0-3E9FC4CE6463}"/>
+              </a:ext>
+            </a:extLst>
+          </p:cNvPr>
+          <p:cNvSpPr>
+            <a:spLocks xmlns:a="http://schemas.openxmlformats.org/drawingml/2006/main" noGrp="1"/>
+          </p:cNvSpPr>
+          <p:nvPr/>
+        </p:nvSpPr>
+        <p:spPr>
+          <a:xfrm xmlns:a="http://schemas.openxmlformats.org/drawingml/2006/main">
+            <a:off x="609600" y="838200"/>
+            <a:ext cx="10668000" cy="704850"/>
           </a:xfrm>
           <a:prstGeom xmlns:a="http://schemas.openxmlformats.org/drawingml/2006/main" prst="rect">
             <a:avLst/>
@@ -22882,10 +21782,10 @@
       </p:sp>
       <p:sp>
         <p:nvSpPr>
-          <p:cNvPr id="5" name="">
-            <a:extLst xmlns:a="http://schemas.openxmlformats.org/drawingml/2006/main">
-              <a:ext uri="{FF2B5EF4-FFF2-40B4-BE49-F238E27FC236}">
-                <a16:creationId xmlns:a16="http://schemas.microsoft.com/office/drawing/2014/main" id="{8C142B9E-666B-4948-B340-A6753EB51E69}"/>
+          <p:cNvPr id="4" name="">
+            <a:extLst xmlns:a="http://schemas.openxmlformats.org/drawingml/2006/main">
+              <a:ext uri="{FF2B5EF4-FFF2-40B4-BE49-F238E27FC236}">
+                <a16:creationId xmlns:a16="http://schemas.microsoft.com/office/drawing/2014/main" id="{30D1A2C0-CE10-411C-85E8-996B19625BDB}"/>
               </a:ext>
             </a:extLst>
           </p:cNvPr>
@@ -22932,10 +21832,10 @@
       </p:sp>
       <p:sp>
         <p:nvSpPr>
-          <p:cNvPr id="6" name="">
-            <a:extLst xmlns:a="http://schemas.openxmlformats.org/drawingml/2006/main">
-              <a:ext uri="{FF2B5EF4-FFF2-40B4-BE49-F238E27FC236}">
-                <a16:creationId xmlns:a16="http://schemas.microsoft.com/office/drawing/2014/main" id="{E0A90D6F-C23C-4D0B-A533-0DDCBF7C4683}"/>
+          <p:cNvPr id="5" name="">
+            <a:extLst xmlns:a="http://schemas.openxmlformats.org/drawingml/2006/main">
+              <a:ext uri="{FF2B5EF4-FFF2-40B4-BE49-F238E27FC236}">
+                <a16:creationId xmlns:a16="http://schemas.microsoft.com/office/drawing/2014/main" id="{594D7646-8FB3-494F-A43E-75732EF09ADC}"/>
               </a:ext>
             </a:extLst>
           </p:cNvPr>
@@ -22982,10 +21882,10 @@
       </p:sp>
       <p:sp>
         <p:nvSpPr>
-          <p:cNvPr id="7" name="">
-            <a:extLst xmlns:a="http://schemas.openxmlformats.org/drawingml/2006/main">
-              <a:ext uri="{FF2B5EF4-FFF2-40B4-BE49-F238E27FC236}">
-                <a16:creationId xmlns:a16="http://schemas.microsoft.com/office/drawing/2014/main" id="{7AA949D1-B17E-419C-B9CE-B6DC2E262D89}"/>
+          <p:cNvPr id="6" name="">
+            <a:extLst xmlns:a="http://schemas.openxmlformats.org/drawingml/2006/main">
+              <a:ext uri="{FF2B5EF4-FFF2-40B4-BE49-F238E27FC236}">
+                <a16:creationId xmlns:a16="http://schemas.microsoft.com/office/drawing/2014/main" id="{B8505C87-C899-41EB-9282-6316527E3EFE}"/>
               </a:ext>
             </a:extLst>
           </p:cNvPr>
@@ -23017,10 +21917,10 @@
       </p:sp>
       <p:sp>
         <p:nvSpPr>
-          <p:cNvPr id="8" name="">
-            <a:extLst xmlns:a="http://schemas.openxmlformats.org/drawingml/2006/main">
-              <a:ext uri="{FF2B5EF4-FFF2-40B4-BE49-F238E27FC236}">
-                <a16:creationId xmlns:a16="http://schemas.microsoft.com/office/drawing/2014/main" id="{7693D46C-58B2-4167-BB14-7D120B3BCA82}"/>
+          <p:cNvPr id="7" name="">
+            <a:extLst xmlns:a="http://schemas.openxmlformats.org/drawingml/2006/main">
+              <a:ext uri="{FF2B5EF4-FFF2-40B4-BE49-F238E27FC236}">
+                <a16:creationId xmlns:a16="http://schemas.microsoft.com/office/drawing/2014/main" id="{8B9882E3-59F7-457F-B4D7-F106536D4ED8}"/>
               </a:ext>
             </a:extLst>
           </p:cNvPr>
@@ -23067,10 +21967,10 @@
       </p:sp>
       <p:sp>
         <p:nvSpPr>
-          <p:cNvPr id="9" name="">
-            <a:extLst xmlns:a="http://schemas.openxmlformats.org/drawingml/2006/main">
-              <a:ext uri="{FF2B5EF4-FFF2-40B4-BE49-F238E27FC236}">
-                <a16:creationId xmlns:a16="http://schemas.microsoft.com/office/drawing/2014/main" id="{9E767043-13CE-4925-87BB-505F558F95F3}"/>
+          <p:cNvPr id="8" name="">
+            <a:extLst xmlns:a="http://schemas.openxmlformats.org/drawingml/2006/main">
+              <a:ext uri="{FF2B5EF4-FFF2-40B4-BE49-F238E27FC236}">
+                <a16:creationId xmlns:a16="http://schemas.microsoft.com/office/drawing/2014/main" id="{FC8DAE17-4A55-4E63-823B-A6C52E8E5639}"/>
               </a:ext>
             </a:extLst>
           </p:cNvPr>
@@ -23117,10 +22017,10 @@
       </p:sp>
       <p:sp>
         <p:nvSpPr>
-          <p:cNvPr id="10" name="">
-            <a:extLst xmlns:a="http://schemas.openxmlformats.org/drawingml/2006/main">
-              <a:ext uri="{FF2B5EF4-FFF2-40B4-BE49-F238E27FC236}">
-                <a16:creationId xmlns:a16="http://schemas.microsoft.com/office/drawing/2014/main" id="{167BDB09-4936-4B4E-AAAC-757B564841F3}"/>
+          <p:cNvPr id="9" name="">
+            <a:extLst xmlns:a="http://schemas.openxmlformats.org/drawingml/2006/main">
+              <a:ext uri="{FF2B5EF4-FFF2-40B4-BE49-F238E27FC236}">
+                <a16:creationId xmlns:a16="http://schemas.microsoft.com/office/drawing/2014/main" id="{95EEAA8D-ADF5-4403-8BEE-D46098257A4F}"/>
               </a:ext>
             </a:extLst>
           </p:cNvPr>
@@ -23150,10 +22050,10 @@
       </p:sp>
       <p:sp>
         <p:nvSpPr>
-          <p:cNvPr id="11" name="">
-            <a:extLst xmlns:a="http://schemas.openxmlformats.org/drawingml/2006/main">
-              <a:ext uri="{FF2B5EF4-FFF2-40B4-BE49-F238E27FC236}">
-                <a16:creationId xmlns:a16="http://schemas.microsoft.com/office/drawing/2014/main" id="{4B197051-3937-40E7-81E0-5186342D70AC}"/>
+          <p:cNvPr id="10" name="">
+            <a:extLst xmlns:a="http://schemas.openxmlformats.org/drawingml/2006/main">
+              <a:ext uri="{FF2B5EF4-FFF2-40B4-BE49-F238E27FC236}">
+                <a16:creationId xmlns:a16="http://schemas.microsoft.com/office/drawing/2014/main" id="{C64AA1B7-7A6E-4013-98B0-07ADA6EC199A}"/>
               </a:ext>
             </a:extLst>
           </p:cNvPr>
@@ -23200,10 +22100,10 @@
       </p:sp>
       <p:sp>
         <p:nvSpPr>
-          <p:cNvPr id="12" name="">
-            <a:extLst xmlns:a="http://schemas.openxmlformats.org/drawingml/2006/main">
-              <a:ext uri="{FF2B5EF4-FFF2-40B4-BE49-F238E27FC236}">
-                <a16:creationId xmlns:a16="http://schemas.microsoft.com/office/drawing/2014/main" id="{7286BE57-A19B-44A2-AB6B-30D015B691DC}"/>
+          <p:cNvPr id="11" name="">
+            <a:extLst xmlns:a="http://schemas.openxmlformats.org/drawingml/2006/main">
+              <a:ext uri="{FF2B5EF4-FFF2-40B4-BE49-F238E27FC236}">
+                <a16:creationId xmlns:a16="http://schemas.microsoft.com/office/drawing/2014/main" id="{FDF5F8D8-7F22-48AA-8DA3-95E2ADD63C07}"/>
               </a:ext>
             </a:extLst>
           </p:cNvPr>
@@ -23250,10 +22150,10 @@
       </p:sp>
       <p:sp>
         <p:nvSpPr>
-          <p:cNvPr id="13" name="">
-            <a:extLst xmlns:a="http://schemas.openxmlformats.org/drawingml/2006/main">
-              <a:ext uri="{FF2B5EF4-FFF2-40B4-BE49-F238E27FC236}">
-                <a16:creationId xmlns:a16="http://schemas.microsoft.com/office/drawing/2014/main" id="{18626CD6-17C8-4A52-A841-E5C4ADC62EFB}"/>
+          <p:cNvPr id="12" name="">
+            <a:extLst xmlns:a="http://schemas.openxmlformats.org/drawingml/2006/main">
+              <a:ext uri="{FF2B5EF4-FFF2-40B4-BE49-F238E27FC236}">
+                <a16:creationId xmlns:a16="http://schemas.microsoft.com/office/drawing/2014/main" id="{29F17BDB-CDA6-4A32-8F23-D3047B9EBFF5}"/>
               </a:ext>
             </a:extLst>
           </p:cNvPr>
@@ -23300,10 +22200,10 @@
       </p:sp>
       <p:sp>
         <p:nvSpPr>
-          <p:cNvPr id="14" name="">
-            <a:extLst xmlns:a="http://schemas.openxmlformats.org/drawingml/2006/main">
-              <a:ext uri="{FF2B5EF4-FFF2-40B4-BE49-F238E27FC236}">
-                <a16:creationId xmlns:a16="http://schemas.microsoft.com/office/drawing/2014/main" id="{2EE180E2-83FD-422B-BE2F-59B6A9197EBF}"/>
+          <p:cNvPr id="13" name="">
+            <a:extLst xmlns:a="http://schemas.openxmlformats.org/drawingml/2006/main">
+              <a:ext uri="{FF2B5EF4-FFF2-40B4-BE49-F238E27FC236}">
+                <a16:creationId xmlns:a16="http://schemas.microsoft.com/office/drawing/2014/main" id="{45FF6A94-FFD3-4184-9DEB-A3CC5F740888}"/>
               </a:ext>
             </a:extLst>
           </p:cNvPr>
@@ -23333,10 +22233,10 @@
       </p:sp>
       <p:sp>
         <p:nvSpPr>
-          <p:cNvPr id="15" name="">
-            <a:extLst xmlns:a="http://schemas.openxmlformats.org/drawingml/2006/main">
-              <a:ext uri="{FF2B5EF4-FFF2-40B4-BE49-F238E27FC236}">
-                <a16:creationId xmlns:a16="http://schemas.microsoft.com/office/drawing/2014/main" id="{A2D2C6A6-8854-4A03-BCE7-70B4C10E1512}"/>
+          <p:cNvPr id="14" name="">
+            <a:extLst xmlns:a="http://schemas.openxmlformats.org/drawingml/2006/main">
+              <a:ext uri="{FF2B5EF4-FFF2-40B4-BE49-F238E27FC236}">
+                <a16:creationId xmlns:a16="http://schemas.microsoft.com/office/drawing/2014/main" id="{BC1EBA80-0A28-4654-A875-ED9D4E108DF4}"/>
               </a:ext>
             </a:extLst>
           </p:cNvPr>
@@ -23383,10 +22283,10 @@
       </p:sp>
       <p:sp>
         <p:nvSpPr>
-          <p:cNvPr id="16" name="">
-            <a:extLst xmlns:a="http://schemas.openxmlformats.org/drawingml/2006/main">
-              <a:ext uri="{FF2B5EF4-FFF2-40B4-BE49-F238E27FC236}">
-                <a16:creationId xmlns:a16="http://schemas.microsoft.com/office/drawing/2014/main" id="{77112F15-69D4-432D-B0CA-335E104A622E}"/>
+          <p:cNvPr id="15" name="">
+            <a:extLst xmlns:a="http://schemas.openxmlformats.org/drawingml/2006/main">
+              <a:ext uri="{FF2B5EF4-FFF2-40B4-BE49-F238E27FC236}">
+                <a16:creationId xmlns:a16="http://schemas.microsoft.com/office/drawing/2014/main" id="{1CD6A4AD-3947-4376-AA67-AD0E4F8D00FE}"/>
               </a:ext>
             </a:extLst>
           </p:cNvPr>
@@ -23434,7 +22334,7 @@
     </p:spTree>
     <p:extLst>
       <p:ext uri="{BB962C8B-B14F-4D97-AF65-F5344CB8AC3E}">
-        <p14:creationId xmlns:p14="http://schemas.microsoft.com/office/powerpoint/2010/main" val="843555635"/>
+        <p14:creationId xmlns:p14="http://schemas.microsoft.com/office/powerpoint/2010/main" val="1659601731"/>
       </p:ext>
     </p:extLst>
   </p:cSld>
@@ -23462,10 +22362,10 @@
       </p:grpSpPr>
       <p:sp>
         <p:nvSpPr>
-          <p:cNvPr id="27" name="">
-            <a:extLst xmlns:a="http://schemas.openxmlformats.org/drawingml/2006/main">
-              <a:ext uri="{FF2B5EF4-FFF2-40B4-BE49-F238E27FC236}">
-                <a16:creationId xmlns:a16="http://schemas.microsoft.com/office/drawing/2014/main" id="{16325DCF-7DDC-4024-8D44-610CA20F03A2}"/>
+          <p:cNvPr id="26" name="">
+            <a:extLst xmlns:a="http://schemas.openxmlformats.org/drawingml/2006/main">
+              <a:ext uri="{FF2B5EF4-FFF2-40B4-BE49-F238E27FC236}">
+                <a16:creationId xmlns:a16="http://schemas.microsoft.com/office/drawing/2014/main" id="{8AF210E4-10EE-4441-85F4-954A52601691}"/>
               </a:ext>
             </a:extLst>
           </p:cNvPr>
@@ -23515,7 +22415,7 @@
           <p:cNvPr id="2" name="">
             <a:extLst xmlns:a="http://schemas.openxmlformats.org/drawingml/2006/main">
               <a:ext uri="{FF2B5EF4-FFF2-40B4-BE49-F238E27FC236}">
-                <a16:creationId xmlns:a16="http://schemas.microsoft.com/office/drawing/2014/main" id="{2495D602-98C0-4C55-B307-1CA6A3CC4F05}"/>
+                <a16:creationId xmlns:a16="http://schemas.microsoft.com/office/drawing/2014/main" id="{B900F133-CB96-4B1C-A980-738282EB95E4}"/>
               </a:ext>
             </a:extLst>
           </p:cNvPr>
@@ -23546,69 +22446,19 @@
           <p:cNvPr id="3" name="">
             <a:extLst xmlns:a="http://schemas.openxmlformats.org/drawingml/2006/main">
               <a:ext uri="{FF2B5EF4-FFF2-40B4-BE49-F238E27FC236}">
-                <a16:creationId xmlns:a16="http://schemas.microsoft.com/office/drawing/2014/main" id="{CC88AE03-4A44-48CD-AC7A-20AA0AA7D3BF}"/>
-              </a:ext>
-            </a:extLst>
-          </p:cNvPr>
-          <p:cNvSpPr>
-            <a:spLocks xmlns:a="http://schemas.openxmlformats.org/drawingml/2006/main" noGrp="1"/>
-          </p:cNvSpPr>
-          <p:nvPr/>
-        </p:nvSpPr>
-        <p:spPr>
-          <a:xfrm xmlns:a="http://schemas.openxmlformats.org/drawingml/2006/main">
-            <a:off x="609600" y="800100"/>
-            <a:ext cx="3429000" cy="228600"/>
-          </a:xfrm>
-          <a:prstGeom xmlns:a="http://schemas.openxmlformats.org/drawingml/2006/main" prst="rect">
-            <a:avLst/>
-          </a:prstGeom>
-          <a:noFill xmlns:a="http://schemas.openxmlformats.org/drawingml/2006/main"/>
-          <a:ln xmlns:a="http://schemas.openxmlformats.org/drawingml/2006/main" w="0">
-            <a:noFill/>
-            <a:prstDash val="solid"/>
-          </a:ln>
-        </p:spPr>
-        <p:txBody>
-          <a:bodyPr xmlns:a="http://schemas.openxmlformats.org/drawingml/2006/main"/>
-          <a:lstStyle xmlns:a="http://schemas.openxmlformats.org/drawingml/2006/main"/>
-          <a:p xmlns:a="http://schemas.openxmlformats.org/drawingml/2006/main">
-            <a:pPr algn="l">
-              <a:defRPr sz="975" b="1">
-                <a:solidFill>
-                  <a:srgbClr val="E63888"/>
-                </a:solidFill>
-              </a:defRPr>
-            </a:pPr>
-            <a:r>
-              <a:rPr sz="975" b="1">
-                <a:solidFill>
-                  <a:srgbClr val="E63888"/>
-                </a:solidFill>
-              </a:rPr>
-              <a:t>THE GROUNDED WORKSPACE</a:t>
-            </a:r>
-          </a:p>
-        </p:txBody>
-      </p:sp>
-      <p:sp>
-        <p:nvSpPr>
-          <p:cNvPr id="4" name="">
-            <a:extLst xmlns:a="http://schemas.openxmlformats.org/drawingml/2006/main">
-              <a:ext uri="{FF2B5EF4-FFF2-40B4-BE49-F238E27FC236}">
-                <a16:creationId xmlns:a16="http://schemas.microsoft.com/office/drawing/2014/main" id="{B476662A-B2C7-4EE4-9634-0B9B56760360}"/>
-              </a:ext>
-            </a:extLst>
-          </p:cNvPr>
-          <p:cNvSpPr>
-            <a:spLocks xmlns:a="http://schemas.openxmlformats.org/drawingml/2006/main" noGrp="1"/>
-          </p:cNvSpPr>
-          <p:nvPr/>
-        </p:nvSpPr>
-        <p:spPr>
-          <a:xfrm xmlns:a="http://schemas.openxmlformats.org/drawingml/2006/main">
-            <a:off x="609600" y="1066800"/>
-            <a:ext cx="10668000" cy="647700"/>
+                <a16:creationId xmlns:a16="http://schemas.microsoft.com/office/drawing/2014/main" id="{5015A93E-493B-460A-8824-CF09FBEF4A39}"/>
+              </a:ext>
+            </a:extLst>
+          </p:cNvPr>
+          <p:cNvSpPr>
+            <a:spLocks xmlns:a="http://schemas.openxmlformats.org/drawingml/2006/main" noGrp="1"/>
+          </p:cNvSpPr>
+          <p:nvPr/>
+        </p:nvSpPr>
+        <p:spPr>
+          <a:xfrm xmlns:a="http://schemas.openxmlformats.org/drawingml/2006/main">
+            <a:off x="609600" y="838200"/>
+            <a:ext cx="10668000" cy="704850"/>
           </a:xfrm>
           <a:prstGeom xmlns:a="http://schemas.openxmlformats.org/drawingml/2006/main" prst="rect">
             <a:avLst/>
@@ -23643,10 +22493,10 @@
       </p:sp>
       <p:sp>
         <p:nvSpPr>
-          <p:cNvPr id="5" name="">
-            <a:extLst xmlns:a="http://schemas.openxmlformats.org/drawingml/2006/main">
-              <a:ext uri="{FF2B5EF4-FFF2-40B4-BE49-F238E27FC236}">
-                <a16:creationId xmlns:a16="http://schemas.microsoft.com/office/drawing/2014/main" id="{5AF84CF3-B8C5-454A-A4EC-607AEFAD7A58}"/>
+          <p:cNvPr id="4" name="">
+            <a:extLst xmlns:a="http://schemas.openxmlformats.org/drawingml/2006/main">
+              <a:ext uri="{FF2B5EF4-FFF2-40B4-BE49-F238E27FC236}">
+                <a16:creationId xmlns:a16="http://schemas.microsoft.com/office/drawing/2014/main" id="{181F8DB6-F82B-4C99-8688-A179CF70A385}"/>
               </a:ext>
             </a:extLst>
           </p:cNvPr>
@@ -23693,10 +22543,10 @@
       </p:sp>
       <p:sp>
         <p:nvSpPr>
-          <p:cNvPr id="6" name="">
-            <a:extLst xmlns:a="http://schemas.openxmlformats.org/drawingml/2006/main">
-              <a:ext uri="{FF2B5EF4-FFF2-40B4-BE49-F238E27FC236}">
-                <a16:creationId xmlns:a16="http://schemas.microsoft.com/office/drawing/2014/main" id="{8C1203D5-6FA7-48BC-A361-C7F54F277EB6}"/>
+          <p:cNvPr id="5" name="">
+            <a:extLst xmlns:a="http://schemas.openxmlformats.org/drawingml/2006/main">
+              <a:ext uri="{FF2B5EF4-FFF2-40B4-BE49-F238E27FC236}">
+                <a16:creationId xmlns:a16="http://schemas.microsoft.com/office/drawing/2014/main" id="{EF8E241C-00C6-4276-BE0F-3DD46093B108}"/>
               </a:ext>
             </a:extLst>
           </p:cNvPr>
@@ -23743,10 +22593,10 @@
       </p:sp>
       <p:sp>
         <p:nvSpPr>
-          <p:cNvPr id="7" name="">
-            <a:extLst xmlns:a="http://schemas.openxmlformats.org/drawingml/2006/main">
-              <a:ext uri="{FF2B5EF4-FFF2-40B4-BE49-F238E27FC236}">
-                <a16:creationId xmlns:a16="http://schemas.microsoft.com/office/drawing/2014/main" id="{45AA0FBC-A6CC-47A6-9B4F-9CEC06DFD472}"/>
+          <p:cNvPr id="6" name="">
+            <a:extLst xmlns:a="http://schemas.openxmlformats.org/drawingml/2006/main">
+              <a:ext uri="{FF2B5EF4-FFF2-40B4-BE49-F238E27FC236}">
+                <a16:creationId xmlns:a16="http://schemas.microsoft.com/office/drawing/2014/main" id="{BB2F18B9-2E5F-431F-B237-EE7719DFBAE8}"/>
               </a:ext>
             </a:extLst>
           </p:cNvPr>
@@ -23776,10 +22626,10 @@
       </p:sp>
       <p:sp>
         <p:nvSpPr>
-          <p:cNvPr id="8" name="">
-            <a:extLst xmlns:a="http://schemas.openxmlformats.org/drawingml/2006/main">
-              <a:ext uri="{FF2B5EF4-FFF2-40B4-BE49-F238E27FC236}">
-                <a16:creationId xmlns:a16="http://schemas.microsoft.com/office/drawing/2014/main" id="{8D2FD0F6-55FE-4FA9-B45D-108480698B66}"/>
+          <p:cNvPr id="7" name="">
+            <a:extLst xmlns:a="http://schemas.openxmlformats.org/drawingml/2006/main">
+              <a:ext uri="{FF2B5EF4-FFF2-40B4-BE49-F238E27FC236}">
+                <a16:creationId xmlns:a16="http://schemas.microsoft.com/office/drawing/2014/main" id="{409F1D16-0FF3-44D6-A870-4667761FCA1C}"/>
               </a:ext>
             </a:extLst>
           </p:cNvPr>
@@ -23826,10 +22676,10 @@
       </p:sp>
       <p:sp>
         <p:nvSpPr>
-          <p:cNvPr id="9" name="">
-            <a:extLst xmlns:a="http://schemas.openxmlformats.org/drawingml/2006/main">
-              <a:ext uri="{FF2B5EF4-FFF2-40B4-BE49-F238E27FC236}">
-                <a16:creationId xmlns:a16="http://schemas.microsoft.com/office/drawing/2014/main" id="{8F58CA1A-E85D-4E32-807C-2046963FFDDB}"/>
+          <p:cNvPr id="8" name="">
+            <a:extLst xmlns:a="http://schemas.openxmlformats.org/drawingml/2006/main">
+              <a:ext uri="{FF2B5EF4-FFF2-40B4-BE49-F238E27FC236}">
+                <a16:creationId xmlns:a16="http://schemas.microsoft.com/office/drawing/2014/main" id="{F08F923A-BF44-4B85-B143-3447366D46F7}"/>
               </a:ext>
             </a:extLst>
           </p:cNvPr>
@@ -23876,10 +22726,10 @@
       </p:sp>
       <p:sp>
         <p:nvSpPr>
-          <p:cNvPr id="10" name="">
-            <a:extLst xmlns:a="http://schemas.openxmlformats.org/drawingml/2006/main">
-              <a:ext uri="{FF2B5EF4-FFF2-40B4-BE49-F238E27FC236}">
-                <a16:creationId xmlns:a16="http://schemas.microsoft.com/office/drawing/2014/main" id="{349575D2-891A-4E68-84BE-58277C308EA7}"/>
+          <p:cNvPr id="9" name="">
+            <a:extLst xmlns:a="http://schemas.openxmlformats.org/drawingml/2006/main">
+              <a:ext uri="{FF2B5EF4-FFF2-40B4-BE49-F238E27FC236}">
+                <a16:creationId xmlns:a16="http://schemas.microsoft.com/office/drawing/2014/main" id="{CA24A5F6-F67A-41E0-9F76-8E4D3B14CEB8}"/>
               </a:ext>
             </a:extLst>
           </p:cNvPr>
@@ -23926,10 +22776,10 @@
       </p:sp>
       <p:sp>
         <p:nvSpPr>
-          <p:cNvPr id="11" name="">
-            <a:extLst xmlns:a="http://schemas.openxmlformats.org/drawingml/2006/main">
-              <a:ext uri="{FF2B5EF4-FFF2-40B4-BE49-F238E27FC236}">
-                <a16:creationId xmlns:a16="http://schemas.microsoft.com/office/drawing/2014/main" id="{9139D750-B1F3-4B22-9044-D0C726AA47CD}"/>
+          <p:cNvPr id="10" name="">
+            <a:extLst xmlns:a="http://schemas.openxmlformats.org/drawingml/2006/main">
+              <a:ext uri="{FF2B5EF4-FFF2-40B4-BE49-F238E27FC236}">
+                <a16:creationId xmlns:a16="http://schemas.microsoft.com/office/drawing/2014/main" id="{8D6BA71C-E0CA-4959-B3E4-02848BDCA28B}"/>
               </a:ext>
             </a:extLst>
           </p:cNvPr>
@@ -23976,10 +22826,10 @@
       </p:sp>
       <p:sp>
         <p:nvSpPr>
-          <p:cNvPr id="12" name="">
-            <a:extLst xmlns:a="http://schemas.openxmlformats.org/drawingml/2006/main">
-              <a:ext uri="{FF2B5EF4-FFF2-40B4-BE49-F238E27FC236}">
-                <a16:creationId xmlns:a16="http://schemas.microsoft.com/office/drawing/2014/main" id="{261E7AC9-1DCF-4F69-A167-C9E954F2B111}"/>
+          <p:cNvPr id="11" name="">
+            <a:extLst xmlns:a="http://schemas.openxmlformats.org/drawingml/2006/main">
+              <a:ext uri="{FF2B5EF4-FFF2-40B4-BE49-F238E27FC236}">
+                <a16:creationId xmlns:a16="http://schemas.microsoft.com/office/drawing/2014/main" id="{10C7C8B9-BDE2-4862-87B2-C35256EF53AD}"/>
               </a:ext>
             </a:extLst>
           </p:cNvPr>
@@ -24026,10 +22876,10 @@
       </p:sp>
       <p:sp>
         <p:nvSpPr>
-          <p:cNvPr id="13" name="">
-            <a:extLst xmlns:a="http://schemas.openxmlformats.org/drawingml/2006/main">
-              <a:ext uri="{FF2B5EF4-FFF2-40B4-BE49-F238E27FC236}">
-                <a16:creationId xmlns:a16="http://schemas.microsoft.com/office/drawing/2014/main" id="{DEBE8417-8163-4E9B-AD51-33F57BDE9B82}"/>
+          <p:cNvPr id="12" name="">
+            <a:extLst xmlns:a="http://schemas.openxmlformats.org/drawingml/2006/main">
+              <a:ext uri="{FF2B5EF4-FFF2-40B4-BE49-F238E27FC236}">
+                <a16:creationId xmlns:a16="http://schemas.microsoft.com/office/drawing/2014/main" id="{19C8A552-AEFC-481F-AACD-4FA4117CACDC}"/>
               </a:ext>
             </a:extLst>
           </p:cNvPr>
@@ -24076,10 +22926,10 @@
       </p:sp>
       <p:sp>
         <p:nvSpPr>
-          <p:cNvPr id="14" name="">
-            <a:extLst xmlns:a="http://schemas.openxmlformats.org/drawingml/2006/main">
-              <a:ext uri="{FF2B5EF4-FFF2-40B4-BE49-F238E27FC236}">
-                <a16:creationId xmlns:a16="http://schemas.microsoft.com/office/drawing/2014/main" id="{AFBDBD55-639A-4BAA-B769-CC749281078F}"/>
+          <p:cNvPr id="13" name="">
+            <a:extLst xmlns:a="http://schemas.openxmlformats.org/drawingml/2006/main">
+              <a:ext uri="{FF2B5EF4-FFF2-40B4-BE49-F238E27FC236}">
+                <a16:creationId xmlns:a16="http://schemas.microsoft.com/office/drawing/2014/main" id="{DFADE5CE-8CD4-4429-A34C-1B42625609EA}"/>
               </a:ext>
             </a:extLst>
           </p:cNvPr>
@@ -24126,10 +22976,10 @@
       </p:sp>
       <p:sp>
         <p:nvSpPr>
-          <p:cNvPr id="15" name="">
-            <a:extLst xmlns:a="http://schemas.openxmlformats.org/drawingml/2006/main">
-              <a:ext uri="{FF2B5EF4-FFF2-40B4-BE49-F238E27FC236}">
-                <a16:creationId xmlns:a16="http://schemas.microsoft.com/office/drawing/2014/main" id="{89E3BBE3-FB0F-4851-84FB-5AEC7264AE93}"/>
+          <p:cNvPr id="14" name="">
+            <a:extLst xmlns:a="http://schemas.openxmlformats.org/drawingml/2006/main">
+              <a:ext uri="{FF2B5EF4-FFF2-40B4-BE49-F238E27FC236}">
+                <a16:creationId xmlns:a16="http://schemas.microsoft.com/office/drawing/2014/main" id="{4C71ECEC-8742-488E-B3E6-0975BA808FD4}"/>
               </a:ext>
             </a:extLst>
           </p:cNvPr>
@@ -24176,10 +23026,10 @@
       </p:sp>
       <p:sp>
         <p:nvSpPr>
-          <p:cNvPr id="16" name="">
-            <a:extLst xmlns:a="http://schemas.openxmlformats.org/drawingml/2006/main">
-              <a:ext uri="{FF2B5EF4-FFF2-40B4-BE49-F238E27FC236}">
-                <a16:creationId xmlns:a16="http://schemas.microsoft.com/office/drawing/2014/main" id="{F4AEC5FB-ABF6-436F-B619-B851CA573BBB}"/>
+          <p:cNvPr id="15" name="">
+            <a:extLst xmlns:a="http://schemas.openxmlformats.org/drawingml/2006/main">
+              <a:ext uri="{FF2B5EF4-FFF2-40B4-BE49-F238E27FC236}">
+                <a16:creationId xmlns:a16="http://schemas.microsoft.com/office/drawing/2014/main" id="{680F053E-1B88-42BA-AE6C-445B125F674C}"/>
               </a:ext>
             </a:extLst>
           </p:cNvPr>
@@ -24226,10 +23076,10 @@
       </p:sp>
       <p:sp>
         <p:nvSpPr>
-          <p:cNvPr id="17" name="">
-            <a:extLst xmlns:a="http://schemas.openxmlformats.org/drawingml/2006/main">
-              <a:ext uri="{FF2B5EF4-FFF2-40B4-BE49-F238E27FC236}">
-                <a16:creationId xmlns:a16="http://schemas.microsoft.com/office/drawing/2014/main" id="{DCEC5FDF-2B6A-4455-B935-2F277A3599BA}"/>
+          <p:cNvPr id="16" name="">
+            <a:extLst xmlns:a="http://schemas.openxmlformats.org/drawingml/2006/main">
+              <a:ext uri="{FF2B5EF4-FFF2-40B4-BE49-F238E27FC236}">
+                <a16:creationId xmlns:a16="http://schemas.microsoft.com/office/drawing/2014/main" id="{F5ADC7A0-FCD0-40A3-90CA-FF1D57B94D46}"/>
               </a:ext>
             </a:extLst>
           </p:cNvPr>
@@ -24276,10 +23126,10 @@
       </p:sp>
       <p:sp>
         <p:nvSpPr>
-          <p:cNvPr id="18" name="">
-            <a:extLst xmlns:a="http://schemas.openxmlformats.org/drawingml/2006/main">
-              <a:ext uri="{FF2B5EF4-FFF2-40B4-BE49-F238E27FC236}">
-                <a16:creationId xmlns:a16="http://schemas.microsoft.com/office/drawing/2014/main" id="{02140E2C-3A24-48BC-A93F-870E37B26D66}"/>
+          <p:cNvPr id="17" name="">
+            <a:extLst xmlns:a="http://schemas.openxmlformats.org/drawingml/2006/main">
+              <a:ext uri="{FF2B5EF4-FFF2-40B4-BE49-F238E27FC236}">
+                <a16:creationId xmlns:a16="http://schemas.microsoft.com/office/drawing/2014/main" id="{0B2A094A-4356-4B76-9597-FBC4521C485B}"/>
               </a:ext>
             </a:extLst>
           </p:cNvPr>
@@ -24326,10 +23176,10 @@
       </p:sp>
       <p:sp>
         <p:nvSpPr>
-          <p:cNvPr id="19" name="">
-            <a:extLst xmlns:a="http://schemas.openxmlformats.org/drawingml/2006/main">
-              <a:ext uri="{FF2B5EF4-FFF2-40B4-BE49-F238E27FC236}">
-                <a16:creationId xmlns:a16="http://schemas.microsoft.com/office/drawing/2014/main" id="{7E8D77DE-C812-4572-AC4B-A8E1D1431C12}"/>
+          <p:cNvPr id="18" name="">
+            <a:extLst xmlns:a="http://schemas.openxmlformats.org/drawingml/2006/main">
+              <a:ext uri="{FF2B5EF4-FFF2-40B4-BE49-F238E27FC236}">
+                <a16:creationId xmlns:a16="http://schemas.microsoft.com/office/drawing/2014/main" id="{DA5FC0BE-3861-41B2-AC54-0157B9079833}"/>
               </a:ext>
             </a:extLst>
           </p:cNvPr>
@@ -24376,10 +23226,10 @@
       </p:sp>
       <p:sp>
         <p:nvSpPr>
-          <p:cNvPr id="20" name="">
-            <a:extLst xmlns:a="http://schemas.openxmlformats.org/drawingml/2006/main">
-              <a:ext uri="{FF2B5EF4-FFF2-40B4-BE49-F238E27FC236}">
-                <a16:creationId xmlns:a16="http://schemas.microsoft.com/office/drawing/2014/main" id="{8C52E022-00E5-4E21-8006-38BBE50766C8}"/>
+          <p:cNvPr id="19" name="">
+            <a:extLst xmlns:a="http://schemas.openxmlformats.org/drawingml/2006/main">
+              <a:ext uri="{FF2B5EF4-FFF2-40B4-BE49-F238E27FC236}">
+                <a16:creationId xmlns:a16="http://schemas.microsoft.com/office/drawing/2014/main" id="{6CF06A75-CCAA-4C20-9B72-513B04DD9A98}"/>
               </a:ext>
             </a:extLst>
           </p:cNvPr>
@@ -24426,10 +23276,10 @@
       </p:sp>
       <p:sp>
         <p:nvSpPr>
-          <p:cNvPr id="21" name="">
-            <a:extLst xmlns:a="http://schemas.openxmlformats.org/drawingml/2006/main">
-              <a:ext uri="{FF2B5EF4-FFF2-40B4-BE49-F238E27FC236}">
-                <a16:creationId xmlns:a16="http://schemas.microsoft.com/office/drawing/2014/main" id="{FABFB154-6867-493A-BA82-61543DD0BD7F}"/>
+          <p:cNvPr id="20" name="">
+            <a:extLst xmlns:a="http://schemas.openxmlformats.org/drawingml/2006/main">
+              <a:ext uri="{FF2B5EF4-FFF2-40B4-BE49-F238E27FC236}">
+                <a16:creationId xmlns:a16="http://schemas.microsoft.com/office/drawing/2014/main" id="{48641B92-3634-4FD9-8E1B-7E4E1D39DF05}"/>
               </a:ext>
             </a:extLst>
           </p:cNvPr>
@@ -24476,10 +23326,10 @@
       </p:sp>
       <p:sp>
         <p:nvSpPr>
-          <p:cNvPr id="22" name="">
-            <a:extLst xmlns:a="http://schemas.openxmlformats.org/drawingml/2006/main">
-              <a:ext uri="{FF2B5EF4-FFF2-40B4-BE49-F238E27FC236}">
-                <a16:creationId xmlns:a16="http://schemas.microsoft.com/office/drawing/2014/main" id="{222B791B-9BE6-4CA2-93DA-776CF7E15988}"/>
+          <p:cNvPr id="21" name="">
+            <a:extLst xmlns:a="http://schemas.openxmlformats.org/drawingml/2006/main">
+              <a:ext uri="{FF2B5EF4-FFF2-40B4-BE49-F238E27FC236}">
+                <a16:creationId xmlns:a16="http://schemas.microsoft.com/office/drawing/2014/main" id="{F666F4FE-0F3F-4D5C-9E0F-9505373FE168}"/>
               </a:ext>
             </a:extLst>
           </p:cNvPr>
@@ -24526,10 +23376,10 @@
       </p:sp>
       <p:sp>
         <p:nvSpPr>
-          <p:cNvPr id="23" name="">
-            <a:extLst xmlns:a="http://schemas.openxmlformats.org/drawingml/2006/main">
-              <a:ext uri="{FF2B5EF4-FFF2-40B4-BE49-F238E27FC236}">
-                <a16:creationId xmlns:a16="http://schemas.microsoft.com/office/drawing/2014/main" id="{C0486F4E-8DB2-4A51-B876-6FA91973981F}"/>
+          <p:cNvPr id="22" name="">
+            <a:extLst xmlns:a="http://schemas.openxmlformats.org/drawingml/2006/main">
+              <a:ext uri="{FF2B5EF4-FFF2-40B4-BE49-F238E27FC236}">
+                <a16:creationId xmlns:a16="http://schemas.microsoft.com/office/drawing/2014/main" id="{C0FEA02E-AA19-405D-8568-5D9CC72BA789}"/>
               </a:ext>
             </a:extLst>
           </p:cNvPr>
@@ -24576,10 +23426,10 @@
       </p:sp>
       <p:sp>
         <p:nvSpPr>
-          <p:cNvPr id="24" name="">
-            <a:extLst xmlns:a="http://schemas.openxmlformats.org/drawingml/2006/main">
-              <a:ext uri="{FF2B5EF4-FFF2-40B4-BE49-F238E27FC236}">
-                <a16:creationId xmlns:a16="http://schemas.microsoft.com/office/drawing/2014/main" id="{4D166FA7-5B5A-4C91-B487-F66E20E1912A}"/>
+          <p:cNvPr id="23" name="">
+            <a:extLst xmlns:a="http://schemas.openxmlformats.org/drawingml/2006/main">
+              <a:ext uri="{FF2B5EF4-FFF2-40B4-BE49-F238E27FC236}">
+                <a16:creationId xmlns:a16="http://schemas.microsoft.com/office/drawing/2014/main" id="{7B40237B-DEBB-4FE8-A198-C6E477D745CE}"/>
               </a:ext>
             </a:extLst>
           </p:cNvPr>
@@ -24626,10 +23476,10 @@
       </p:sp>
       <p:sp>
         <p:nvSpPr>
-          <p:cNvPr id="25" name="">
-            <a:extLst xmlns:a="http://schemas.openxmlformats.org/drawingml/2006/main">
-              <a:ext uri="{FF2B5EF4-FFF2-40B4-BE49-F238E27FC236}">
-                <a16:creationId xmlns:a16="http://schemas.microsoft.com/office/drawing/2014/main" id="{B29DA8CA-A7CE-4046-A59D-5E0C7EFCAA47}"/>
+          <p:cNvPr id="24" name="">
+            <a:extLst xmlns:a="http://schemas.openxmlformats.org/drawingml/2006/main">
+              <a:ext uri="{FF2B5EF4-FFF2-40B4-BE49-F238E27FC236}">
+                <a16:creationId xmlns:a16="http://schemas.microsoft.com/office/drawing/2014/main" id="{3540E210-C9A5-445F-A65D-D669FD7E46F4}"/>
               </a:ext>
             </a:extLst>
           </p:cNvPr>
@@ -24676,10 +23526,10 @@
       </p:sp>
       <p:sp>
         <p:nvSpPr>
-          <p:cNvPr id="26" name="">
-            <a:extLst xmlns:a="http://schemas.openxmlformats.org/drawingml/2006/main">
-              <a:ext uri="{FF2B5EF4-FFF2-40B4-BE49-F238E27FC236}">
-                <a16:creationId xmlns:a16="http://schemas.microsoft.com/office/drawing/2014/main" id="{C6D7E223-4FA0-48B2-BC5E-FA97BA4B5713}"/>
+          <p:cNvPr id="25" name="">
+            <a:extLst xmlns:a="http://schemas.openxmlformats.org/drawingml/2006/main">
+              <a:ext uri="{FF2B5EF4-FFF2-40B4-BE49-F238E27FC236}">
+                <a16:creationId xmlns:a16="http://schemas.microsoft.com/office/drawing/2014/main" id="{9A34C283-7AAD-44AE-9F0D-15420FAF7EAF}"/>
               </a:ext>
             </a:extLst>
           </p:cNvPr>
@@ -24727,7 +23577,7 @@
     </p:spTree>
     <p:extLst>
       <p:ext uri="{BB962C8B-B14F-4D97-AF65-F5344CB8AC3E}">
-        <p14:creationId xmlns:p14="http://schemas.microsoft.com/office/powerpoint/2010/main" val="1780744738"/>
+        <p14:creationId xmlns:p14="http://schemas.microsoft.com/office/powerpoint/2010/main" val="2097130580"/>
       </p:ext>
     </p:extLst>
   </p:cSld>

--- a/webinar/2026-09-17-ai-for-abm-foundations/deliverables/forgex-ai-for-abm-webinar-deck.pptx
+++ b/webinar/2026-09-17-ai-for-abm-foundations/deliverables/forgex-ai-for-abm-webinar-deck.pptx
@@ -2,33 +2,33 @@
 <file path=ppt/presentation.xml><?xml version="1.0" encoding="utf-8"?>
 <p:presentation xmlns:p="http://schemas.openxmlformats.org/presentationml/2006/main">
   <p:sldMasterIdLst>
-    <p:sldMasterId xmlns:r="http://schemas.openxmlformats.org/officeDocument/2006/relationships" id="2147483648" r:id="R057bc7f3a29044e1"/>
+    <p:sldMasterId xmlns:r="http://schemas.openxmlformats.org/officeDocument/2006/relationships" id="2147483648" r:id="Re90f20a8cf9446ee"/>
   </p:sldMasterIdLst>
   <p:notesMasterIdLst>
-    <p:notesMasterId xmlns:r="http://schemas.openxmlformats.org/officeDocument/2006/relationships" r:id="R348283ae57114fe2"/>
+    <p:notesMasterId xmlns:r="http://schemas.openxmlformats.org/officeDocument/2006/relationships" r:id="Rbc4c7f1ef91543da"/>
   </p:notesMasterIdLst>
   <p:sldIdLst>
-    <p:sldId xmlns:r="http://schemas.openxmlformats.org/officeDocument/2006/relationships" id="256" r:id="R61991f2bd73a4a15"/>
-    <p:sldId xmlns:r="http://schemas.openxmlformats.org/officeDocument/2006/relationships" id="257" r:id="R9d2533b48fd34af5"/>
-    <p:sldId xmlns:r="http://schemas.openxmlformats.org/officeDocument/2006/relationships" id="258" r:id="R43fbfac072414536"/>
-    <p:sldId xmlns:r="http://schemas.openxmlformats.org/officeDocument/2006/relationships" id="259" r:id="R2df15b8232124295"/>
-    <p:sldId xmlns:r="http://schemas.openxmlformats.org/officeDocument/2006/relationships" id="260" r:id="R74a38bfa3b9c4bca"/>
-    <p:sldId xmlns:r="http://schemas.openxmlformats.org/officeDocument/2006/relationships" id="261" r:id="R94897d980b3e4a9a"/>
-    <p:sldId xmlns:r="http://schemas.openxmlformats.org/officeDocument/2006/relationships" id="262" r:id="R3947c349eb104346"/>
-    <p:sldId xmlns:r="http://schemas.openxmlformats.org/officeDocument/2006/relationships" id="263" r:id="Rbfbd6e30e71c4b25"/>
-    <p:sldId xmlns:r="http://schemas.openxmlformats.org/officeDocument/2006/relationships" id="264" r:id="Rd7b622fce54144bf"/>
-    <p:sldId xmlns:r="http://schemas.openxmlformats.org/officeDocument/2006/relationships" id="265" r:id="Rb860ed1241824795"/>
-    <p:sldId xmlns:r="http://schemas.openxmlformats.org/officeDocument/2006/relationships" id="266" r:id="R7cec8f2935bf4025"/>
-    <p:sldId xmlns:r="http://schemas.openxmlformats.org/officeDocument/2006/relationships" id="267" r:id="R6b28f07645df4a57"/>
-    <p:sldId xmlns:r="http://schemas.openxmlformats.org/officeDocument/2006/relationships" id="268" r:id="R9d47095d7a6642c7"/>
-    <p:sldId xmlns:r="http://schemas.openxmlformats.org/officeDocument/2006/relationships" id="269" r:id="R2dfd100ec6754b51"/>
-    <p:sldId xmlns:r="http://schemas.openxmlformats.org/officeDocument/2006/relationships" id="270" r:id="Rbbeb1ae505274cb9"/>
-    <p:sldId xmlns:r="http://schemas.openxmlformats.org/officeDocument/2006/relationships" id="271" r:id="Rb46497f4d5bf4b89"/>
-    <p:sldId xmlns:r="http://schemas.openxmlformats.org/officeDocument/2006/relationships" id="272" r:id="R53251cf6437e4ec5"/>
-    <p:sldId xmlns:r="http://schemas.openxmlformats.org/officeDocument/2006/relationships" id="273" r:id="Rd17d342498544b34"/>
-    <p:sldId xmlns:r="http://schemas.openxmlformats.org/officeDocument/2006/relationships" id="274" r:id="Rfedda95930ed47e5"/>
-    <p:sldId xmlns:r="http://schemas.openxmlformats.org/officeDocument/2006/relationships" id="275" r:id="R631393df1bfe4879"/>
-    <p:sldId xmlns:r="http://schemas.openxmlformats.org/officeDocument/2006/relationships" id="276" r:id="Re63c0662b94f4f40"/>
+    <p:sldId xmlns:r="http://schemas.openxmlformats.org/officeDocument/2006/relationships" id="256" r:id="R3e2c269f282242d0"/>
+    <p:sldId xmlns:r="http://schemas.openxmlformats.org/officeDocument/2006/relationships" id="257" r:id="R17503447ec7e4ca0"/>
+    <p:sldId xmlns:r="http://schemas.openxmlformats.org/officeDocument/2006/relationships" id="258" r:id="R620e0c4ff096488a"/>
+    <p:sldId xmlns:r="http://schemas.openxmlformats.org/officeDocument/2006/relationships" id="259" r:id="R15540b54ef644038"/>
+    <p:sldId xmlns:r="http://schemas.openxmlformats.org/officeDocument/2006/relationships" id="260" r:id="R9c1835d937154fbe"/>
+    <p:sldId xmlns:r="http://schemas.openxmlformats.org/officeDocument/2006/relationships" id="261" r:id="R4c7f64be0b2846a1"/>
+    <p:sldId xmlns:r="http://schemas.openxmlformats.org/officeDocument/2006/relationships" id="262" r:id="R3afb655c33e24114"/>
+    <p:sldId xmlns:r="http://schemas.openxmlformats.org/officeDocument/2006/relationships" id="263" r:id="R1750c11aebd64282"/>
+    <p:sldId xmlns:r="http://schemas.openxmlformats.org/officeDocument/2006/relationships" id="264" r:id="Rf56602042b954c66"/>
+    <p:sldId xmlns:r="http://schemas.openxmlformats.org/officeDocument/2006/relationships" id="265" r:id="Rd7ddf3b7a8e44275"/>
+    <p:sldId xmlns:r="http://schemas.openxmlformats.org/officeDocument/2006/relationships" id="266" r:id="Rcba55e90cfdd4a56"/>
+    <p:sldId xmlns:r="http://schemas.openxmlformats.org/officeDocument/2006/relationships" id="267" r:id="R4830026fc7004801"/>
+    <p:sldId xmlns:r="http://schemas.openxmlformats.org/officeDocument/2006/relationships" id="268" r:id="R138017b6b0bd498e"/>
+    <p:sldId xmlns:r="http://schemas.openxmlformats.org/officeDocument/2006/relationships" id="269" r:id="Ra6abc595c4d94357"/>
+    <p:sldId xmlns:r="http://schemas.openxmlformats.org/officeDocument/2006/relationships" id="270" r:id="Rd15cb86b458c44d3"/>
+    <p:sldId xmlns:r="http://schemas.openxmlformats.org/officeDocument/2006/relationships" id="271" r:id="Rd8ce20c310064c14"/>
+    <p:sldId xmlns:r="http://schemas.openxmlformats.org/officeDocument/2006/relationships" id="272" r:id="Rf8a6c790567346a1"/>
+    <p:sldId xmlns:r="http://schemas.openxmlformats.org/officeDocument/2006/relationships" id="273" r:id="R34674ce482ba4218"/>
+    <p:sldId xmlns:r="http://schemas.openxmlformats.org/officeDocument/2006/relationships" id="274" r:id="R81c3a15e47774ada"/>
+    <p:sldId xmlns:r="http://schemas.openxmlformats.org/officeDocument/2006/relationships" id="275" r:id="R0439af09085949f6"/>
+    <p:sldId xmlns:r="http://schemas.openxmlformats.org/officeDocument/2006/relationships" id="276" r:id="R8ec8640a05ec48b5"/>
   </p:sldIdLst>
   <p:sldSz cx="12192000" cy="6858000"/>
   <p:notesSz cx="6858000" cy="9144000"/>
@@ -817,12 +817,42 @@
           <a:lstStyle xmlns:a="http://schemas.openxmlformats.org/drawingml/2006/main"/>
           <a:p xmlns:a="http://schemas.openxmlformats.org/drawingml/2006/main">
             <a:r>
-              <a:t>Treat the community as a pattern library, not an app store. Keep 1:1 ABM Ads draft-only, with no live objects, activation, or spend. Audience ICP Filter has a conditional pass for reviewed list classification only: 22 synthetic attendees reconciled completely, nine required semantic review, and the corrected suite passes 45 of 45 checks. No enrichment, sending, CRM writes, or sequence enrollment.</a:t>
-            </a:r>
-          </a:p>
-          <a:p xmlns:a="http://schemas.openxmlformats.org/drawingml/2006/main">
-            <a:r>
-              <a:t/>
+              <a:t>Treat the GTM community as a pattern library, not an app store.</a:t>
+            </a:r>
+          </a:p>
+          <a:p xmlns:a="http://schemas.openxmlformats.org/drawingml/2006/main">
+            <a:r>
+              <a:t>Read the Level 3 sequence left to right: verify evidence, interpret meaning, qualify the audience, then generate a draft.</a:t>
+            </a:r>
+          </a:p>
+          <a:p xmlns:a="http://schemas.openxmlformats.org/drawingml/2006/main">
+            <a:r>
+              <a:t>Hiring Signal Verification is the evidence gate. The local evaluation passed six adversarial synthetic cases. A live read-only audit of 11 labels accepted 2, narrowed 4, and dropped 5. Verification belongs before scoring or messaging.</a:t>
+            </a:r>
+          </a:p>
+          <a:p xmlns:a="http://schemas.openxmlformats.org/drawingml/2006/main">
+            <a:r>
+              <a:t>Signal Interpreter is a pure interpretation gate. It returns meaning, strength, confidence, why-now, limits, and open questions without routing or writing.</a:t>
+            </a:r>
+          </a:p>
+          <a:p xmlns:a="http://schemas.openxmlformats.org/drawingml/2006/main">
+            <a:r>
+              <a:t>Audience ICP Filter is the qualification gate. A 22-person synthetic fixture reconciled every record into Keep, Exclude, or Review, and the bundled suite passed 45 of 45 checks.</a:t>
+            </a:r>
+          </a:p>
+          <a:p xmlns:a="http://schemas.openxmlformats.org/drawingml/2006/main">
+            <a:r>
+              <a:t>Multichannel Campaign Builder is a conditional draft-generation example. One synthetic brief produced three distinct angles and a five-touch sequence. Require source-backed inputs and human copy QA before any send or activation.</a:t>
+            </a:r>
+          </a:p>
+          <a:p xmlns:a="http://schemas.openxmlformats.org/drawingml/2006/main">
+            <a:r>
+              <a:t>Company Deep Dive is only a Level 2-to-3 source-hierarchy concept. Its evidence is T1 static review, so do not call the package operationally verified.</a:t>
+            </a:r>
+          </a:p>
+          <a:p xmlns:a="http://schemas.openxmlformats.org/drawingml/2006/main">
+            <a:r>
+              <a:t>Do not install or run Swan GTM packages in the live build. Keep the North Peak and Alder path unchanged.</a:t>
             </a:r>
           </a:p>
           <a:p xmlns:a="http://schemas.openxmlformats.org/drawingml/2006/main">
@@ -832,27 +862,37 @@
           </a:p>
           <a:p xmlns:a="http://schemas.openxmlformats.org/drawingml/2006/main">
             <a:r>
-              <a:t>- https://github.com/swan-gtm/gtm-skills/tree/d378356a2668095d71e8dfb0661155255cf6776b/skills/erwann-lefevre/multichannel-campaign-builder</a:t>
-            </a:r>
-          </a:p>
-          <a:p xmlns:a="http://schemas.openxmlformats.org/drawingml/2006/main">
-            <a:r>
-              <a:t>- https://github.com/swan-gtm/gtm-skills/tree/d378356a2668095d71e8dfb0661155255cf6776b/skills/ivan-falco/1-to-1-abm-ads</a:t>
-            </a:r>
-          </a:p>
-          <a:p xmlns:a="http://schemas.openxmlformats.org/drawingml/2006/main">
-            <a:r>
-              <a:t>- https://github.com/swan-gtm/gtm-skills/blob/d378356a2668095d71e8dfb0661155255cf6776b/LICENSE</a:t>
-            </a:r>
-          </a:p>
-          <a:p xmlns:a="http://schemas.openxmlformats.org/drawingml/2006/main">
-            <a:r>
-              <a:t>- /Users/treyharnden/Projects/Folloze-Skills-swan-eval/evaluations/swan-gtm/pilots/audience-icp-filter/sample-evaluation.md at local commit 938b70d760e002a85c5b0a6a83fe395403b98959</a:t>
-            </a:r>
-          </a:p>
-          <a:p xmlns:a="http://schemas.openxmlformats.org/drawingml/2006/main">
-            <a:r>
-              <a:t>- /Users/treyharnden/Projects/forgex-practical-abm-skills/webinar/2026-09-17-ai-for-abm-foundations/sources-and-attribution.md</a:t>
+              <a:t>Swan GTM Skills license: https://github.com/swan-gtm/gtm-skills/blob/d378356a2668095d71e8dfb0661155255cf6776b/LICENSE</a:t>
+            </a:r>
+          </a:p>
+          <a:p xmlns:a="http://schemas.openxmlformats.org/drawingml/2006/main">
+            <a:r>
+              <a:t>Hiring Signal Verification, Peter S. Borkovich: https://github.com/swan-gtm/gtm-skills/tree/d378356a2668095d71e8dfb0661155255cf6776b/skills/peter-borkovich/hiring-signal-verification</a:t>
+            </a:r>
+          </a:p>
+          <a:p xmlns:a="http://schemas.openxmlformats.org/drawingml/2006/main">
+            <a:r>
+              <a:t>Signal Interpreter, Din Arbel: https://github.com/swan-gtm/gtm-skills/tree/d378356a2668095d71e8dfb0661155255cf6776b/skills/din-arbel/signal-interpreter</a:t>
+            </a:r>
+          </a:p>
+          <a:p xmlns:a="http://schemas.openxmlformats.org/drawingml/2006/main">
+            <a:r>
+              <a:t>Audience ICP Filter, Erwann Lefevre: https://github.com/swan-gtm/gtm-skills/tree/d378356a2668095d71e8dfb0661155255cf6776b/skills/erwann-lefevre/audience-icp-filter</a:t>
+            </a:r>
+          </a:p>
+          <a:p xmlns:a="http://schemas.openxmlformats.org/drawingml/2006/main">
+            <a:r>
+              <a:t>Multichannel Campaign Builder, Erwann Lefevre: https://github.com/swan-gtm/gtm-skills/tree/d378356a2668095d71e8dfb0661155255cf6776b/skills/erwann-lefevre/multichannel-campaign-builder</a:t>
+            </a:r>
+          </a:p>
+          <a:p xmlns:a="http://schemas.openxmlformats.org/drawingml/2006/main">
+            <a:r>
+              <a:t>Company Deep Dive, Uriel Knorovich: https://github.com/swan-gtm/gtm-skills/tree/d378356a2668095d71e8dfb0661155255cf6776b/skills/uri-knorovich/company-deep-dive</a:t>
+            </a:r>
+          </a:p>
+          <a:p xmlns:a="http://schemas.openxmlformats.org/drawingml/2006/main">
+            <a:r>
+              <a:t>Local evaluation evidence: /Users/treyharnden/Projects/Folloze-Skills-swan-eval/evaluations/swan-gtm at commit 8dd94e1</a:t>
             </a:r>
           </a:p>
         </p:txBody>
@@ -2320,7 +2360,7 @@
   </p:cSld>
   <p:clrMap bg1="lt1" tx1="dk1" bg2="lt2" tx2="dk2" accent1="accent1" accent2="accent2" accent3="accent3" accent4="accent4" accent5="accent5" accent6="accent6" hlink="hlink" folHlink="folHlink"/>
   <p:sldLayoutIdLst>
-    <p:sldLayoutId xmlns:r="http://schemas.openxmlformats.org/officeDocument/2006/relationships" id="2147483649" r:id="Rbc515e5be2ef4e30"/>
+    <p:sldLayoutId xmlns:r="http://schemas.openxmlformats.org/officeDocument/2006/relationships" id="2147483649" r:id="R2a2ab9de4a4245df"/>
   </p:sldLayoutIdLst>
   <p:txStyles>
     <p:titleStyle>
@@ -2899,6 +2939,7 @@
           <a:lstStyle xmlns:a="http://schemas.openxmlformats.org/drawingml/2006/main"/>
           <a:p xmlns:a="http://schemas.openxmlformats.org/drawingml/2006/main">
             <a:pPr algn="l">
+              <a:buNone/>
               <a:defRPr sz="1800" b="1">
                 <a:solidFill>
                   <a:srgbClr val="E63888"/>
@@ -4220,6 +4261,7 @@
           <a:lstStyle xmlns:a="http://schemas.openxmlformats.org/drawingml/2006/main"/>
           <a:p xmlns:a="http://schemas.openxmlformats.org/drawingml/2006/main">
             <a:pPr algn="l">
+              <a:buNone/>
               <a:defRPr sz="3600" b="1">
                 <a:solidFill>
                   <a:srgbClr val="E63888"/>
@@ -4270,6 +4312,7 @@
           <a:lstStyle xmlns:a="http://schemas.openxmlformats.org/drawingml/2006/main"/>
           <a:p xmlns:a="http://schemas.openxmlformats.org/drawingml/2006/main">
             <a:pPr algn="l">
+              <a:buNone/>
               <a:defRPr sz="4200" b="1">
                 <a:solidFill>
                   <a:srgbClr val="FFFFFF"/>
@@ -4287,6 +4330,7 @@
           </a:p>
           <a:p xmlns:a="http://schemas.openxmlformats.org/drawingml/2006/main">
             <a:pPr algn="l">
+              <a:buNone/>
               <a:defRPr sz="4200" b="1">
                 <a:solidFill>
                   <a:srgbClr val="FFFFFF"/>
@@ -4368,6 +4412,7 @@
           <a:lstStyle xmlns:a="http://schemas.openxmlformats.org/drawingml/2006/main"/>
           <a:p xmlns:a="http://schemas.openxmlformats.org/drawingml/2006/main">
             <a:pPr algn="l">
+              <a:buNone/>
               <a:defRPr sz="1200" b="1">
                 <a:solidFill>
                   <a:srgbClr val="FFFFFF"/>
@@ -4418,6 +4463,7 @@
           <a:lstStyle xmlns:a="http://schemas.openxmlformats.org/drawingml/2006/main"/>
           <a:p xmlns:a="http://schemas.openxmlformats.org/drawingml/2006/main">
             <a:pPr algn="l">
+              <a:buNone/>
               <a:defRPr sz="1050" b="1">
                 <a:solidFill>
                   <a:srgbClr val="C7F25C"/>
@@ -4590,6 +4636,7 @@
           <a:lstStyle xmlns:a="http://schemas.openxmlformats.org/drawingml/2006/main"/>
           <a:p xmlns:a="http://schemas.openxmlformats.org/drawingml/2006/main">
             <a:pPr algn="l">
+              <a:buNone/>
               <a:defRPr sz="1800" b="1">
                 <a:solidFill>
                   <a:srgbClr val="E63888"/>
@@ -4671,6 +4718,7 @@
           <a:lstStyle xmlns:a="http://schemas.openxmlformats.org/drawingml/2006/main"/>
           <a:p xmlns:a="http://schemas.openxmlformats.org/drawingml/2006/main">
             <a:pPr algn="l">
+              <a:buNone/>
               <a:defRPr sz="3150" b="1">
                 <a:solidFill>
                   <a:srgbClr val="FFFFFF"/>
@@ -4721,6 +4769,7 @@
           <a:lstStyle xmlns:a="http://schemas.openxmlformats.org/drawingml/2006/main"/>
           <a:p xmlns:a="http://schemas.openxmlformats.org/drawingml/2006/main">
             <a:pPr algn="l">
+              <a:buNone/>
               <a:defRPr sz="750" b="1">
                 <a:solidFill>
                   <a:srgbClr val="EAE3EC"/>
@@ -4771,6 +4820,7 @@
           <a:lstStyle xmlns:a="http://schemas.openxmlformats.org/drawingml/2006/main"/>
           <a:p xmlns:a="http://schemas.openxmlformats.org/drawingml/2006/main">
             <a:pPr algn="r">
+              <a:buNone/>
               <a:defRPr sz="825" b="1">
                 <a:solidFill>
                   <a:srgbClr val="C7F25C"/>
@@ -4821,6 +4871,7 @@
           <a:lstStyle xmlns:a="http://schemas.openxmlformats.org/drawingml/2006/main"/>
           <a:p xmlns:a="http://schemas.openxmlformats.org/drawingml/2006/main">
             <a:pPr algn="l">
+              <a:buNone/>
               <a:defRPr sz="975" b="1">
                 <a:solidFill>
                   <a:srgbClr val="C7F25C"/>
@@ -4906,6 +4957,7 @@
           <a:lstStyle xmlns:a="http://schemas.openxmlformats.org/drawingml/2006/main"/>
           <a:p xmlns:a="http://schemas.openxmlformats.org/drawingml/2006/main">
             <a:pPr algn="ctr">
+              <a:buNone/>
               <a:defRPr sz="1500" b="1">
                 <a:solidFill>
                   <a:srgbClr val="FFFFFF"/>
@@ -4991,6 +5043,7 @@
           <a:lstStyle xmlns:a="http://schemas.openxmlformats.org/drawingml/2006/main"/>
           <a:p xmlns:a="http://schemas.openxmlformats.org/drawingml/2006/main">
             <a:pPr algn="ctr">
+              <a:buNone/>
               <a:defRPr sz="1500" b="1">
                 <a:solidFill>
                   <a:srgbClr val="FFFFFF"/>
@@ -5076,6 +5129,7 @@
           <a:lstStyle xmlns:a="http://schemas.openxmlformats.org/drawingml/2006/main"/>
           <a:p xmlns:a="http://schemas.openxmlformats.org/drawingml/2006/main">
             <a:pPr algn="ctr">
+              <a:buNone/>
               <a:defRPr sz="1500" b="1">
                 <a:solidFill>
                   <a:srgbClr val="FFFFFF"/>
@@ -5161,6 +5215,7 @@
           <a:lstStyle xmlns:a="http://schemas.openxmlformats.org/drawingml/2006/main"/>
           <a:p xmlns:a="http://schemas.openxmlformats.org/drawingml/2006/main">
             <a:pPr algn="ctr">
+              <a:buNone/>
               <a:defRPr sz="1500" b="1">
                 <a:solidFill>
                   <a:srgbClr val="FFFFFF"/>
@@ -5376,6 +5431,7 @@
           <a:lstStyle xmlns:a="http://schemas.openxmlformats.org/drawingml/2006/main"/>
           <a:p xmlns:a="http://schemas.openxmlformats.org/drawingml/2006/main">
             <a:pPr algn="l">
+              <a:buNone/>
               <a:defRPr sz="975" b="1">
                 <a:solidFill>
                   <a:srgbClr val="C7F25C"/>
@@ -5461,6 +5517,7 @@
           <a:lstStyle xmlns:a="http://schemas.openxmlformats.org/drawingml/2006/main"/>
           <a:p xmlns:a="http://schemas.openxmlformats.org/drawingml/2006/main">
             <a:pPr algn="ctr">
+              <a:buNone/>
               <a:defRPr sz="1350" b="1">
                 <a:solidFill>
                   <a:srgbClr val="FFFFFF"/>
@@ -5546,6 +5603,7 @@
           <a:lstStyle xmlns:a="http://schemas.openxmlformats.org/drawingml/2006/main"/>
           <a:p xmlns:a="http://schemas.openxmlformats.org/drawingml/2006/main">
             <a:pPr algn="ctr">
+              <a:buNone/>
               <a:defRPr sz="1350" b="1">
                 <a:solidFill>
                   <a:srgbClr val="FFFFFF"/>
@@ -5631,6 +5689,7 @@
           <a:lstStyle xmlns:a="http://schemas.openxmlformats.org/drawingml/2006/main"/>
           <a:p xmlns:a="http://schemas.openxmlformats.org/drawingml/2006/main">
             <a:pPr algn="ctr">
+              <a:buNone/>
               <a:defRPr sz="1350" b="1">
                 <a:solidFill>
                   <a:srgbClr val="FFFFFF"/>
@@ -5716,6 +5775,7 @@
           <a:lstStyle xmlns:a="http://schemas.openxmlformats.org/drawingml/2006/main"/>
           <a:p xmlns:a="http://schemas.openxmlformats.org/drawingml/2006/main">
             <a:pPr algn="ctr">
+              <a:buNone/>
               <a:defRPr sz="1350" b="1">
                 <a:solidFill>
                   <a:srgbClr val="FFFFFF"/>
@@ -5801,6 +5861,7 @@
           <a:lstStyle xmlns:a="http://schemas.openxmlformats.org/drawingml/2006/main"/>
           <a:p xmlns:a="http://schemas.openxmlformats.org/drawingml/2006/main">
             <a:pPr algn="ctr">
+              <a:buNone/>
               <a:defRPr sz="1350" b="1">
                 <a:solidFill>
                   <a:srgbClr val="FFFFFF"/>
@@ -5851,6 +5912,7 @@
           <a:lstStyle xmlns:a="http://schemas.openxmlformats.org/drawingml/2006/main"/>
           <a:p xmlns:a="http://schemas.openxmlformats.org/drawingml/2006/main">
             <a:pPr algn="ctr">
+              <a:buNone/>
               <a:defRPr sz="1800" b="1">
                 <a:solidFill>
                   <a:srgbClr val="C7F25C"/>
@@ -5930,6 +5992,7 @@
           <a:lstStyle xmlns:a="http://schemas.openxmlformats.org/drawingml/2006/main"/>
           <a:p xmlns:a="http://schemas.openxmlformats.org/drawingml/2006/main">
             <a:pPr algn="l">
+              <a:buNone/>
               <a:defRPr sz="1800" b="1">
                 <a:solidFill>
                   <a:srgbClr val="E63888"/>
@@ -6011,6 +6074,7 @@
           <a:lstStyle xmlns:a="http://schemas.openxmlformats.org/drawingml/2006/main"/>
           <a:p xmlns:a="http://schemas.openxmlformats.org/drawingml/2006/main">
             <a:pPr algn="l">
+              <a:buNone/>
               <a:defRPr sz="3150" b="1">
                 <a:solidFill>
                   <a:srgbClr val="26232A"/>
@@ -6061,6 +6125,7 @@
           <a:lstStyle xmlns:a="http://schemas.openxmlformats.org/drawingml/2006/main"/>
           <a:p xmlns:a="http://schemas.openxmlformats.org/drawingml/2006/main">
             <a:pPr algn="l">
+              <a:buNone/>
               <a:defRPr sz="750" b="1">
                 <a:solidFill>
                   <a:srgbClr val="6E6873"/>
@@ -6111,6 +6176,7 @@
           <a:lstStyle xmlns:a="http://schemas.openxmlformats.org/drawingml/2006/main"/>
           <a:p xmlns:a="http://schemas.openxmlformats.org/drawingml/2006/main">
             <a:pPr algn="r">
+              <a:buNone/>
               <a:defRPr sz="825" b="1">
                 <a:solidFill>
                   <a:srgbClr val="E63888"/>
@@ -6161,6 +6227,7 @@
           <a:lstStyle xmlns:a="http://schemas.openxmlformats.org/drawingml/2006/main"/>
           <a:p xmlns:a="http://schemas.openxmlformats.org/drawingml/2006/main">
             <a:pPr algn="l">
+              <a:buNone/>
               <a:defRPr sz="2100" b="1">
                 <a:solidFill>
                   <a:srgbClr val="6E6873"/>
@@ -6211,6 +6278,7 @@
           <a:lstStyle xmlns:a="http://schemas.openxmlformats.org/drawingml/2006/main"/>
           <a:p xmlns:a="http://schemas.openxmlformats.org/drawingml/2006/main">
             <a:pPr algn="ctr">
+              <a:buNone/>
               <a:defRPr sz="2850" b="1">
                 <a:solidFill>
                   <a:srgbClr val="E63888"/>
@@ -6261,6 +6329,7 @@
           <a:lstStyle xmlns:a="http://schemas.openxmlformats.org/drawingml/2006/main"/>
           <a:p xmlns:a="http://schemas.openxmlformats.org/drawingml/2006/main">
             <a:pPr algn="l">
+              <a:buNone/>
               <a:defRPr sz="2400" b="1">
                 <a:solidFill>
                   <a:srgbClr val="3D1F5C"/>
@@ -6278,6 +6347,7 @@
           </a:p>
           <a:p xmlns:a="http://schemas.openxmlformats.org/drawingml/2006/main">
             <a:pPr algn="l">
+              <a:buNone/>
               <a:defRPr sz="2400" b="1">
                 <a:solidFill>
                   <a:srgbClr val="3D1F5C"/>
@@ -6363,6 +6433,7 @@
           <a:lstStyle xmlns:a="http://schemas.openxmlformats.org/drawingml/2006/main"/>
           <a:p xmlns:a="http://schemas.openxmlformats.org/drawingml/2006/main">
             <a:pPr algn="l">
+              <a:buNone/>
               <a:defRPr sz="975" b="1">
                 <a:solidFill>
                   <a:srgbClr val="E63888"/>
@@ -6413,6 +6484,7 @@
           <a:lstStyle xmlns:a="http://schemas.openxmlformats.org/drawingml/2006/main"/>
           <a:p xmlns:a="http://schemas.openxmlformats.org/drawingml/2006/main">
             <a:pPr algn="l">
+              <a:buNone/>
               <a:defRPr sz="1425" b="0">
                 <a:solidFill>
                   <a:srgbClr val="26232A"/>
@@ -6496,6 +6568,7 @@
           <a:lstStyle xmlns:a="http://schemas.openxmlformats.org/drawingml/2006/main"/>
           <a:p xmlns:a="http://schemas.openxmlformats.org/drawingml/2006/main">
             <a:pPr algn="l">
+              <a:buNone/>
               <a:defRPr sz="975" b="1">
                 <a:solidFill>
                   <a:srgbClr val="C7F25C"/>
@@ -6546,6 +6619,7 @@
           <a:lstStyle xmlns:a="http://schemas.openxmlformats.org/drawingml/2006/main"/>
           <a:p xmlns:a="http://schemas.openxmlformats.org/drawingml/2006/main">
             <a:pPr algn="l">
+              <a:buNone/>
               <a:defRPr sz="1650" b="1">
                 <a:solidFill>
                   <a:srgbClr val="FFFFFF"/>
@@ -6629,6 +6703,7 @@
           <a:lstStyle xmlns:a="http://schemas.openxmlformats.org/drawingml/2006/main"/>
           <a:p xmlns:a="http://schemas.openxmlformats.org/drawingml/2006/main">
             <a:pPr algn="l">
+              <a:buNone/>
               <a:defRPr sz="975" b="1">
                 <a:solidFill>
                   <a:srgbClr val="3D1F5C"/>
@@ -6679,6 +6754,7 @@
           <a:lstStyle xmlns:a="http://schemas.openxmlformats.org/drawingml/2006/main"/>
           <a:p xmlns:a="http://schemas.openxmlformats.org/drawingml/2006/main">
             <a:pPr algn="l">
+              <a:buNone/>
               <a:defRPr sz="1350" b="1">
                 <a:solidFill>
                   <a:srgbClr val="3D1F5C"/>
@@ -6758,6 +6834,7 @@
           <a:lstStyle xmlns:a="http://schemas.openxmlformats.org/drawingml/2006/main"/>
           <a:p xmlns:a="http://schemas.openxmlformats.org/drawingml/2006/main">
             <a:pPr algn="l">
+              <a:buNone/>
               <a:defRPr sz="1800" b="1">
                 <a:solidFill>
                   <a:srgbClr val="E63888"/>
@@ -6839,6 +6916,7 @@
           <a:lstStyle xmlns:a="http://schemas.openxmlformats.org/drawingml/2006/main"/>
           <a:p xmlns:a="http://schemas.openxmlformats.org/drawingml/2006/main">
             <a:pPr algn="l">
+              <a:buNone/>
               <a:defRPr sz="3150" b="1">
                 <a:solidFill>
                   <a:srgbClr val="FFFFFF"/>
@@ -6889,6 +6967,7 @@
           <a:lstStyle xmlns:a="http://schemas.openxmlformats.org/drawingml/2006/main"/>
           <a:p xmlns:a="http://schemas.openxmlformats.org/drawingml/2006/main">
             <a:pPr algn="l">
+              <a:buNone/>
               <a:defRPr sz="750" b="1">
                 <a:solidFill>
                   <a:srgbClr val="EAE3EC"/>
@@ -6939,6 +7018,7 @@
           <a:lstStyle xmlns:a="http://schemas.openxmlformats.org/drawingml/2006/main"/>
           <a:p xmlns:a="http://schemas.openxmlformats.org/drawingml/2006/main">
             <a:pPr algn="r">
+              <a:buNone/>
               <a:defRPr sz="825" b="1">
                 <a:solidFill>
                   <a:srgbClr val="C7F25C"/>
@@ -7024,6 +7104,7 @@
           <a:lstStyle xmlns:a="http://schemas.openxmlformats.org/drawingml/2006/main"/>
           <a:p xmlns:a="http://schemas.openxmlformats.org/drawingml/2006/main">
             <a:pPr algn="l">
+              <a:buNone/>
               <a:defRPr sz="1050" b="1">
                 <a:solidFill>
                   <a:srgbClr val="C7F25C"/>
@@ -7074,6 +7155,7 @@
           <a:lstStyle xmlns:a="http://schemas.openxmlformats.org/drawingml/2006/main"/>
           <a:p xmlns:a="http://schemas.openxmlformats.org/drawingml/2006/main">
             <a:pPr algn="ctr">
+              <a:buNone/>
               <a:defRPr sz="1350" b="1">
                 <a:solidFill>
                   <a:srgbClr val="FFFFFF"/>
@@ -7124,6 +7206,7 @@
           <a:lstStyle xmlns:a="http://schemas.openxmlformats.org/drawingml/2006/main"/>
           <a:p xmlns:a="http://schemas.openxmlformats.org/drawingml/2006/main">
             <a:pPr algn="ctr">
+              <a:buNone/>
               <a:defRPr sz="1650" b="1">
                 <a:solidFill>
                   <a:srgbClr val="E63888"/>
@@ -7209,6 +7292,7 @@
           <a:lstStyle xmlns:a="http://schemas.openxmlformats.org/drawingml/2006/main"/>
           <a:p xmlns:a="http://schemas.openxmlformats.org/drawingml/2006/main">
             <a:pPr algn="l">
+              <a:buNone/>
               <a:defRPr sz="1050" b="1">
                 <a:solidFill>
                   <a:srgbClr val="C7F25C"/>
@@ -7259,6 +7343,7 @@
           <a:lstStyle xmlns:a="http://schemas.openxmlformats.org/drawingml/2006/main"/>
           <a:p xmlns:a="http://schemas.openxmlformats.org/drawingml/2006/main">
             <a:pPr algn="ctr">
+              <a:buNone/>
               <a:defRPr sz="1350" b="1">
                 <a:solidFill>
                   <a:srgbClr val="FFFFFF"/>
@@ -7309,6 +7394,7 @@
           <a:lstStyle xmlns:a="http://schemas.openxmlformats.org/drawingml/2006/main"/>
           <a:p xmlns:a="http://schemas.openxmlformats.org/drawingml/2006/main">
             <a:pPr algn="ctr">
+              <a:buNone/>
               <a:defRPr sz="1650" b="1">
                 <a:solidFill>
                   <a:srgbClr val="E63888"/>
@@ -7394,6 +7480,7 @@
           <a:lstStyle xmlns:a="http://schemas.openxmlformats.org/drawingml/2006/main"/>
           <a:p xmlns:a="http://schemas.openxmlformats.org/drawingml/2006/main">
             <a:pPr algn="l">
+              <a:buNone/>
               <a:defRPr sz="1050" b="1">
                 <a:solidFill>
                   <a:srgbClr val="C7F25C"/>
@@ -7444,6 +7531,7 @@
           <a:lstStyle xmlns:a="http://schemas.openxmlformats.org/drawingml/2006/main"/>
           <a:p xmlns:a="http://schemas.openxmlformats.org/drawingml/2006/main">
             <a:pPr algn="ctr">
+              <a:buNone/>
               <a:defRPr sz="1350" b="1">
                 <a:solidFill>
                   <a:srgbClr val="FFFFFF"/>
@@ -7494,6 +7582,7 @@
           <a:lstStyle xmlns:a="http://schemas.openxmlformats.org/drawingml/2006/main"/>
           <a:p xmlns:a="http://schemas.openxmlformats.org/drawingml/2006/main">
             <a:pPr algn="ctr">
+              <a:buNone/>
               <a:defRPr sz="1650" b="1">
                 <a:solidFill>
                   <a:srgbClr val="E63888"/>
@@ -7579,6 +7668,7 @@
           <a:lstStyle xmlns:a="http://schemas.openxmlformats.org/drawingml/2006/main"/>
           <a:p xmlns:a="http://schemas.openxmlformats.org/drawingml/2006/main">
             <a:pPr algn="l">
+              <a:buNone/>
               <a:defRPr sz="1050" b="1">
                 <a:solidFill>
                   <a:srgbClr val="C7F25C"/>
@@ -7629,6 +7719,7 @@
           <a:lstStyle xmlns:a="http://schemas.openxmlformats.org/drawingml/2006/main"/>
           <a:p xmlns:a="http://schemas.openxmlformats.org/drawingml/2006/main">
             <a:pPr algn="ctr">
+              <a:buNone/>
               <a:defRPr sz="1350" b="1">
                 <a:solidFill>
                   <a:srgbClr val="FFFFFF"/>
@@ -7679,6 +7770,7 @@
           <a:lstStyle xmlns:a="http://schemas.openxmlformats.org/drawingml/2006/main"/>
           <a:p xmlns:a="http://schemas.openxmlformats.org/drawingml/2006/main">
             <a:pPr algn="ctr">
+              <a:buNone/>
               <a:defRPr sz="1650" b="1">
                 <a:solidFill>
                   <a:srgbClr val="E63888"/>
@@ -7764,6 +7856,7 @@
           <a:lstStyle xmlns:a="http://schemas.openxmlformats.org/drawingml/2006/main"/>
           <a:p xmlns:a="http://schemas.openxmlformats.org/drawingml/2006/main">
             <a:pPr algn="l">
+              <a:buNone/>
               <a:defRPr sz="1050" b="1">
                 <a:solidFill>
                   <a:srgbClr val="C7F25C"/>
@@ -7814,6 +7907,7 @@
           <a:lstStyle xmlns:a="http://schemas.openxmlformats.org/drawingml/2006/main"/>
           <a:p xmlns:a="http://schemas.openxmlformats.org/drawingml/2006/main">
             <a:pPr algn="ctr">
+              <a:buNone/>
               <a:defRPr sz="1350" b="1">
                 <a:solidFill>
                   <a:srgbClr val="FFFFFF"/>
@@ -7864,6 +7958,7 @@
           <a:lstStyle xmlns:a="http://schemas.openxmlformats.org/drawingml/2006/main"/>
           <a:p xmlns:a="http://schemas.openxmlformats.org/drawingml/2006/main">
             <a:pPr algn="ctr">
+              <a:buNone/>
               <a:defRPr sz="1650" b="1">
                 <a:solidFill>
                   <a:srgbClr val="E63888"/>
@@ -7949,6 +8044,7 @@
           <a:lstStyle xmlns:a="http://schemas.openxmlformats.org/drawingml/2006/main"/>
           <a:p xmlns:a="http://schemas.openxmlformats.org/drawingml/2006/main">
             <a:pPr algn="l">
+              <a:buNone/>
               <a:defRPr sz="1050" b="1">
                 <a:solidFill>
                   <a:srgbClr val="C7F25C"/>
@@ -7999,6 +8095,7 @@
           <a:lstStyle xmlns:a="http://schemas.openxmlformats.org/drawingml/2006/main"/>
           <a:p xmlns:a="http://schemas.openxmlformats.org/drawingml/2006/main">
             <a:pPr algn="ctr">
+              <a:buNone/>
               <a:defRPr sz="1350" b="1">
                 <a:solidFill>
                   <a:srgbClr val="FFFFFF"/>
@@ -8049,6 +8146,7 @@
           <a:lstStyle xmlns:a="http://schemas.openxmlformats.org/drawingml/2006/main"/>
           <a:p xmlns:a="http://schemas.openxmlformats.org/drawingml/2006/main">
             <a:pPr algn="ctr">
+              <a:buNone/>
               <a:defRPr sz="1950" b="1">
                 <a:solidFill>
                   <a:srgbClr val="FFFFFF"/>
@@ -8099,6 +8197,7 @@
           <a:lstStyle xmlns:a="http://schemas.openxmlformats.org/drawingml/2006/main"/>
           <a:p xmlns:a="http://schemas.openxmlformats.org/drawingml/2006/main">
             <a:pPr algn="ctr">
+              <a:buNone/>
               <a:defRPr sz="1575" b="1">
                 <a:solidFill>
                   <a:srgbClr val="C7F25C"/>
@@ -8178,6 +8277,7 @@
           <a:lstStyle xmlns:a="http://schemas.openxmlformats.org/drawingml/2006/main"/>
           <a:p xmlns:a="http://schemas.openxmlformats.org/drawingml/2006/main">
             <a:pPr algn="l">
+              <a:buNone/>
               <a:defRPr sz="1800" b="1">
                 <a:solidFill>
                   <a:srgbClr val="E63888"/>
@@ -8259,6 +8359,7 @@
           <a:lstStyle xmlns:a="http://schemas.openxmlformats.org/drawingml/2006/main"/>
           <a:p xmlns:a="http://schemas.openxmlformats.org/drawingml/2006/main">
             <a:pPr algn="l">
+              <a:buNone/>
               <a:defRPr sz="3150" b="1">
                 <a:solidFill>
                   <a:srgbClr val="26232A"/>
@@ -8271,7 +8372,7 @@
                   <a:srgbClr val="26232A"/>
                 </a:solidFill>
               </a:rPr>
-              <a:t>Borrow the pattern. Keep the attribution.</a:t>
+              <a:t>Verify, interpret, qualify, then draft.</a:t>
             </a:r>
           </a:p>
         </p:txBody>
@@ -8309,6 +8410,7 @@
           <a:lstStyle xmlns:a="http://schemas.openxmlformats.org/drawingml/2006/main"/>
           <a:p xmlns:a="http://schemas.openxmlformats.org/drawingml/2006/main">
             <a:pPr algn="l">
+              <a:buNone/>
               <a:defRPr sz="750" b="1">
                 <a:solidFill>
                   <a:srgbClr val="6E6873"/>
@@ -8359,6 +8461,7 @@
           <a:lstStyle xmlns:a="http://schemas.openxmlformats.org/drawingml/2006/main"/>
           <a:p xmlns:a="http://schemas.openxmlformats.org/drawingml/2006/main">
             <a:pPr algn="r">
+              <a:buNone/>
               <a:defRPr sz="825" b="1">
                 <a:solidFill>
                   <a:srgbClr val="E63888"/>
@@ -8444,6 +8547,7 @@
           <a:lstStyle xmlns:a="http://schemas.openxmlformats.org/drawingml/2006/main"/>
           <a:p xmlns:a="http://schemas.openxmlformats.org/drawingml/2006/main">
             <a:pPr algn="l">
+              <a:buNone/>
               <a:defRPr sz="1500" b="1">
                 <a:solidFill>
                   <a:srgbClr val="3D1F5C"/>
@@ -8456,7 +8560,7 @@
                   <a:srgbClr val="3D1F5C"/>
                 </a:solidFill>
               </a:rPr>
-              <a:t>MULTICHANNEL CAMPAIGN BUILDER</a:t>
+              <a:t>1 VERIFY | HIRING SIGNAL VERIFICATION</a:t>
             </a:r>
           </a:p>
         </p:txBody>
@@ -8494,6 +8598,7 @@
           <a:lstStyle xmlns:a="http://schemas.openxmlformats.org/drawingml/2006/main"/>
           <a:p xmlns:a="http://schemas.openxmlformats.org/drawingml/2006/main">
             <a:pPr algn="l">
+              <a:buNone/>
               <a:defRPr sz="1050" b="1">
                 <a:solidFill>
                   <a:srgbClr val="E63888"/>
@@ -8506,7 +8611,7 @@
                   <a:srgbClr val="E63888"/>
                 </a:solidFill>
               </a:rPr>
-              <a:t>Erwann Lefevre  |  Level 3</a:t>
+              <a:t>Peter S. Borkovich | T3 synthetic + T4 live read-only</a:t>
             </a:r>
           </a:p>
         </p:txBody>
@@ -8544,6 +8649,7 @@
           <a:lstStyle xmlns:a="http://schemas.openxmlformats.org/drawingml/2006/main"/>
           <a:p xmlns:a="http://schemas.openxmlformats.org/drawingml/2006/main">
             <a:pPr algn="l">
+              <a:buNone/>
               <a:defRPr sz="1275" b="0">
                 <a:solidFill>
                   <a:srgbClr val="26232A"/>
@@ -8556,7 +8662,8 @@
                   <a:srgbClr val="26232A"/>
                 </a:solidFill>
               </a:rPr>
-              <a:t>intake → 3 angles → correction → channel rules → output → QA</a:t>
+              <a:t>2 INTERPRET | Signal Interpreter | Din Arbel
+T3 synthetic | meaning + confidence + why-now | no routing or writes</a:t>
             </a:r>
           </a:p>
         </p:txBody>
@@ -8629,6 +8736,7 @@
           <a:lstStyle xmlns:a="http://schemas.openxmlformats.org/drawingml/2006/main"/>
           <a:p xmlns:a="http://schemas.openxmlformats.org/drawingml/2006/main">
             <a:pPr algn="l">
+              <a:buNone/>
               <a:defRPr sz="1500" b="1">
                 <a:solidFill>
                   <a:srgbClr val="FFFFFF"/>
@@ -8641,7 +8749,7 @@
                   <a:srgbClr val="FFFFFF"/>
                 </a:solidFill>
               </a:rPr>
-              <a:t>1:1 ABM ADS</a:t>
+              <a:t>3 QUALIFY | AUDIENCE ICP FILTER</a:t>
             </a:r>
           </a:p>
         </p:txBody>
@@ -8679,6 +8787,7 @@
           <a:lstStyle xmlns:a="http://schemas.openxmlformats.org/drawingml/2006/main"/>
           <a:p xmlns:a="http://schemas.openxmlformats.org/drawingml/2006/main">
             <a:pPr algn="l">
+              <a:buNone/>
               <a:defRPr sz="1050" b="1">
                 <a:solidFill>
                   <a:srgbClr val="C7F25C"/>
@@ -8691,7 +8800,7 @@
                   <a:srgbClr val="C7F25C"/>
                 </a:solidFill>
               </a:rPr>
-              <a:t>Ivan Falco  |  Advanced Level 3 to 4</a:t>
+              <a:t>Erwann Lefevre | T3 synthetic | Keep / Exclude / Review</a:t>
             </a:r>
           </a:p>
         </p:txBody>
@@ -8729,6 +8838,7 @@
           <a:lstStyle xmlns:a="http://schemas.openxmlformats.org/drawingml/2006/main"/>
           <a:p xmlns:a="http://schemas.openxmlformats.org/drawingml/2006/main">
             <a:pPr algn="l">
+              <a:buNone/>
               <a:defRPr sz="1275" b="0">
                 <a:solidFill>
                   <a:srgbClr val="FFFFFF"/>
@@ -8741,7 +8851,8 @@
                   <a:srgbClr val="FFFFFF"/>
                 </a:solidFill>
               </a:rPr>
-              <a:t>SOPs → scripts → DRAFT creation → QA → explicit activation gate</a:t>
+              <a:t>4 DRAFT | Multichannel Campaign Builder | Erwann Lefevre
+T3 conditional synthetic | source-backed inputs + mandatory human QA</a:t>
             </a:r>
           </a:p>
         </p:txBody>
@@ -8779,6 +8890,7 @@
           <a:lstStyle xmlns:a="http://schemas.openxmlformats.org/drawingml/2006/main"/>
           <a:p xmlns:a="http://schemas.openxmlformats.org/drawingml/2006/main">
             <a:pPr algn="l">
+              <a:buNone/>
               <a:defRPr sz="975" b="1">
                 <a:solidFill>
                   <a:srgbClr val="E63888"/>
@@ -8791,7 +8903,7 @@
                   <a:srgbClr val="E63888"/>
                 </a:solidFill>
               </a:rPr>
-              <a:t>ADOPT OR PILOT PATTERNS</a:t>
+              <a:t>LEVEL 2 TO 3 SOURCE BRIDGE</a:t>
             </a:r>
           </a:p>
         </p:txBody>
@@ -8829,6 +8941,7 @@
           <a:lstStyle xmlns:a="http://schemas.openxmlformats.org/drawingml/2006/main"/>
           <a:p xmlns:a="http://schemas.openxmlformats.org/drawingml/2006/main">
             <a:pPr algn="ctr">
+              <a:buNone/>
               <a:defRPr sz="1275" b="1">
                 <a:solidFill>
                   <a:srgbClr val="3D1F5C"/>
@@ -8841,7 +8954,7 @@
                   <a:srgbClr val="3D1F5C"/>
                 </a:solidFill>
               </a:rPr>
-              <a:t>Hiring verification  •  Signal interpretation  •  ICP reconciliation  •  Dated company research</a:t>
+              <a:t>Company Deep Dive | Uriel Knorovich | T1 static only | source hierarchy, dated claims, contradictions, refresh deduplication</a:t>
             </a:r>
           </a:p>
         </p:txBody>
@@ -8912,6 +9025,7 @@
           <a:lstStyle xmlns:a="http://schemas.openxmlformats.org/drawingml/2006/main"/>
           <a:p xmlns:a="http://schemas.openxmlformats.org/drawingml/2006/main">
             <a:pPr algn="ctr">
+              <a:buNone/>
               <a:defRPr sz="1050" b="1">
                 <a:solidFill>
                   <a:srgbClr val="3D1F5C"/>
@@ -8924,7 +9038,7 @@
                   <a:srgbClr val="3D1F5C"/>
                 </a:solidFill>
               </a:rPr>
-              <a:t>AUDIENCE FILTER: 22 reconciled  |  9 semantic review  |  final 12 match, 1 review, 6 no match, 3 excluded  |  45/45</a:t>
+              <a:t>22 ICP records reconciled | 45/45 checks | hiring audit: 2 accepted, 4 narrowed, 5 dropped</a:t>
             </a:r>
           </a:p>
         </p:txBody>
@@ -8962,6 +9076,7 @@
           <a:lstStyle xmlns:a="http://schemas.openxmlformats.org/drawingml/2006/main"/>
           <a:p xmlns:a="http://schemas.openxmlformats.org/drawingml/2006/main">
             <a:pPr algn="ctr">
+              <a:buNone/>
               <a:defRPr sz="825" b="0">
                 <a:solidFill>
                   <a:srgbClr val="6E6873"/>
@@ -8974,7 +9089,7 @@
                   <a:srgbClr val="6E6873"/>
                 </a:solidFill>
               </a:rPr>
-              <a:t>Conditional pass for reviewed list classification only. No enrichment, sending, CRM writes, or sequence enrollment.</a:t>
+              <a:t>External community work. Teaching references only. No Swan packages in the live build or external actions from these examples.</a:t>
             </a:r>
           </a:p>
         </p:txBody>
@@ -9041,6 +9156,7 @@
           <a:lstStyle xmlns:a="http://schemas.openxmlformats.org/drawingml/2006/main"/>
           <a:p xmlns:a="http://schemas.openxmlformats.org/drawingml/2006/main">
             <a:pPr algn="l">
+              <a:buNone/>
               <a:defRPr sz="1800" b="1">
                 <a:solidFill>
                   <a:srgbClr val="E63888"/>
@@ -9122,6 +9238,7 @@
           <a:lstStyle xmlns:a="http://schemas.openxmlformats.org/drawingml/2006/main"/>
           <a:p xmlns:a="http://schemas.openxmlformats.org/drawingml/2006/main">
             <a:pPr algn="l">
+              <a:buNone/>
               <a:defRPr sz="3150" b="1">
                 <a:solidFill>
                   <a:srgbClr val="26232A"/>
@@ -9172,6 +9289,7 @@
           <a:lstStyle xmlns:a="http://schemas.openxmlformats.org/drawingml/2006/main"/>
           <a:p xmlns:a="http://schemas.openxmlformats.org/drawingml/2006/main">
             <a:pPr algn="l">
+              <a:buNone/>
               <a:defRPr sz="750" b="1">
                 <a:solidFill>
                   <a:srgbClr val="6E6873"/>
@@ -9222,6 +9340,7 @@
           <a:lstStyle xmlns:a="http://schemas.openxmlformats.org/drawingml/2006/main"/>
           <a:p xmlns:a="http://schemas.openxmlformats.org/drawingml/2006/main">
             <a:pPr algn="r">
+              <a:buNone/>
               <a:defRPr sz="825" b="1">
                 <a:solidFill>
                   <a:srgbClr val="E63888"/>
@@ -9307,6 +9426,7 @@
           <a:lstStyle xmlns:a="http://schemas.openxmlformats.org/drawingml/2006/main"/>
           <a:p xmlns:a="http://schemas.openxmlformats.org/drawingml/2006/main">
             <a:pPr algn="l">
+              <a:buNone/>
               <a:defRPr sz="975" b="1">
                 <a:solidFill>
                   <a:srgbClr val="E63888"/>
@@ -9357,6 +9477,7 @@
           <a:lstStyle xmlns:a="http://schemas.openxmlformats.org/drawingml/2006/main"/>
           <a:p xmlns:a="http://schemas.openxmlformats.org/drawingml/2006/main">
             <a:pPr algn="l">
+              <a:buNone/>
               <a:defRPr sz="1425" b="0">
                 <a:solidFill>
                   <a:srgbClr val="26232A"/>
@@ -9440,6 +9561,7 @@
           <a:lstStyle xmlns:a="http://schemas.openxmlformats.org/drawingml/2006/main"/>
           <a:p xmlns:a="http://schemas.openxmlformats.org/drawingml/2006/main">
             <a:pPr algn="l">
+              <a:buNone/>
               <a:defRPr sz="975" b="1">
                 <a:solidFill>
                   <a:srgbClr val="C7F25C"/>
@@ -9490,6 +9612,7 @@
           <a:lstStyle xmlns:a="http://schemas.openxmlformats.org/drawingml/2006/main"/>
           <a:p xmlns:a="http://schemas.openxmlformats.org/drawingml/2006/main">
             <a:pPr algn="l">
+              <a:buNone/>
               <a:defRPr sz="1650" b="1">
                 <a:solidFill>
                   <a:srgbClr val="FFFFFF"/>
@@ -9507,6 +9630,7 @@
           </a:p>
           <a:p xmlns:a="http://schemas.openxmlformats.org/drawingml/2006/main">
             <a:pPr algn="l">
+              <a:buNone/>
               <a:defRPr sz="1650" b="1">
                 <a:solidFill>
                   <a:srgbClr val="FFFFFF"/>
@@ -9524,6 +9648,7 @@
           </a:p>
           <a:p xmlns:a="http://schemas.openxmlformats.org/drawingml/2006/main">
             <a:pPr algn="l">
+              <a:buNone/>
               <a:defRPr sz="1650" b="1">
                 <a:solidFill>
                   <a:srgbClr val="FFFFFF"/>
@@ -9541,6 +9666,7 @@
           </a:p>
           <a:p xmlns:a="http://schemas.openxmlformats.org/drawingml/2006/main">
             <a:pPr algn="l">
+              <a:buNone/>
               <a:defRPr sz="1650" b="1">
                 <a:solidFill>
                   <a:srgbClr val="FFFFFF"/>
@@ -9558,6 +9684,7 @@
           </a:p>
           <a:p xmlns:a="http://schemas.openxmlformats.org/drawingml/2006/main">
             <a:pPr algn="l">
+              <a:buNone/>
               <a:defRPr sz="1650" b="1">
                 <a:solidFill>
                   <a:srgbClr val="FFFFFF"/>
@@ -9608,6 +9735,7 @@
           <a:lstStyle xmlns:a="http://schemas.openxmlformats.org/drawingml/2006/main"/>
           <a:p xmlns:a="http://schemas.openxmlformats.org/drawingml/2006/main">
             <a:pPr algn="ctr">
+              <a:buNone/>
               <a:defRPr sz="1875" b="1">
                 <a:solidFill>
                   <a:srgbClr val="3D1F5C"/>
@@ -9691,6 +9819,7 @@
           <a:lstStyle xmlns:a="http://schemas.openxmlformats.org/drawingml/2006/main"/>
           <a:p xmlns:a="http://schemas.openxmlformats.org/drawingml/2006/main">
             <a:pPr algn="l">
+              <a:buNone/>
               <a:defRPr sz="975" b="1">
                 <a:solidFill>
                   <a:srgbClr val="3D1F5C"/>
@@ -9741,6 +9870,7 @@
           <a:lstStyle xmlns:a="http://schemas.openxmlformats.org/drawingml/2006/main"/>
           <a:p xmlns:a="http://schemas.openxmlformats.org/drawingml/2006/main">
             <a:pPr algn="l">
+              <a:buNone/>
               <a:defRPr sz="1350" b="1">
                 <a:solidFill>
                   <a:srgbClr val="3D1F5C"/>
@@ -9820,6 +9950,7 @@
           <a:lstStyle xmlns:a="http://schemas.openxmlformats.org/drawingml/2006/main"/>
           <a:p xmlns:a="http://schemas.openxmlformats.org/drawingml/2006/main">
             <a:pPr algn="l">
+              <a:buNone/>
               <a:defRPr sz="1800" b="1">
                 <a:solidFill>
                   <a:srgbClr val="E63888"/>
@@ -9901,6 +10032,7 @@
           <a:lstStyle xmlns:a="http://schemas.openxmlformats.org/drawingml/2006/main"/>
           <a:p xmlns:a="http://schemas.openxmlformats.org/drawingml/2006/main">
             <a:pPr algn="l">
+              <a:buNone/>
               <a:defRPr sz="3150" b="1">
                 <a:solidFill>
                   <a:srgbClr val="FFFFFF"/>
@@ -9951,6 +10083,7 @@
           <a:lstStyle xmlns:a="http://schemas.openxmlformats.org/drawingml/2006/main"/>
           <a:p xmlns:a="http://schemas.openxmlformats.org/drawingml/2006/main">
             <a:pPr algn="l">
+              <a:buNone/>
               <a:defRPr sz="750" b="1">
                 <a:solidFill>
                   <a:srgbClr val="EAE3EC"/>
@@ -10001,6 +10134,7 @@
           <a:lstStyle xmlns:a="http://schemas.openxmlformats.org/drawingml/2006/main"/>
           <a:p xmlns:a="http://schemas.openxmlformats.org/drawingml/2006/main">
             <a:pPr algn="r">
+              <a:buNone/>
               <a:defRPr sz="825" b="1">
                 <a:solidFill>
                   <a:srgbClr val="C7F25C"/>
@@ -10051,6 +10185,7 @@
           <a:lstStyle xmlns:a="http://schemas.openxmlformats.org/drawingml/2006/main"/>
           <a:p xmlns:a="http://schemas.openxmlformats.org/drawingml/2006/main">
             <a:pPr algn="l">
+              <a:buNone/>
               <a:defRPr sz="2550" b="1">
                 <a:solidFill>
                   <a:srgbClr val="FFFFFF"/>
@@ -10068,6 +10203,7 @@
           </a:p>
           <a:p xmlns:a="http://schemas.openxmlformats.org/drawingml/2006/main">
             <a:pPr algn="l">
+              <a:buNone/>
               <a:defRPr sz="2550" b="1">
                 <a:solidFill>
                   <a:srgbClr val="FFFFFF"/>
@@ -10118,6 +10254,7 @@
           <a:lstStyle xmlns:a="http://schemas.openxmlformats.org/drawingml/2006/main"/>
           <a:p xmlns:a="http://schemas.openxmlformats.org/drawingml/2006/main">
             <a:pPr algn="l">
+              <a:buNone/>
               <a:defRPr sz="975" b="1">
                 <a:solidFill>
                   <a:srgbClr val="C7F25C"/>
@@ -10168,6 +10305,7 @@
           <a:lstStyle xmlns:a="http://schemas.openxmlformats.org/drawingml/2006/main"/>
           <a:p xmlns:a="http://schemas.openxmlformats.org/drawingml/2006/main">
             <a:pPr algn="l">
+              <a:buNone/>
               <a:defRPr sz="1650" b="0">
                 <a:solidFill>
                   <a:srgbClr val="EAE3EC"/>
@@ -10218,6 +10356,7 @@
           <a:lstStyle xmlns:a="http://schemas.openxmlformats.org/drawingml/2006/main"/>
           <a:p xmlns:a="http://schemas.openxmlformats.org/drawingml/2006/main">
             <a:pPr algn="l">
+              <a:buNone/>
               <a:defRPr sz="975" b="1">
                 <a:solidFill>
                   <a:srgbClr val="C7F25C"/>
@@ -10268,6 +10407,7 @@
           <a:lstStyle xmlns:a="http://schemas.openxmlformats.org/drawingml/2006/main"/>
           <a:p xmlns:a="http://schemas.openxmlformats.org/drawingml/2006/main">
             <a:pPr algn="l">
+              <a:buNone/>
               <a:defRPr sz="1650" b="0">
                 <a:solidFill>
                   <a:srgbClr val="FFFFFF"/>
@@ -10318,6 +10458,7 @@
           <a:lstStyle xmlns:a="http://schemas.openxmlformats.org/drawingml/2006/main"/>
           <a:p xmlns:a="http://schemas.openxmlformats.org/drawingml/2006/main">
             <a:pPr algn="l">
+              <a:buNone/>
               <a:defRPr sz="1500" b="1">
                 <a:solidFill>
                   <a:srgbClr val="C7F25C"/>
@@ -10337,14 +10478,14 @@
       </p:sp>
       <p:pic>
         <p:nvPicPr>
-          <p:cNvPr id="24" name=""/>
+          <p:cNvPr id="26" name=""/>
           <p:cNvPicPr>
             <a:picLocks xmlns:a="http://schemas.openxmlformats.org/drawingml/2006/main" noChangeAspect="1"/>
           </p:cNvPicPr>
           <p:nvPr/>
         </p:nvPicPr>
         <p:blipFill>
-          <a:blip xmlns:r="http://schemas.openxmlformats.org/officeDocument/2006/relationships" xmlns:a="http://schemas.openxmlformats.org/drawingml/2006/main" r:embed="R66bfc8904f52442d"/>
+          <a:blip xmlns:r="http://schemas.openxmlformats.org/officeDocument/2006/relationships" xmlns:a="http://schemas.openxmlformats.org/drawingml/2006/main" r:embed="Rdbfa6739f7d24609"/>
           <a:stretch xmlns:a="http://schemas.openxmlformats.org/drawingml/2006/main"/>
         </p:blipFill>
         <p:spPr>
@@ -10419,6 +10560,7 @@
           <a:lstStyle xmlns:a="http://schemas.openxmlformats.org/drawingml/2006/main"/>
           <a:p xmlns:a="http://schemas.openxmlformats.org/drawingml/2006/main">
             <a:pPr algn="l">
+              <a:buNone/>
               <a:defRPr sz="1800" b="1">
                 <a:solidFill>
                   <a:srgbClr val="E63888"/>
@@ -10500,6 +10642,7 @@
           <a:lstStyle xmlns:a="http://schemas.openxmlformats.org/drawingml/2006/main"/>
           <a:p xmlns:a="http://schemas.openxmlformats.org/drawingml/2006/main">
             <a:pPr algn="l">
+              <a:buNone/>
               <a:defRPr sz="3150" b="1">
                 <a:solidFill>
                   <a:srgbClr val="26232A"/>
@@ -10550,6 +10693,7 @@
           <a:lstStyle xmlns:a="http://schemas.openxmlformats.org/drawingml/2006/main"/>
           <a:p xmlns:a="http://schemas.openxmlformats.org/drawingml/2006/main">
             <a:pPr algn="l">
+              <a:buNone/>
               <a:defRPr sz="750" b="1">
                 <a:solidFill>
                   <a:srgbClr val="6E6873"/>
@@ -10600,6 +10744,7 @@
           <a:lstStyle xmlns:a="http://schemas.openxmlformats.org/drawingml/2006/main"/>
           <a:p xmlns:a="http://schemas.openxmlformats.org/drawingml/2006/main">
             <a:pPr algn="r">
+              <a:buNone/>
               <a:defRPr sz="825" b="1">
                 <a:solidFill>
                   <a:srgbClr val="E63888"/>
@@ -10714,6 +10859,7 @@
           <a:lstStyle xmlns:a="http://schemas.openxmlformats.org/drawingml/2006/main"/>
           <a:p xmlns:a="http://schemas.openxmlformats.org/drawingml/2006/main">
             <a:pPr algn="ctr">
+              <a:buNone/>
               <a:defRPr sz="1350" b="1">
                 <a:solidFill>
                   <a:srgbClr val="FFFFFF"/>
@@ -10764,6 +10910,7 @@
           <a:lstStyle xmlns:a="http://schemas.openxmlformats.org/drawingml/2006/main"/>
           <a:p xmlns:a="http://schemas.openxmlformats.org/drawingml/2006/main">
             <a:pPr algn="ctr">
+              <a:buNone/>
               <a:defRPr sz="1575" b="1">
                 <a:solidFill>
                   <a:srgbClr val="3D1F5C"/>
@@ -10814,6 +10961,7 @@
           <a:lstStyle xmlns:a="http://schemas.openxmlformats.org/drawingml/2006/main"/>
           <a:p xmlns:a="http://schemas.openxmlformats.org/drawingml/2006/main">
             <a:pPr algn="ctr">
+              <a:buNone/>
               <a:defRPr sz="1275" b="0">
                 <a:solidFill>
                   <a:srgbClr val="26232A"/>
@@ -10895,6 +11043,7 @@
           <a:lstStyle xmlns:a="http://schemas.openxmlformats.org/drawingml/2006/main"/>
           <a:p xmlns:a="http://schemas.openxmlformats.org/drawingml/2006/main">
             <a:pPr algn="ctr">
+              <a:buNone/>
               <a:defRPr sz="1350" b="1">
                 <a:solidFill>
                   <a:srgbClr val="FFFFFF"/>
@@ -10945,6 +11094,7 @@
           <a:lstStyle xmlns:a="http://schemas.openxmlformats.org/drawingml/2006/main"/>
           <a:p xmlns:a="http://schemas.openxmlformats.org/drawingml/2006/main">
             <a:pPr algn="ctr">
+              <a:buNone/>
               <a:defRPr sz="1575" b="1">
                 <a:solidFill>
                   <a:srgbClr val="3D1F5C"/>
@@ -10995,6 +11145,7 @@
           <a:lstStyle xmlns:a="http://schemas.openxmlformats.org/drawingml/2006/main"/>
           <a:p xmlns:a="http://schemas.openxmlformats.org/drawingml/2006/main">
             <a:pPr algn="ctr">
+              <a:buNone/>
               <a:defRPr sz="1275" b="0">
                 <a:solidFill>
                   <a:srgbClr val="26232A"/>
@@ -11076,6 +11227,7 @@
           <a:lstStyle xmlns:a="http://schemas.openxmlformats.org/drawingml/2006/main"/>
           <a:p xmlns:a="http://schemas.openxmlformats.org/drawingml/2006/main">
             <a:pPr algn="ctr">
+              <a:buNone/>
               <a:defRPr sz="1350" b="1">
                 <a:solidFill>
                   <a:srgbClr val="FFFFFF"/>
@@ -11126,6 +11278,7 @@
           <a:lstStyle xmlns:a="http://schemas.openxmlformats.org/drawingml/2006/main"/>
           <a:p xmlns:a="http://schemas.openxmlformats.org/drawingml/2006/main">
             <a:pPr algn="ctr">
+              <a:buNone/>
               <a:defRPr sz="1575" b="1">
                 <a:solidFill>
                   <a:srgbClr val="3D1F5C"/>
@@ -11176,6 +11329,7 @@
           <a:lstStyle xmlns:a="http://schemas.openxmlformats.org/drawingml/2006/main"/>
           <a:p xmlns:a="http://schemas.openxmlformats.org/drawingml/2006/main">
             <a:pPr algn="ctr">
+              <a:buNone/>
               <a:defRPr sz="1275" b="0">
                 <a:solidFill>
                   <a:srgbClr val="26232A"/>
@@ -11257,6 +11411,7 @@
           <a:lstStyle xmlns:a="http://schemas.openxmlformats.org/drawingml/2006/main"/>
           <a:p xmlns:a="http://schemas.openxmlformats.org/drawingml/2006/main">
             <a:pPr algn="ctr">
+              <a:buNone/>
               <a:defRPr sz="1350" b="1">
                 <a:solidFill>
                   <a:srgbClr val="3D1F5C"/>
@@ -11307,6 +11462,7 @@
           <a:lstStyle xmlns:a="http://schemas.openxmlformats.org/drawingml/2006/main"/>
           <a:p xmlns:a="http://schemas.openxmlformats.org/drawingml/2006/main">
             <a:pPr algn="ctr">
+              <a:buNone/>
               <a:defRPr sz="1575" b="1">
                 <a:solidFill>
                   <a:srgbClr val="3D1F5C"/>
@@ -11357,6 +11513,7 @@
           <a:lstStyle xmlns:a="http://schemas.openxmlformats.org/drawingml/2006/main"/>
           <a:p xmlns:a="http://schemas.openxmlformats.org/drawingml/2006/main">
             <a:pPr algn="ctr">
+              <a:buNone/>
               <a:defRPr sz="1275" b="0">
                 <a:solidFill>
                   <a:srgbClr val="26232A"/>
@@ -11407,6 +11564,7 @@
           <a:lstStyle xmlns:a="http://schemas.openxmlformats.org/drawingml/2006/main"/>
           <a:p xmlns:a="http://schemas.openxmlformats.org/drawingml/2006/main">
             <a:pPr algn="ctr">
+              <a:buNone/>
               <a:defRPr sz="2100" b="1">
                 <a:solidFill>
                   <a:srgbClr val="E63888"/>
@@ -11486,6 +11644,7 @@
           <a:lstStyle xmlns:a="http://schemas.openxmlformats.org/drawingml/2006/main"/>
           <a:p xmlns:a="http://schemas.openxmlformats.org/drawingml/2006/main">
             <a:pPr algn="l">
+              <a:buNone/>
               <a:defRPr sz="1800" b="1">
                 <a:solidFill>
                   <a:srgbClr val="E63888"/>
@@ -11567,6 +11726,7 @@
           <a:lstStyle xmlns:a="http://schemas.openxmlformats.org/drawingml/2006/main"/>
           <a:p xmlns:a="http://schemas.openxmlformats.org/drawingml/2006/main">
             <a:pPr algn="l">
+              <a:buNone/>
               <a:defRPr sz="3150" b="1">
                 <a:solidFill>
                   <a:srgbClr val="FFFFFF"/>
@@ -11617,6 +11777,7 @@
           <a:lstStyle xmlns:a="http://schemas.openxmlformats.org/drawingml/2006/main"/>
           <a:p xmlns:a="http://schemas.openxmlformats.org/drawingml/2006/main">
             <a:pPr algn="l">
+              <a:buNone/>
               <a:defRPr sz="750" b="1">
                 <a:solidFill>
                   <a:srgbClr val="EAE3EC"/>
@@ -11667,6 +11828,7 @@
           <a:lstStyle xmlns:a="http://schemas.openxmlformats.org/drawingml/2006/main"/>
           <a:p xmlns:a="http://schemas.openxmlformats.org/drawingml/2006/main">
             <a:pPr algn="r">
+              <a:buNone/>
               <a:defRPr sz="825" b="1">
                 <a:solidFill>
                   <a:srgbClr val="C7F25C"/>
@@ -11717,6 +11879,7 @@
           <a:lstStyle xmlns:a="http://schemas.openxmlformats.org/drawingml/2006/main"/>
           <a:p xmlns:a="http://schemas.openxmlformats.org/drawingml/2006/main">
             <a:pPr algn="l">
+              <a:buNone/>
               <a:defRPr sz="2100" b="1">
                 <a:solidFill>
                   <a:srgbClr val="EAE3EC"/>
@@ -11734,6 +11897,7 @@
           </a:p>
           <a:p xmlns:a="http://schemas.openxmlformats.org/drawingml/2006/main">
             <a:pPr algn="l">
+              <a:buNone/>
               <a:defRPr sz="2100" b="1">
                 <a:solidFill>
                   <a:srgbClr val="EAE3EC"/>
@@ -11784,6 +11948,7 @@
           <a:lstStyle xmlns:a="http://schemas.openxmlformats.org/drawingml/2006/main"/>
           <a:p xmlns:a="http://schemas.openxmlformats.org/drawingml/2006/main">
             <a:pPr algn="ctr">
+              <a:buNone/>
               <a:defRPr sz="2850" b="1">
                 <a:solidFill>
                   <a:srgbClr val="E63888"/>
@@ -11834,6 +11999,7 @@
           <a:lstStyle xmlns:a="http://schemas.openxmlformats.org/drawingml/2006/main"/>
           <a:p xmlns:a="http://schemas.openxmlformats.org/drawingml/2006/main">
             <a:pPr algn="l">
+              <a:buNone/>
               <a:defRPr sz="2400" b="1">
                 <a:solidFill>
                   <a:srgbClr val="FFFFFF"/>
@@ -11851,6 +12017,7 @@
           </a:p>
           <a:p xmlns:a="http://schemas.openxmlformats.org/drawingml/2006/main">
             <a:pPr algn="l">
+              <a:buNone/>
               <a:defRPr sz="2400" b="1">
                 <a:solidFill>
                   <a:srgbClr val="FFFFFF"/>
@@ -11936,6 +12103,7 @@
           <a:lstStyle xmlns:a="http://schemas.openxmlformats.org/drawingml/2006/main"/>
           <a:p xmlns:a="http://schemas.openxmlformats.org/drawingml/2006/main">
             <a:pPr algn="l">
+              <a:buNone/>
               <a:defRPr sz="975" b="1">
                 <a:solidFill>
                   <a:srgbClr val="C7F25C"/>
@@ -11986,6 +12154,7 @@
           <a:lstStyle xmlns:a="http://schemas.openxmlformats.org/drawingml/2006/main"/>
           <a:p xmlns:a="http://schemas.openxmlformats.org/drawingml/2006/main">
             <a:pPr algn="l">
+              <a:buNone/>
               <a:defRPr sz="1425" b="0">
                 <a:solidFill>
                   <a:srgbClr val="FFFFFF"/>
@@ -12069,6 +12238,7 @@
           <a:lstStyle xmlns:a="http://schemas.openxmlformats.org/drawingml/2006/main"/>
           <a:p xmlns:a="http://schemas.openxmlformats.org/drawingml/2006/main">
             <a:pPr algn="l">
+              <a:buNone/>
               <a:defRPr sz="975" b="1">
                 <a:solidFill>
                   <a:srgbClr val="C7F25C"/>
@@ -12119,6 +12289,7 @@
           <a:lstStyle xmlns:a="http://schemas.openxmlformats.org/drawingml/2006/main"/>
           <a:p xmlns:a="http://schemas.openxmlformats.org/drawingml/2006/main">
             <a:pPr algn="l">
+              <a:buNone/>
               <a:defRPr sz="1650" b="1">
                 <a:solidFill>
                   <a:srgbClr val="FFFFFF"/>
@@ -12202,6 +12373,7 @@
           <a:lstStyle xmlns:a="http://schemas.openxmlformats.org/drawingml/2006/main"/>
           <a:p xmlns:a="http://schemas.openxmlformats.org/drawingml/2006/main">
             <a:pPr algn="l">
+              <a:buNone/>
               <a:defRPr sz="975" b="1">
                 <a:solidFill>
                   <a:srgbClr val="3D1F5C"/>
@@ -12252,6 +12424,7 @@
           <a:lstStyle xmlns:a="http://schemas.openxmlformats.org/drawingml/2006/main"/>
           <a:p xmlns:a="http://schemas.openxmlformats.org/drawingml/2006/main">
             <a:pPr algn="l">
+              <a:buNone/>
               <a:defRPr sz="1350" b="1">
                 <a:solidFill>
                   <a:srgbClr val="3D1F5C"/>
@@ -12331,6 +12504,7 @@
           <a:lstStyle xmlns:a="http://schemas.openxmlformats.org/drawingml/2006/main"/>
           <a:p xmlns:a="http://schemas.openxmlformats.org/drawingml/2006/main">
             <a:pPr algn="l">
+              <a:buNone/>
               <a:defRPr sz="1800" b="1">
                 <a:solidFill>
                   <a:srgbClr val="E63888"/>
@@ -12412,6 +12586,7 @@
           <a:lstStyle xmlns:a="http://schemas.openxmlformats.org/drawingml/2006/main"/>
           <a:p xmlns:a="http://schemas.openxmlformats.org/drawingml/2006/main">
             <a:pPr algn="l">
+              <a:buNone/>
               <a:defRPr sz="3150" b="1">
                 <a:solidFill>
                   <a:srgbClr val="26232A"/>
@@ -12462,6 +12637,7 @@
           <a:lstStyle xmlns:a="http://schemas.openxmlformats.org/drawingml/2006/main"/>
           <a:p xmlns:a="http://schemas.openxmlformats.org/drawingml/2006/main">
             <a:pPr algn="l">
+              <a:buNone/>
               <a:defRPr sz="750" b="1">
                 <a:solidFill>
                   <a:srgbClr val="6E6873"/>
@@ -12512,6 +12688,7 @@
           <a:lstStyle xmlns:a="http://schemas.openxmlformats.org/drawingml/2006/main"/>
           <a:p xmlns:a="http://schemas.openxmlformats.org/drawingml/2006/main">
             <a:pPr algn="r">
+              <a:buNone/>
               <a:defRPr sz="825" b="1">
                 <a:solidFill>
                   <a:srgbClr val="E63888"/>
@@ -12597,6 +12774,7 @@
           <a:lstStyle xmlns:a="http://schemas.openxmlformats.org/drawingml/2006/main"/>
           <a:p xmlns:a="http://schemas.openxmlformats.org/drawingml/2006/main">
             <a:pPr algn="l">
+              <a:buNone/>
               <a:defRPr sz="1500" b="1">
                 <a:solidFill>
                   <a:srgbClr val="E63888"/>
@@ -12647,6 +12825,7 @@
           <a:lstStyle xmlns:a="http://schemas.openxmlformats.org/drawingml/2006/main"/>
           <a:p xmlns:a="http://schemas.openxmlformats.org/drawingml/2006/main">
             <a:pPr algn="l">
+              <a:buNone/>
               <a:defRPr sz="1200" b="1">
                 <a:solidFill>
                   <a:srgbClr val="26232A"/>
@@ -12732,6 +12911,7 @@
           <a:lstStyle xmlns:a="http://schemas.openxmlformats.org/drawingml/2006/main"/>
           <a:p xmlns:a="http://schemas.openxmlformats.org/drawingml/2006/main">
             <a:pPr algn="l">
+              <a:buNone/>
               <a:defRPr sz="1500" b="1">
                 <a:solidFill>
                   <a:srgbClr val="E63888"/>
@@ -12782,6 +12962,7 @@
           <a:lstStyle xmlns:a="http://schemas.openxmlformats.org/drawingml/2006/main"/>
           <a:p xmlns:a="http://schemas.openxmlformats.org/drawingml/2006/main">
             <a:pPr algn="l">
+              <a:buNone/>
               <a:defRPr sz="1200" b="1">
                 <a:solidFill>
                   <a:srgbClr val="26232A"/>
@@ -12867,6 +13048,7 @@
           <a:lstStyle xmlns:a="http://schemas.openxmlformats.org/drawingml/2006/main"/>
           <a:p xmlns:a="http://schemas.openxmlformats.org/drawingml/2006/main">
             <a:pPr algn="l">
+              <a:buNone/>
               <a:defRPr sz="1500" b="1">
                 <a:solidFill>
                   <a:srgbClr val="E63888"/>
@@ -12917,6 +13099,7 @@
           <a:lstStyle xmlns:a="http://schemas.openxmlformats.org/drawingml/2006/main"/>
           <a:p xmlns:a="http://schemas.openxmlformats.org/drawingml/2006/main">
             <a:pPr algn="l">
+              <a:buNone/>
               <a:defRPr sz="1200" b="1">
                 <a:solidFill>
                   <a:srgbClr val="26232A"/>
@@ -13002,6 +13185,7 @@
           <a:lstStyle xmlns:a="http://schemas.openxmlformats.org/drawingml/2006/main"/>
           <a:p xmlns:a="http://schemas.openxmlformats.org/drawingml/2006/main">
             <a:pPr algn="l">
+              <a:buNone/>
               <a:defRPr sz="1500" b="1">
                 <a:solidFill>
                   <a:srgbClr val="E63888"/>
@@ -13052,6 +13236,7 @@
           <a:lstStyle xmlns:a="http://schemas.openxmlformats.org/drawingml/2006/main"/>
           <a:p xmlns:a="http://schemas.openxmlformats.org/drawingml/2006/main">
             <a:pPr algn="l">
+              <a:buNone/>
               <a:defRPr sz="1200" b="1">
                 <a:solidFill>
                   <a:srgbClr val="26232A"/>
@@ -13137,6 +13322,7 @@
           <a:lstStyle xmlns:a="http://schemas.openxmlformats.org/drawingml/2006/main"/>
           <a:p xmlns:a="http://schemas.openxmlformats.org/drawingml/2006/main">
             <a:pPr algn="l">
+              <a:buNone/>
               <a:defRPr sz="1500" b="1">
                 <a:solidFill>
                   <a:srgbClr val="C7F25C"/>
@@ -13187,6 +13373,7 @@
           <a:lstStyle xmlns:a="http://schemas.openxmlformats.org/drawingml/2006/main"/>
           <a:p xmlns:a="http://schemas.openxmlformats.org/drawingml/2006/main">
             <a:pPr algn="l">
+              <a:buNone/>
               <a:defRPr sz="1200" b="1">
                 <a:solidFill>
                   <a:srgbClr val="FFFFFF"/>
@@ -13272,6 +13459,7 @@
           <a:lstStyle xmlns:a="http://schemas.openxmlformats.org/drawingml/2006/main"/>
           <a:p xmlns:a="http://schemas.openxmlformats.org/drawingml/2006/main">
             <a:pPr algn="l">
+              <a:buNone/>
               <a:defRPr sz="1500" b="1">
                 <a:solidFill>
                   <a:srgbClr val="C7F25C"/>
@@ -13322,6 +13510,7 @@
           <a:lstStyle xmlns:a="http://schemas.openxmlformats.org/drawingml/2006/main"/>
           <a:p xmlns:a="http://schemas.openxmlformats.org/drawingml/2006/main">
             <a:pPr algn="l">
+              <a:buNone/>
               <a:defRPr sz="1200" b="1">
                 <a:solidFill>
                   <a:srgbClr val="FFFFFF"/>
@@ -13372,6 +13561,7 @@
           <a:lstStyle xmlns:a="http://schemas.openxmlformats.org/drawingml/2006/main"/>
           <a:p xmlns:a="http://schemas.openxmlformats.org/drawingml/2006/main">
             <a:pPr algn="ctr">
+              <a:buNone/>
               <a:defRPr sz="1650" b="1">
                 <a:solidFill>
                   <a:srgbClr val="3D1F5C"/>
@@ -13451,6 +13641,7 @@
           <a:lstStyle xmlns:a="http://schemas.openxmlformats.org/drawingml/2006/main"/>
           <a:p xmlns:a="http://schemas.openxmlformats.org/drawingml/2006/main">
             <a:pPr algn="l">
+              <a:buNone/>
               <a:defRPr sz="1800" b="1">
                 <a:solidFill>
                   <a:srgbClr val="E63888"/>
@@ -13532,6 +13723,7 @@
           <a:lstStyle xmlns:a="http://schemas.openxmlformats.org/drawingml/2006/main"/>
           <a:p xmlns:a="http://schemas.openxmlformats.org/drawingml/2006/main">
             <a:pPr algn="l">
+              <a:buNone/>
               <a:defRPr sz="3150" b="1">
                 <a:solidFill>
                   <a:srgbClr val="FFFFFF"/>
@@ -13582,6 +13774,7 @@
           <a:lstStyle xmlns:a="http://schemas.openxmlformats.org/drawingml/2006/main"/>
           <a:p xmlns:a="http://schemas.openxmlformats.org/drawingml/2006/main">
             <a:pPr algn="l">
+              <a:buNone/>
               <a:defRPr sz="750" b="1">
                 <a:solidFill>
                   <a:srgbClr val="EAE3EC"/>
@@ -13632,6 +13825,7 @@
           <a:lstStyle xmlns:a="http://schemas.openxmlformats.org/drawingml/2006/main"/>
           <a:p xmlns:a="http://schemas.openxmlformats.org/drawingml/2006/main">
             <a:pPr algn="r">
+              <a:buNone/>
               <a:defRPr sz="825" b="1">
                 <a:solidFill>
                   <a:srgbClr val="C7F25C"/>
@@ -13682,6 +13876,7 @@
           <a:lstStyle xmlns:a="http://schemas.openxmlformats.org/drawingml/2006/main"/>
           <a:p xmlns:a="http://schemas.openxmlformats.org/drawingml/2006/main">
             <a:pPr algn="l">
+              <a:buNone/>
               <a:defRPr sz="2850" b="1">
                 <a:solidFill>
                   <a:srgbClr val="E63888"/>
@@ -13732,6 +13927,7 @@
           <a:lstStyle xmlns:a="http://schemas.openxmlformats.org/drawingml/2006/main"/>
           <a:p xmlns:a="http://schemas.openxmlformats.org/drawingml/2006/main">
             <a:pPr algn="l">
+              <a:buNone/>
               <a:defRPr sz="2850" b="1">
                 <a:solidFill>
                   <a:srgbClr val="FFFFFF"/>
@@ -13782,6 +13978,7 @@
           <a:lstStyle xmlns:a="http://schemas.openxmlformats.org/drawingml/2006/main"/>
           <a:p xmlns:a="http://schemas.openxmlformats.org/drawingml/2006/main">
             <a:pPr algn="l">
+              <a:buNone/>
               <a:defRPr sz="2850" b="1">
                 <a:solidFill>
                   <a:srgbClr val="C7F25C"/>
@@ -13832,6 +14029,7 @@
           <a:lstStyle xmlns:a="http://schemas.openxmlformats.org/drawingml/2006/main"/>
           <a:p xmlns:a="http://schemas.openxmlformats.org/drawingml/2006/main">
             <a:pPr algn="l">
+              <a:buNone/>
               <a:defRPr sz="2850" b="1">
                 <a:solidFill>
                   <a:srgbClr val="FFFFFF"/>
@@ -13882,6 +14080,7 @@
           <a:lstStyle xmlns:a="http://schemas.openxmlformats.org/drawingml/2006/main"/>
           <a:p xmlns:a="http://schemas.openxmlformats.org/drawingml/2006/main">
             <a:pPr algn="l">
+              <a:buNone/>
               <a:defRPr sz="2850" b="1">
                 <a:solidFill>
                   <a:srgbClr val="E63888"/>
@@ -13963,6 +14162,7 @@
           <a:lstStyle xmlns:a="http://schemas.openxmlformats.org/drawingml/2006/main"/>
           <a:p xmlns:a="http://schemas.openxmlformats.org/drawingml/2006/main">
             <a:pPr algn="ctr">
+              <a:buNone/>
               <a:defRPr sz="1350" b="0">
                 <a:solidFill>
                   <a:srgbClr val="EAE3EC"/>
@@ -14042,6 +14242,7 @@
           <a:lstStyle xmlns:a="http://schemas.openxmlformats.org/drawingml/2006/main"/>
           <a:p xmlns:a="http://schemas.openxmlformats.org/drawingml/2006/main">
             <a:pPr algn="l">
+              <a:buNone/>
               <a:defRPr sz="1800" b="1">
                 <a:solidFill>
                   <a:srgbClr val="E63888"/>
@@ -14123,6 +14324,7 @@
           <a:lstStyle xmlns:a="http://schemas.openxmlformats.org/drawingml/2006/main"/>
           <a:p xmlns:a="http://schemas.openxmlformats.org/drawingml/2006/main">
             <a:pPr algn="l">
+              <a:buNone/>
               <a:defRPr sz="3150" b="1">
                 <a:solidFill>
                   <a:srgbClr val="26232A"/>
@@ -14173,6 +14375,7 @@
           <a:lstStyle xmlns:a="http://schemas.openxmlformats.org/drawingml/2006/main"/>
           <a:p xmlns:a="http://schemas.openxmlformats.org/drawingml/2006/main">
             <a:pPr algn="l">
+              <a:buNone/>
               <a:defRPr sz="750" b="1">
                 <a:solidFill>
                   <a:srgbClr val="6E6873"/>
@@ -14223,6 +14426,7 @@
           <a:lstStyle xmlns:a="http://schemas.openxmlformats.org/drawingml/2006/main"/>
           <a:p xmlns:a="http://schemas.openxmlformats.org/drawingml/2006/main">
             <a:pPr algn="r">
+              <a:buNone/>
               <a:defRPr sz="825" b="1">
                 <a:solidFill>
                   <a:srgbClr val="E63888"/>
@@ -14308,6 +14512,7 @@
           <a:lstStyle xmlns:a="http://schemas.openxmlformats.org/drawingml/2006/main"/>
           <a:p xmlns:a="http://schemas.openxmlformats.org/drawingml/2006/main">
             <a:pPr algn="l">
+              <a:buNone/>
               <a:defRPr sz="1050" b="1">
                 <a:solidFill>
                   <a:srgbClr val="E63888"/>
@@ -14358,6 +14563,7 @@
           <a:lstStyle xmlns:a="http://schemas.openxmlformats.org/drawingml/2006/main"/>
           <a:p xmlns:a="http://schemas.openxmlformats.org/drawingml/2006/main">
             <a:pPr algn="l">
+              <a:buNone/>
               <a:defRPr sz="1500" b="1">
                 <a:solidFill>
                   <a:srgbClr val="26232A"/>
@@ -14408,6 +14614,7 @@
           <a:lstStyle xmlns:a="http://schemas.openxmlformats.org/drawingml/2006/main"/>
           <a:p xmlns:a="http://schemas.openxmlformats.org/drawingml/2006/main">
             <a:pPr algn="l">
+              <a:buNone/>
               <a:defRPr sz="1125" b="0">
                 <a:solidFill>
                   <a:srgbClr val="6E6873"/>
@@ -14458,6 +14665,7 @@
           <a:lstStyle xmlns:a="http://schemas.openxmlformats.org/drawingml/2006/main"/>
           <a:p xmlns:a="http://schemas.openxmlformats.org/drawingml/2006/main">
             <a:pPr algn="ctr">
+              <a:buNone/>
               <a:defRPr sz="2100" b="1">
                 <a:solidFill>
                   <a:srgbClr val="E63888"/>
@@ -14543,6 +14751,7 @@
           <a:lstStyle xmlns:a="http://schemas.openxmlformats.org/drawingml/2006/main"/>
           <a:p xmlns:a="http://schemas.openxmlformats.org/drawingml/2006/main">
             <a:pPr algn="l">
+              <a:buNone/>
               <a:defRPr sz="1050" b="1">
                 <a:solidFill>
                   <a:srgbClr val="E63888"/>
@@ -14593,6 +14802,7 @@
           <a:lstStyle xmlns:a="http://schemas.openxmlformats.org/drawingml/2006/main"/>
           <a:p xmlns:a="http://schemas.openxmlformats.org/drawingml/2006/main">
             <a:pPr algn="l">
+              <a:buNone/>
               <a:defRPr sz="1500" b="1">
                 <a:solidFill>
                   <a:srgbClr val="26232A"/>
@@ -14643,6 +14853,7 @@
           <a:lstStyle xmlns:a="http://schemas.openxmlformats.org/drawingml/2006/main"/>
           <a:p xmlns:a="http://schemas.openxmlformats.org/drawingml/2006/main">
             <a:pPr algn="l">
+              <a:buNone/>
               <a:defRPr sz="1125" b="0">
                 <a:solidFill>
                   <a:srgbClr val="6E6873"/>
@@ -14693,6 +14904,7 @@
           <a:lstStyle xmlns:a="http://schemas.openxmlformats.org/drawingml/2006/main"/>
           <a:p xmlns:a="http://schemas.openxmlformats.org/drawingml/2006/main">
             <a:pPr algn="ctr">
+              <a:buNone/>
               <a:defRPr sz="2100" b="1">
                 <a:solidFill>
                   <a:srgbClr val="E63888"/>
@@ -14778,6 +14990,7 @@
           <a:lstStyle xmlns:a="http://schemas.openxmlformats.org/drawingml/2006/main"/>
           <a:p xmlns:a="http://schemas.openxmlformats.org/drawingml/2006/main">
             <a:pPr algn="l">
+              <a:buNone/>
               <a:defRPr sz="1050" b="1">
                 <a:solidFill>
                   <a:srgbClr val="E63888"/>
@@ -14828,6 +15041,7 @@
           <a:lstStyle xmlns:a="http://schemas.openxmlformats.org/drawingml/2006/main"/>
           <a:p xmlns:a="http://schemas.openxmlformats.org/drawingml/2006/main">
             <a:pPr algn="l">
+              <a:buNone/>
               <a:defRPr sz="1500" b="1">
                 <a:solidFill>
                   <a:srgbClr val="26232A"/>
@@ -14878,6 +15092,7 @@
           <a:lstStyle xmlns:a="http://schemas.openxmlformats.org/drawingml/2006/main"/>
           <a:p xmlns:a="http://schemas.openxmlformats.org/drawingml/2006/main">
             <a:pPr algn="l">
+              <a:buNone/>
               <a:defRPr sz="1125" b="0">
                 <a:solidFill>
                   <a:srgbClr val="6E6873"/>
@@ -14928,6 +15143,7 @@
           <a:lstStyle xmlns:a="http://schemas.openxmlformats.org/drawingml/2006/main"/>
           <a:p xmlns:a="http://schemas.openxmlformats.org/drawingml/2006/main">
             <a:pPr algn="ctr">
+              <a:buNone/>
               <a:defRPr sz="2100" b="1">
                 <a:solidFill>
                   <a:srgbClr val="E63888"/>
@@ -15013,6 +15229,7 @@
           <a:lstStyle xmlns:a="http://schemas.openxmlformats.org/drawingml/2006/main"/>
           <a:p xmlns:a="http://schemas.openxmlformats.org/drawingml/2006/main">
             <a:pPr algn="l">
+              <a:buNone/>
               <a:defRPr sz="1050" b="1">
                 <a:solidFill>
                   <a:srgbClr val="C7F25C"/>
@@ -15063,6 +15280,7 @@
           <a:lstStyle xmlns:a="http://schemas.openxmlformats.org/drawingml/2006/main"/>
           <a:p xmlns:a="http://schemas.openxmlformats.org/drawingml/2006/main">
             <a:pPr algn="l">
+              <a:buNone/>
               <a:defRPr sz="1500" b="1">
                 <a:solidFill>
                   <a:srgbClr val="FFFFFF"/>
@@ -15113,6 +15331,7 @@
           <a:lstStyle xmlns:a="http://schemas.openxmlformats.org/drawingml/2006/main"/>
           <a:p xmlns:a="http://schemas.openxmlformats.org/drawingml/2006/main">
             <a:pPr algn="l">
+              <a:buNone/>
               <a:defRPr sz="1125" b="0">
                 <a:solidFill>
                   <a:srgbClr val="EAE3EC"/>
@@ -15163,6 +15382,7 @@
           <a:lstStyle xmlns:a="http://schemas.openxmlformats.org/drawingml/2006/main"/>
           <a:p xmlns:a="http://schemas.openxmlformats.org/drawingml/2006/main">
             <a:pPr algn="ctr">
+              <a:buNone/>
               <a:defRPr sz="2100" b="1">
                 <a:solidFill>
                   <a:srgbClr val="3D1F5C"/>
@@ -15242,6 +15462,7 @@
           <a:lstStyle xmlns:a="http://schemas.openxmlformats.org/drawingml/2006/main"/>
           <a:p xmlns:a="http://schemas.openxmlformats.org/drawingml/2006/main">
             <a:pPr algn="l">
+              <a:buNone/>
               <a:defRPr sz="1800" b="1">
                 <a:solidFill>
                   <a:srgbClr val="E63888"/>
@@ -15323,6 +15544,7 @@
           <a:lstStyle xmlns:a="http://schemas.openxmlformats.org/drawingml/2006/main"/>
           <a:p xmlns:a="http://schemas.openxmlformats.org/drawingml/2006/main">
             <a:pPr algn="l">
+              <a:buNone/>
               <a:defRPr sz="3150" b="1">
                 <a:solidFill>
                   <a:srgbClr val="26232A"/>
@@ -15373,6 +15595,7 @@
           <a:lstStyle xmlns:a="http://schemas.openxmlformats.org/drawingml/2006/main"/>
           <a:p xmlns:a="http://schemas.openxmlformats.org/drawingml/2006/main">
             <a:pPr algn="l">
+              <a:buNone/>
               <a:defRPr sz="750" b="1">
                 <a:solidFill>
                   <a:srgbClr val="6E6873"/>
@@ -15423,6 +15646,7 @@
           <a:lstStyle xmlns:a="http://schemas.openxmlformats.org/drawingml/2006/main"/>
           <a:p xmlns:a="http://schemas.openxmlformats.org/drawingml/2006/main">
             <a:pPr algn="r">
+              <a:buNone/>
               <a:defRPr sz="825" b="1">
                 <a:solidFill>
                   <a:srgbClr val="E63888"/>
@@ -15473,6 +15697,7 @@
           <a:lstStyle xmlns:a="http://schemas.openxmlformats.org/drawingml/2006/main"/>
           <a:p xmlns:a="http://schemas.openxmlformats.org/drawingml/2006/main">
             <a:pPr algn="ctr">
+              <a:buNone/>
               <a:defRPr sz="6450" b="1">
                 <a:solidFill>
                   <a:srgbClr val="3D1F5C"/>
@@ -15523,6 +15748,7 @@
           <a:lstStyle xmlns:a="http://schemas.openxmlformats.org/drawingml/2006/main"/>
           <a:p xmlns:a="http://schemas.openxmlformats.org/drawingml/2006/main">
             <a:pPr algn="ctr">
+              <a:buNone/>
               <a:defRPr sz="3450" b="1">
                 <a:solidFill>
                   <a:srgbClr val="E63888"/>
@@ -15573,6 +15799,7 @@
           <a:lstStyle xmlns:a="http://schemas.openxmlformats.org/drawingml/2006/main"/>
           <a:p xmlns:a="http://schemas.openxmlformats.org/drawingml/2006/main">
             <a:pPr algn="ctr">
+              <a:buNone/>
               <a:defRPr sz="6450" b="1">
                 <a:solidFill>
                   <a:srgbClr val="3D1F5C"/>
@@ -15623,6 +15850,7 @@
           <a:lstStyle xmlns:a="http://schemas.openxmlformats.org/drawingml/2006/main"/>
           <a:p xmlns:a="http://schemas.openxmlformats.org/drawingml/2006/main">
             <a:pPr algn="ctr">
+              <a:buNone/>
               <a:defRPr sz="3450" b="1">
                 <a:solidFill>
                   <a:srgbClr val="E63888"/>
@@ -15673,6 +15901,7 @@
           <a:lstStyle xmlns:a="http://schemas.openxmlformats.org/drawingml/2006/main"/>
           <a:p xmlns:a="http://schemas.openxmlformats.org/drawingml/2006/main">
             <a:pPr algn="ctr">
+              <a:buNone/>
               <a:defRPr sz="6450" b="1">
                 <a:solidFill>
                   <a:srgbClr val="3D1F5C"/>
@@ -15723,6 +15952,7 @@
           <a:lstStyle xmlns:a="http://schemas.openxmlformats.org/drawingml/2006/main"/>
           <a:p xmlns:a="http://schemas.openxmlformats.org/drawingml/2006/main">
             <a:pPr algn="ctr">
+              <a:buNone/>
               <a:defRPr sz="1200" b="1">
                 <a:solidFill>
                   <a:srgbClr val="6E6873"/>
@@ -15773,6 +16003,7 @@
           <a:lstStyle xmlns:a="http://schemas.openxmlformats.org/drawingml/2006/main"/>
           <a:p xmlns:a="http://schemas.openxmlformats.org/drawingml/2006/main">
             <a:pPr algn="ctr">
+              <a:buNone/>
               <a:defRPr sz="1200" b="1">
                 <a:solidFill>
                   <a:srgbClr val="6E6873"/>
@@ -15823,6 +16054,7 @@
           <a:lstStyle xmlns:a="http://schemas.openxmlformats.org/drawingml/2006/main"/>
           <a:p xmlns:a="http://schemas.openxmlformats.org/drawingml/2006/main">
             <a:pPr algn="ctr">
+              <a:buNone/>
               <a:defRPr sz="1200" b="1">
                 <a:solidFill>
                   <a:srgbClr val="6E6873"/>
@@ -15906,6 +16138,7 @@
           <a:lstStyle xmlns:a="http://schemas.openxmlformats.org/drawingml/2006/main"/>
           <a:p xmlns:a="http://schemas.openxmlformats.org/drawingml/2006/main">
             <a:pPr algn="l">
+              <a:buNone/>
               <a:defRPr sz="975" b="1">
                 <a:solidFill>
                   <a:srgbClr val="C7F25C"/>
@@ -15956,6 +16189,7 @@
           <a:lstStyle xmlns:a="http://schemas.openxmlformats.org/drawingml/2006/main"/>
           <a:p xmlns:a="http://schemas.openxmlformats.org/drawingml/2006/main">
             <a:pPr algn="l">
+              <a:buNone/>
               <a:defRPr sz="1575" b="1">
                 <a:solidFill>
                   <a:srgbClr val="FFFFFF"/>
@@ -15973,6 +16207,7 @@
           </a:p>
           <a:p xmlns:a="http://schemas.openxmlformats.org/drawingml/2006/main">
             <a:pPr algn="l">
+              <a:buNone/>
               <a:defRPr sz="1575" b="1">
                 <a:solidFill>
                   <a:srgbClr val="FFFFFF"/>
@@ -15990,6 +16225,7 @@
           </a:p>
           <a:p xmlns:a="http://schemas.openxmlformats.org/drawingml/2006/main">
             <a:pPr algn="l">
+              <a:buNone/>
               <a:defRPr sz="1575" b="1">
                 <a:solidFill>
                   <a:srgbClr val="FFFFFF"/>
@@ -16007,6 +16243,7 @@
           </a:p>
           <a:p xmlns:a="http://schemas.openxmlformats.org/drawingml/2006/main">
             <a:pPr algn="l">
+              <a:buNone/>
               <a:defRPr sz="1575" b="1">
                 <a:solidFill>
                   <a:srgbClr val="FFFFFF"/>
@@ -16057,6 +16294,7 @@
           <a:lstStyle xmlns:a="http://schemas.openxmlformats.org/drawingml/2006/main"/>
           <a:p xmlns:a="http://schemas.openxmlformats.org/drawingml/2006/main">
             <a:pPr algn="ctr">
+              <a:buNone/>
               <a:defRPr sz="1650" b="1">
                 <a:solidFill>
                   <a:srgbClr val="E63888"/>
@@ -16136,6 +16374,7 @@
           <a:lstStyle xmlns:a="http://schemas.openxmlformats.org/drawingml/2006/main"/>
           <a:p xmlns:a="http://schemas.openxmlformats.org/drawingml/2006/main">
             <a:pPr algn="l">
+              <a:buNone/>
               <a:defRPr sz="1800" b="1">
                 <a:solidFill>
                   <a:srgbClr val="E63888"/>
@@ -16217,6 +16456,7 @@
           <a:lstStyle xmlns:a="http://schemas.openxmlformats.org/drawingml/2006/main"/>
           <a:p xmlns:a="http://schemas.openxmlformats.org/drawingml/2006/main">
             <a:pPr algn="l">
+              <a:buNone/>
               <a:defRPr sz="3150" b="1">
                 <a:solidFill>
                   <a:srgbClr val="FFFFFF"/>
@@ -16267,6 +16507,7 @@
           <a:lstStyle xmlns:a="http://schemas.openxmlformats.org/drawingml/2006/main"/>
           <a:p xmlns:a="http://schemas.openxmlformats.org/drawingml/2006/main">
             <a:pPr algn="l">
+              <a:buNone/>
               <a:defRPr sz="750" b="1">
                 <a:solidFill>
                   <a:srgbClr val="EAE3EC"/>
@@ -16317,6 +16558,7 @@
           <a:lstStyle xmlns:a="http://schemas.openxmlformats.org/drawingml/2006/main"/>
           <a:p xmlns:a="http://schemas.openxmlformats.org/drawingml/2006/main">
             <a:pPr algn="r">
+              <a:buNone/>
               <a:defRPr sz="825" b="1">
                 <a:solidFill>
                   <a:srgbClr val="C7F25C"/>
@@ -16398,6 +16640,7 @@
           <a:lstStyle xmlns:a="http://schemas.openxmlformats.org/drawingml/2006/main"/>
           <a:p xmlns:a="http://schemas.openxmlformats.org/drawingml/2006/main">
             <a:pPr algn="ctr">
+              <a:buNone/>
               <a:defRPr sz="1200" b="1">
                 <a:solidFill>
                   <a:srgbClr val="FFFFFF"/>
@@ -16448,6 +16691,7 @@
           <a:lstStyle xmlns:a="http://schemas.openxmlformats.org/drawingml/2006/main"/>
           <a:p xmlns:a="http://schemas.openxmlformats.org/drawingml/2006/main">
             <a:pPr algn="l">
+              <a:buNone/>
               <a:defRPr sz="1575" b="0">
                 <a:solidFill>
                   <a:srgbClr val="FFFFFF"/>
@@ -16529,6 +16773,7 @@
           <a:lstStyle xmlns:a="http://schemas.openxmlformats.org/drawingml/2006/main"/>
           <a:p xmlns:a="http://schemas.openxmlformats.org/drawingml/2006/main">
             <a:pPr algn="ctr">
+              <a:buNone/>
               <a:defRPr sz="1200" b="1">
                 <a:solidFill>
                   <a:srgbClr val="FFFFFF"/>
@@ -16579,6 +16824,7 @@
           <a:lstStyle xmlns:a="http://schemas.openxmlformats.org/drawingml/2006/main"/>
           <a:p xmlns:a="http://schemas.openxmlformats.org/drawingml/2006/main">
             <a:pPr algn="l">
+              <a:buNone/>
               <a:defRPr sz="1575" b="0">
                 <a:solidFill>
                   <a:srgbClr val="FFFFFF"/>
@@ -16660,6 +16906,7 @@
           <a:lstStyle xmlns:a="http://schemas.openxmlformats.org/drawingml/2006/main"/>
           <a:p xmlns:a="http://schemas.openxmlformats.org/drawingml/2006/main">
             <a:pPr algn="ctr">
+              <a:buNone/>
               <a:defRPr sz="1200" b="1">
                 <a:solidFill>
                   <a:srgbClr val="FFFFFF"/>
@@ -16710,6 +16957,7 @@
           <a:lstStyle xmlns:a="http://schemas.openxmlformats.org/drawingml/2006/main"/>
           <a:p xmlns:a="http://schemas.openxmlformats.org/drawingml/2006/main">
             <a:pPr algn="l">
+              <a:buNone/>
               <a:defRPr sz="1575" b="0">
                 <a:solidFill>
                   <a:srgbClr val="FFFFFF"/>
@@ -16791,6 +17039,7 @@
           <a:lstStyle xmlns:a="http://schemas.openxmlformats.org/drawingml/2006/main"/>
           <a:p xmlns:a="http://schemas.openxmlformats.org/drawingml/2006/main">
             <a:pPr algn="ctr">
+              <a:buNone/>
               <a:defRPr sz="1200" b="1">
                 <a:solidFill>
                   <a:srgbClr val="FFFFFF"/>
@@ -16841,6 +17090,7 @@
           <a:lstStyle xmlns:a="http://schemas.openxmlformats.org/drawingml/2006/main"/>
           <a:p xmlns:a="http://schemas.openxmlformats.org/drawingml/2006/main">
             <a:pPr algn="l">
+              <a:buNone/>
               <a:defRPr sz="1575" b="0">
                 <a:solidFill>
                   <a:srgbClr val="FFFFFF"/>
@@ -16922,6 +17172,7 @@
           <a:lstStyle xmlns:a="http://schemas.openxmlformats.org/drawingml/2006/main"/>
           <a:p xmlns:a="http://schemas.openxmlformats.org/drawingml/2006/main">
             <a:pPr algn="ctr">
+              <a:buNone/>
               <a:defRPr sz="1200" b="1">
                 <a:solidFill>
                   <a:srgbClr val="3D1F5C"/>
@@ -16972,6 +17223,7 @@
           <a:lstStyle xmlns:a="http://schemas.openxmlformats.org/drawingml/2006/main"/>
           <a:p xmlns:a="http://schemas.openxmlformats.org/drawingml/2006/main">
             <a:pPr algn="l">
+              <a:buNone/>
               <a:defRPr sz="1575" b="1">
                 <a:solidFill>
                   <a:srgbClr val="FFFFFF"/>
@@ -17084,6 +17336,7 @@
           <a:lstStyle xmlns:a="http://schemas.openxmlformats.org/drawingml/2006/main"/>
           <a:p xmlns:a="http://schemas.openxmlformats.org/drawingml/2006/main">
             <a:pPr algn="ctr">
+              <a:buNone/>
               <a:defRPr sz="4800" b="1">
                 <a:solidFill>
                   <a:srgbClr val="C7F25C"/>
@@ -17134,6 +17387,7 @@
           <a:lstStyle xmlns:a="http://schemas.openxmlformats.org/drawingml/2006/main"/>
           <a:p xmlns:a="http://schemas.openxmlformats.org/drawingml/2006/main">
             <a:pPr algn="ctr">
+              <a:buNone/>
               <a:defRPr sz="1500" b="1">
                 <a:solidFill>
                   <a:srgbClr val="FFFFFF"/>
@@ -17184,6 +17438,7 @@
           <a:lstStyle xmlns:a="http://schemas.openxmlformats.org/drawingml/2006/main"/>
           <a:p xmlns:a="http://schemas.openxmlformats.org/drawingml/2006/main">
             <a:pPr algn="ctr">
+              <a:buNone/>
               <a:defRPr sz="1725" b="1">
                 <a:solidFill>
                   <a:srgbClr val="C7F25C"/>
@@ -17263,6 +17518,7 @@
           <a:lstStyle xmlns:a="http://schemas.openxmlformats.org/drawingml/2006/main"/>
           <a:p xmlns:a="http://schemas.openxmlformats.org/drawingml/2006/main">
             <a:pPr algn="l">
+              <a:buNone/>
               <a:defRPr sz="1800" b="1">
                 <a:solidFill>
                   <a:srgbClr val="E63888"/>
@@ -17344,6 +17600,7 @@
           <a:lstStyle xmlns:a="http://schemas.openxmlformats.org/drawingml/2006/main"/>
           <a:p xmlns:a="http://schemas.openxmlformats.org/drawingml/2006/main">
             <a:pPr algn="l">
+              <a:buNone/>
               <a:defRPr sz="3150" b="1">
                 <a:solidFill>
                   <a:srgbClr val="26232A"/>
@@ -17394,6 +17651,7 @@
           <a:lstStyle xmlns:a="http://schemas.openxmlformats.org/drawingml/2006/main"/>
           <a:p xmlns:a="http://schemas.openxmlformats.org/drawingml/2006/main">
             <a:pPr algn="l">
+              <a:buNone/>
               <a:defRPr sz="750" b="1">
                 <a:solidFill>
                   <a:srgbClr val="6E6873"/>
@@ -17444,6 +17702,7 @@
           <a:lstStyle xmlns:a="http://schemas.openxmlformats.org/drawingml/2006/main"/>
           <a:p xmlns:a="http://schemas.openxmlformats.org/drawingml/2006/main">
             <a:pPr algn="r">
+              <a:buNone/>
               <a:defRPr sz="825" b="1">
                 <a:solidFill>
                   <a:srgbClr val="E63888"/>
@@ -17527,6 +17786,7 @@
           <a:lstStyle xmlns:a="http://schemas.openxmlformats.org/drawingml/2006/main"/>
           <a:p xmlns:a="http://schemas.openxmlformats.org/drawingml/2006/main">
             <a:pPr algn="l">
+              <a:buNone/>
               <a:defRPr sz="1275" b="1">
                 <a:solidFill>
                   <a:srgbClr val="E63888"/>
@@ -17577,6 +17837,7 @@
           <a:lstStyle xmlns:a="http://schemas.openxmlformats.org/drawingml/2006/main"/>
           <a:p xmlns:a="http://schemas.openxmlformats.org/drawingml/2006/main">
             <a:pPr algn="l">
+              <a:buNone/>
               <a:defRPr sz="1350" b="0">
                 <a:solidFill>
                   <a:srgbClr val="26232A"/>
@@ -17627,6 +17888,7 @@
           <a:lstStyle xmlns:a="http://schemas.openxmlformats.org/drawingml/2006/main"/>
           <a:p xmlns:a="http://schemas.openxmlformats.org/drawingml/2006/main">
             <a:pPr algn="l">
+              <a:buNone/>
               <a:defRPr sz="1275" b="1">
                 <a:solidFill>
                   <a:srgbClr val="E63888"/>
@@ -17677,6 +17939,7 @@
           <a:lstStyle xmlns:a="http://schemas.openxmlformats.org/drawingml/2006/main"/>
           <a:p xmlns:a="http://schemas.openxmlformats.org/drawingml/2006/main">
             <a:pPr algn="l">
+              <a:buNone/>
               <a:defRPr sz="1350" b="0">
                 <a:solidFill>
                   <a:srgbClr val="26232A"/>
@@ -17727,6 +17990,7 @@
           <a:lstStyle xmlns:a="http://schemas.openxmlformats.org/drawingml/2006/main"/>
           <a:p xmlns:a="http://schemas.openxmlformats.org/drawingml/2006/main">
             <a:pPr algn="l">
+              <a:buNone/>
               <a:defRPr sz="1275" b="1">
                 <a:solidFill>
                   <a:srgbClr val="E63888"/>
@@ -17777,6 +18041,7 @@
           <a:lstStyle xmlns:a="http://schemas.openxmlformats.org/drawingml/2006/main"/>
           <a:p xmlns:a="http://schemas.openxmlformats.org/drawingml/2006/main">
             <a:pPr algn="l">
+              <a:buNone/>
               <a:defRPr sz="1350" b="0">
                 <a:solidFill>
                   <a:srgbClr val="26232A"/>
@@ -17827,6 +18092,7 @@
           <a:lstStyle xmlns:a="http://schemas.openxmlformats.org/drawingml/2006/main"/>
           <a:p xmlns:a="http://schemas.openxmlformats.org/drawingml/2006/main">
             <a:pPr algn="l">
+              <a:buNone/>
               <a:defRPr sz="1275" b="1">
                 <a:solidFill>
                   <a:srgbClr val="E63888"/>
@@ -17877,6 +18143,7 @@
           <a:lstStyle xmlns:a="http://schemas.openxmlformats.org/drawingml/2006/main"/>
           <a:p xmlns:a="http://schemas.openxmlformats.org/drawingml/2006/main">
             <a:pPr algn="l">
+              <a:buNone/>
               <a:defRPr sz="1350" b="0">
                 <a:solidFill>
                   <a:srgbClr val="26232A"/>
@@ -17927,6 +18194,7 @@
           <a:lstStyle xmlns:a="http://schemas.openxmlformats.org/drawingml/2006/main"/>
           <a:p xmlns:a="http://schemas.openxmlformats.org/drawingml/2006/main">
             <a:pPr algn="l">
+              <a:buNone/>
               <a:defRPr sz="1275" b="1">
                 <a:solidFill>
                   <a:srgbClr val="E63888"/>
@@ -17977,6 +18245,7 @@
           <a:lstStyle xmlns:a="http://schemas.openxmlformats.org/drawingml/2006/main"/>
           <a:p xmlns:a="http://schemas.openxmlformats.org/drawingml/2006/main">
             <a:pPr algn="l">
+              <a:buNone/>
               <a:defRPr sz="1350" b="0">
                 <a:solidFill>
                   <a:srgbClr val="26232A"/>
@@ -18027,6 +18296,7 @@
           <a:lstStyle xmlns:a="http://schemas.openxmlformats.org/drawingml/2006/main"/>
           <a:p xmlns:a="http://schemas.openxmlformats.org/drawingml/2006/main">
             <a:pPr algn="l">
+              <a:buNone/>
               <a:defRPr sz="1275" b="1">
                 <a:solidFill>
                   <a:srgbClr val="E63888"/>
@@ -18077,6 +18347,7 @@
           <a:lstStyle xmlns:a="http://schemas.openxmlformats.org/drawingml/2006/main"/>
           <a:p xmlns:a="http://schemas.openxmlformats.org/drawingml/2006/main">
             <a:pPr algn="l">
+              <a:buNone/>
               <a:defRPr sz="1350" b="0">
                 <a:solidFill>
                   <a:srgbClr val="26232A"/>
@@ -18127,6 +18398,7 @@
           <a:lstStyle xmlns:a="http://schemas.openxmlformats.org/drawingml/2006/main"/>
           <a:p xmlns:a="http://schemas.openxmlformats.org/drawingml/2006/main">
             <a:pPr algn="l">
+              <a:buNone/>
               <a:defRPr sz="1275" b="1">
                 <a:solidFill>
                   <a:srgbClr val="E63888"/>
@@ -18177,6 +18449,7 @@
           <a:lstStyle xmlns:a="http://schemas.openxmlformats.org/drawingml/2006/main"/>
           <a:p xmlns:a="http://schemas.openxmlformats.org/drawingml/2006/main">
             <a:pPr algn="l">
+              <a:buNone/>
               <a:defRPr sz="1350" b="0">
                 <a:solidFill>
                   <a:srgbClr val="26232A"/>
@@ -18227,6 +18500,7 @@
           <a:lstStyle xmlns:a="http://schemas.openxmlformats.org/drawingml/2006/main"/>
           <a:p xmlns:a="http://schemas.openxmlformats.org/drawingml/2006/main">
             <a:pPr algn="l">
+              <a:buNone/>
               <a:defRPr sz="1275" b="1">
                 <a:solidFill>
                   <a:srgbClr val="E63888"/>
@@ -18277,6 +18551,7 @@
           <a:lstStyle xmlns:a="http://schemas.openxmlformats.org/drawingml/2006/main"/>
           <a:p xmlns:a="http://schemas.openxmlformats.org/drawingml/2006/main">
             <a:pPr algn="l">
+              <a:buNone/>
               <a:defRPr sz="1350" b="0">
                 <a:solidFill>
                   <a:srgbClr val="26232A"/>
@@ -18327,6 +18602,7 @@
           <a:lstStyle xmlns:a="http://schemas.openxmlformats.org/drawingml/2006/main"/>
           <a:p xmlns:a="http://schemas.openxmlformats.org/drawingml/2006/main">
             <a:pPr algn="l">
+              <a:buNone/>
               <a:defRPr sz="1275" b="1">
                 <a:solidFill>
                   <a:srgbClr val="E63888"/>
@@ -18377,6 +18653,7 @@
           <a:lstStyle xmlns:a="http://schemas.openxmlformats.org/drawingml/2006/main"/>
           <a:p xmlns:a="http://schemas.openxmlformats.org/drawingml/2006/main">
             <a:pPr algn="l">
+              <a:buNone/>
               <a:defRPr sz="1350" b="0">
                 <a:solidFill>
                   <a:srgbClr val="26232A"/>
@@ -18427,6 +18704,7 @@
           <a:lstStyle xmlns:a="http://schemas.openxmlformats.org/drawingml/2006/main"/>
           <a:p xmlns:a="http://schemas.openxmlformats.org/drawingml/2006/main">
             <a:pPr algn="l">
+              <a:buNone/>
               <a:defRPr sz="1650" b="1">
                 <a:solidFill>
                   <a:srgbClr val="3D1F5C"/>
@@ -18506,6 +18784,7 @@
           <a:lstStyle xmlns:a="http://schemas.openxmlformats.org/drawingml/2006/main"/>
           <a:p xmlns:a="http://schemas.openxmlformats.org/drawingml/2006/main">
             <a:pPr algn="l">
+              <a:buNone/>
               <a:defRPr sz="1800" b="1">
                 <a:solidFill>
                   <a:srgbClr val="E63888"/>
@@ -18587,6 +18866,7 @@
           <a:lstStyle xmlns:a="http://schemas.openxmlformats.org/drawingml/2006/main"/>
           <a:p xmlns:a="http://schemas.openxmlformats.org/drawingml/2006/main">
             <a:pPr algn="l">
+              <a:buNone/>
               <a:defRPr sz="3150" b="1">
                 <a:solidFill>
                   <a:srgbClr val="FFFFFF"/>
@@ -18637,6 +18917,7 @@
           <a:lstStyle xmlns:a="http://schemas.openxmlformats.org/drawingml/2006/main"/>
           <a:p xmlns:a="http://schemas.openxmlformats.org/drawingml/2006/main">
             <a:pPr algn="l">
+              <a:buNone/>
               <a:defRPr sz="750" b="1">
                 <a:solidFill>
                   <a:srgbClr val="EAE3EC"/>
@@ -18687,6 +18968,7 @@
           <a:lstStyle xmlns:a="http://schemas.openxmlformats.org/drawingml/2006/main"/>
           <a:p xmlns:a="http://schemas.openxmlformats.org/drawingml/2006/main">
             <a:pPr algn="r">
+              <a:buNone/>
               <a:defRPr sz="825" b="1">
                 <a:solidFill>
                   <a:srgbClr val="C7F25C"/>
@@ -18737,6 +19019,7 @@
           <a:lstStyle xmlns:a="http://schemas.openxmlformats.org/drawingml/2006/main"/>
           <a:p xmlns:a="http://schemas.openxmlformats.org/drawingml/2006/main">
             <a:pPr algn="l">
+              <a:buNone/>
               <a:defRPr sz="2100" b="1">
                 <a:solidFill>
                   <a:srgbClr val="FFFFFF"/>
@@ -18787,6 +19070,7 @@
           <a:lstStyle xmlns:a="http://schemas.openxmlformats.org/drawingml/2006/main"/>
           <a:p xmlns:a="http://schemas.openxmlformats.org/drawingml/2006/main">
             <a:pPr algn="l">
+              <a:buNone/>
               <a:defRPr sz="2100" b="1">
                 <a:solidFill>
                   <a:srgbClr val="E63888"/>
@@ -18837,6 +19121,7 @@
           <a:lstStyle xmlns:a="http://schemas.openxmlformats.org/drawingml/2006/main"/>
           <a:p xmlns:a="http://schemas.openxmlformats.org/drawingml/2006/main">
             <a:pPr algn="l">
+              <a:buNone/>
               <a:defRPr sz="2100" b="1">
                 <a:solidFill>
                   <a:srgbClr val="C7F25C"/>
@@ -18887,6 +19172,7 @@
           <a:lstStyle xmlns:a="http://schemas.openxmlformats.org/drawingml/2006/main"/>
           <a:p xmlns:a="http://schemas.openxmlformats.org/drawingml/2006/main">
             <a:pPr algn="l">
+              <a:buNone/>
               <a:defRPr sz="1500" b="0">
                 <a:solidFill>
                   <a:srgbClr val="EAE3EC"/>
@@ -18937,6 +19223,7 @@
           <a:lstStyle xmlns:a="http://schemas.openxmlformats.org/drawingml/2006/main"/>
           <a:p xmlns:a="http://schemas.openxmlformats.org/drawingml/2006/main">
             <a:pPr algn="l">
+              <a:buNone/>
               <a:defRPr sz="1650" b="1">
                 <a:solidFill>
                   <a:srgbClr val="FFFFFF"/>
@@ -18956,14 +19243,14 @@
       </p:sp>
       <p:pic>
         <p:nvPicPr>
-          <p:cNvPr id="22" name=""/>
+          <p:cNvPr id="24" name=""/>
           <p:cNvPicPr>
             <a:picLocks xmlns:a="http://schemas.openxmlformats.org/drawingml/2006/main" noChangeAspect="1"/>
           </p:cNvPicPr>
           <p:nvPr/>
         </p:nvPicPr>
         <p:blipFill>
-          <a:blip xmlns:r="http://schemas.openxmlformats.org/officeDocument/2006/relationships" xmlns:a="http://schemas.openxmlformats.org/drawingml/2006/main" r:embed="R3505a2f4fe5d42d5"/>
+          <a:blip xmlns:r="http://schemas.openxmlformats.org/officeDocument/2006/relationships" xmlns:a="http://schemas.openxmlformats.org/drawingml/2006/main" r:embed="Rc21bb8fb53204259"/>
           <a:stretch xmlns:a="http://schemas.openxmlformats.org/drawingml/2006/main"/>
         </p:blipFill>
         <p:spPr>
@@ -19038,6 +19325,7 @@
           <a:lstStyle xmlns:a="http://schemas.openxmlformats.org/drawingml/2006/main"/>
           <a:p xmlns:a="http://schemas.openxmlformats.org/drawingml/2006/main">
             <a:pPr algn="l">
+              <a:buNone/>
               <a:defRPr sz="1800" b="1">
                 <a:solidFill>
                   <a:srgbClr val="E63888"/>
@@ -19119,6 +19407,7 @@
           <a:lstStyle xmlns:a="http://schemas.openxmlformats.org/drawingml/2006/main"/>
           <a:p xmlns:a="http://schemas.openxmlformats.org/drawingml/2006/main">
             <a:pPr algn="l">
+              <a:buNone/>
               <a:defRPr sz="3150" b="1">
                 <a:solidFill>
                   <a:srgbClr val="FFFFFF"/>
@@ -19169,6 +19458,7 @@
           <a:lstStyle xmlns:a="http://schemas.openxmlformats.org/drawingml/2006/main"/>
           <a:p xmlns:a="http://schemas.openxmlformats.org/drawingml/2006/main">
             <a:pPr algn="l">
+              <a:buNone/>
               <a:defRPr sz="750" b="1">
                 <a:solidFill>
                   <a:srgbClr val="EAE3EC"/>
@@ -19219,6 +19509,7 @@
           <a:lstStyle xmlns:a="http://schemas.openxmlformats.org/drawingml/2006/main"/>
           <a:p xmlns:a="http://schemas.openxmlformats.org/drawingml/2006/main">
             <a:pPr algn="r">
+              <a:buNone/>
               <a:defRPr sz="825" b="1">
                 <a:solidFill>
                   <a:srgbClr val="C7F25C"/>
@@ -19304,6 +19595,7 @@
           <a:lstStyle xmlns:a="http://schemas.openxmlformats.org/drawingml/2006/main"/>
           <a:p xmlns:a="http://schemas.openxmlformats.org/drawingml/2006/main">
             <a:pPr algn="l">
+              <a:buNone/>
               <a:defRPr sz="1500" b="1">
                 <a:solidFill>
                   <a:srgbClr val="C7F25C"/>
@@ -19354,6 +19646,7 @@
           <a:lstStyle xmlns:a="http://schemas.openxmlformats.org/drawingml/2006/main"/>
           <a:p xmlns:a="http://schemas.openxmlformats.org/drawingml/2006/main">
             <a:pPr algn="l">
+              <a:buNone/>
               <a:defRPr sz="1275" b="1">
                 <a:solidFill>
                   <a:srgbClr val="FFFFFF"/>
@@ -19371,6 +19664,7 @@
           </a:p>
           <a:p xmlns:a="http://schemas.openxmlformats.org/drawingml/2006/main">
             <a:pPr algn="l">
+              <a:buNone/>
               <a:defRPr sz="1275" b="1">
                 <a:solidFill>
                   <a:srgbClr val="FFFFFF"/>
@@ -19456,6 +19750,7 @@
           <a:lstStyle xmlns:a="http://schemas.openxmlformats.org/drawingml/2006/main"/>
           <a:p xmlns:a="http://schemas.openxmlformats.org/drawingml/2006/main">
             <a:pPr algn="l">
+              <a:buNone/>
               <a:defRPr sz="1500" b="1">
                 <a:solidFill>
                   <a:srgbClr val="C7F25C"/>
@@ -19506,6 +19801,7 @@
           <a:lstStyle xmlns:a="http://schemas.openxmlformats.org/drawingml/2006/main"/>
           <a:p xmlns:a="http://schemas.openxmlformats.org/drawingml/2006/main">
             <a:pPr algn="l">
+              <a:buNone/>
               <a:defRPr sz="1275" b="1">
                 <a:solidFill>
                   <a:srgbClr val="FFFFFF"/>
@@ -19523,6 +19819,7 @@
           </a:p>
           <a:p xmlns:a="http://schemas.openxmlformats.org/drawingml/2006/main">
             <a:pPr algn="l">
+              <a:buNone/>
               <a:defRPr sz="1275" b="1">
                 <a:solidFill>
                   <a:srgbClr val="FFFFFF"/>
@@ -19608,6 +19905,7 @@
           <a:lstStyle xmlns:a="http://schemas.openxmlformats.org/drawingml/2006/main"/>
           <a:p xmlns:a="http://schemas.openxmlformats.org/drawingml/2006/main">
             <a:pPr algn="l">
+              <a:buNone/>
               <a:defRPr sz="1500" b="1">
                 <a:solidFill>
                   <a:srgbClr val="C7F25C"/>
@@ -19658,6 +19956,7 @@
           <a:lstStyle xmlns:a="http://schemas.openxmlformats.org/drawingml/2006/main"/>
           <a:p xmlns:a="http://schemas.openxmlformats.org/drawingml/2006/main">
             <a:pPr algn="l">
+              <a:buNone/>
               <a:defRPr sz="1275" b="1">
                 <a:solidFill>
                   <a:srgbClr val="FFFFFF"/>
@@ -19675,6 +19974,7 @@
           </a:p>
           <a:p xmlns:a="http://schemas.openxmlformats.org/drawingml/2006/main">
             <a:pPr algn="l">
+              <a:buNone/>
               <a:defRPr sz="1275" b="1">
                 <a:solidFill>
                   <a:srgbClr val="FFFFFF"/>
@@ -19760,6 +20060,7 @@
           <a:lstStyle xmlns:a="http://schemas.openxmlformats.org/drawingml/2006/main"/>
           <a:p xmlns:a="http://schemas.openxmlformats.org/drawingml/2006/main">
             <a:pPr algn="l">
+              <a:buNone/>
               <a:defRPr sz="1500" b="1">
                 <a:solidFill>
                   <a:srgbClr val="C7F25C"/>
@@ -19810,6 +20111,7 @@
           <a:lstStyle xmlns:a="http://schemas.openxmlformats.org/drawingml/2006/main"/>
           <a:p xmlns:a="http://schemas.openxmlformats.org/drawingml/2006/main">
             <a:pPr algn="l">
+              <a:buNone/>
               <a:defRPr sz="1275" b="1">
                 <a:solidFill>
                   <a:srgbClr val="FFFFFF"/>
@@ -19827,6 +20129,7 @@
           </a:p>
           <a:p xmlns:a="http://schemas.openxmlformats.org/drawingml/2006/main">
             <a:pPr algn="l">
+              <a:buNone/>
               <a:defRPr sz="1275" b="1">
                 <a:solidFill>
                   <a:srgbClr val="FFFFFF"/>
@@ -19912,6 +20215,7 @@
           <a:lstStyle xmlns:a="http://schemas.openxmlformats.org/drawingml/2006/main"/>
           <a:p xmlns:a="http://schemas.openxmlformats.org/drawingml/2006/main">
             <a:pPr algn="l">
+              <a:buNone/>
               <a:defRPr sz="1500" b="1">
                 <a:solidFill>
                   <a:srgbClr val="C7F25C"/>
@@ -19962,6 +20266,7 @@
           <a:lstStyle xmlns:a="http://schemas.openxmlformats.org/drawingml/2006/main"/>
           <a:p xmlns:a="http://schemas.openxmlformats.org/drawingml/2006/main">
             <a:pPr algn="l">
+              <a:buNone/>
               <a:defRPr sz="1275" b="1">
                 <a:solidFill>
                   <a:srgbClr val="FFFFFF"/>
@@ -19979,6 +20284,7 @@
           </a:p>
           <a:p xmlns:a="http://schemas.openxmlformats.org/drawingml/2006/main">
             <a:pPr algn="l">
+              <a:buNone/>
               <a:defRPr sz="1275" b="1">
                 <a:solidFill>
                   <a:srgbClr val="FFFFFF"/>
@@ -20064,6 +20370,7 @@
           <a:lstStyle xmlns:a="http://schemas.openxmlformats.org/drawingml/2006/main"/>
           <a:p xmlns:a="http://schemas.openxmlformats.org/drawingml/2006/main">
             <a:pPr algn="l">
+              <a:buNone/>
               <a:defRPr sz="1500" b="1">
                 <a:solidFill>
                   <a:srgbClr val="C7F25C"/>
@@ -20114,6 +20421,7 @@
           <a:lstStyle xmlns:a="http://schemas.openxmlformats.org/drawingml/2006/main"/>
           <a:p xmlns:a="http://schemas.openxmlformats.org/drawingml/2006/main">
             <a:pPr algn="l">
+              <a:buNone/>
               <a:defRPr sz="1050" b="1">
                 <a:solidFill>
                   <a:srgbClr val="FFFFFF"/>
@@ -20131,6 +20439,7 @@
           </a:p>
           <a:p xmlns:a="http://schemas.openxmlformats.org/drawingml/2006/main">
             <a:pPr algn="l">
+              <a:buNone/>
               <a:defRPr sz="1050" b="1">
                 <a:solidFill>
                   <a:srgbClr val="FFFFFF"/>
@@ -20181,6 +20490,7 @@
           <a:lstStyle xmlns:a="http://schemas.openxmlformats.org/drawingml/2006/main"/>
           <a:p xmlns:a="http://schemas.openxmlformats.org/drawingml/2006/main">
             <a:pPr algn="ctr">
+              <a:buNone/>
               <a:defRPr sz="1650" b="1">
                 <a:solidFill>
                   <a:srgbClr val="FFFFFF"/>
@@ -20260,6 +20570,7 @@
           <a:lstStyle xmlns:a="http://schemas.openxmlformats.org/drawingml/2006/main"/>
           <a:p xmlns:a="http://schemas.openxmlformats.org/drawingml/2006/main">
             <a:pPr algn="l">
+              <a:buNone/>
               <a:defRPr sz="1800" b="1">
                 <a:solidFill>
                   <a:srgbClr val="E63888"/>
@@ -20341,6 +20652,7 @@
           <a:lstStyle xmlns:a="http://schemas.openxmlformats.org/drawingml/2006/main"/>
           <a:p xmlns:a="http://schemas.openxmlformats.org/drawingml/2006/main">
             <a:pPr algn="l">
+              <a:buNone/>
               <a:defRPr sz="3150" b="1">
                 <a:solidFill>
                   <a:srgbClr val="26232A"/>
@@ -20391,6 +20703,7 @@
           <a:lstStyle xmlns:a="http://schemas.openxmlformats.org/drawingml/2006/main"/>
           <a:p xmlns:a="http://schemas.openxmlformats.org/drawingml/2006/main">
             <a:pPr algn="l">
+              <a:buNone/>
               <a:defRPr sz="750" b="1">
                 <a:solidFill>
                   <a:srgbClr val="6E6873"/>
@@ -20441,6 +20754,7 @@
           <a:lstStyle xmlns:a="http://schemas.openxmlformats.org/drawingml/2006/main"/>
           <a:p xmlns:a="http://schemas.openxmlformats.org/drawingml/2006/main">
             <a:pPr algn="r">
+              <a:buNone/>
               <a:defRPr sz="825" b="1">
                 <a:solidFill>
                   <a:srgbClr val="E63888"/>
@@ -20526,6 +20840,7 @@
           <a:lstStyle xmlns:a="http://schemas.openxmlformats.org/drawingml/2006/main"/>
           <a:p xmlns:a="http://schemas.openxmlformats.org/drawingml/2006/main">
             <a:pPr algn="l">
+              <a:buNone/>
               <a:defRPr sz="975" b="1">
                 <a:solidFill>
                   <a:srgbClr val="E63888"/>
@@ -20576,6 +20891,7 @@
           <a:lstStyle xmlns:a="http://schemas.openxmlformats.org/drawingml/2006/main"/>
           <a:p xmlns:a="http://schemas.openxmlformats.org/drawingml/2006/main">
             <a:pPr algn="l">
+              <a:buNone/>
               <a:defRPr sz="1425" b="0">
                 <a:solidFill>
                   <a:srgbClr val="26232A"/>
@@ -20659,6 +20975,7 @@
           <a:lstStyle xmlns:a="http://schemas.openxmlformats.org/drawingml/2006/main"/>
           <a:p xmlns:a="http://schemas.openxmlformats.org/drawingml/2006/main">
             <a:pPr algn="l">
+              <a:buNone/>
               <a:defRPr sz="975" b="1">
                 <a:solidFill>
                   <a:srgbClr val="C7F25C"/>
@@ -20709,6 +21026,7 @@
           <a:lstStyle xmlns:a="http://schemas.openxmlformats.org/drawingml/2006/main"/>
           <a:p xmlns:a="http://schemas.openxmlformats.org/drawingml/2006/main">
             <a:pPr algn="l">
+              <a:buNone/>
               <a:defRPr sz="1650" b="1">
                 <a:solidFill>
                   <a:srgbClr val="FFFFFF"/>
@@ -20759,6 +21077,7 @@
           <a:lstStyle xmlns:a="http://schemas.openxmlformats.org/drawingml/2006/main"/>
           <a:p xmlns:a="http://schemas.openxmlformats.org/drawingml/2006/main">
             <a:pPr algn="l">
+              <a:buNone/>
               <a:defRPr sz="2400" b="1">
                 <a:solidFill>
                   <a:srgbClr val="E63888"/>
@@ -20842,6 +21161,7 @@
           <a:lstStyle xmlns:a="http://schemas.openxmlformats.org/drawingml/2006/main"/>
           <a:p xmlns:a="http://schemas.openxmlformats.org/drawingml/2006/main">
             <a:pPr algn="l">
+              <a:buNone/>
               <a:defRPr sz="975" b="1">
                 <a:solidFill>
                   <a:srgbClr val="3D1F5C"/>
@@ -20892,6 +21212,7 @@
           <a:lstStyle xmlns:a="http://schemas.openxmlformats.org/drawingml/2006/main"/>
           <a:p xmlns:a="http://schemas.openxmlformats.org/drawingml/2006/main">
             <a:pPr algn="l">
+              <a:buNone/>
               <a:defRPr sz="1350" b="1">
                 <a:solidFill>
                   <a:srgbClr val="3D1F5C"/>
@@ -20971,6 +21292,7 @@
           <a:lstStyle xmlns:a="http://schemas.openxmlformats.org/drawingml/2006/main"/>
           <a:p xmlns:a="http://schemas.openxmlformats.org/drawingml/2006/main">
             <a:pPr algn="l">
+              <a:buNone/>
               <a:defRPr sz="1800" b="1">
                 <a:solidFill>
                   <a:srgbClr val="E63888"/>
@@ -21052,6 +21374,7 @@
           <a:lstStyle xmlns:a="http://schemas.openxmlformats.org/drawingml/2006/main"/>
           <a:p xmlns:a="http://schemas.openxmlformats.org/drawingml/2006/main">
             <a:pPr algn="l">
+              <a:buNone/>
               <a:defRPr sz="3150" b="1">
                 <a:solidFill>
                   <a:srgbClr val="26232A"/>
@@ -21102,6 +21425,7 @@
           <a:lstStyle xmlns:a="http://schemas.openxmlformats.org/drawingml/2006/main"/>
           <a:p xmlns:a="http://schemas.openxmlformats.org/drawingml/2006/main">
             <a:pPr algn="l">
+              <a:buNone/>
               <a:defRPr sz="750" b="1">
                 <a:solidFill>
                   <a:srgbClr val="6E6873"/>
@@ -21152,6 +21476,7 @@
           <a:lstStyle xmlns:a="http://schemas.openxmlformats.org/drawingml/2006/main"/>
           <a:p xmlns:a="http://schemas.openxmlformats.org/drawingml/2006/main">
             <a:pPr algn="r">
+              <a:buNone/>
               <a:defRPr sz="825" b="1">
                 <a:solidFill>
                   <a:srgbClr val="E63888"/>
@@ -21237,6 +21562,7 @@
           <a:lstStyle xmlns:a="http://schemas.openxmlformats.org/drawingml/2006/main"/>
           <a:p xmlns:a="http://schemas.openxmlformats.org/drawingml/2006/main">
             <a:pPr algn="l">
+              <a:buNone/>
               <a:defRPr sz="975" b="1">
                 <a:solidFill>
                   <a:srgbClr val="E63888"/>
@@ -21287,6 +21613,7 @@
           <a:lstStyle xmlns:a="http://schemas.openxmlformats.org/drawingml/2006/main"/>
           <a:p xmlns:a="http://schemas.openxmlformats.org/drawingml/2006/main">
             <a:pPr algn="l">
+              <a:buNone/>
               <a:defRPr sz="1425" b="0">
                 <a:solidFill>
                   <a:srgbClr val="26232A"/>
@@ -21370,6 +21697,7 @@
           <a:lstStyle xmlns:a="http://schemas.openxmlformats.org/drawingml/2006/main"/>
           <a:p xmlns:a="http://schemas.openxmlformats.org/drawingml/2006/main">
             <a:pPr algn="l">
+              <a:buNone/>
               <a:defRPr sz="975" b="1">
                 <a:solidFill>
                   <a:srgbClr val="C7F25C"/>
@@ -21420,6 +21748,7 @@
           <a:lstStyle xmlns:a="http://schemas.openxmlformats.org/drawingml/2006/main"/>
           <a:p xmlns:a="http://schemas.openxmlformats.org/drawingml/2006/main">
             <a:pPr algn="l">
+              <a:buNone/>
               <a:defRPr sz="1650" b="1">
                 <a:solidFill>
                   <a:srgbClr val="FFFFFF"/>
@@ -21470,6 +21799,7 @@
           <a:lstStyle xmlns:a="http://schemas.openxmlformats.org/drawingml/2006/main"/>
           <a:p xmlns:a="http://schemas.openxmlformats.org/drawingml/2006/main">
             <a:pPr algn="l">
+              <a:buNone/>
               <a:defRPr sz="1650" b="1">
                 <a:solidFill>
                   <a:srgbClr val="3D1F5C"/>
@@ -21553,6 +21883,7 @@
           <a:lstStyle xmlns:a="http://schemas.openxmlformats.org/drawingml/2006/main"/>
           <a:p xmlns:a="http://schemas.openxmlformats.org/drawingml/2006/main">
             <a:pPr algn="l">
+              <a:buNone/>
               <a:defRPr sz="975" b="1">
                 <a:solidFill>
                   <a:srgbClr val="3D1F5C"/>
@@ -21603,6 +21934,7 @@
           <a:lstStyle xmlns:a="http://schemas.openxmlformats.org/drawingml/2006/main"/>
           <a:p xmlns:a="http://schemas.openxmlformats.org/drawingml/2006/main">
             <a:pPr algn="l">
+              <a:buNone/>
               <a:defRPr sz="1350" b="1">
                 <a:solidFill>
                   <a:srgbClr val="3D1F5C"/>
@@ -21682,6 +22014,7 @@
           <a:lstStyle xmlns:a="http://schemas.openxmlformats.org/drawingml/2006/main"/>
           <a:p xmlns:a="http://schemas.openxmlformats.org/drawingml/2006/main">
             <a:pPr algn="l">
+              <a:buNone/>
               <a:defRPr sz="1800" b="1">
                 <a:solidFill>
                   <a:srgbClr val="E63888"/>
@@ -21763,6 +22096,7 @@
           <a:lstStyle xmlns:a="http://schemas.openxmlformats.org/drawingml/2006/main"/>
           <a:p xmlns:a="http://schemas.openxmlformats.org/drawingml/2006/main">
             <a:pPr algn="l">
+              <a:buNone/>
               <a:defRPr sz="3150" b="1">
                 <a:solidFill>
                   <a:srgbClr val="26232A"/>
@@ -21813,6 +22147,7 @@
           <a:lstStyle xmlns:a="http://schemas.openxmlformats.org/drawingml/2006/main"/>
           <a:p xmlns:a="http://schemas.openxmlformats.org/drawingml/2006/main">
             <a:pPr algn="l">
+              <a:buNone/>
               <a:defRPr sz="750" b="1">
                 <a:solidFill>
                   <a:srgbClr val="6E6873"/>
@@ -21863,6 +22198,7 @@
           <a:lstStyle xmlns:a="http://schemas.openxmlformats.org/drawingml/2006/main"/>
           <a:p xmlns:a="http://schemas.openxmlformats.org/drawingml/2006/main">
             <a:pPr algn="r">
+              <a:buNone/>
               <a:defRPr sz="825" b="1">
                 <a:solidFill>
                   <a:srgbClr val="E63888"/>
@@ -21948,6 +22284,7 @@
           <a:lstStyle xmlns:a="http://schemas.openxmlformats.org/drawingml/2006/main"/>
           <a:p xmlns:a="http://schemas.openxmlformats.org/drawingml/2006/main">
             <a:pPr algn="l">
+              <a:buNone/>
               <a:defRPr sz="975" b="1">
                 <a:solidFill>
                   <a:srgbClr val="E63888"/>
@@ -21998,6 +22335,7 @@
           <a:lstStyle xmlns:a="http://schemas.openxmlformats.org/drawingml/2006/main"/>
           <a:p xmlns:a="http://schemas.openxmlformats.org/drawingml/2006/main">
             <a:pPr algn="l">
+              <a:buNone/>
               <a:defRPr sz="1425" b="0">
                 <a:solidFill>
                   <a:srgbClr val="26232A"/>
@@ -22081,6 +22419,7 @@
           <a:lstStyle xmlns:a="http://schemas.openxmlformats.org/drawingml/2006/main"/>
           <a:p xmlns:a="http://schemas.openxmlformats.org/drawingml/2006/main">
             <a:pPr algn="l">
+              <a:buNone/>
               <a:defRPr sz="975" b="1">
                 <a:solidFill>
                   <a:srgbClr val="C7F25C"/>
@@ -22131,6 +22470,7 @@
           <a:lstStyle xmlns:a="http://schemas.openxmlformats.org/drawingml/2006/main"/>
           <a:p xmlns:a="http://schemas.openxmlformats.org/drawingml/2006/main">
             <a:pPr algn="l">
+              <a:buNone/>
               <a:defRPr sz="1650" b="1">
                 <a:solidFill>
                   <a:srgbClr val="FFFFFF"/>
@@ -22181,6 +22521,7 @@
           <a:lstStyle xmlns:a="http://schemas.openxmlformats.org/drawingml/2006/main"/>
           <a:p xmlns:a="http://schemas.openxmlformats.org/drawingml/2006/main">
             <a:pPr algn="ctr">
+              <a:buNone/>
               <a:defRPr sz="2250" b="1">
                 <a:solidFill>
                   <a:srgbClr val="E63888"/>
@@ -22264,6 +22605,7 @@
           <a:lstStyle xmlns:a="http://schemas.openxmlformats.org/drawingml/2006/main"/>
           <a:p xmlns:a="http://schemas.openxmlformats.org/drawingml/2006/main">
             <a:pPr algn="l">
+              <a:buNone/>
               <a:defRPr sz="975" b="1">
                 <a:solidFill>
                   <a:srgbClr val="3D1F5C"/>
@@ -22314,6 +22656,7 @@
           <a:lstStyle xmlns:a="http://schemas.openxmlformats.org/drawingml/2006/main"/>
           <a:p xmlns:a="http://schemas.openxmlformats.org/drawingml/2006/main">
             <a:pPr algn="l">
+              <a:buNone/>
               <a:defRPr sz="1350" b="1">
                 <a:solidFill>
                   <a:srgbClr val="3D1F5C"/>
@@ -22393,6 +22736,7 @@
           <a:lstStyle xmlns:a="http://schemas.openxmlformats.org/drawingml/2006/main"/>
           <a:p xmlns:a="http://schemas.openxmlformats.org/drawingml/2006/main">
             <a:pPr algn="l">
+              <a:buNone/>
               <a:defRPr sz="1800" b="1">
                 <a:solidFill>
                   <a:srgbClr val="E63888"/>
@@ -22474,6 +22818,7 @@
           <a:lstStyle xmlns:a="http://schemas.openxmlformats.org/drawingml/2006/main"/>
           <a:p xmlns:a="http://schemas.openxmlformats.org/drawingml/2006/main">
             <a:pPr algn="l">
+              <a:buNone/>
               <a:defRPr sz="3150" b="1">
                 <a:solidFill>
                   <a:srgbClr val="26232A"/>
@@ -22524,6 +22869,7 @@
           <a:lstStyle xmlns:a="http://schemas.openxmlformats.org/drawingml/2006/main"/>
           <a:p xmlns:a="http://schemas.openxmlformats.org/drawingml/2006/main">
             <a:pPr algn="l">
+              <a:buNone/>
               <a:defRPr sz="750" b="1">
                 <a:solidFill>
                   <a:srgbClr val="6E6873"/>
@@ -22574,6 +22920,7 @@
           <a:lstStyle xmlns:a="http://schemas.openxmlformats.org/drawingml/2006/main"/>
           <a:p xmlns:a="http://schemas.openxmlformats.org/drawingml/2006/main">
             <a:pPr algn="r">
+              <a:buNone/>
               <a:defRPr sz="825" b="1">
                 <a:solidFill>
                   <a:srgbClr val="E63888"/>
@@ -22657,6 +23004,7 @@
           <a:lstStyle xmlns:a="http://schemas.openxmlformats.org/drawingml/2006/main"/>
           <a:p xmlns:a="http://schemas.openxmlformats.org/drawingml/2006/main">
             <a:pPr algn="l">
+              <a:buNone/>
               <a:defRPr sz="975" b="1">
                 <a:solidFill>
                   <a:srgbClr val="C7F25C"/>
@@ -22707,6 +23055,7 @@
           <a:lstStyle xmlns:a="http://schemas.openxmlformats.org/drawingml/2006/main"/>
           <a:p xmlns:a="http://schemas.openxmlformats.org/drawingml/2006/main">
             <a:pPr algn="l">
+              <a:buNone/>
               <a:defRPr sz="1350" b="0">
                 <a:solidFill>
                   <a:srgbClr val="FFFFFF"/>
@@ -22757,6 +23106,7 @@
           <a:lstStyle xmlns:a="http://schemas.openxmlformats.org/drawingml/2006/main"/>
           <a:p xmlns:a="http://schemas.openxmlformats.org/drawingml/2006/main">
             <a:pPr algn="l">
+              <a:buNone/>
               <a:defRPr sz="1350" b="0">
                 <a:solidFill>
                   <a:srgbClr val="FFFFFF"/>
@@ -22807,6 +23157,7 @@
           <a:lstStyle xmlns:a="http://schemas.openxmlformats.org/drawingml/2006/main"/>
           <a:p xmlns:a="http://schemas.openxmlformats.org/drawingml/2006/main">
             <a:pPr algn="l">
+              <a:buNone/>
               <a:defRPr sz="1350" b="0">
                 <a:solidFill>
                   <a:srgbClr val="FFFFFF"/>
@@ -22857,6 +23208,7 @@
           <a:lstStyle xmlns:a="http://schemas.openxmlformats.org/drawingml/2006/main"/>
           <a:p xmlns:a="http://schemas.openxmlformats.org/drawingml/2006/main">
             <a:pPr algn="l">
+              <a:buNone/>
               <a:defRPr sz="1350" b="0">
                 <a:solidFill>
                   <a:srgbClr val="FFFFFF"/>
@@ -22907,6 +23259,7 @@
           <a:lstStyle xmlns:a="http://schemas.openxmlformats.org/drawingml/2006/main"/>
           <a:p xmlns:a="http://schemas.openxmlformats.org/drawingml/2006/main">
             <a:pPr algn="l">
+              <a:buNone/>
               <a:defRPr sz="1350" b="0">
                 <a:solidFill>
                   <a:srgbClr val="FFFFFF"/>
@@ -22957,6 +23310,7 @@
           <a:lstStyle xmlns:a="http://schemas.openxmlformats.org/drawingml/2006/main"/>
           <a:p xmlns:a="http://schemas.openxmlformats.org/drawingml/2006/main">
             <a:pPr algn="l">
+              <a:buNone/>
               <a:defRPr sz="1350" b="0">
                 <a:solidFill>
                   <a:srgbClr val="FFFFFF"/>
@@ -23007,6 +23361,7 @@
           <a:lstStyle xmlns:a="http://schemas.openxmlformats.org/drawingml/2006/main"/>
           <a:p xmlns:a="http://schemas.openxmlformats.org/drawingml/2006/main">
             <a:pPr algn="l">
+              <a:buNone/>
               <a:defRPr sz="1350" b="1">
                 <a:solidFill>
                   <a:srgbClr val="C7F25C"/>
@@ -23057,6 +23412,7 @@
           <a:lstStyle xmlns:a="http://schemas.openxmlformats.org/drawingml/2006/main"/>
           <a:p xmlns:a="http://schemas.openxmlformats.org/drawingml/2006/main">
             <a:pPr algn="l">
+              <a:buNone/>
               <a:defRPr sz="1275" b="1">
                 <a:solidFill>
                   <a:srgbClr val="E63888"/>
@@ -23107,6 +23463,7 @@
           <a:lstStyle xmlns:a="http://schemas.openxmlformats.org/drawingml/2006/main"/>
           <a:p xmlns:a="http://schemas.openxmlformats.org/drawingml/2006/main">
             <a:pPr algn="l">
+              <a:buNone/>
               <a:defRPr sz="1350" b="0">
                 <a:solidFill>
                   <a:srgbClr val="26232A"/>
@@ -23157,6 +23514,7 @@
           <a:lstStyle xmlns:a="http://schemas.openxmlformats.org/drawingml/2006/main"/>
           <a:p xmlns:a="http://schemas.openxmlformats.org/drawingml/2006/main">
             <a:pPr algn="l">
+              <a:buNone/>
               <a:defRPr sz="1275" b="1">
                 <a:solidFill>
                   <a:srgbClr val="E63888"/>
@@ -23207,6 +23565,7 @@
           <a:lstStyle xmlns:a="http://schemas.openxmlformats.org/drawingml/2006/main"/>
           <a:p xmlns:a="http://schemas.openxmlformats.org/drawingml/2006/main">
             <a:pPr algn="l">
+              <a:buNone/>
               <a:defRPr sz="1350" b="0">
                 <a:solidFill>
                   <a:srgbClr val="26232A"/>
@@ -23257,6 +23616,7 @@
           <a:lstStyle xmlns:a="http://schemas.openxmlformats.org/drawingml/2006/main"/>
           <a:p xmlns:a="http://schemas.openxmlformats.org/drawingml/2006/main">
             <a:pPr algn="l">
+              <a:buNone/>
               <a:defRPr sz="1275" b="1">
                 <a:solidFill>
                   <a:srgbClr val="E63888"/>
@@ -23307,6 +23667,7 @@
           <a:lstStyle xmlns:a="http://schemas.openxmlformats.org/drawingml/2006/main"/>
           <a:p xmlns:a="http://schemas.openxmlformats.org/drawingml/2006/main">
             <a:pPr algn="l">
+              <a:buNone/>
               <a:defRPr sz="1350" b="0">
                 <a:solidFill>
                   <a:srgbClr val="26232A"/>
@@ -23357,6 +23718,7 @@
           <a:lstStyle xmlns:a="http://schemas.openxmlformats.org/drawingml/2006/main"/>
           <a:p xmlns:a="http://schemas.openxmlformats.org/drawingml/2006/main">
             <a:pPr algn="l">
+              <a:buNone/>
               <a:defRPr sz="1275" b="1">
                 <a:solidFill>
                   <a:srgbClr val="E63888"/>
@@ -23407,6 +23769,7 @@
           <a:lstStyle xmlns:a="http://schemas.openxmlformats.org/drawingml/2006/main"/>
           <a:p xmlns:a="http://schemas.openxmlformats.org/drawingml/2006/main">
             <a:pPr algn="l">
+              <a:buNone/>
               <a:defRPr sz="1350" b="0">
                 <a:solidFill>
                   <a:srgbClr val="26232A"/>
@@ -23457,6 +23820,7 @@
           <a:lstStyle xmlns:a="http://schemas.openxmlformats.org/drawingml/2006/main"/>
           <a:p xmlns:a="http://schemas.openxmlformats.org/drawingml/2006/main">
             <a:pPr algn="l">
+              <a:buNone/>
               <a:defRPr sz="1275" b="1">
                 <a:solidFill>
                   <a:srgbClr val="E63888"/>
@@ -23507,6 +23871,7 @@
           <a:lstStyle xmlns:a="http://schemas.openxmlformats.org/drawingml/2006/main"/>
           <a:p xmlns:a="http://schemas.openxmlformats.org/drawingml/2006/main">
             <a:pPr algn="l">
+              <a:buNone/>
               <a:defRPr sz="1350" b="0">
                 <a:solidFill>
                   <a:srgbClr val="26232A"/>
@@ -23557,6 +23922,7 @@
           <a:lstStyle xmlns:a="http://schemas.openxmlformats.org/drawingml/2006/main"/>
           <a:p xmlns:a="http://schemas.openxmlformats.org/drawingml/2006/main">
             <a:pPr algn="l">
+              <a:buNone/>
               <a:defRPr sz="1350" b="1">
                 <a:solidFill>
                   <a:srgbClr val="3D1F5C"/>
